--- a/praesentation/Neue-Mitte-Werlte_Baufeld3_Gastro-Konzept.pptx
+++ b/praesentation/Neue-Mitte-Werlte_Baufeld3_Gastro-Konzept.pptx
@@ -8449,7 +8449,7 @@
                 <a:ea typeface="Arial" pitchFamily="34" charset="-122"/>
                 <a:cs typeface="Arial" pitchFamily="34" charset="-120"/>
               </a:rPr>
-              <a:t>Mit 50.000 € Umsatz bleiben im ganzen Haus +6.351 € pro Monat (3,3 % Zins, ohne Förderung, ohne Lohn). Die Gastro braucht für Break-even im Haus ca. 29.000 € Umsatz.</a:t>
+              <a:t>Mit 50.000 € Umsatz bleiben im ganzen Haus +5.430 € pro Monat nach Zinsen und Tilgung (KfW-Kredite und Hausbank, ohne Lohn). Die Gastro braucht für Break-even im Haus ca. 32.200 € Umsatz.</a:t>
             </a:r>
             <a:endParaRPr lang="en-US" sz="1300" dirty="0"/>
           </a:p>

--- a/praesentation/Neue-Mitte-Werlte_Baufeld3_Gastro-Konzept.pptx
+++ b/praesentation/Neue-Mitte-Werlte_Baufeld3_Gastro-Konzept.pptx
@@ -604,7 +604,7 @@
           <a:p>
             <a:r>
               <a:rPr lang="en-US" dirty="0"/>
-              <a:t>Plausibilitätsrechnung mit Annahmen für Gäste und Bon. Die Gastro hat ca. 150 Plätze, die Annahme ist vorsichtig.</a:t>
+              <a:t>Plausibilitätsrechnung mit Annahmen für Gäste und Bon. Die Gastro hat ca. 190 Plätze (ca. 4.100 € Umsatz je Sitzplatz und Jahr), die Annahme ist vorsichtig.</a:t>
             </a:r>
             <a:endParaRPr lang="en-US" dirty="0"/>
           </a:p>
@@ -868,7 +868,7 @@
           <a:p>
             <a:r>
               <a:rPr lang="en-US" dirty="0"/>
-              <a:t>Annahme des Bauherrn: 150.000 € für einen einfachen Ausbau. Für 460 m² und ca. 150 Plätze ist das knapp, Angebote von Küchen- und Lüftungsbauern müssen es bestätigen.</a:t>
+              <a:t>Hochgerechnet vom Budget des Bauherrn (150.000 € für 150 Plätze): 1.000 € je Platz bei 190 Plätzen. Angebote von Küchen- und Lüftungsbauern müssen es bestätigen.</a:t>
             </a:r>
             <a:endParaRPr lang="en-US" dirty="0"/>
           </a:p>
@@ -2472,7 +2472,7 @@
                 <a:ea typeface="Arial" pitchFamily="34" charset="-122"/>
                 <a:cs typeface="Arial" pitchFamily="34" charset="-120"/>
               </a:rPr>
-              <a:t>Bar-Restaurant für den ganzen Tag, ca. 460 m² im ganzen EG</a:t>
+              <a:t>Bar-Restaurant für den ganzen Tag, ca. 510 m² im ganzen EG</a:t>
             </a:r>
             <a:endParaRPr lang="en-US" sz="1700" dirty="0"/>
           </a:p>
@@ -2611,7 +2611,7 @@
                 <a:ea typeface="Georgia" pitchFamily="34" charset="-122"/>
                 <a:cs typeface="Georgia" pitchFamily="34" charset="-120"/>
               </a:rPr>
-              <a:t>Wie 50.000 € Umsatz im Monat zusammenkommen</a:t>
+              <a:t>Wie 65.000 € Umsatz im Monat zusammenkommen</a:t>
             </a:r>
             <a:endParaRPr lang="en-US" sz="2700" dirty="0"/>
           </a:p>
@@ -3172,7 +3172,7 @@
                           <a:ea typeface="Arial" pitchFamily="34" charset="-122"/>
                           <a:cs typeface="Arial" pitchFamily="34" charset="-120"/>
                         </a:rPr>
-                        <a:t>40</a:t>
+                        <a:t>50</a:t>
                       </a:r>
                       <a:endParaRPr lang="en-US" sz="1250" dirty="0">
                         <a:latin typeface="Arial" charset="0"/>
@@ -3302,7 +3302,7 @@
                           <a:ea typeface="Arial" pitchFamily="34" charset="-122"/>
                           <a:cs typeface="Arial" pitchFamily="34" charset="-120"/>
                         </a:rPr>
-                        <a:t>9.688 €</a:t>
+                        <a:t>12.110 €</a:t>
                       </a:r>
                       <a:endParaRPr lang="en-US" sz="1250" dirty="0">
                         <a:latin typeface="Arial" charset="0"/>
@@ -3499,7 +3499,7 @@
                           <a:ea typeface="Arial" pitchFamily="34" charset="-122"/>
                           <a:cs typeface="Arial" pitchFamily="34" charset="-120"/>
                         </a:rPr>
-                        <a:t>45</a:t>
+                        <a:t>60</a:t>
                       </a:r>
                       <a:endParaRPr lang="en-US" sz="1250" dirty="0">
                         <a:latin typeface="Arial" charset="0"/>
@@ -3629,7 +3629,7 @@
                           <a:ea typeface="Arial" pitchFamily="34" charset="-122"/>
                           <a:cs typeface="Arial" pitchFamily="34" charset="-120"/>
                         </a:rPr>
-                        <a:t>5.089 €</a:t>
+                        <a:t>6.786 €</a:t>
                       </a:r>
                       <a:endParaRPr lang="en-US" sz="1250" dirty="0">
                         <a:latin typeface="Arial" charset="0"/>
@@ -3826,7 +3826,7 @@
                           <a:ea typeface="Arial" pitchFamily="34" charset="-122"/>
                           <a:cs typeface="Arial" pitchFamily="34" charset="-120"/>
                         </a:rPr>
-                        <a:t>38</a:t>
+                        <a:t>48</a:t>
                       </a:r>
                       <a:endParaRPr lang="en-US" sz="1250" dirty="0">
                         <a:latin typeface="Arial" charset="0"/>
@@ -3956,7 +3956,7 @@
                           <a:ea typeface="Arial" pitchFamily="34" charset="-122"/>
                           <a:cs typeface="Arial" pitchFamily="34" charset="-120"/>
                         </a:rPr>
-                        <a:t>28.652 €</a:t>
+                        <a:t>36.192 €</a:t>
                       </a:r>
                       <a:endParaRPr lang="en-US" sz="1250" dirty="0">
                         <a:latin typeface="Arial" charset="0"/>
@@ -4153,7 +4153,7 @@
                           <a:ea typeface="Arial" pitchFamily="34" charset="-122"/>
                           <a:cs typeface="Arial" pitchFamily="34" charset="-120"/>
                         </a:rPr>
-                        <a:t>35</a:t>
+                        <a:t>45</a:t>
                       </a:r>
                       <a:endParaRPr lang="en-US" sz="1250" dirty="0">
                         <a:latin typeface="Arial" charset="0"/>
@@ -4283,7 +4283,7 @@
                           <a:ea typeface="Arial" pitchFamily="34" charset="-122"/>
                           <a:cs typeface="Arial" pitchFamily="34" charset="-120"/>
                         </a:rPr>
-                        <a:t>4.568 €</a:t>
+                        <a:t>5.872 €</a:t>
                       </a:r>
                       <a:endParaRPr lang="en-US" sz="1250" dirty="0">
                         <a:latin typeface="Arial" charset="0"/>
@@ -4350,7 +4350,7 @@
                           <a:ea typeface="Arial" pitchFamily="34" charset="-122"/>
                           <a:cs typeface="Arial" pitchFamily="34" charset="-120"/>
                         </a:rPr>
-                        <a:t>Feiern im Séparée (2 pro Monat)</a:t>
+                        <a:t>Feiern im Séparée (3 pro Monat)</a:t>
                       </a:r>
                       <a:endParaRPr lang="en-US" sz="1250" dirty="0">
                         <a:latin typeface="Arial" charset="0"/>
@@ -4415,7 +4415,7 @@
                           <a:ea typeface="Arial" pitchFamily="34" charset="-122"/>
                           <a:cs typeface="Arial" pitchFamily="34" charset="-120"/>
                         </a:rPr>
-                        <a:t>2</a:t>
+                        <a:t>3</a:t>
                       </a:r>
                       <a:endParaRPr lang="en-US" sz="1250" dirty="0">
                         <a:latin typeface="Arial" charset="0"/>
@@ -4480,7 +4480,7 @@
                           <a:ea typeface="Arial" pitchFamily="34" charset="-122"/>
                           <a:cs typeface="Arial" pitchFamily="34" charset="-120"/>
                         </a:rPr>
-                        <a:t>20</a:t>
+                        <a:t>30</a:t>
                       </a:r>
                       <a:endParaRPr lang="en-US" sz="1250" dirty="0">
                         <a:latin typeface="Arial" charset="0"/>
@@ -4610,7 +4610,7 @@
                           <a:ea typeface="Arial" pitchFamily="34" charset="-122"/>
                           <a:cs typeface="Arial" pitchFamily="34" charset="-120"/>
                         </a:rPr>
-                        <a:t>1.800 €</a:t>
+                        <a:t>4.050 €</a:t>
                       </a:r>
                       <a:endParaRPr lang="en-US" sz="1250" dirty="0">
                         <a:latin typeface="Arial" charset="0"/>
@@ -4904,7 +4904,7 @@
                           <a:ea typeface="Arial" pitchFamily="34" charset="-122"/>
                           <a:cs typeface="Arial" pitchFamily="34" charset="-120"/>
                         </a:rPr>
-                        <a:t>49.797 €</a:t>
+                        <a:t>65.011 €</a:t>
                       </a:r>
                       <a:endParaRPr lang="en-US" sz="1250" dirty="0">
                         <a:latin typeface="Arial" charset="0"/>
@@ -5034,7 +5034,7 @@
                 <a:ea typeface="Arial" pitchFamily="34" charset="-122"/>
                 <a:cs typeface="Arial" pitchFamily="34" charset="-120"/>
               </a:rPr>
-              <a:t>Ca. 2.416 Gäste im Monat, im Schnitt ca. 93 pro Öffnungstag bei 150 Plätzen.</a:t>
+              <a:t>Ca. 3.117 Gäste im Monat, im Schnitt ca. 120 pro Öffnungstag bei 190 Plätzen.</a:t>
             </a:r>
             <a:endParaRPr lang="en-US" sz="1300" dirty="0"/>
           </a:p>
@@ -5883,7 +5883,7 @@
                           <a:ea typeface="Arial" pitchFamily="34" charset="-122"/>
                           <a:cs typeface="Arial" pitchFamily="34" charset="-120"/>
                         </a:rPr>
-                        <a:t>Küchenhilfe, Spülen</a:t>
+                        <a:t>Koch</a:t>
                       </a:r>
                       <a:endParaRPr lang="en-US" sz="1250" dirty="0">
                         <a:latin typeface="Arial" charset="0"/>
@@ -6013,7 +6013,204 @@
                           <a:ea typeface="Arial" pitchFamily="34" charset="-122"/>
                           <a:cs typeface="Arial" pitchFamily="34" charset="-120"/>
                         </a:rPr>
-                        <a:t>1.600 €</a:t>
+                        <a:t>2.400 €</a:t>
+                      </a:r>
+                      <a:endParaRPr lang="en-US" sz="1250" dirty="0">
+                        <a:latin typeface="Arial" charset="0"/>
+                        <a:ea typeface="Arial" charset="0"/>
+                        <a:cs typeface="Arial" charset="0"/>
+                      </a:endParaRPr>
+                    </a:p>
+                  </a:txBody>
+                  <a:tcPr marL="91440" marR="91440" marT="45720" marB="45720">
+                    <a:lnL w="12700" cap="flat" cmpd="sng" algn="ctr">
+                      <a:solidFill>
+                        <a:srgbClr val="FFFFFF"/>
+                      </a:solidFill>
+                      <a:prstDash val="solid"/>
+                      <a:round/>
+                      <a:headEnd type="none" w="med" len="med"/>
+                      <a:tailEnd type="none" w="med" len="med"/>
+                    </a:lnL>
+                    <a:lnR w="12700" cap="flat" cmpd="sng" algn="ctr">
+                      <a:solidFill>
+                        <a:srgbClr val="FFFFFF"/>
+                      </a:solidFill>
+                      <a:prstDash val="solid"/>
+                      <a:round/>
+                      <a:headEnd type="none" w="med" len="med"/>
+                      <a:tailEnd type="none" w="med" len="med"/>
+                    </a:lnR>
+                    <a:lnT w="12700" cap="flat" cmpd="sng" algn="ctr">
+                      <a:solidFill>
+                        <a:srgbClr val="FFFFFF"/>
+                      </a:solidFill>
+                      <a:prstDash val="solid"/>
+                      <a:round/>
+                      <a:headEnd type="none" w="med" len="med"/>
+                      <a:tailEnd type="none" w="med" len="med"/>
+                    </a:lnT>
+                    <a:lnB w="12700" cap="flat" cmpd="sng" algn="ctr">
+                      <a:solidFill>
+                        <a:srgbClr val="FFFFFF"/>
+                      </a:solidFill>
+                      <a:prstDash val="solid"/>
+                      <a:round/>
+                      <a:headEnd type="none" w="med" len="med"/>
+                      <a:tailEnd type="none" w="med" len="med"/>
+                    </a:lnB>
+                  </a:tcPr>
+                </a:tc>
+              </a:tr>
+              <a:tr h="502920">
+                <a:tc>
+                  <a:txBody>
+                    <a:bodyPr/>
+                    <a:lstStyle/>
+                    <a:p>
+                      <a:pPr indent="0" marL="0">
+                        <a:buNone/>
+                      </a:pPr>
+                      <a:r>
+                        <a:rPr lang="en-US" sz="1250" dirty="0">
+                          <a:solidFill>
+                            <a:srgbClr val="000000"/>
+                          </a:solidFill>
+                          <a:latin typeface="Arial" pitchFamily="34" charset="0"/>
+                          <a:ea typeface="Arial" pitchFamily="34" charset="-122"/>
+                          <a:cs typeface="Arial" pitchFamily="34" charset="-120"/>
+                        </a:rPr>
+                        <a:t>Küchenhilfe, Spülen</a:t>
+                      </a:r>
+                      <a:endParaRPr lang="en-US" sz="1250" dirty="0">
+                        <a:latin typeface="Arial" charset="0"/>
+                        <a:ea typeface="Arial" charset="0"/>
+                        <a:cs typeface="Arial" charset="0"/>
+                      </a:endParaRPr>
+                    </a:p>
+                  </a:txBody>
+                  <a:tcPr marL="91440" marR="91440" marT="45720" marB="45720">
+                    <a:lnL w="12700" cap="flat" cmpd="sng" algn="ctr">
+                      <a:solidFill>
+                        <a:srgbClr val="FFFFFF"/>
+                      </a:solidFill>
+                      <a:prstDash val="solid"/>
+                      <a:round/>
+                      <a:headEnd type="none" w="med" len="med"/>
+                      <a:tailEnd type="none" w="med" len="med"/>
+                    </a:lnL>
+                    <a:lnR w="12700" cap="flat" cmpd="sng" algn="ctr">
+                      <a:solidFill>
+                        <a:srgbClr val="FFFFFF"/>
+                      </a:solidFill>
+                      <a:prstDash val="solid"/>
+                      <a:round/>
+                      <a:headEnd type="none" w="med" len="med"/>
+                      <a:tailEnd type="none" w="med" len="med"/>
+                    </a:lnR>
+                    <a:lnT w="12700" cap="flat" cmpd="sng" algn="ctr">
+                      <a:solidFill>
+                        <a:srgbClr val="FFFFFF"/>
+                      </a:solidFill>
+                      <a:prstDash val="solid"/>
+                      <a:round/>
+                      <a:headEnd type="none" w="med" len="med"/>
+                      <a:tailEnd type="none" w="med" len="med"/>
+                    </a:lnT>
+                    <a:lnB w="12700" cap="flat" cmpd="sng" algn="ctr">
+                      <a:solidFill>
+                        <a:srgbClr val="FFFFFF"/>
+                      </a:solidFill>
+                      <a:prstDash val="solid"/>
+                      <a:round/>
+                      <a:headEnd type="none" w="med" len="med"/>
+                      <a:tailEnd type="none" w="med" len="med"/>
+                    </a:lnB>
+                  </a:tcPr>
+                </a:tc>
+                <a:tc>
+                  <a:txBody>
+                    <a:bodyPr/>
+                    <a:lstStyle/>
+                    <a:p>
+                      <a:pPr indent="0" marL="0">
+                        <a:buNone/>
+                      </a:pPr>
+                      <a:r>
+                        <a:rPr lang="en-US" sz="1250" dirty="0">
+                          <a:solidFill>
+                            <a:srgbClr val="000000"/>
+                          </a:solidFill>
+                          <a:latin typeface="Arial" pitchFamily="34" charset="0"/>
+                          <a:ea typeface="Arial" pitchFamily="34" charset="-122"/>
+                          <a:cs typeface="Arial" pitchFamily="34" charset="-120"/>
+                        </a:rPr>
+                        <a:t>2 Teilzeit</a:t>
+                      </a:r>
+                      <a:endParaRPr lang="en-US" sz="1250" dirty="0">
+                        <a:latin typeface="Arial" charset="0"/>
+                        <a:ea typeface="Arial" charset="0"/>
+                        <a:cs typeface="Arial" charset="0"/>
+                      </a:endParaRPr>
+                    </a:p>
+                  </a:txBody>
+                  <a:tcPr marL="91440" marR="91440" marT="45720" marB="45720">
+                    <a:lnL w="12700" cap="flat" cmpd="sng" algn="ctr">
+                      <a:solidFill>
+                        <a:srgbClr val="FFFFFF"/>
+                      </a:solidFill>
+                      <a:prstDash val="solid"/>
+                      <a:round/>
+                      <a:headEnd type="none" w="med" len="med"/>
+                      <a:tailEnd type="none" w="med" len="med"/>
+                    </a:lnL>
+                    <a:lnR w="12700" cap="flat" cmpd="sng" algn="ctr">
+                      <a:solidFill>
+                        <a:srgbClr val="FFFFFF"/>
+                      </a:solidFill>
+                      <a:prstDash val="solid"/>
+                      <a:round/>
+                      <a:headEnd type="none" w="med" len="med"/>
+                      <a:tailEnd type="none" w="med" len="med"/>
+                    </a:lnR>
+                    <a:lnT w="12700" cap="flat" cmpd="sng" algn="ctr">
+                      <a:solidFill>
+                        <a:srgbClr val="FFFFFF"/>
+                      </a:solidFill>
+                      <a:prstDash val="solid"/>
+                      <a:round/>
+                      <a:headEnd type="none" w="med" len="med"/>
+                      <a:tailEnd type="none" w="med" len="med"/>
+                    </a:lnT>
+                    <a:lnB w="12700" cap="flat" cmpd="sng" algn="ctr">
+                      <a:solidFill>
+                        <a:srgbClr val="FFFFFF"/>
+                      </a:solidFill>
+                      <a:prstDash val="solid"/>
+                      <a:round/>
+                      <a:headEnd type="none" w="med" len="med"/>
+                      <a:tailEnd type="none" w="med" len="med"/>
+                    </a:lnB>
+                  </a:tcPr>
+                </a:tc>
+                <a:tc>
+                  <a:txBody>
+                    <a:bodyPr/>
+                    <a:lstStyle/>
+                    <a:p>
+                      <a:pPr algn="r" indent="0" marL="0">
+                        <a:buNone/>
+                      </a:pPr>
+                      <a:r>
+                        <a:rPr lang="en-US" sz="1250" dirty="0">
+                          <a:solidFill>
+                            <a:srgbClr val="000000"/>
+                          </a:solidFill>
+                          <a:latin typeface="Arial" pitchFamily="34" charset="0"/>
+                          <a:ea typeface="Arial" pitchFamily="34" charset="-122"/>
+                          <a:cs typeface="Arial" pitchFamily="34" charset="-120"/>
+                        </a:rPr>
+                        <a:t>2.800 €</a:t>
                       </a:r>
                       <a:endParaRPr lang="en-US" sz="1250" dirty="0">
                         <a:latin typeface="Arial" charset="0"/>
@@ -6145,7 +6342,7 @@
                           <a:ea typeface="Arial" pitchFamily="34" charset="-122"/>
                           <a:cs typeface="Arial" pitchFamily="34" charset="-120"/>
                         </a:rPr>
-                        <a:t>ca. 5 Teilzeit und Minijobs</a:t>
+                        <a:t>ca. 7 Teilzeit und Minijobs</a:t>
                       </a:r>
                       <a:endParaRPr lang="en-US" sz="1250" dirty="0">
                         <a:latin typeface="Arial" charset="0"/>
@@ -6210,7 +6407,7 @@
                           <a:ea typeface="Arial" pitchFamily="34" charset="-122"/>
                           <a:cs typeface="Arial" pitchFamily="34" charset="-120"/>
                         </a:rPr>
-                        <a:t>5.800 €</a:t>
+                        <a:t>6.700 €</a:t>
                       </a:r>
                       <a:endParaRPr lang="en-US" sz="1250" dirty="0">
                         <a:latin typeface="Arial" charset="0"/>
@@ -6407,7 +6604,7 @@
                           <a:ea typeface="Arial" pitchFamily="34" charset="-122"/>
                           <a:cs typeface="Arial" pitchFamily="34" charset="-120"/>
                         </a:rPr>
-                        <a:t>15.000 €</a:t>
+                        <a:t>19.500 €</a:t>
                       </a:r>
                       <a:endParaRPr lang="en-US" sz="1250" dirty="0">
                         <a:latin typeface="Arial" charset="0"/>
@@ -6537,7 +6734,7 @@
                 <a:ea typeface="Arial" pitchFamily="34" charset="-122"/>
                 <a:cs typeface="Arial" pitchFamily="34" charset="-120"/>
               </a:rPr>
-              <a:t>Du führst die Gastro selbst oder verpachtest sie. Bei Verpachtung zahlt der Betreiber ca. 12 €/m² Pacht, das sind bei 460 m² ca. 5.520 € im Monat.</a:t>
+              <a:t>Du führst die Gastro selbst oder verpachtest sie. Bei Verpachtung zahlt der Betreiber ca. 10 €/m² Pacht, das sind bei 510 m² ca. 5.100 € im Monat (ca. 8 % vom Umsatz).</a:t>
             </a:r>
             <a:endParaRPr lang="en-US" sz="1300" dirty="0"/>
           </a:p>
@@ -7061,271 +7258,6 @@
                           <a:ea typeface="Arial" pitchFamily="34" charset="-122"/>
                           <a:cs typeface="Arial" pitchFamily="34" charset="-120"/>
                         </a:rPr>
-                        <a:t>30.000 €</a:t>
-                      </a:r>
-                      <a:endParaRPr lang="en-US" sz="1250" dirty="0">
-                        <a:latin typeface="Arial" charset="0"/>
-                        <a:ea typeface="Arial" charset="0"/>
-                        <a:cs typeface="Arial" charset="0"/>
-                      </a:endParaRPr>
-                    </a:p>
-                  </a:txBody>
-                  <a:tcPr marL="91440" marR="91440" marT="45720" marB="45720">
-                    <a:lnL w="12700" cap="flat" cmpd="sng" algn="ctr">
-                      <a:solidFill>
-                        <a:srgbClr val="FFFFFF"/>
-                      </a:solidFill>
-                      <a:prstDash val="solid"/>
-                      <a:round/>
-                      <a:headEnd type="none" w="med" len="med"/>
-                      <a:tailEnd type="none" w="med" len="med"/>
-                    </a:lnL>
-                    <a:lnR w="12700" cap="flat" cmpd="sng" algn="ctr">
-                      <a:solidFill>
-                        <a:srgbClr val="FFFFFF"/>
-                      </a:solidFill>
-                      <a:prstDash val="solid"/>
-                      <a:round/>
-                      <a:headEnd type="none" w="med" len="med"/>
-                      <a:tailEnd type="none" w="med" len="med"/>
-                    </a:lnR>
-                    <a:lnT w="12700" cap="flat" cmpd="sng" algn="ctr">
-                      <a:solidFill>
-                        <a:srgbClr val="FFFFFF"/>
-                      </a:solidFill>
-                      <a:prstDash val="solid"/>
-                      <a:round/>
-                      <a:headEnd type="none" w="med" len="med"/>
-                      <a:tailEnd type="none" w="med" len="med"/>
-                    </a:lnT>
-                    <a:lnB w="12700" cap="flat" cmpd="sng" algn="ctr">
-                      <a:solidFill>
-                        <a:srgbClr val="FFFFFF"/>
-                      </a:solidFill>
-                      <a:prstDash val="solid"/>
-                      <a:round/>
-                      <a:headEnd type="none" w="med" len="med"/>
-                      <a:tailEnd type="none" w="med" len="med"/>
-                    </a:lnB>
-                  </a:tcPr>
-                </a:tc>
-                <a:tc>
-                  <a:txBody>
-                    <a:bodyPr/>
-                    <a:lstStyle/>
-                    <a:p>
-                      <a:pPr algn="r" indent="0" marL="0">
-                        <a:buNone/>
-                      </a:pPr>
-                      <a:r>
-                        <a:rPr lang="en-US" sz="1250" dirty="0">
-                          <a:solidFill>
-                            <a:srgbClr val="000000"/>
-                          </a:solidFill>
-                          <a:latin typeface="Arial" pitchFamily="34" charset="0"/>
-                          <a:ea typeface="Arial" pitchFamily="34" charset="-122"/>
-                          <a:cs typeface="Arial" pitchFamily="34" charset="-120"/>
-                        </a:rPr>
-                        <a:t>9.150 €</a:t>
-                      </a:r>
-                      <a:endParaRPr lang="en-US" sz="1250" dirty="0">
-                        <a:latin typeface="Arial" charset="0"/>
-                        <a:ea typeface="Arial" charset="0"/>
-                        <a:cs typeface="Arial" charset="0"/>
-                      </a:endParaRPr>
-                    </a:p>
-                  </a:txBody>
-                  <a:tcPr marL="91440" marR="91440" marT="45720" marB="45720">
-                    <a:lnL w="12700" cap="flat" cmpd="sng" algn="ctr">
-                      <a:solidFill>
-                        <a:srgbClr val="FFFFFF"/>
-                      </a:solidFill>
-                      <a:prstDash val="solid"/>
-                      <a:round/>
-                      <a:headEnd type="none" w="med" len="med"/>
-                      <a:tailEnd type="none" w="med" len="med"/>
-                    </a:lnL>
-                    <a:lnR w="12700" cap="flat" cmpd="sng" algn="ctr">
-                      <a:solidFill>
-                        <a:srgbClr val="FFFFFF"/>
-                      </a:solidFill>
-                      <a:prstDash val="solid"/>
-                      <a:round/>
-                      <a:headEnd type="none" w="med" len="med"/>
-                      <a:tailEnd type="none" w="med" len="med"/>
-                    </a:lnR>
-                    <a:lnT w="12700" cap="flat" cmpd="sng" algn="ctr">
-                      <a:solidFill>
-                        <a:srgbClr val="FFFFFF"/>
-                      </a:solidFill>
-                      <a:prstDash val="solid"/>
-                      <a:round/>
-                      <a:headEnd type="none" w="med" len="med"/>
-                      <a:tailEnd type="none" w="med" len="med"/>
-                    </a:lnT>
-                    <a:lnB w="12700" cap="flat" cmpd="sng" algn="ctr">
-                      <a:solidFill>
-                        <a:srgbClr val="FFFFFF"/>
-                      </a:solidFill>
-                      <a:prstDash val="solid"/>
-                      <a:round/>
-                      <a:headEnd type="none" w="med" len="med"/>
-                      <a:tailEnd type="none" w="med" len="med"/>
-                    </a:lnB>
-                  </a:tcPr>
-                </a:tc>
-                <a:tc>
-                  <a:txBody>
-                    <a:bodyPr/>
-                    <a:lstStyle/>
-                    <a:p>
-                      <a:pPr algn="r" indent="0" marL="0">
-                        <a:buNone/>
-                      </a:pPr>
-                      <a:r>
-                        <a:rPr lang="en-US" sz="1250" dirty="0">
-                          <a:solidFill>
-                            <a:srgbClr val="000000"/>
-                          </a:solidFill>
-                          <a:latin typeface="Arial" pitchFamily="34" charset="0"/>
-                          <a:ea typeface="Arial" pitchFamily="34" charset="-122"/>
-                          <a:cs typeface="Arial" pitchFamily="34" charset="-120"/>
-                        </a:rPr>
-                        <a:t>−5.520 €</a:t>
-                      </a:r>
-                      <a:endParaRPr lang="en-US" sz="1250" dirty="0">
-                        <a:latin typeface="Arial" charset="0"/>
-                        <a:ea typeface="Arial" charset="0"/>
-                        <a:cs typeface="Arial" charset="0"/>
-                      </a:endParaRPr>
-                    </a:p>
-                  </a:txBody>
-                  <a:tcPr marL="91440" marR="91440" marT="45720" marB="45720">
-                    <a:lnL w="12700" cap="flat" cmpd="sng" algn="ctr">
-                      <a:solidFill>
-                        <a:srgbClr val="FFFFFF"/>
-                      </a:solidFill>
-                      <a:prstDash val="solid"/>
-                      <a:round/>
-                      <a:headEnd type="none" w="med" len="med"/>
-                      <a:tailEnd type="none" w="med" len="med"/>
-                    </a:lnL>
-                    <a:lnR w="12700" cap="flat" cmpd="sng" algn="ctr">
-                      <a:solidFill>
-                        <a:srgbClr val="FFFFFF"/>
-                      </a:solidFill>
-                      <a:prstDash val="solid"/>
-                      <a:round/>
-                      <a:headEnd type="none" w="med" len="med"/>
-                      <a:tailEnd type="none" w="med" len="med"/>
-                    </a:lnR>
-                    <a:lnT w="12700" cap="flat" cmpd="sng" algn="ctr">
-                      <a:solidFill>
-                        <a:srgbClr val="FFFFFF"/>
-                      </a:solidFill>
-                      <a:prstDash val="solid"/>
-                      <a:round/>
-                      <a:headEnd type="none" w="med" len="med"/>
-                      <a:tailEnd type="none" w="med" len="med"/>
-                    </a:lnT>
-                    <a:lnB w="12700" cap="flat" cmpd="sng" algn="ctr">
-                      <a:solidFill>
-                        <a:srgbClr val="FFFFFF"/>
-                      </a:solidFill>
-                      <a:prstDash val="solid"/>
-                      <a:round/>
-                      <a:headEnd type="none" w="med" len="med"/>
-                      <a:tailEnd type="none" w="med" len="med"/>
-                    </a:lnB>
-                  </a:tcPr>
-                </a:tc>
-                <a:tc>
-                  <a:txBody>
-                    <a:bodyPr/>
-                    <a:lstStyle/>
-                    <a:p>
-                      <a:pPr algn="r" indent="0" marL="0">
-                        <a:buNone/>
-                      </a:pPr>
-                      <a:r>
-                        <a:rPr lang="en-US" sz="1250" b="1" dirty="0">
-                          <a:solidFill>
-                            <a:schemeClr val="accent5"/>
-                          </a:solidFill>
-                          <a:latin typeface="Arial" pitchFamily="34" charset="0"/>
-                          <a:ea typeface="Arial" pitchFamily="34" charset="-122"/>
-                          <a:cs typeface="Arial" pitchFamily="34" charset="-120"/>
-                        </a:rPr>
-                        <a:t>+3.630 €</a:t>
-                      </a:r>
-                      <a:endParaRPr lang="en-US" sz="1250" dirty="0">
-                        <a:latin typeface="Arial" charset="0"/>
-                        <a:ea typeface="Arial" charset="0"/>
-                        <a:cs typeface="Arial" charset="0"/>
-                      </a:endParaRPr>
-                    </a:p>
-                  </a:txBody>
-                  <a:tcPr marL="91440" marR="91440" marT="45720" marB="45720">
-                    <a:lnL w="12700" cap="flat" cmpd="sng" algn="ctr">
-                      <a:solidFill>
-                        <a:srgbClr val="FFFFFF"/>
-                      </a:solidFill>
-                      <a:prstDash val="solid"/>
-                      <a:round/>
-                      <a:headEnd type="none" w="med" len="med"/>
-                      <a:tailEnd type="none" w="med" len="med"/>
-                    </a:lnL>
-                    <a:lnR w="12700" cap="flat" cmpd="sng" algn="ctr">
-                      <a:solidFill>
-                        <a:srgbClr val="FFFFFF"/>
-                      </a:solidFill>
-                      <a:prstDash val="solid"/>
-                      <a:round/>
-                      <a:headEnd type="none" w="med" len="med"/>
-                      <a:tailEnd type="none" w="med" len="med"/>
-                    </a:lnR>
-                    <a:lnT w="12700" cap="flat" cmpd="sng" algn="ctr">
-                      <a:solidFill>
-                        <a:srgbClr val="FFFFFF"/>
-                      </a:solidFill>
-                      <a:prstDash val="solid"/>
-                      <a:round/>
-                      <a:headEnd type="none" w="med" len="med"/>
-                      <a:tailEnd type="none" w="med" len="med"/>
-                    </a:lnT>
-                    <a:lnB w="12700" cap="flat" cmpd="sng" algn="ctr">
-                      <a:solidFill>
-                        <a:srgbClr val="FFFFFF"/>
-                      </a:solidFill>
-                      <a:prstDash val="solid"/>
-                      <a:round/>
-                      <a:headEnd type="none" w="med" len="med"/>
-                      <a:tailEnd type="none" w="med" len="med"/>
-                    </a:lnB>
-                    <a:solidFill>
-                      <a:srgbClr val="E3F1EA"/>
-                    </a:solidFill>
-                  </a:tcPr>
-                </a:tc>
-              </a:tr>
-              <a:tr h="502920">
-                <a:tc>
-                  <a:txBody>
-                    <a:bodyPr/>
-                    <a:lstStyle/>
-                    <a:p>
-                      <a:pPr indent="0" marL="0">
-                        <a:buNone/>
-                      </a:pPr>
-                      <a:r>
-                        <a:rPr lang="en-US" sz="1250" dirty="0">
-                          <a:solidFill>
-                            <a:srgbClr val="000000"/>
-                          </a:solidFill>
-                          <a:latin typeface="Arial" pitchFamily="34" charset="0"/>
-                          <a:ea typeface="Arial" pitchFamily="34" charset="-122"/>
-                          <a:cs typeface="Arial" pitchFamily="34" charset="-120"/>
-                        </a:rPr>
                         <a:t>40.000 €</a:t>
                       </a:r>
                       <a:endParaRPr lang="en-US" sz="1250" dirty="0">
@@ -7456,7 +7388,7 @@
                           <a:ea typeface="Arial" pitchFamily="34" charset="-122"/>
                           <a:cs typeface="Arial" pitchFamily="34" charset="-120"/>
                         </a:rPr>
-                        <a:t>−5.520 €</a:t>
+                        <a:t>−5.100 €</a:t>
                       </a:r>
                       <a:endParaRPr lang="en-US" sz="1250" dirty="0">
                         <a:latin typeface="Arial" charset="0"/>
@@ -7521,7 +7453,7 @@
                           <a:ea typeface="Arial" pitchFamily="34" charset="-122"/>
                           <a:cs typeface="Arial" pitchFamily="34" charset="-120"/>
                         </a:rPr>
-                        <a:t>+6.680 €</a:t>
+                        <a:t>+7.100 €</a:t>
                       </a:r>
                       <a:endParaRPr lang="en-US" sz="1250" dirty="0">
                         <a:latin typeface="Arial" charset="0"/>
@@ -7583,7 +7515,7 @@
                         <a:buNone/>
                       </a:pPr>
                       <a:r>
-                        <a:rPr lang="en-US" sz="1250" b="1" dirty="0">
+                        <a:rPr lang="en-US" sz="1250" dirty="0">
                           <a:solidFill>
                             <a:srgbClr val="000000"/>
                           </a:solidFill>
@@ -7721,7 +7653,7 @@
                           <a:ea typeface="Arial" pitchFamily="34" charset="-122"/>
                           <a:cs typeface="Arial" pitchFamily="34" charset="-120"/>
                         </a:rPr>
-                        <a:t>−5.520 €</a:t>
+                        <a:t>−5.100 €</a:t>
                       </a:r>
                       <a:endParaRPr lang="en-US" sz="1250" dirty="0">
                         <a:latin typeface="Arial" charset="0"/>
@@ -7786,7 +7718,272 @@
                           <a:ea typeface="Arial" pitchFamily="34" charset="-122"/>
                           <a:cs typeface="Arial" pitchFamily="34" charset="-120"/>
                         </a:rPr>
-                        <a:t>+9.730 €</a:t>
+                        <a:t>+10.150 €</a:t>
+                      </a:r>
+                      <a:endParaRPr lang="en-US" sz="1250" dirty="0">
+                        <a:latin typeface="Arial" charset="0"/>
+                        <a:ea typeface="Arial" charset="0"/>
+                        <a:cs typeface="Arial" charset="0"/>
+                      </a:endParaRPr>
+                    </a:p>
+                  </a:txBody>
+                  <a:tcPr marL="91440" marR="91440" marT="45720" marB="45720">
+                    <a:lnL w="12700" cap="flat" cmpd="sng" algn="ctr">
+                      <a:solidFill>
+                        <a:srgbClr val="FFFFFF"/>
+                      </a:solidFill>
+                      <a:prstDash val="solid"/>
+                      <a:round/>
+                      <a:headEnd type="none" w="med" len="med"/>
+                      <a:tailEnd type="none" w="med" len="med"/>
+                    </a:lnL>
+                    <a:lnR w="12700" cap="flat" cmpd="sng" algn="ctr">
+                      <a:solidFill>
+                        <a:srgbClr val="FFFFFF"/>
+                      </a:solidFill>
+                      <a:prstDash val="solid"/>
+                      <a:round/>
+                      <a:headEnd type="none" w="med" len="med"/>
+                      <a:tailEnd type="none" w="med" len="med"/>
+                    </a:lnR>
+                    <a:lnT w="12700" cap="flat" cmpd="sng" algn="ctr">
+                      <a:solidFill>
+                        <a:srgbClr val="FFFFFF"/>
+                      </a:solidFill>
+                      <a:prstDash val="solid"/>
+                      <a:round/>
+                      <a:headEnd type="none" w="med" len="med"/>
+                      <a:tailEnd type="none" w="med" len="med"/>
+                    </a:lnT>
+                    <a:lnB w="12700" cap="flat" cmpd="sng" algn="ctr">
+                      <a:solidFill>
+                        <a:srgbClr val="FFFFFF"/>
+                      </a:solidFill>
+                      <a:prstDash val="solid"/>
+                      <a:round/>
+                      <a:headEnd type="none" w="med" len="med"/>
+                      <a:tailEnd type="none" w="med" len="med"/>
+                    </a:lnB>
+                    <a:solidFill>
+                      <a:srgbClr val="E3F1EA"/>
+                    </a:solidFill>
+                  </a:tcPr>
+                </a:tc>
+              </a:tr>
+              <a:tr h="502920">
+                <a:tc>
+                  <a:txBody>
+                    <a:bodyPr/>
+                    <a:lstStyle/>
+                    <a:p>
+                      <a:pPr indent="0" marL="0">
+                        <a:buNone/>
+                      </a:pPr>
+                      <a:r>
+                        <a:rPr lang="en-US" sz="1250" b="1" dirty="0">
+                          <a:solidFill>
+                            <a:srgbClr val="000000"/>
+                          </a:solidFill>
+                          <a:latin typeface="Arial" pitchFamily="34" charset="0"/>
+                          <a:ea typeface="Arial" pitchFamily="34" charset="-122"/>
+                          <a:cs typeface="Arial" pitchFamily="34" charset="-120"/>
+                        </a:rPr>
+                        <a:t>65.000 €</a:t>
+                      </a:r>
+                      <a:endParaRPr lang="en-US" sz="1250" dirty="0">
+                        <a:latin typeface="Arial" charset="0"/>
+                        <a:ea typeface="Arial" charset="0"/>
+                        <a:cs typeface="Arial" charset="0"/>
+                      </a:endParaRPr>
+                    </a:p>
+                  </a:txBody>
+                  <a:tcPr marL="91440" marR="91440" marT="45720" marB="45720">
+                    <a:lnL w="12700" cap="flat" cmpd="sng" algn="ctr">
+                      <a:solidFill>
+                        <a:srgbClr val="FFFFFF"/>
+                      </a:solidFill>
+                      <a:prstDash val="solid"/>
+                      <a:round/>
+                      <a:headEnd type="none" w="med" len="med"/>
+                      <a:tailEnd type="none" w="med" len="med"/>
+                    </a:lnL>
+                    <a:lnR w="12700" cap="flat" cmpd="sng" algn="ctr">
+                      <a:solidFill>
+                        <a:srgbClr val="FFFFFF"/>
+                      </a:solidFill>
+                      <a:prstDash val="solid"/>
+                      <a:round/>
+                      <a:headEnd type="none" w="med" len="med"/>
+                      <a:tailEnd type="none" w="med" len="med"/>
+                    </a:lnR>
+                    <a:lnT w="12700" cap="flat" cmpd="sng" algn="ctr">
+                      <a:solidFill>
+                        <a:srgbClr val="FFFFFF"/>
+                      </a:solidFill>
+                      <a:prstDash val="solid"/>
+                      <a:round/>
+                      <a:headEnd type="none" w="med" len="med"/>
+                      <a:tailEnd type="none" w="med" len="med"/>
+                    </a:lnT>
+                    <a:lnB w="12700" cap="flat" cmpd="sng" algn="ctr">
+                      <a:solidFill>
+                        <a:srgbClr val="FFFFFF"/>
+                      </a:solidFill>
+                      <a:prstDash val="solid"/>
+                      <a:round/>
+                      <a:headEnd type="none" w="med" len="med"/>
+                      <a:tailEnd type="none" w="med" len="med"/>
+                    </a:lnB>
+                  </a:tcPr>
+                </a:tc>
+                <a:tc>
+                  <a:txBody>
+                    <a:bodyPr/>
+                    <a:lstStyle/>
+                    <a:p>
+                      <a:pPr algn="r" indent="0" marL="0">
+                        <a:buNone/>
+                      </a:pPr>
+                      <a:r>
+                        <a:rPr lang="en-US" sz="1250" dirty="0">
+                          <a:solidFill>
+                            <a:srgbClr val="000000"/>
+                          </a:solidFill>
+                          <a:latin typeface="Arial" pitchFamily="34" charset="0"/>
+                          <a:ea typeface="Arial" pitchFamily="34" charset="-122"/>
+                          <a:cs typeface="Arial" pitchFamily="34" charset="-120"/>
+                        </a:rPr>
+                        <a:t>19.825 €</a:t>
+                      </a:r>
+                      <a:endParaRPr lang="en-US" sz="1250" dirty="0">
+                        <a:latin typeface="Arial" charset="0"/>
+                        <a:ea typeface="Arial" charset="0"/>
+                        <a:cs typeface="Arial" charset="0"/>
+                      </a:endParaRPr>
+                    </a:p>
+                  </a:txBody>
+                  <a:tcPr marL="91440" marR="91440" marT="45720" marB="45720">
+                    <a:lnL w="12700" cap="flat" cmpd="sng" algn="ctr">
+                      <a:solidFill>
+                        <a:srgbClr val="FFFFFF"/>
+                      </a:solidFill>
+                      <a:prstDash val="solid"/>
+                      <a:round/>
+                      <a:headEnd type="none" w="med" len="med"/>
+                      <a:tailEnd type="none" w="med" len="med"/>
+                    </a:lnL>
+                    <a:lnR w="12700" cap="flat" cmpd="sng" algn="ctr">
+                      <a:solidFill>
+                        <a:srgbClr val="FFFFFF"/>
+                      </a:solidFill>
+                      <a:prstDash val="solid"/>
+                      <a:round/>
+                      <a:headEnd type="none" w="med" len="med"/>
+                      <a:tailEnd type="none" w="med" len="med"/>
+                    </a:lnR>
+                    <a:lnT w="12700" cap="flat" cmpd="sng" algn="ctr">
+                      <a:solidFill>
+                        <a:srgbClr val="FFFFFF"/>
+                      </a:solidFill>
+                      <a:prstDash val="solid"/>
+                      <a:round/>
+                      <a:headEnd type="none" w="med" len="med"/>
+                      <a:tailEnd type="none" w="med" len="med"/>
+                    </a:lnT>
+                    <a:lnB w="12700" cap="flat" cmpd="sng" algn="ctr">
+                      <a:solidFill>
+                        <a:srgbClr val="FFFFFF"/>
+                      </a:solidFill>
+                      <a:prstDash val="solid"/>
+                      <a:round/>
+                      <a:headEnd type="none" w="med" len="med"/>
+                      <a:tailEnd type="none" w="med" len="med"/>
+                    </a:lnB>
+                  </a:tcPr>
+                </a:tc>
+                <a:tc>
+                  <a:txBody>
+                    <a:bodyPr/>
+                    <a:lstStyle/>
+                    <a:p>
+                      <a:pPr algn="r" indent="0" marL="0">
+                        <a:buNone/>
+                      </a:pPr>
+                      <a:r>
+                        <a:rPr lang="en-US" sz="1250" dirty="0">
+                          <a:solidFill>
+                            <a:srgbClr val="000000"/>
+                          </a:solidFill>
+                          <a:latin typeface="Arial" pitchFamily="34" charset="0"/>
+                          <a:ea typeface="Arial" pitchFamily="34" charset="-122"/>
+                          <a:cs typeface="Arial" pitchFamily="34" charset="-120"/>
+                        </a:rPr>
+                        <a:t>−5.100 €</a:t>
+                      </a:r>
+                      <a:endParaRPr lang="en-US" sz="1250" dirty="0">
+                        <a:latin typeface="Arial" charset="0"/>
+                        <a:ea typeface="Arial" charset="0"/>
+                        <a:cs typeface="Arial" charset="0"/>
+                      </a:endParaRPr>
+                    </a:p>
+                  </a:txBody>
+                  <a:tcPr marL="91440" marR="91440" marT="45720" marB="45720">
+                    <a:lnL w="12700" cap="flat" cmpd="sng" algn="ctr">
+                      <a:solidFill>
+                        <a:srgbClr val="FFFFFF"/>
+                      </a:solidFill>
+                      <a:prstDash val="solid"/>
+                      <a:round/>
+                      <a:headEnd type="none" w="med" len="med"/>
+                      <a:tailEnd type="none" w="med" len="med"/>
+                    </a:lnL>
+                    <a:lnR w="12700" cap="flat" cmpd="sng" algn="ctr">
+                      <a:solidFill>
+                        <a:srgbClr val="FFFFFF"/>
+                      </a:solidFill>
+                      <a:prstDash val="solid"/>
+                      <a:round/>
+                      <a:headEnd type="none" w="med" len="med"/>
+                      <a:tailEnd type="none" w="med" len="med"/>
+                    </a:lnR>
+                    <a:lnT w="12700" cap="flat" cmpd="sng" algn="ctr">
+                      <a:solidFill>
+                        <a:srgbClr val="FFFFFF"/>
+                      </a:solidFill>
+                      <a:prstDash val="solid"/>
+                      <a:round/>
+                      <a:headEnd type="none" w="med" len="med"/>
+                      <a:tailEnd type="none" w="med" len="med"/>
+                    </a:lnT>
+                    <a:lnB w="12700" cap="flat" cmpd="sng" algn="ctr">
+                      <a:solidFill>
+                        <a:srgbClr val="FFFFFF"/>
+                      </a:solidFill>
+                      <a:prstDash val="solid"/>
+                      <a:round/>
+                      <a:headEnd type="none" w="med" len="med"/>
+                      <a:tailEnd type="none" w="med" len="med"/>
+                    </a:lnB>
+                  </a:tcPr>
+                </a:tc>
+                <a:tc>
+                  <a:txBody>
+                    <a:bodyPr/>
+                    <a:lstStyle/>
+                    <a:p>
+                      <a:pPr algn="r" indent="0" marL="0">
+                        <a:buNone/>
+                      </a:pPr>
+                      <a:r>
+                        <a:rPr lang="en-US" sz="1250" b="1" dirty="0">
+                          <a:solidFill>
+                            <a:schemeClr val="accent5"/>
+                          </a:solidFill>
+                          <a:latin typeface="Arial" pitchFamily="34" charset="0"/>
+                          <a:ea typeface="Arial" pitchFamily="34" charset="-122"/>
+                          <a:cs typeface="Arial" pitchFamily="34" charset="-120"/>
+                        </a:rPr>
+                        <a:t>+14.725 €</a:t>
                       </a:r>
                       <a:endParaRPr lang="en-US" sz="1250" dirty="0">
                         <a:latin typeface="Arial" charset="0"/>
@@ -7856,7 +8053,7 @@
                           <a:ea typeface="Arial" pitchFamily="34" charset="-122"/>
                           <a:cs typeface="Arial" pitchFamily="34" charset="-120"/>
                         </a:rPr>
-                        <a:t>60.000 €</a:t>
+                        <a:t>80.000 €</a:t>
                       </a:r>
                       <a:endParaRPr lang="en-US" sz="1250" dirty="0">
                         <a:latin typeface="Arial" charset="0"/>
@@ -7921,7 +8118,7 @@
                           <a:ea typeface="Arial" pitchFamily="34" charset="-122"/>
                           <a:cs typeface="Arial" pitchFamily="34" charset="-120"/>
                         </a:rPr>
-                        <a:t>18.300 €</a:t>
+                        <a:t>24.400 €</a:t>
                       </a:r>
                       <a:endParaRPr lang="en-US" sz="1250" dirty="0">
                         <a:latin typeface="Arial" charset="0"/>
@@ -7986,7 +8183,7 @@
                           <a:ea typeface="Arial" pitchFamily="34" charset="-122"/>
                           <a:cs typeface="Arial" pitchFamily="34" charset="-120"/>
                         </a:rPr>
-                        <a:t>−5.520 €</a:t>
+                        <a:t>−5.100 €</a:t>
                       </a:r>
                       <a:endParaRPr lang="en-US" sz="1250" dirty="0">
                         <a:latin typeface="Arial" charset="0"/>
@@ -8051,7 +8248,7 @@
                           <a:ea typeface="Arial" pitchFamily="34" charset="-122"/>
                           <a:cs typeface="Arial" pitchFamily="34" charset="-120"/>
                         </a:rPr>
-                        <a:t>+12.780 €</a:t>
+                        <a:t>+19.300 €</a:t>
                       </a:r>
                       <a:endParaRPr lang="en-US" sz="1250" dirty="0">
                         <a:latin typeface="Arial" charset="0"/>
@@ -8121,7 +8318,7 @@
                           <a:ea typeface="Arial" pitchFamily="34" charset="-122"/>
                           <a:cs typeface="Arial" pitchFamily="34" charset="-120"/>
                         </a:rPr>
-                        <a:t>70.000 €</a:t>
+                        <a:t>90.000 €</a:t>
                       </a:r>
                       <a:endParaRPr lang="en-US" sz="1250" dirty="0">
                         <a:latin typeface="Arial" charset="0"/>
@@ -8186,7 +8383,7 @@
                           <a:ea typeface="Arial" pitchFamily="34" charset="-122"/>
                           <a:cs typeface="Arial" pitchFamily="34" charset="-120"/>
                         </a:rPr>
-                        <a:t>21.350 €</a:t>
+                        <a:t>27.450 €</a:t>
                       </a:r>
                       <a:endParaRPr lang="en-US" sz="1250" dirty="0">
                         <a:latin typeface="Arial" charset="0"/>
@@ -8251,7 +8448,7 @@
                           <a:ea typeface="Arial" pitchFamily="34" charset="-122"/>
                           <a:cs typeface="Arial" pitchFamily="34" charset="-120"/>
                         </a:rPr>
-                        <a:t>−5.520 €</a:t>
+                        <a:t>−5.100 €</a:t>
                       </a:r>
                       <a:endParaRPr lang="en-US" sz="1250" dirty="0">
                         <a:latin typeface="Arial" charset="0"/>
@@ -8316,7 +8513,7 @@
                           <a:ea typeface="Arial" pitchFamily="34" charset="-122"/>
                           <a:cs typeface="Arial" pitchFamily="34" charset="-120"/>
                         </a:rPr>
-                        <a:t>+15.830 €</a:t>
+                        <a:t>+22.350 €</a:t>
                       </a:r>
                       <a:endParaRPr lang="en-US" sz="1250" dirty="0">
                         <a:latin typeface="Arial" charset="0"/>
@@ -8449,7 +8646,7 @@
                 <a:ea typeface="Arial" pitchFamily="34" charset="-122"/>
                 <a:cs typeface="Arial" pitchFamily="34" charset="-120"/>
               </a:rPr>
-              <a:t>Mit 50.000 € Umsatz bleiben im ganzen Haus +5.430 € pro Monat nach Zinsen und Tilgung (KfW-Kredite und Hausbank, ohne Lohn). Die Gastro braucht für Break-even im Haus ca. 32.200 € Umsatz.</a:t>
+              <a:t>Mit 65.000 € Umsatz bleiben im ganzen Haus +9.610 € pro Monat nach Zinsen und Tilgung (KfW-Kredite und Hausbank, ohne Lohn). Die Gastro braucht für Break-even im Haus ca. 33.500 € Umsatz.</a:t>
             </a:r>
             <a:endParaRPr lang="en-US" sz="1300" dirty="0"/>
           </a:p>
@@ -8888,7 +9085,7 @@
                           <a:ea typeface="Arial" pitchFamily="34" charset="-122"/>
                           <a:cs typeface="Arial" pitchFamily="34" charset="-120"/>
                         </a:rPr>
-                        <a:t>30.000 €</a:t>
+                        <a:t>38.000 €</a:t>
                       </a:r>
                       <a:endParaRPr lang="en-US" sz="1250" dirty="0">
                         <a:latin typeface="Arial" charset="0"/>
@@ -9020,7 +9217,7 @@
                           <a:ea typeface="Arial" pitchFamily="34" charset="-122"/>
                           <a:cs typeface="Arial" pitchFamily="34" charset="-120"/>
                         </a:rPr>
-                        <a:t>18.000 €</a:t>
+                        <a:t>23.000 €</a:t>
                       </a:r>
                       <a:endParaRPr lang="en-US" sz="1250" dirty="0">
                         <a:latin typeface="Arial" charset="0"/>
@@ -9152,7 +9349,7 @@
                           <a:ea typeface="Arial" pitchFamily="34" charset="-122"/>
                           <a:cs typeface="Arial" pitchFamily="34" charset="-120"/>
                         </a:rPr>
-                        <a:t>20.000 €</a:t>
+                        <a:t>25.000 €</a:t>
                       </a:r>
                       <a:endParaRPr lang="en-US" sz="1250" dirty="0">
                         <a:latin typeface="Arial" charset="0"/>
@@ -9219,7 +9416,7 @@
                           <a:ea typeface="Arial" pitchFamily="34" charset="-122"/>
                           <a:cs typeface="Arial" pitchFamily="34" charset="-120"/>
                         </a:rPr>
-                        <a:t>Möbel (ca. 150 Plätze, Lounge, Séparée)</a:t>
+                        <a:t>Möbel (ca. 190 Plätze, Lounge, Séparée)</a:t>
                       </a:r>
                       <a:endParaRPr lang="en-US" sz="1250" dirty="0">
                         <a:latin typeface="Arial" charset="0"/>
@@ -9284,7 +9481,7 @@
                           <a:ea typeface="Arial" pitchFamily="34" charset="-122"/>
                           <a:cs typeface="Arial" pitchFamily="34" charset="-120"/>
                         </a:rPr>
-                        <a:t>28.000 €</a:t>
+                        <a:t>36.000 €</a:t>
                       </a:r>
                       <a:endParaRPr lang="en-US" sz="1250" dirty="0">
                         <a:latin typeface="Arial" charset="0"/>
@@ -9416,7 +9613,7 @@
                           <a:ea typeface="Arial" pitchFamily="34" charset="-122"/>
                           <a:cs typeface="Arial" pitchFamily="34" charset="-120"/>
                         </a:rPr>
-                        <a:t>8.000 €</a:t>
+                        <a:t>10.000 €</a:t>
                       </a:r>
                       <a:endParaRPr lang="en-US" sz="1250" dirty="0">
                         <a:latin typeface="Arial" charset="0"/>
@@ -9548,7 +9745,7 @@
                           <a:ea typeface="Arial" pitchFamily="34" charset="-122"/>
                           <a:cs typeface="Arial" pitchFamily="34" charset="-120"/>
                         </a:rPr>
-                        <a:t>15.000 €</a:t>
+                        <a:t>19.000 €</a:t>
                       </a:r>
                       <a:endParaRPr lang="en-US" sz="1250" dirty="0">
                         <a:latin typeface="Arial" charset="0"/>
@@ -9680,7 +9877,7 @@
                           <a:ea typeface="Arial" pitchFamily="34" charset="-122"/>
                           <a:cs typeface="Arial" pitchFamily="34" charset="-120"/>
                         </a:rPr>
-                        <a:t>5.000 €</a:t>
+                        <a:t>6.000 €</a:t>
                       </a:r>
                       <a:endParaRPr lang="en-US" sz="1250" dirty="0">
                         <a:latin typeface="Arial" charset="0"/>
@@ -9812,7 +10009,7 @@
                           <a:ea typeface="Arial" pitchFamily="34" charset="-122"/>
                           <a:cs typeface="Arial" pitchFamily="34" charset="-120"/>
                         </a:rPr>
-                        <a:t>5.000 €</a:t>
+                        <a:t>6.000 €</a:t>
                       </a:r>
                       <a:endParaRPr lang="en-US" sz="1250" dirty="0">
                         <a:latin typeface="Arial" charset="0"/>
@@ -9879,7 +10076,7 @@
                           <a:ea typeface="Arial" pitchFamily="34" charset="-122"/>
                           <a:cs typeface="Arial" pitchFamily="34" charset="-120"/>
                         </a:rPr>
-                        <a:t>Terrasse (Holzdeck, Möbel, Heizstrahler)</a:t>
+                        <a:t>Terrasse (Holzdeck, Möbel, Heizstrahler, 60 Plätze)</a:t>
                       </a:r>
                       <a:endParaRPr lang="en-US" sz="1250" dirty="0">
                         <a:latin typeface="Arial" charset="0"/>
@@ -9944,7 +10141,7 @@
                           <a:ea typeface="Arial" pitchFamily="34" charset="-122"/>
                           <a:cs typeface="Arial" pitchFamily="34" charset="-120"/>
                         </a:rPr>
-                        <a:t>6.000 €</a:t>
+                        <a:t>8.000 €</a:t>
                       </a:r>
                       <a:endParaRPr lang="en-US" sz="1250" dirty="0">
                         <a:latin typeface="Arial" charset="0"/>
@@ -10076,7 +10273,7 @@
                           <a:ea typeface="Arial" pitchFamily="34" charset="-122"/>
                           <a:cs typeface="Arial" pitchFamily="34" charset="-120"/>
                         </a:rPr>
-                        <a:t>5.000 €</a:t>
+                        <a:t>6.000 €</a:t>
                       </a:r>
                       <a:endParaRPr lang="en-US" sz="1250" dirty="0">
                         <a:latin typeface="Arial" charset="0"/>
@@ -10208,7 +10405,7 @@
                           <a:ea typeface="Arial" pitchFamily="34" charset="-122"/>
                           <a:cs typeface="Arial" pitchFamily="34" charset="-120"/>
                         </a:rPr>
-                        <a:t>3.000 €</a:t>
+                        <a:t>4.000 €</a:t>
                       </a:r>
                       <a:endParaRPr lang="en-US" sz="1250" dirty="0">
                         <a:latin typeface="Arial" charset="0"/>
@@ -10340,7 +10537,7 @@
                           <a:ea typeface="Arial" pitchFamily="34" charset="-122"/>
                           <a:cs typeface="Arial" pitchFamily="34" charset="-120"/>
                         </a:rPr>
-                        <a:t>7.150 €</a:t>
+                        <a:t>9.050 €</a:t>
                       </a:r>
                       <a:endParaRPr lang="en-US" sz="1250" dirty="0">
                         <a:latin typeface="Arial" charset="0"/>
@@ -10407,7 +10604,7 @@
                           <a:ea typeface="Arial" pitchFamily="34" charset="-122"/>
                           <a:cs typeface="Arial" pitchFamily="34" charset="-120"/>
                         </a:rPr>
-                        <a:t>Summe (im Modell: 150.000 €)</a:t>
+                        <a:t>Summe (im Modell: 190.000 €)</a:t>
                       </a:r>
                       <a:endParaRPr lang="en-US" sz="1250" dirty="0">
                         <a:latin typeface="Arial" charset="0"/>
@@ -10472,7 +10669,7 @@
                           <a:ea typeface="Arial" pitchFamily="34" charset="-122"/>
                           <a:cs typeface="Arial" pitchFamily="34" charset="-120"/>
                         </a:rPr>
-                        <a:t>150.150 €</a:t>
+                        <a:t>190.050 €</a:t>
                       </a:r>
                       <a:endParaRPr lang="en-US" sz="1250" dirty="0">
                         <a:latin typeface="Arial" charset="0"/>
@@ -10585,7 +10782,7 @@
                 <a:ea typeface="Arial" pitchFamily="34" charset="-122"/>
                 <a:cs typeface="Arial" pitchFamily="34" charset="-120"/>
               </a:rPr>
-              <a:t>Bei 200.000 € Ausbau steigt die Rate des Hauses um ca. 190 € im Monat. Der Schallschutz zur Decke und die Küchenabluft (über Dach, weg von den Wohnungen) gehören unbedingt in die Planung.</a:t>
+              <a:t>Bei 250.000 € Ausbau steigt die Rate des Hauses um ca. 228 € im Monat. Der Schallschutz zur Decke und die Küchenabluft (über Dach, weg von den Wohnungen) gehören unbedingt in die Planung.</a:t>
             </a:r>
             <a:endParaRPr lang="en-US" sz="1400" dirty="0"/>
           </a:p>
@@ -11047,7 +11244,7 @@
                 <a:ea typeface="Arial" pitchFamily="34" charset="-122"/>
                 <a:cs typeface="Arial" pitchFamily="34" charset="-120"/>
               </a:rPr>
-              <a:t>Bedarf der großen Gastro ca. 33 Plätze plus Wohnungen. Auf dem Grundstück passen nur ca. 8–10, Rest über die öffentliche Parkfläche oder Ablöse.</a:t>
+              <a:t>Bedarf der großen Gastro ca. 37 Plätze, mit Büros und Wohnungen ca. 55. Auf dem Grundstück passen nur ca. 6–8, Rest über die öffentliche Parkfläche oder Ablöse.</a:t>
             </a:r>
             <a:endParaRPr lang="en-US" sz="1300" dirty="0"/>
           </a:p>
@@ -11725,7 +11922,7 @@
                 <a:ea typeface="Arial" pitchFamily="34" charset="-122"/>
                 <a:cs typeface="Arial" pitchFamily="34" charset="-120"/>
               </a:rPr>
-              <a:t>Angebote für Ausbau einholen, Budget prüfen (150.000 € ist knapp)</a:t>
+              <a:t>Angebote für Ausbau einholen, Budget prüfen (190.000 €)</a:t>
             </a:r>
             <a:endParaRPr lang="en-US" sz="1500" dirty="0"/>
           </a:p>
@@ -12613,7 +12810,7 @@
                 <a:ea typeface="Arial" pitchFamily="34" charset="-122"/>
                 <a:cs typeface="Arial" pitchFamily="34" charset="-120"/>
               </a:rPr>
-              <a:t>Cocktails, Wein und Bier an der Theke. Séparée mit 20 Plätzen für Geburtstage, Firmen- und Vereinsfeiern.</a:t>
+              <a:t>Cocktails, Wein und Bier an der Theke. Séparée mit 30 Plätzen für Geburtstage, Firmen- und Vereinsfeiern.</a:t>
             </a:r>
             <a:endParaRPr lang="en-US" sz="1400" dirty="0"/>
           </a:p>
@@ -12679,7 +12876,7 @@
                 <a:ea typeface="Georgia" pitchFamily="34" charset="-122"/>
                 <a:cs typeface="Georgia" pitchFamily="34" charset="-120"/>
               </a:rPr>
-              <a:t>ca. 460 m²</a:t>
+              <a:t>ca. 510 m²</a:t>
             </a:r>
             <a:endParaRPr lang="en-US" sz="2800" dirty="0"/>
           </a:p>
@@ -12726,7 +12923,7 @@
       </p:sp>
       <p:sp>
         <p:nvSpPr>
-          <p:cNvPr id="17" name="Kennzahl Plätze innen (130 Gastraum, 20 Séparée)"/>
+          <p:cNvPr id="17" name="Kennzahl Plätze innen (160 Gastraum, 30 Séparée)"/>
           <p:cNvSpPr/>
           <p:nvPr/>
         </p:nvSpPr>
@@ -12784,7 +12981,7 @@
                 <a:ea typeface="Georgia" pitchFamily="34" charset="-122"/>
                 <a:cs typeface="Georgia" pitchFamily="34" charset="-120"/>
               </a:rPr>
-              <a:t>ca. 150</a:t>
+              <a:t>ca. 190</a:t>
             </a:r>
             <a:endParaRPr lang="en-US" sz="2800" dirty="0"/>
           </a:p>
@@ -12823,7 +13020,7 @@
                 <a:ea typeface="Arial" pitchFamily="34" charset="-122"/>
                 <a:cs typeface="Arial" pitchFamily="34" charset="-120"/>
               </a:rPr>
-              <a:t>Plätze innen (130 Gastraum, 20 Séparée)</a:t>
+              <a:t>Plätze innen (160 Gastraum, 30 Séparée)</a:t>
             </a:r>
             <a:endParaRPr lang="en-US" sz="1300" dirty="0"/>
           </a:p>
@@ -12889,7 +13086,7 @@
                 <a:ea typeface="Georgia" pitchFamily="34" charset="-122"/>
                 <a:cs typeface="Georgia" pitchFamily="34" charset="-120"/>
               </a:rPr>
-              <a:t>ca. 40</a:t>
+              <a:t>ca. 60</a:t>
             </a:r>
             <a:endParaRPr lang="en-US" sz="2800" dirty="0"/>
           </a:p>
@@ -12994,7 +13191,7 @@
                 <a:ea typeface="Georgia" pitchFamily="34" charset="-122"/>
                 <a:cs typeface="Georgia" pitchFamily="34" charset="-120"/>
               </a:rPr>
-              <a:t>10</a:t>
+              <a:t>12</a:t>
             </a:r>
             <a:endParaRPr lang="en-US" sz="2800" dirty="0"/>
           </a:p>
@@ -17052,7 +17249,7 @@
         <p:spPr>
           <a:xfrm>
             <a:off x="548640" y="1371600"/>
-            <a:ext cx="4873752" cy="3374136"/>
+            <a:ext cx="4864608" cy="3127248"/>
           </a:xfrm>
           <a:prstGeom prst="rect">
             <a:avLst/>
@@ -17076,8 +17273,8 @@
         </p:nvSpPr>
         <p:spPr>
           <a:xfrm>
-            <a:off x="1110996" y="4745736"/>
-            <a:ext cx="4311396" cy="524866"/>
+            <a:off x="1069848" y="4498848"/>
+            <a:ext cx="4343400" cy="486461"/>
           </a:xfrm>
           <a:prstGeom prst="rect">
             <a:avLst/>
@@ -17101,8 +17298,8 @@
         </p:nvSpPr>
         <p:spPr>
           <a:xfrm>
-            <a:off x="1110996" y="4745736"/>
-            <a:ext cx="4311396" cy="524866"/>
+            <a:off x="1069848" y="4498848"/>
+            <a:ext cx="4343400" cy="486461"/>
           </a:xfrm>
           <a:prstGeom prst="rect">
             <a:avLst/>
@@ -17126,7 +17323,7 @@
                 <a:ea typeface="Arial" pitchFamily="34" charset="-122"/>
                 <a:cs typeface="Arial" pitchFamily="34" charset="-120"/>
               </a:rPr>
-              <a:t>Terrasse, ca. 40 Plätze</a:t>
+              <a:t>Terrasse, ca. 60 Plätze</a:t>
             </a:r>
             <a:endParaRPr lang="en-US" sz="1000" dirty="0"/>
           </a:p>
@@ -17140,8 +17337,8 @@
         </p:nvSpPr>
         <p:spPr>
           <a:xfrm>
-            <a:off x="773582" y="4483303"/>
-            <a:ext cx="487375" cy="262433"/>
+            <a:off x="757123" y="4255618"/>
+            <a:ext cx="451714" cy="243230"/>
           </a:xfrm>
           <a:prstGeom prst="rect">
             <a:avLst/>
@@ -17165,8 +17362,8 @@
         </p:nvSpPr>
         <p:spPr>
           <a:xfrm>
-            <a:off x="773582" y="4483303"/>
-            <a:ext cx="487375" cy="262433"/>
+            <a:off x="757123" y="4255618"/>
+            <a:ext cx="451714" cy="243230"/>
           </a:xfrm>
           <a:prstGeom prst="rect">
             <a:avLst/>
@@ -17204,8 +17401,8 @@
         </p:nvSpPr>
         <p:spPr>
           <a:xfrm>
-            <a:off x="1148486" y="4080281"/>
-            <a:ext cx="318668" cy="178079"/>
+            <a:off x="1069848" y="3882085"/>
+            <a:ext cx="295351" cy="165049"/>
           </a:xfrm>
           <a:prstGeom prst="rect">
             <a:avLst/>
@@ -17229,8 +17426,8 @@
         </p:nvSpPr>
         <p:spPr>
           <a:xfrm>
-            <a:off x="1879549" y="4080281"/>
-            <a:ext cx="318668" cy="178079"/>
+            <a:off x="1747418" y="3882085"/>
+            <a:ext cx="295351" cy="165049"/>
           </a:xfrm>
           <a:prstGeom prst="rect">
             <a:avLst/>
@@ -17254,8 +17451,8 @@
         </p:nvSpPr>
         <p:spPr>
           <a:xfrm>
-            <a:off x="2610612" y="4080281"/>
-            <a:ext cx="318668" cy="178079"/>
+            <a:off x="2424989" y="3882085"/>
+            <a:ext cx="295351" cy="165049"/>
           </a:xfrm>
           <a:prstGeom prst="rect">
             <a:avLst/>
@@ -17279,8 +17476,8 @@
         </p:nvSpPr>
         <p:spPr>
           <a:xfrm>
-            <a:off x="3341675" y="4080281"/>
-            <a:ext cx="318668" cy="178079"/>
+            <a:off x="3102559" y="3882085"/>
+            <a:ext cx="295351" cy="165049"/>
           </a:xfrm>
           <a:prstGeom prst="rect">
             <a:avLst/>
@@ -17304,8 +17501,8 @@
         </p:nvSpPr>
         <p:spPr>
           <a:xfrm>
-            <a:off x="4072738" y="4080281"/>
-            <a:ext cx="318668" cy="178079"/>
+            <a:off x="3780130" y="3882085"/>
+            <a:ext cx="295351" cy="165049"/>
           </a:xfrm>
           <a:prstGeom prst="rect">
             <a:avLst/>
@@ -17329,8 +17526,8 @@
         </p:nvSpPr>
         <p:spPr>
           <a:xfrm>
-            <a:off x="1148486" y="3677260"/>
-            <a:ext cx="318668" cy="178079"/>
+            <a:off x="1069848" y="3578047"/>
+            <a:ext cx="295351" cy="165049"/>
           </a:xfrm>
           <a:prstGeom prst="rect">
             <a:avLst/>
@@ -17354,8 +17551,8 @@
         </p:nvSpPr>
         <p:spPr>
           <a:xfrm>
-            <a:off x="1879549" y="3677260"/>
-            <a:ext cx="318668" cy="178079"/>
+            <a:off x="1747418" y="3578047"/>
+            <a:ext cx="295351" cy="165049"/>
           </a:xfrm>
           <a:prstGeom prst="rect">
             <a:avLst/>
@@ -17379,8 +17576,8 @@
         </p:nvSpPr>
         <p:spPr>
           <a:xfrm>
-            <a:off x="2610612" y="3677260"/>
-            <a:ext cx="318668" cy="178079"/>
+            <a:off x="2424989" y="3578047"/>
+            <a:ext cx="295351" cy="165049"/>
           </a:xfrm>
           <a:prstGeom prst="rect">
             <a:avLst/>
@@ -17404,8 +17601,8 @@
         </p:nvSpPr>
         <p:spPr>
           <a:xfrm>
-            <a:off x="3341675" y="3677260"/>
-            <a:ext cx="318668" cy="178079"/>
+            <a:off x="3102559" y="3578047"/>
+            <a:ext cx="295351" cy="165049"/>
           </a:xfrm>
           <a:prstGeom prst="rect">
             <a:avLst/>
@@ -17429,8 +17626,8 @@
         </p:nvSpPr>
         <p:spPr>
           <a:xfrm>
-            <a:off x="4072738" y="3677260"/>
-            <a:ext cx="318668" cy="178079"/>
+            <a:off x="3780130" y="3578047"/>
+            <a:ext cx="295351" cy="165049"/>
           </a:xfrm>
           <a:prstGeom prst="rect">
             <a:avLst/>
@@ -17454,8 +17651,8 @@
         </p:nvSpPr>
         <p:spPr>
           <a:xfrm>
-            <a:off x="1148486" y="3274238"/>
-            <a:ext cx="318668" cy="178079"/>
+            <a:off x="1069848" y="3274009"/>
+            <a:ext cx="295351" cy="165049"/>
           </a:xfrm>
           <a:prstGeom prst="rect">
             <a:avLst/>
@@ -17479,8 +17676,8 @@
         </p:nvSpPr>
         <p:spPr>
           <a:xfrm>
-            <a:off x="1879549" y="3274238"/>
-            <a:ext cx="318668" cy="178079"/>
+            <a:off x="1747418" y="3274009"/>
+            <a:ext cx="295351" cy="165049"/>
           </a:xfrm>
           <a:prstGeom prst="rect">
             <a:avLst/>
@@ -17504,8 +17701,8 @@
         </p:nvSpPr>
         <p:spPr>
           <a:xfrm>
-            <a:off x="2610612" y="3274238"/>
-            <a:ext cx="318668" cy="178079"/>
+            <a:off x="2424989" y="3274009"/>
+            <a:ext cx="295351" cy="165049"/>
           </a:xfrm>
           <a:prstGeom prst="rect">
             <a:avLst/>
@@ -17529,8 +17726,8 @@
         </p:nvSpPr>
         <p:spPr>
           <a:xfrm>
-            <a:off x="3341675" y="3274238"/>
-            <a:ext cx="318668" cy="178079"/>
+            <a:off x="3102559" y="3274009"/>
+            <a:ext cx="295351" cy="165049"/>
           </a:xfrm>
           <a:prstGeom prst="rect">
             <a:avLst/>
@@ -17554,8 +17751,8 @@
         </p:nvSpPr>
         <p:spPr>
           <a:xfrm>
-            <a:off x="4072738" y="3274238"/>
-            <a:ext cx="318668" cy="178079"/>
+            <a:off x="3780130" y="3274009"/>
+            <a:ext cx="295351" cy="165049"/>
           </a:xfrm>
           <a:prstGeom prst="rect">
             <a:avLst/>
@@ -17579,8 +17776,8 @@
         </p:nvSpPr>
         <p:spPr>
           <a:xfrm>
-            <a:off x="1148486" y="2871216"/>
-            <a:ext cx="318668" cy="178079"/>
+            <a:off x="1069848" y="2969971"/>
+            <a:ext cx="295351" cy="165049"/>
           </a:xfrm>
           <a:prstGeom prst="rect">
             <a:avLst/>
@@ -17604,8 +17801,8 @@
         </p:nvSpPr>
         <p:spPr>
           <a:xfrm>
-            <a:off x="1879549" y="2871216"/>
-            <a:ext cx="318668" cy="178079"/>
+            <a:off x="1747418" y="2969971"/>
+            <a:ext cx="295351" cy="165049"/>
           </a:xfrm>
           <a:prstGeom prst="rect">
             <a:avLst/>
@@ -17629,8 +17826,8 @@
         </p:nvSpPr>
         <p:spPr>
           <a:xfrm>
-            <a:off x="2610612" y="2871216"/>
-            <a:ext cx="318668" cy="178079"/>
+            <a:off x="2424989" y="2969971"/>
+            <a:ext cx="295351" cy="165049"/>
           </a:xfrm>
           <a:prstGeom prst="rect">
             <a:avLst/>
@@ -17654,8 +17851,8 @@
         </p:nvSpPr>
         <p:spPr>
           <a:xfrm>
-            <a:off x="3341675" y="2871216"/>
-            <a:ext cx="318668" cy="178079"/>
+            <a:off x="3102559" y="2969971"/>
+            <a:ext cx="295351" cy="165049"/>
           </a:xfrm>
           <a:prstGeom prst="rect">
             <a:avLst/>
@@ -17679,8 +17876,8 @@
         </p:nvSpPr>
         <p:spPr>
           <a:xfrm>
-            <a:off x="4072738" y="2871216"/>
-            <a:ext cx="318668" cy="178079"/>
+            <a:off x="3780130" y="2969971"/>
+            <a:ext cx="295351" cy="165049"/>
           </a:xfrm>
           <a:prstGeom prst="rect">
             <a:avLst/>
@@ -17698,14 +17895,139 @@
       </p:sp>
       <p:sp>
         <p:nvSpPr>
-          <p:cNvPr id="30" name="Fenstertisch 1"/>
+          <p:cNvPr id="30" name="Tisch 21"/>
           <p:cNvSpPr/>
           <p:nvPr/>
         </p:nvSpPr>
         <p:spPr>
           <a:xfrm>
-            <a:off x="1036015" y="4492676"/>
-            <a:ext cx="149962" cy="149962"/>
+            <a:off x="1069848" y="2665933"/>
+            <a:ext cx="295351" cy="165049"/>
+          </a:xfrm>
+          <a:prstGeom prst="rect">
+            <a:avLst/>
+          </a:prstGeom>
+          <a:solidFill>
+            <a:srgbClr val="8A6A45"/>
+          </a:solidFill>
+          <a:ln w="6350">
+            <a:solidFill>
+              <a:srgbClr val="FFFFFF"/>
+            </a:solidFill>
+            <a:prstDash val="solid"/>
+          </a:ln>
+        </p:spPr>
+      </p:sp>
+      <p:sp>
+        <p:nvSpPr>
+          <p:cNvPr id="31" name="Tisch 22"/>
+          <p:cNvSpPr/>
+          <p:nvPr/>
+        </p:nvSpPr>
+        <p:spPr>
+          <a:xfrm>
+            <a:off x="1747418" y="2665933"/>
+            <a:ext cx="295351" cy="165049"/>
+          </a:xfrm>
+          <a:prstGeom prst="rect">
+            <a:avLst/>
+          </a:prstGeom>
+          <a:solidFill>
+            <a:srgbClr val="8A6A45"/>
+          </a:solidFill>
+          <a:ln w="6350">
+            <a:solidFill>
+              <a:srgbClr val="FFFFFF"/>
+            </a:solidFill>
+            <a:prstDash val="solid"/>
+          </a:ln>
+        </p:spPr>
+      </p:sp>
+      <p:sp>
+        <p:nvSpPr>
+          <p:cNvPr id="32" name="Tisch 23"/>
+          <p:cNvSpPr/>
+          <p:nvPr/>
+        </p:nvSpPr>
+        <p:spPr>
+          <a:xfrm>
+            <a:off x="2424989" y="2665933"/>
+            <a:ext cx="295351" cy="165049"/>
+          </a:xfrm>
+          <a:prstGeom prst="rect">
+            <a:avLst/>
+          </a:prstGeom>
+          <a:solidFill>
+            <a:srgbClr val="8A6A45"/>
+          </a:solidFill>
+          <a:ln w="6350">
+            <a:solidFill>
+              <a:srgbClr val="FFFFFF"/>
+            </a:solidFill>
+            <a:prstDash val="solid"/>
+          </a:ln>
+        </p:spPr>
+      </p:sp>
+      <p:sp>
+        <p:nvSpPr>
+          <p:cNvPr id="33" name="Tisch 24"/>
+          <p:cNvSpPr/>
+          <p:nvPr/>
+        </p:nvSpPr>
+        <p:spPr>
+          <a:xfrm>
+            <a:off x="3102559" y="2665933"/>
+            <a:ext cx="295351" cy="165049"/>
+          </a:xfrm>
+          <a:prstGeom prst="rect">
+            <a:avLst/>
+          </a:prstGeom>
+          <a:solidFill>
+            <a:srgbClr val="8A6A45"/>
+          </a:solidFill>
+          <a:ln w="6350">
+            <a:solidFill>
+              <a:srgbClr val="FFFFFF"/>
+            </a:solidFill>
+            <a:prstDash val="solid"/>
+          </a:ln>
+        </p:spPr>
+      </p:sp>
+      <p:sp>
+        <p:nvSpPr>
+          <p:cNvPr id="34" name="Tisch 25"/>
+          <p:cNvSpPr/>
+          <p:nvPr/>
+        </p:nvSpPr>
+        <p:spPr>
+          <a:xfrm>
+            <a:off x="3780130" y="2665933"/>
+            <a:ext cx="295351" cy="165049"/>
+          </a:xfrm>
+          <a:prstGeom prst="rect">
+            <a:avLst/>
+          </a:prstGeom>
+          <a:solidFill>
+            <a:srgbClr val="8A6A45"/>
+          </a:solidFill>
+          <a:ln w="6350">
+            <a:solidFill>
+              <a:srgbClr val="FFFFFF"/>
+            </a:solidFill>
+            <a:prstDash val="solid"/>
+          </a:ln>
+        </p:spPr>
+      </p:sp>
+      <p:sp>
+        <p:nvSpPr>
+          <p:cNvPr id="35" name="Fenstertisch 1"/>
+          <p:cNvSpPr/>
+          <p:nvPr/>
+        </p:nvSpPr>
+        <p:spPr>
+          <a:xfrm>
+            <a:off x="965606" y="4264304"/>
+            <a:ext cx="138989" cy="138989"/>
           </a:xfrm>
           <a:prstGeom prst="rect">
             <a:avLst/>
@@ -17723,14 +18045,14 @@
       </p:sp>
       <p:sp>
         <p:nvSpPr>
-          <p:cNvPr id="31" name="Fenstertisch 2"/>
+          <p:cNvPr id="36" name="Fenstertisch 2"/>
           <p:cNvSpPr/>
           <p:nvPr/>
         </p:nvSpPr>
         <p:spPr>
           <a:xfrm>
-            <a:off x="1476527" y="4492676"/>
-            <a:ext cx="149962" cy="149962"/>
+            <a:off x="1434694" y="4264304"/>
+            <a:ext cx="138989" cy="138989"/>
           </a:xfrm>
           <a:prstGeom prst="rect">
             <a:avLst/>
@@ -17748,14 +18070,14 @@
       </p:sp>
       <p:sp>
         <p:nvSpPr>
-          <p:cNvPr id="32" name="Fenstertisch 3"/>
+          <p:cNvPr id="37" name="Fenstertisch 3"/>
           <p:cNvSpPr/>
           <p:nvPr/>
         </p:nvSpPr>
         <p:spPr>
           <a:xfrm>
-            <a:off x="1917040" y="4492676"/>
-            <a:ext cx="149962" cy="149962"/>
+            <a:off x="1903781" y="4264304"/>
+            <a:ext cx="138989" cy="138989"/>
           </a:xfrm>
           <a:prstGeom prst="rect">
             <a:avLst/>
@@ -17773,14 +18095,14 @@
       </p:sp>
       <p:sp>
         <p:nvSpPr>
-          <p:cNvPr id="33" name="Fenstertisch 4"/>
+          <p:cNvPr id="38" name="Fenstertisch 4"/>
           <p:cNvSpPr/>
           <p:nvPr/>
         </p:nvSpPr>
         <p:spPr>
           <a:xfrm>
-            <a:off x="2357552" y="4492676"/>
-            <a:ext cx="149962" cy="149962"/>
+            <a:off x="2372868" y="4264304"/>
+            <a:ext cx="138989" cy="138989"/>
           </a:xfrm>
           <a:prstGeom prst="rect">
             <a:avLst/>
@@ -17798,14 +18120,14 @@
       </p:sp>
       <p:sp>
         <p:nvSpPr>
-          <p:cNvPr id="34" name="Fenstertisch 5"/>
+          <p:cNvPr id="39" name="Fenstertisch 5"/>
           <p:cNvSpPr/>
           <p:nvPr/>
         </p:nvSpPr>
         <p:spPr>
           <a:xfrm>
-            <a:off x="2798064" y="4492676"/>
-            <a:ext cx="149962" cy="149962"/>
+            <a:off x="2841955" y="4264304"/>
+            <a:ext cx="138989" cy="138989"/>
           </a:xfrm>
           <a:prstGeom prst="rect">
             <a:avLst/>
@@ -17823,14 +18145,14 @@
       </p:sp>
       <p:sp>
         <p:nvSpPr>
-          <p:cNvPr id="35" name="Fenstertisch 6"/>
+          <p:cNvPr id="40" name="Fenstertisch 6"/>
           <p:cNvSpPr/>
           <p:nvPr/>
         </p:nvSpPr>
         <p:spPr>
           <a:xfrm>
-            <a:off x="3238576" y="4492676"/>
-            <a:ext cx="149962" cy="149962"/>
+            <a:off x="3311042" y="4264304"/>
+            <a:ext cx="138989" cy="138989"/>
           </a:xfrm>
           <a:prstGeom prst="rect">
             <a:avLst/>
@@ -17848,14 +18170,14 @@
       </p:sp>
       <p:sp>
         <p:nvSpPr>
-          <p:cNvPr id="36" name="Fenstertisch 7"/>
+          <p:cNvPr id="41" name="Fenstertisch 7"/>
           <p:cNvSpPr/>
           <p:nvPr/>
         </p:nvSpPr>
         <p:spPr>
           <a:xfrm>
-            <a:off x="3679088" y="4492676"/>
-            <a:ext cx="149962" cy="149962"/>
+            <a:off x="3780130" y="4264304"/>
+            <a:ext cx="138989" cy="138989"/>
           </a:xfrm>
           <a:prstGeom prst="rect">
             <a:avLst/>
@@ -17873,14 +18195,14 @@
       </p:sp>
       <p:sp>
         <p:nvSpPr>
-          <p:cNvPr id="37" name="Fenstertisch 8"/>
+          <p:cNvPr id="42" name="Fenstertisch 8"/>
           <p:cNvSpPr/>
           <p:nvPr/>
         </p:nvSpPr>
         <p:spPr>
           <a:xfrm>
-            <a:off x="4119601" y="4492676"/>
-            <a:ext cx="149962" cy="149962"/>
+            <a:off x="4249217" y="4264304"/>
+            <a:ext cx="138989" cy="138989"/>
           </a:xfrm>
           <a:prstGeom prst="rect">
             <a:avLst/>
@@ -17898,14 +18220,14 @@
       </p:sp>
       <p:sp>
         <p:nvSpPr>
-          <p:cNvPr id="38" name="Lounge"/>
+          <p:cNvPr id="43" name="Lounge"/>
           <p:cNvSpPr/>
           <p:nvPr/>
         </p:nvSpPr>
         <p:spPr>
           <a:xfrm>
-            <a:off x="4485132" y="2964942"/>
-            <a:ext cx="862279" cy="1405890"/>
+            <a:off x="4509821" y="2691994"/>
+            <a:ext cx="833933" cy="1459382"/>
           </a:xfrm>
           <a:prstGeom prst="rect">
             <a:avLst/>
@@ -17923,14 +18245,14 @@
       </p:sp>
       <p:sp>
         <p:nvSpPr>
-          <p:cNvPr id="39" name="Text 36"/>
+          <p:cNvPr id="44" name="Text 41"/>
           <p:cNvSpPr txBox="1"/>
           <p:nvPr/>
         </p:nvSpPr>
         <p:spPr>
           <a:xfrm>
-            <a:off x="4485132" y="2964942"/>
-            <a:ext cx="862279" cy="1405890"/>
+            <a:off x="4509821" y="2691994"/>
+            <a:ext cx="833933" cy="1459382"/>
           </a:xfrm>
           <a:prstGeom prst="rect">
             <a:avLst/>
@@ -17971,7 +18293,7 @@
                 <a:ea typeface="Arial" pitchFamily="34" charset="-122"/>
                 <a:cs typeface="Arial" pitchFamily="34" charset="-120"/>
               </a:rPr>
-              <a:t>14 Plätze</a:t>
+              <a:t>20 Plätze</a:t>
             </a:r>
             <a:endParaRPr lang="en-US" sz="1000" dirty="0"/>
           </a:p>
@@ -17979,14 +18301,14 @@
       </p:sp>
       <p:sp>
         <p:nvSpPr>
-          <p:cNvPr id="40" name="Bar"/>
+          <p:cNvPr id="45" name="Bar"/>
           <p:cNvSpPr/>
           <p:nvPr/>
         </p:nvSpPr>
         <p:spPr>
           <a:xfrm>
-            <a:off x="2048256" y="2365096"/>
-            <a:ext cx="2249424" cy="262433"/>
+            <a:off x="1938528" y="2292401"/>
+            <a:ext cx="2258568" cy="243230"/>
           </a:xfrm>
           <a:prstGeom prst="rect">
             <a:avLst/>
@@ -18004,14 +18326,14 @@
       </p:sp>
       <p:sp>
         <p:nvSpPr>
-          <p:cNvPr id="41" name="Text 38"/>
+          <p:cNvPr id="46" name="Text 43"/>
           <p:cNvSpPr txBox="1"/>
           <p:nvPr/>
         </p:nvSpPr>
         <p:spPr>
           <a:xfrm>
-            <a:off x="2048256" y="2365096"/>
-            <a:ext cx="2249424" cy="262433"/>
+            <a:off x="1938528" y="2292401"/>
+            <a:ext cx="2258568" cy="243230"/>
           </a:xfrm>
           <a:prstGeom prst="rect">
             <a:avLst/>
@@ -18035,7 +18357,7 @@
                 <a:ea typeface="Arial" pitchFamily="34" charset="-122"/>
                 <a:cs typeface="Arial" pitchFamily="34" charset="-120"/>
               </a:rPr>
-              <a:t>Bar, 10 Barhocker</a:t>
+              <a:t>Bar, 12 Barhocker</a:t>
             </a:r>
             <a:endParaRPr lang="en-US" sz="1000" dirty="0"/>
           </a:p>
@@ -18043,14 +18365,14 @@
       </p:sp>
       <p:sp>
         <p:nvSpPr>
-          <p:cNvPr id="42" name="Backbar"/>
+          <p:cNvPr id="47" name="Backbar"/>
           <p:cNvSpPr/>
           <p:nvPr/>
         </p:nvSpPr>
         <p:spPr>
           <a:xfrm>
-            <a:off x="2048256" y="2187016"/>
-            <a:ext cx="2249424" cy="103099"/>
+            <a:off x="1938528" y="2127352"/>
+            <a:ext cx="2258568" cy="95555"/>
           </a:xfrm>
           <a:prstGeom prst="rect">
             <a:avLst/>
@@ -18068,14 +18390,14 @@
       </p:sp>
       <p:sp>
         <p:nvSpPr>
-          <p:cNvPr id="43" name="Séparée"/>
+          <p:cNvPr id="48" name="Séparée"/>
           <p:cNvSpPr/>
           <p:nvPr/>
         </p:nvSpPr>
         <p:spPr>
           <a:xfrm>
-            <a:off x="623621" y="1446581"/>
-            <a:ext cx="1237183" cy="956005"/>
+            <a:off x="618134" y="1441094"/>
+            <a:ext cx="1250899" cy="886054"/>
           </a:xfrm>
           <a:prstGeom prst="rect">
             <a:avLst/>
@@ -18093,14 +18415,14 @@
       </p:sp>
       <p:sp>
         <p:nvSpPr>
-          <p:cNvPr id="44" name="Text 41"/>
+          <p:cNvPr id="49" name="Text 46"/>
           <p:cNvSpPr txBox="1"/>
           <p:nvPr/>
         </p:nvSpPr>
         <p:spPr>
           <a:xfrm>
-            <a:off x="623621" y="1446581"/>
-            <a:ext cx="1237183" cy="956005"/>
+            <a:off x="618134" y="1441094"/>
+            <a:ext cx="1250899" cy="886054"/>
           </a:xfrm>
           <a:prstGeom prst="rect">
             <a:avLst/>
@@ -18141,7 +18463,7 @@
                 <a:ea typeface="Arial" pitchFamily="34" charset="-122"/>
                 <a:cs typeface="Arial" pitchFamily="34" charset="-120"/>
               </a:rPr>
-              <a:t>20 Plätze</a:t>
+              <a:t>30 Plätze</a:t>
             </a:r>
             <a:endParaRPr lang="en-US" sz="1000" dirty="0"/>
           </a:p>
@@ -18158,7 +18480,7 @@
                 <a:ea typeface="Arial" pitchFamily="34" charset="-122"/>
                 <a:cs typeface="Arial" pitchFamily="34" charset="-120"/>
               </a:rPr>
-              <a:t>mit Stahl-Glas-Wand</a:t>
+              <a:t>Stahl-Glas-Wand</a:t>
             </a:r>
             <a:endParaRPr lang="en-US" sz="1000" dirty="0"/>
           </a:p>
@@ -18166,14 +18488,14 @@
       </p:sp>
       <p:sp>
         <p:nvSpPr>
-          <p:cNvPr id="45" name="Küche"/>
+          <p:cNvPr id="50" name="Küche"/>
           <p:cNvSpPr/>
           <p:nvPr/>
         </p:nvSpPr>
         <p:spPr>
           <a:xfrm>
-            <a:off x="2123237" y="1446581"/>
-            <a:ext cx="1199693" cy="637337"/>
+            <a:off x="2008022" y="1441094"/>
+            <a:ext cx="1111910" cy="590702"/>
           </a:xfrm>
           <a:prstGeom prst="rect">
             <a:avLst/>
@@ -18191,14 +18513,14 @@
       </p:sp>
       <p:sp>
         <p:nvSpPr>
-          <p:cNvPr id="46" name="Text 43"/>
+          <p:cNvPr id="51" name="Text 48"/>
           <p:cNvSpPr txBox="1"/>
           <p:nvPr/>
         </p:nvSpPr>
         <p:spPr>
           <a:xfrm>
-            <a:off x="2123237" y="1446581"/>
-            <a:ext cx="1199693" cy="637337"/>
+            <a:off x="2008022" y="1441094"/>
+            <a:ext cx="1111910" cy="590702"/>
           </a:xfrm>
           <a:prstGeom prst="rect">
             <a:avLst/>
@@ -18230,14 +18552,14 @@
       </p:sp>
       <p:sp>
         <p:nvSpPr>
-          <p:cNvPr id="47" name="Lager und Kühlung"/>
+          <p:cNvPr id="52" name="Lager und Kühlung"/>
           <p:cNvSpPr/>
           <p:nvPr/>
         </p:nvSpPr>
         <p:spPr>
           <a:xfrm>
-            <a:off x="3341675" y="1446581"/>
-            <a:ext cx="862279" cy="637337"/>
+            <a:off x="3137306" y="1441094"/>
+            <a:ext cx="799186" cy="590702"/>
           </a:xfrm>
           <a:prstGeom prst="rect">
             <a:avLst/>
@@ -18255,14 +18577,14 @@
       </p:sp>
       <p:sp>
         <p:nvSpPr>
-          <p:cNvPr id="48" name="Text 45"/>
+          <p:cNvPr id="53" name="Text 50"/>
           <p:cNvSpPr txBox="1"/>
           <p:nvPr/>
         </p:nvSpPr>
         <p:spPr>
           <a:xfrm>
-            <a:off x="3341675" y="1446581"/>
-            <a:ext cx="862279" cy="637337"/>
+            <a:off x="3137306" y="1441094"/>
+            <a:ext cx="799186" cy="590702"/>
           </a:xfrm>
           <a:prstGeom prst="rect">
             <a:avLst/>
@@ -18311,14 +18633,14 @@
       </p:sp>
       <p:sp>
         <p:nvSpPr>
-          <p:cNvPr id="49" name="WC"/>
+          <p:cNvPr id="54" name="WC"/>
           <p:cNvSpPr/>
           <p:nvPr/>
         </p:nvSpPr>
         <p:spPr>
           <a:xfrm>
-            <a:off x="4222699" y="1446581"/>
-            <a:ext cx="1124712" cy="637337"/>
+            <a:off x="3953866" y="1441094"/>
+            <a:ext cx="1389888" cy="590702"/>
           </a:xfrm>
           <a:prstGeom prst="rect">
             <a:avLst/>
@@ -18336,14 +18658,14 @@
       </p:sp>
       <p:sp>
         <p:nvSpPr>
-          <p:cNvPr id="50" name="Text 47"/>
+          <p:cNvPr id="55" name="Text 52"/>
           <p:cNvSpPr txBox="1"/>
           <p:nvPr/>
         </p:nvSpPr>
         <p:spPr>
           <a:xfrm>
-            <a:off x="4222699" y="1446581"/>
-            <a:ext cx="1124712" cy="637337"/>
+            <a:off x="3953866" y="1441094"/>
+            <a:ext cx="1389888" cy="590702"/>
           </a:xfrm>
           <a:prstGeom prst="rect">
             <a:avLst/>
@@ -18624,7 +18946,7 @@
                           <a:ea typeface="Arial" pitchFamily="34" charset="-122"/>
                           <a:cs typeface="Arial" pitchFamily="34" charset="-120"/>
                         </a:rPr>
-                        <a:t>Gastraum mit Tischen und Gängen</a:t>
+                        <a:t>Gastraum (Tische, Fenster, Gänge)</a:t>
                       </a:r>
                       <a:endParaRPr lang="en-US" sz="1250" dirty="0">
                         <a:latin typeface="Arial" charset="0"/>
@@ -18689,7 +19011,7 @@
                           <a:ea typeface="Arial" pitchFamily="34" charset="-122"/>
                           <a:cs typeface="Arial" pitchFamily="34" charset="-120"/>
                         </a:rPr>
-                        <a:t>ca. 280 m²</a:t>
+                        <a:t>ca. 304 m²</a:t>
                       </a:r>
                       <a:endParaRPr lang="en-US" sz="1250" dirty="0">
                         <a:latin typeface="Arial" charset="0"/>
@@ -18754,7 +19076,7 @@
                           <a:ea typeface="Arial" pitchFamily="34" charset="-122"/>
                           <a:cs typeface="Arial" pitchFamily="34" charset="-120"/>
                         </a:rPr>
-                        <a:t>ca. 80</a:t>
+                        <a:t>116</a:t>
                       </a:r>
                       <a:endParaRPr lang="en-US" sz="1250" dirty="0">
                         <a:latin typeface="Arial" charset="0"/>
@@ -18886,7 +19208,7 @@
                           <a:ea typeface="Arial" pitchFamily="34" charset="-122"/>
                           <a:cs typeface="Arial" pitchFamily="34" charset="-120"/>
                         </a:rPr>
-                        <a:t>ca. 35 m²</a:t>
+                        <a:t>im Gastraum</a:t>
                       </a:r>
                       <a:endParaRPr lang="en-US" sz="1250" dirty="0">
                         <a:latin typeface="Arial" charset="0"/>
@@ -18951,7 +19273,7 @@
                           <a:ea typeface="Arial" pitchFamily="34" charset="-122"/>
                           <a:cs typeface="Arial" pitchFamily="34" charset="-120"/>
                         </a:rPr>
-                        <a:t>14</a:t>
+                        <a:t>20</a:t>
                       </a:r>
                       <a:endParaRPr lang="en-US" sz="1250" dirty="0">
                         <a:latin typeface="Arial" charset="0"/>
@@ -19018,7 +19340,7 @@
                           <a:ea typeface="Arial" pitchFamily="34" charset="-122"/>
                           <a:cs typeface="Arial" pitchFamily="34" charset="-120"/>
                         </a:rPr>
-                        <a:t>Fenstertische (2er)</a:t>
+                        <a:t>Bar und Theken-Zone</a:t>
                       </a:r>
                       <a:endParaRPr lang="en-US" sz="1250" dirty="0">
                         <a:latin typeface="Arial" charset="0"/>
@@ -19083,7 +19405,7 @@
                           <a:ea typeface="Arial" pitchFamily="34" charset="-122"/>
                           <a:cs typeface="Arial" pitchFamily="34" charset="-120"/>
                         </a:rPr>
-                        <a:t>im Gastraum</a:t>
+                        <a:t>ca. 25 m²</a:t>
                       </a:r>
                       <a:endParaRPr lang="en-US" sz="1250" dirty="0">
                         <a:latin typeface="Arial" charset="0"/>
@@ -19148,204 +19470,7 @@
                           <a:ea typeface="Arial" pitchFamily="34" charset="-122"/>
                           <a:cs typeface="Arial" pitchFamily="34" charset="-120"/>
                         </a:rPr>
-                        <a:t>16</a:t>
-                      </a:r>
-                      <a:endParaRPr lang="en-US" sz="1250" dirty="0">
-                        <a:latin typeface="Arial" charset="0"/>
-                        <a:ea typeface="Arial" charset="0"/>
-                        <a:cs typeface="Arial" charset="0"/>
-                      </a:endParaRPr>
-                    </a:p>
-                  </a:txBody>
-                  <a:tcPr marL="91440" marR="91440" marT="45720" marB="45720">
-                    <a:lnL w="12700" cap="flat" cmpd="sng" algn="ctr">
-                      <a:solidFill>
-                        <a:srgbClr val="FFFFFF"/>
-                      </a:solidFill>
-                      <a:prstDash val="solid"/>
-                      <a:round/>
-                      <a:headEnd type="none" w="med" len="med"/>
-                      <a:tailEnd type="none" w="med" len="med"/>
-                    </a:lnL>
-                    <a:lnR w="12700" cap="flat" cmpd="sng" algn="ctr">
-                      <a:solidFill>
-                        <a:srgbClr val="FFFFFF"/>
-                      </a:solidFill>
-                      <a:prstDash val="solid"/>
-                      <a:round/>
-                      <a:headEnd type="none" w="med" len="med"/>
-                      <a:tailEnd type="none" w="med" len="med"/>
-                    </a:lnR>
-                    <a:lnT w="12700" cap="flat" cmpd="sng" algn="ctr">
-                      <a:solidFill>
-                        <a:srgbClr val="FFFFFF"/>
-                      </a:solidFill>
-                      <a:prstDash val="solid"/>
-                      <a:round/>
-                      <a:headEnd type="none" w="med" len="med"/>
-                      <a:tailEnd type="none" w="med" len="med"/>
-                    </a:lnT>
-                    <a:lnB w="12700" cap="flat" cmpd="sng" algn="ctr">
-                      <a:solidFill>
-                        <a:srgbClr val="FFFFFF"/>
-                      </a:solidFill>
-                      <a:prstDash val="solid"/>
-                      <a:round/>
-                      <a:headEnd type="none" w="med" len="med"/>
-                      <a:tailEnd type="none" w="med" len="med"/>
-                    </a:lnB>
-                  </a:tcPr>
-                </a:tc>
-              </a:tr>
-              <a:tr h="402336">
-                <a:tc>
-                  <a:txBody>
-                    <a:bodyPr/>
-                    <a:lstStyle/>
-                    <a:p>
-                      <a:pPr indent="0" marL="0">
-                        <a:buNone/>
-                      </a:pPr>
-                      <a:r>
-                        <a:rPr lang="en-US" sz="1250" dirty="0">
-                          <a:solidFill>
-                            <a:srgbClr val="000000"/>
-                          </a:solidFill>
-                          <a:latin typeface="Arial" pitchFamily="34" charset="0"/>
-                          <a:ea typeface="Arial" pitchFamily="34" charset="-122"/>
-                          <a:cs typeface="Arial" pitchFamily="34" charset="-120"/>
-                        </a:rPr>
-                        <a:t>Bar und Backbar</a:t>
-                      </a:r>
-                      <a:endParaRPr lang="en-US" sz="1250" dirty="0">
-                        <a:latin typeface="Arial" charset="0"/>
-                        <a:ea typeface="Arial" charset="0"/>
-                        <a:cs typeface="Arial" charset="0"/>
-                      </a:endParaRPr>
-                    </a:p>
-                  </a:txBody>
-                  <a:tcPr marL="91440" marR="91440" marT="45720" marB="45720">
-                    <a:lnL w="12700" cap="flat" cmpd="sng" algn="ctr">
-                      <a:solidFill>
-                        <a:srgbClr val="FFFFFF"/>
-                      </a:solidFill>
-                      <a:prstDash val="solid"/>
-                      <a:round/>
-                      <a:headEnd type="none" w="med" len="med"/>
-                      <a:tailEnd type="none" w="med" len="med"/>
-                    </a:lnL>
-                    <a:lnR w="12700" cap="flat" cmpd="sng" algn="ctr">
-                      <a:solidFill>
-                        <a:srgbClr val="FFFFFF"/>
-                      </a:solidFill>
-                      <a:prstDash val="solid"/>
-                      <a:round/>
-                      <a:headEnd type="none" w="med" len="med"/>
-                      <a:tailEnd type="none" w="med" len="med"/>
-                    </a:lnR>
-                    <a:lnT w="12700" cap="flat" cmpd="sng" algn="ctr">
-                      <a:solidFill>
-                        <a:srgbClr val="FFFFFF"/>
-                      </a:solidFill>
-                      <a:prstDash val="solid"/>
-                      <a:round/>
-                      <a:headEnd type="none" w="med" len="med"/>
-                      <a:tailEnd type="none" w="med" len="med"/>
-                    </a:lnT>
-                    <a:lnB w="12700" cap="flat" cmpd="sng" algn="ctr">
-                      <a:solidFill>
-                        <a:srgbClr val="FFFFFF"/>
-                      </a:solidFill>
-                      <a:prstDash val="solid"/>
-                      <a:round/>
-                      <a:headEnd type="none" w="med" len="med"/>
-                      <a:tailEnd type="none" w="med" len="med"/>
-                    </a:lnB>
-                  </a:tcPr>
-                </a:tc>
-                <a:tc>
-                  <a:txBody>
-                    <a:bodyPr/>
-                    <a:lstStyle/>
-                    <a:p>
-                      <a:pPr algn="r" indent="0" marL="0">
-                        <a:buNone/>
-                      </a:pPr>
-                      <a:r>
-                        <a:rPr lang="en-US" sz="1250" dirty="0">
-                          <a:solidFill>
-                            <a:srgbClr val="000000"/>
-                          </a:solidFill>
-                          <a:latin typeface="Arial" pitchFamily="34" charset="0"/>
-                          <a:ea typeface="Arial" pitchFamily="34" charset="-122"/>
-                          <a:cs typeface="Arial" pitchFamily="34" charset="-120"/>
-                        </a:rPr>
-                        <a:t>ca. 30 m²</a:t>
-                      </a:r>
-                      <a:endParaRPr lang="en-US" sz="1250" dirty="0">
-                        <a:latin typeface="Arial" charset="0"/>
-                        <a:ea typeface="Arial" charset="0"/>
-                        <a:cs typeface="Arial" charset="0"/>
-                      </a:endParaRPr>
-                    </a:p>
-                  </a:txBody>
-                  <a:tcPr marL="91440" marR="91440" marT="45720" marB="45720">
-                    <a:lnL w="12700" cap="flat" cmpd="sng" algn="ctr">
-                      <a:solidFill>
-                        <a:srgbClr val="FFFFFF"/>
-                      </a:solidFill>
-                      <a:prstDash val="solid"/>
-                      <a:round/>
-                      <a:headEnd type="none" w="med" len="med"/>
-                      <a:tailEnd type="none" w="med" len="med"/>
-                    </a:lnL>
-                    <a:lnR w="12700" cap="flat" cmpd="sng" algn="ctr">
-                      <a:solidFill>
-                        <a:srgbClr val="FFFFFF"/>
-                      </a:solidFill>
-                      <a:prstDash val="solid"/>
-                      <a:round/>
-                      <a:headEnd type="none" w="med" len="med"/>
-                      <a:tailEnd type="none" w="med" len="med"/>
-                    </a:lnR>
-                    <a:lnT w="12700" cap="flat" cmpd="sng" algn="ctr">
-                      <a:solidFill>
-                        <a:srgbClr val="FFFFFF"/>
-                      </a:solidFill>
-                      <a:prstDash val="solid"/>
-                      <a:round/>
-                      <a:headEnd type="none" w="med" len="med"/>
-                      <a:tailEnd type="none" w="med" len="med"/>
-                    </a:lnT>
-                    <a:lnB w="12700" cap="flat" cmpd="sng" algn="ctr">
-                      <a:solidFill>
-                        <a:srgbClr val="FFFFFF"/>
-                      </a:solidFill>
-                      <a:prstDash val="solid"/>
-                      <a:round/>
-                      <a:headEnd type="none" w="med" len="med"/>
-                      <a:tailEnd type="none" w="med" len="med"/>
-                    </a:lnB>
-                  </a:tcPr>
-                </a:tc>
-                <a:tc>
-                  <a:txBody>
-                    <a:bodyPr/>
-                    <a:lstStyle/>
-                    <a:p>
-                      <a:pPr algn="r" indent="0" marL="0">
-                        <a:buNone/>
-                      </a:pPr>
-                      <a:r>
-                        <a:rPr lang="en-US" sz="1250" dirty="0">
-                          <a:solidFill>
-                            <a:srgbClr val="000000"/>
-                          </a:solidFill>
-                          <a:latin typeface="Arial" pitchFamily="34" charset="0"/>
-                          <a:ea typeface="Arial" pitchFamily="34" charset="-122"/>
-                          <a:cs typeface="Arial" pitchFamily="34" charset="-120"/>
-                        </a:rPr>
-                        <a:t>10</a:t>
+                        <a:t>12</a:t>
                       </a:r>
                       <a:endParaRPr lang="en-US" sz="1250" dirty="0">
                         <a:latin typeface="Arial" charset="0"/>
@@ -19542,7 +19667,7 @@
                           <a:ea typeface="Arial" pitchFamily="34" charset="-122"/>
                           <a:cs typeface="Arial" pitchFamily="34" charset="-120"/>
                         </a:rPr>
-                        <a:t>8</a:t>
+                        <a:t>12</a:t>
                       </a:r>
                       <a:endParaRPr lang="en-US" sz="1250" dirty="0">
                         <a:latin typeface="Arial" charset="0"/>
@@ -19674,7 +19799,7 @@
                           <a:ea typeface="Arial" pitchFamily="34" charset="-122"/>
                           <a:cs typeface="Arial" pitchFamily="34" charset="-120"/>
                         </a:rPr>
-                        <a:t>ca. 34 m²</a:t>
+                        <a:t>ca. 42 m²</a:t>
                       </a:r>
                       <a:endParaRPr lang="en-US" sz="1250" dirty="0">
                         <a:latin typeface="Arial" charset="0"/>
@@ -19739,7 +19864,7 @@
                           <a:ea typeface="Arial" pitchFamily="34" charset="-122"/>
                           <a:cs typeface="Arial" pitchFamily="34" charset="-120"/>
                         </a:rPr>
-                        <a:t>20</a:t>
+                        <a:t>30</a:t>
                       </a:r>
                       <a:endParaRPr lang="en-US" sz="1250" dirty="0">
                         <a:latin typeface="Arial" charset="0"/>
@@ -19871,7 +19996,7 @@
                           <a:ea typeface="Arial" pitchFamily="34" charset="-122"/>
                           <a:cs typeface="Arial" pitchFamily="34" charset="-120"/>
                         </a:rPr>
-                        <a:t>ca. 80 m²</a:t>
+                        <a:t>ca. 139 m²</a:t>
                       </a:r>
                       <a:endParaRPr lang="en-US" sz="1250" dirty="0">
                         <a:latin typeface="Arial" charset="0"/>
@@ -20068,7 +20193,7 @@
                           <a:ea typeface="Arial" pitchFamily="34" charset="-122"/>
                           <a:cs typeface="Arial" pitchFamily="34" charset="-120"/>
                         </a:rPr>
-                        <a:t>ca. 460 m²</a:t>
+                        <a:t>ca. 510 m²</a:t>
                       </a:r>
                       <a:endParaRPr lang="en-US" sz="1250" dirty="0">
                         <a:latin typeface="Arial" charset="0"/>
@@ -20133,7 +20258,7 @@
                           <a:ea typeface="Arial" pitchFamily="34" charset="-122"/>
                           <a:cs typeface="Arial" pitchFamily="34" charset="-120"/>
                         </a:rPr>
-                        <a:t>ca. 150</a:t>
+                        <a:t>ca. 190</a:t>
                       </a:r>
                       <a:endParaRPr lang="en-US" sz="1250" dirty="0">
                         <a:latin typeface="Arial" charset="0"/>
@@ -20188,7 +20313,7 @@
       </p:graphicFrame>
       <p:sp>
         <p:nvSpPr>
-          <p:cNvPr id="52" name="Text 48"/>
+          <p:cNvPr id="57" name="Text 53"/>
           <p:cNvSpPr txBox="1"/>
           <p:nvPr/>
         </p:nvSpPr>
@@ -21620,7 +21745,7 @@
                 <a:ea typeface="Arial" pitchFamily="34" charset="-122"/>
                 <a:cs typeface="Arial" pitchFamily="34" charset="-120"/>
               </a:rPr>
-              <a:t>Séparée für Feiern mit 20 Plätzen, hinter Stahl und Glas</a:t>
+              <a:t>Séparée für Feiern mit 30 Plätzen, hinter Stahl und Glas</a:t>
             </a:r>
             <a:endParaRPr lang="en-US" sz="1200" dirty="0"/>
           </a:p>
@@ -21858,7 +21983,7 @@
                 <a:ea typeface="Arial" pitchFamily="34" charset="-122"/>
                 <a:cs typeface="Arial" pitchFamily="34" charset="-120"/>
               </a:rPr>
-              <a:t>ca. 40 Plätze auf Holzdeck unter dunklem Stahl-Vordach, Heizstrahler und Windschutz verlängern die Saison.</a:t>
+              <a:t>ca. 60 Plätze auf Holzdeck unter dunklem Stahl-Vordach, Heizstrahler und Windschutz verlängern die Saison.</a:t>
             </a:r>
             <a:endParaRPr lang="en-US" sz="1400" dirty="0"/>
           </a:p>

--- a/praesentation/Neue-Mitte-Werlte_Baufeld3_Gastro-Konzept.pptx
+++ b/praesentation/Neue-Mitte-Werlte_Baufeld3_Gastro-Konzept.pptx
@@ -8646,7 +8646,7 @@
                 <a:ea typeface="Arial" pitchFamily="34" charset="-122"/>
                 <a:cs typeface="Arial" pitchFamily="34" charset="-120"/>
               </a:rPr>
-              <a:t>Mit 65.000 € Umsatz bleiben im ganzen Haus +9.610 € pro Monat nach Zinsen und Tilgung (KfW-Kredite und Hausbank, ohne Lohn). Die Gastro braucht für Break-even im Haus ca. 33.500 € Umsatz.</a:t>
+              <a:t>Mit 65.000 € Umsatz bleiben im ganzen Haus +9.204 € pro Monat nach Zinsen und Tilgung (KfW-Kredite und Hausbank, ohne Lohn). Die Gastro braucht für Break-even im Haus ca. 34.800 € Umsatz.</a:t>
             </a:r>
             <a:endParaRPr lang="en-US" sz="1300" dirty="0"/>
           </a:p>

--- a/praesentation/Neue-Mitte-Werlte_Baufeld3_Gastro-Konzept.pptx
+++ b/praesentation/Neue-Mitte-Werlte_Baufeld3_Gastro-Konzept.pptx
@@ -8646,7 +8646,7 @@
                 <a:ea typeface="Arial" pitchFamily="34" charset="-122"/>
                 <a:cs typeface="Arial" pitchFamily="34" charset="-120"/>
               </a:rPr>
-              <a:t>Mit 65.000 € Umsatz bleiben im ganzen Haus +9.204 € pro Monat nach Zinsen und Tilgung (KfW-Kredite und Hausbank, ohne Lohn). Die Gastro braucht für Break-even im Haus ca. 34.800 € Umsatz.</a:t>
+              <a:t>Mit 65.000 € Umsatz bleiben im ganzen Haus +9.610 € pro Monat nach Zinsen und Tilgung (KfW-Kredite und Hausbank, ohne Lohn). Die Gastro braucht für Break-even im Haus ca. 33.500 € Umsatz.</a:t>
             </a:r>
             <a:endParaRPr lang="en-US" sz="1300" dirty="0"/>
           </a:p>

--- a/praesentation/Neue-Mitte-Werlte_Baufeld3_Gastro-Konzept.pptx
+++ b/praesentation/Neue-Mitte-Werlte_Baufeld3_Gastro-Konzept.pptx
@@ -20,9 +20,10 @@
     <p:sldId id="268" r:id="rId14"/>
     <p:sldId id="269" r:id="rId15"/>
     <p:sldId id="270" r:id="rId16"/>
+    <p:sldId id="271" r:id="rId17"/>
   </p:sldIdLst>
   <p:notesMasterIdLst>
-    <p:notesMasterId r:id="rId17"/>
+    <p:notesMasterId r:id="rId18"/>
   </p:notesMasterIdLst>
   <p:sldSz cx="12192000" cy="6858000"/>
   <p:notesSz cx="6858000" cy="12192000"/>
@@ -604,7 +605,7 @@
           <a:p>
             <a:r>
               <a:rPr lang="en-US" dirty="0"/>
-              <a:t>Plausibilitätsrechnung mit Annahmen für Gäste und Bon. Die Gastro hat ca. 190 Plätze (ca. 4.100 € Umsatz je Sitzplatz und Jahr), die Annahme ist vorsichtig.</a:t>
+              <a:t>Terrasse mit Vordach zum Marktplatz. Nutzungszeiten und Lärmschutz mit der Stadt abstimmen.</a:t>
             </a:r>
             <a:endParaRPr lang="en-US" dirty="0"/>
           </a:p>
@@ -692,7 +693,7 @@
           <a:p>
             <a:r>
               <a:rPr lang="en-US" dirty="0"/>
-              <a:t>Personal ca. 30 % vom Umsatz (Branchen-Richtwert). Der Lohn des Bauherrn ist nicht gerechnet. Beträge sind Arbeitgeber-Brutto, Annahmen.</a:t>
+              <a:t>Plausibilitätsrechnung mit Annahmen für Gäste und Bon. Ca. 6.000 € Umsatz je Sitzplatz und Jahr bei 190 Plätzen, Branchen-Median Österreich ca. 12.000 €.</a:t>
             </a:r>
             <a:endParaRPr lang="en-US" dirty="0"/>
           </a:p>
@@ -780,7 +781,7 @@
           <a:p>
             <a:r>
               <a:rPr lang="en-US" dirty="0"/>
-              <a:t>Marge vor Pacht 30,5 % vom Umsatz (Branchen-Richtwert, nicht aus Werlte). Bei sehr niedrigem Umsatz drücken die Fixkosten stärker, die Rechnung ist dort zu günstig.</a:t>
+              <a:t>Personal ca. 30 % vom Umsatz (Branchen-Richtwert). Der Lohn des Bauherrn ist nicht gerechnet. Beträge sind Arbeitgeber-Brutto, Annahmen.</a:t>
             </a:r>
             <a:endParaRPr lang="en-US" dirty="0"/>
           </a:p>
@@ -868,7 +869,7 @@
           <a:p>
             <a:r>
               <a:rPr lang="en-US" dirty="0"/>
-              <a:t>Hochgerechnet vom Budget des Bauherrn (150.000 € für 150 Plätze): 1.000 € je Platz bei 190 Plätzen. Angebote von Küchen- und Lüftungsbauern müssen es bestätigen.</a:t>
+              <a:t>Marge vor Pacht 30,5 % vom Umsatz (Branchen-Richtwert, nicht aus Werlte). Bei sehr niedrigem Umsatz drücken die Fixkosten stärker, die Rechnung ist dort zu günstig.</a:t>
             </a:r>
             <a:endParaRPr lang="en-US" dirty="0"/>
           </a:p>
@@ -956,7 +957,7 @@
           <a:p>
             <a:r>
               <a:rPr lang="en-US" dirty="0"/>
-              <a:t>Hinweise sind keine Rechtsberatung. Bitte mit Bauamt und Ordnungsamt klären.</a:t>
+              <a:t>Hochgerechnet vom Budget des Bauherrn (150.000 € für 150 Plätze): 1.000 € je Platz bei 190 Plätzen. Angebote von Küchen- und Lüftungsbauern müssen es bestätigen.</a:t>
             </a:r>
             <a:endParaRPr lang="en-US" dirty="0"/>
           </a:p>
@@ -1044,7 +1045,7 @@
           <a:p>
             <a:r>
               <a:rPr lang="en-US" dirty="0"/>
-              <a:t>Zeitplan passend zum Baubeginn Mitte 2027 und zur Eröffnung Ende 2028.</a:t>
+              <a:t>Hinweise sind keine Rechtsberatung. Bitte mit Bauamt und Ordnungsamt klären.</a:t>
             </a:r>
             <a:endParaRPr lang="en-US" dirty="0"/>
           </a:p>
@@ -1068,6 +1069,94 @@
             <a:fld id="{F7021451-1387-4CA6-816F-3879F97B5CBC}" type="slidenum">
               <a:rPr lang="en-US"/>
               <a:t>15</a:t>
+            </a:fld>
+            <a:endParaRPr lang="en-US"/>
+          </a:p>
+        </p:txBody>
+      </p:sp>
+    </p:spTree>
+    <p:extLst>
+      <p:ext uri="{BB962C8B-B14F-4D97-AF65-F5344CB8AC3E}">
+        <p14:creationId xmlns:p14="http://schemas.microsoft.com/office/powerpoint/2010/main" val="1024086991"/>
+      </p:ext>
+    </p:extLst>
+  </p:cSld>
+  <p:clrMapOvr>
+    <a:masterClrMapping/>
+  </p:clrMapOvr>
+</p:notes>
+</file>
+
+<file path=ppt/notesSlides/notesSlide16.xml><?xml version="1.0" encoding="utf-8"?>
+<p:notes xmlns:a="http://schemas.openxmlformats.org/drawingml/2006/main" xmlns:r="http://schemas.openxmlformats.org/officeDocument/2006/relationships" xmlns:p="http://schemas.openxmlformats.org/presentationml/2006/main">
+  <p:cSld>
+    <p:spTree>
+      <p:nvGrpSpPr>
+        <p:cNvPr id="1" name=""/>
+        <p:cNvGrpSpPr/>
+        <p:nvPr/>
+      </p:nvGrpSpPr>
+      <p:grpSpPr>
+        <a:xfrm>
+          <a:off x="0" y="0"/>
+          <a:ext cx="0" cy="0"/>
+          <a:chOff x="0" y="0"/>
+          <a:chExt cx="0" cy="0"/>
+        </a:xfrm>
+      </p:grpSpPr>
+      <p:sp>
+        <p:nvSpPr>
+          <p:cNvPr id="2" name="Slide Image Placeholder 1"/>
+          <p:cNvSpPr>
+            <a:spLocks noGrp="1" noRot="1" noChangeAspect="1"/>
+          </p:cNvSpPr>
+          <p:nvPr>
+            <p:ph type="sldImg"/>
+          </p:nvPr>
+        </p:nvSpPr>
+        <p:spPr/>
+      </p:sp>
+      <p:sp>
+        <p:nvSpPr>
+          <p:cNvPr id="3" name="Notes Placeholder 2"/>
+          <p:cNvSpPr>
+            <a:spLocks noGrp="1"/>
+          </p:cNvSpPr>
+          <p:nvPr>
+            <p:ph type="body" idx="1"/>
+          </p:nvPr>
+        </p:nvSpPr>
+        <p:spPr/>
+        <p:txBody>
+          <a:bodyPr/>
+          <a:lstStyle/>
+          <a:p>
+            <a:r>
+              <a:rPr lang="en-US" dirty="0"/>
+              <a:t>Zeitplan passend zum Baubeginn Mitte 2027 und zur Eröffnung Ende 2028.</a:t>
+            </a:r>
+            <a:endParaRPr lang="en-US" dirty="0"/>
+          </a:p>
+        </p:txBody>
+      </p:sp>
+      <p:sp>
+        <p:nvSpPr>
+          <p:cNvPr id="4" name="Slide Number Placeholder 3"/>
+          <p:cNvSpPr>
+            <a:spLocks noGrp="1"/>
+          </p:cNvSpPr>
+          <p:nvPr>
+            <p:ph type="sldNum" sz="quarter" idx="10"/>
+          </p:nvPr>
+        </p:nvSpPr>
+        <p:spPr/>
+        <p:txBody>
+          <a:bodyPr/>
+          <a:lstStyle/>
+          <a:p>
+            <a:fld id="{F7021451-1387-4CA6-816F-3879F97B5CBC}" type="slidenum">
+              <a:rPr lang="en-US"/>
+              <a:t>16</a:t>
             </a:fld>
             <a:endParaRPr lang="en-US"/>
           </a:p>
@@ -1308,7 +1397,7 @@
           <a:p>
             <a:r>
               <a:rPr lang="en-US" dirty="0"/>
-              <a:t>Vorschlag für Öffnungszeiten, Ruhetag Montag. Küche warm bis ca. 21:30 Uhr.</a:t>
+              <a:t>Vorschlag für Öffnungszeiten, Ruhetag Montag. Hauptfokus ist der Abend. Küche warm bis ca. 21:30 Uhr.</a:t>
             </a:r>
             <a:endParaRPr lang="en-US" dirty="0"/>
           </a:p>
@@ -1484,7 +1573,7 @@
           <a:p>
             <a:r>
               <a:rPr lang="en-US" dirty="0"/>
-              <a:t>Schematische Skizze, nicht maßstäblich genau. Aufteilung wird mit Gastro-Fachplaner und Architekt verfeinert. Süden liegt unten.</a:t>
+              <a:t>Konzeptideen und Zahlen sind Annahmen, keine Betreiberplanung. Der Abend bringt den größten Teil des Umsatzes.</a:t>
             </a:r>
             <a:endParaRPr lang="en-US" dirty="0"/>
           </a:p>
@@ -1572,7 +1661,7 @@
           <a:p>
             <a:r>
               <a:rPr lang="en-US" dirty="0"/>
-              <a:t>Stimmung nach dem Referenzbild des Bauherrn: olivgrüne Wände mit Vertäfelung, Cognac-Samt, schwarzer Stahl und warmes Licht.</a:t>
+              <a:t>Schematische Skizze, nicht maßstäblich genau. Aufteilung wird mit Gastro-Fachplaner und Architekt verfeinert. Süden liegt unten.</a:t>
             </a:r>
             <a:endParaRPr lang="en-US" dirty="0"/>
           </a:p>
@@ -1660,7 +1749,7 @@
           <a:p>
             <a:r>
               <a:rPr lang="en-US" dirty="0"/>
-              <a:t>KI-Visualisierungen zur Orientierung, keine Planung.</a:t>
+              <a:t>Stimmung nach dem Referenzbild des Bauherrn: olivgrüne Wände mit Vertäfelung, Cognac-Samt, schwarzer Stahl und warmes Licht.</a:t>
             </a:r>
             <a:endParaRPr lang="en-US" dirty="0"/>
           </a:p>
@@ -1748,7 +1837,7 @@
           <a:p>
             <a:r>
               <a:rPr lang="en-US" dirty="0"/>
-              <a:t>Terrasse mit Vordach zum Marktplatz. Nutzungszeiten und Lärmschutz mit der Stadt abstimmen.</a:t>
+              <a:t>KI-Visualisierungen zur Orientierung, keine Planung.</a:t>
             </a:r>
             <a:endParaRPr lang="en-US" dirty="0"/>
           </a:p>
@@ -2611,7 +2700,287 @@
                 <a:ea typeface="Georgia" pitchFamily="34" charset="-122"/>
                 <a:cs typeface="Georgia" pitchFamily="34" charset="-120"/>
               </a:rPr>
-              <a:t>Wie 65.000 € Umsatz im Monat zusammenkommen</a:t>
+              <a:t>Terrasse und Außenwirkung</a:t>
+            </a:r>
+            <a:endParaRPr lang="en-US" sz="2700" dirty="0"/>
+          </a:p>
+        </p:txBody>
+      </p:sp>
+      <p:sp>
+        <p:nvSpPr>
+          <p:cNvPr id="3" name="Zielgruppe"/>
+          <p:cNvSpPr txBox="1"/>
+          <p:nvPr/>
+        </p:nvSpPr>
+        <p:spPr>
+          <a:xfrm>
+            <a:off x="548640" y="6446520"/>
+            <a:ext cx="5486400" cy="274320"/>
+          </a:xfrm>
+          <a:prstGeom prst="rect">
+            <a:avLst/>
+          </a:prstGeom>
+          <a:noFill/>
+          <a:ln/>
+        </p:spPr>
+        <p:txBody>
+          <a:bodyPr wrap="square" lIns="0" tIns="0" rIns="0" bIns="0" rtlCol="0" anchor="ctr"/>
+          <a:lstStyle/>
+          <a:p>
+            <a:pPr indent="0" marL="0">
+              <a:buNone/>
+            </a:pPr>
+            <a:r>
+              <a:rPr lang="en-US" sz="1000" dirty="0">
+                <a:solidFill>
+                  <a:schemeClr val="accent4"/>
+                </a:solidFill>
+              </a:rPr>
+              <a:t>Für Stadt und Bank</a:t>
+            </a:r>
+            <a:endParaRPr lang="en-US" sz="1000" dirty="0"/>
+          </a:p>
+        </p:txBody>
+      </p:sp>
+      <p:pic>
+        <p:nvPicPr>
+          <p:cNvPr id="5" name="Image 0" descr="Terrasse am Abend">    </p:cNvPr>
+          <p:cNvPicPr>
+            <a:picLocks noChangeAspect="1"/>
+          </p:cNvPicPr>
+          <p:nvPr/>
+        </p:nvPicPr>
+        <p:blipFill>
+          <a:blip r:embed="rId1"/>
+          <a:stretch>
+            <a:fillRect/>
+          </a:stretch>
+        </p:blipFill>
+        <p:spPr>
+          <a:xfrm>
+            <a:off x="548640" y="1371600"/>
+            <a:ext cx="5486400" cy="3086100"/>
+          </a:xfrm>
+          <a:prstGeom prst="rect">
+            <a:avLst/>
+          </a:prstGeom>
+        </p:spPr>
+      </p:pic>
+      <p:pic>
+        <p:nvPicPr>
+          <p:cNvPr id="6" name="Image 1" descr="Haus am Abend">    </p:cNvPr>
+          <p:cNvPicPr>
+            <a:picLocks noChangeAspect="1"/>
+          </p:cNvPicPr>
+          <p:nvPr/>
+        </p:nvPicPr>
+        <p:blipFill>
+          <a:blip r:embed="rId2"/>
+          <a:stretch>
+            <a:fillRect/>
+          </a:stretch>
+        </p:blipFill>
+        <p:spPr>
+          <a:xfrm>
+            <a:off x="6309360" y="1371600"/>
+            <a:ext cx="5486400" cy="3086100"/>
+          </a:xfrm>
+          <a:prstGeom prst="rect">
+            <a:avLst/>
+          </a:prstGeom>
+        </p:spPr>
+      </p:pic>
+      <p:sp>
+        <p:nvSpPr>
+          <p:cNvPr id="7" name="Text 2"/>
+          <p:cNvSpPr txBox="1"/>
+          <p:nvPr/>
+        </p:nvSpPr>
+        <p:spPr>
+          <a:xfrm>
+            <a:off x="548640" y="4640580"/>
+            <a:ext cx="11091672" cy="1280160"/>
+          </a:xfrm>
+          <a:prstGeom prst="rect">
+            <a:avLst/>
+          </a:prstGeom>
+          <a:noFill/>
+          <a:ln/>
+        </p:spPr>
+        <p:txBody>
+          <a:bodyPr wrap="square" lIns="0" tIns="0" rIns="0" bIns="0" rtlCol="0" anchor="t"/>
+          <a:lstStyle/>
+          <a:p>
+            <a:pPr marL="342900" indent="-342900">
+              <a:spcAft>
+                <a:spcPts val="500"/>
+              </a:spcAft>
+              <a:buSzPct val="100000"/>
+              <a:buChar char="•"/>
+            </a:pPr>
+            <a:r>
+              <a:rPr lang="en-US" sz="1400" dirty="0">
+                <a:solidFill>
+                  <a:schemeClr val="tx1"/>
+                </a:solidFill>
+                <a:latin typeface="Arial" pitchFamily="34" charset="0"/>
+                <a:ea typeface="Arial" pitchFamily="34" charset="-122"/>
+                <a:cs typeface="Arial" pitchFamily="34" charset="-120"/>
+              </a:rPr>
+              <a:t>ca. 60 Plätze auf Holzdeck unter dunklem Stahl-Vordach, Heizstrahler und Windschutz verlängern die Saison.</a:t>
+            </a:r>
+            <a:endParaRPr lang="en-US" sz="1400" dirty="0"/>
+          </a:p>
+          <a:p>
+            <a:pPr marL="342900" indent="-342900">
+              <a:spcAft>
+                <a:spcPts val="500"/>
+              </a:spcAft>
+              <a:buSzPct val="100000"/>
+              <a:buChar char="•"/>
+            </a:pPr>
+            <a:r>
+              <a:rPr lang="en-US" sz="1400" dirty="0">
+                <a:solidFill>
+                  <a:schemeClr val="tx1"/>
+                </a:solidFill>
+                <a:latin typeface="Arial" pitchFamily="34" charset="0"/>
+                <a:ea typeface="Arial" pitchFamily="34" charset="-122"/>
+                <a:cs typeface="Arial" pitchFamily="34" charset="-120"/>
+              </a:rPr>
+              <a:t>Die vollverglaste Fassade über die ganze Länge zeigt das Leben im Haus und zieht Gäste an.</a:t>
+            </a:r>
+            <a:endParaRPr lang="en-US" sz="1400" dirty="0"/>
+          </a:p>
+          <a:p>
+            <a:pPr marL="342900" indent="-342900">
+              <a:spcAft>
+                <a:spcPts val="500"/>
+              </a:spcAft>
+              <a:buSzPct val="100000"/>
+              <a:buChar char="•"/>
+            </a:pPr>
+            <a:r>
+              <a:rPr lang="en-US" sz="1400" dirty="0">
+                <a:solidFill>
+                  <a:schemeClr val="tx1"/>
+                </a:solidFill>
+                <a:latin typeface="Arial" pitchFamily="34" charset="0"/>
+                <a:ea typeface="Arial" pitchFamily="34" charset="-122"/>
+                <a:cs typeface="Arial" pitchFamily="34" charset="-120"/>
+              </a:rPr>
+              <a:t>Die Wohnungen darüber haben eigene Eingänge und Balkone zur anderen Seite, wichtig für Ruhe.</a:t>
+            </a:r>
+            <a:endParaRPr lang="en-US" sz="1400" dirty="0"/>
+          </a:p>
+        </p:txBody>
+      </p:sp>
+      <p:sp>
+        <p:nvSpPr>
+          <p:cNvPr id="25" name="Slide Number Placeholder 0"/>
+          <p:cNvSpPr>
+            <a:spLocks noGrp="1"/>
+          </p:cNvSpPr>
+          <p:nvPr>
+            <p:ph type="sldNum" sz="quarter" idx="4294967295"/>
+          </p:nvPr>
+        </p:nvSpPr>
+        <p:spPr>
+          <a:xfrm>
+            <a:off x="11183112" y="6446520"/>
+            <a:ext cx="548640" cy="274320"/>
+          </a:xfrm>
+          <a:prstGeom prst="rect">
+            <a:avLst/>
+          </a:prstGeom>
+          <a:extLst>
+            <a:ext uri="{C572A759-6A51-4108-AA02-DFA0A04FC94B}">
+              <ma14:wrappingTextBoxFlag xmlns:ma14="http://schemas.microsoft.com/office/mac/drawingml/2011/main" val="0"/>
+            </a:ext>
+          </a:extLst>
+        </p:spPr>
+        <p:txBody>
+          <a:bodyPr/>
+          <a:lstStyle>
+            <a:lvl1pPr>
+              <a:defRPr sz="1000">
+                <a:solidFill>
+                  <a:schemeClr val="accent4"/>
+                </a:solidFill>
+              </a:defRPr>
+            </a:lvl1pPr>
+          </a:lstStyle>
+          <a:p>
+            <a:pPr algn="r"/>
+            <a:fld id="{F7021451-1387-4CA6-816F-3879F97B5CBC}" type="slidenum">
+              <a:rPr b="0" lang="en-US"/>
+              <a:t>10</a:t>
+            </a:fld>
+            <a:endParaRPr lang="en-US"/>
+          </a:p>
+        </p:txBody>
+      </p:sp>
+    </p:spTree>
+  </p:cSld>
+  <p:clrMapOvr>
+    <a:masterClrMapping/>
+  </p:clrMapOvr>
+</p:sld>
+</file>
+
+<file path=ppt/slides/slide11.xml><?xml version="1.0" encoding="utf-8"?>
+<p:sld xmlns:a="http://schemas.openxmlformats.org/drawingml/2006/main" xmlns:r="http://schemas.openxmlformats.org/officeDocument/2006/relationships" xmlns:p="http://schemas.openxmlformats.org/presentationml/2006/main">
+  <p:cSld name="Slide 11">
+    <p:spTree>
+      <p:nvGrpSpPr>
+        <p:cNvPr id="1" name=""/>
+        <p:cNvGrpSpPr/>
+        <p:nvPr/>
+      </p:nvGrpSpPr>
+      <p:grpSpPr>
+        <a:xfrm>
+          <a:off x="0" y="0"/>
+          <a:ext cx="0" cy="0"/>
+          <a:chOff x="0" y="0"/>
+          <a:chExt cx="0" cy="0"/>
+        </a:xfrm>
+      </p:grpSpPr>
+      <p:sp>
+        <p:nvSpPr>
+          <p:cNvPr id="2" name="Text 1"/>
+          <p:cNvSpPr/>
+          <p:nvPr>
+            <p:ph idx="101" type="title" hasCustomPrompt="1"/>
+          </p:nvPr>
+        </p:nvSpPr>
+        <p:spPr>
+          <a:xfrm>
+            <a:off x="548640" y="320040"/>
+            <a:ext cx="11091672" cy="822960"/>
+          </a:xfrm>
+          <a:prstGeom prst="rect">
+            <a:avLst/>
+          </a:prstGeom>
+          <a:noFill/>
+          <a:ln/>
+        </p:spPr>
+        <p:txBody>
+          <a:bodyPr wrap="square" lIns="0" tIns="0" rIns="0" bIns="0" rtlCol="0" anchor="ctr"/>
+          <a:lstStyle/>
+          <a:p>
+            <a:pPr algn="l" indent="0" marL="0">
+              <a:buNone/>
+            </a:pPr>
+            <a:r>
+              <a:rPr lang="en-US" sz="2700" dirty="0">
+                <a:solidFill>
+                  <a:schemeClr val="accent1"/>
+                </a:solidFill>
+                <a:latin typeface="Georgia" pitchFamily="34" charset="0"/>
+                <a:ea typeface="Georgia" pitchFamily="34" charset="-122"/>
+                <a:cs typeface="Georgia" pitchFamily="34" charset="-120"/>
+              </a:rPr>
+              <a:t>Wie 95.635 € Umsatz im Monat zusammenkommen</a:t>
             </a:r>
             <a:endParaRPr lang="en-US" sz="2700" dirty="0"/>
           </a:p>
@@ -2655,7 +3024,7 @@
       </p:sp>
       <p:graphicFrame>
         <p:nvGraphicFramePr>
-          <p:cNvPr id="11" name="Tabelle Umsatzaufbau"/>
+          <p:cNvPr id="12" name="Tabelle Umsatzaufbau"/>
           <p:cNvGraphicFramePr>
             <a:graphicFrameLocks noGrp="1"/>
           </p:cNvGraphicFramePr>
@@ -2676,13 +3045,13 @@
             <a:tbl>
               <a:tblPr/>
               <a:tblGrid>
-                <a:gridCol w="3108960"/>
-                <a:gridCol w="1097280"/>
-                <a:gridCol w="1097280"/>
+                <a:gridCol w="3657600"/>
+                <a:gridCol w="822960"/>
                 <a:gridCol w="914400"/>
+                <a:gridCol w="822960"/>
                 <a:gridCol w="1280160"/>
               </a:tblGrid>
-              <a:tr h="475488">
+              <a:tr h="457200">
                 <a:tc>
                   <a:txBody>
                     <a:bodyPr/>
@@ -3024,7 +3393,7 @@
                   </a:tcPr>
                 </a:tc>
               </a:tr>
-              <a:tr h="475488">
+              <a:tr h="457200">
                 <a:tc>
                   <a:txBody>
                     <a:bodyPr/>
@@ -3042,7 +3411,7 @@
                           <a:ea typeface="Arial" pitchFamily="34" charset="-122"/>
                           <a:cs typeface="Arial" pitchFamily="34" charset="-120"/>
                         </a:rPr>
-                        <a:t>Mittagstisch (Di–Fr)</a:t>
+                        <a:t>Frühstück werktags (Di–Fr 08:00–11:00)</a:t>
                       </a:r>
                       <a:endParaRPr lang="en-US" sz="1250" dirty="0">
                         <a:latin typeface="Arial" charset="0"/>
@@ -3107,7 +3476,661 @@
                           <a:ea typeface="Arial" pitchFamily="34" charset="-122"/>
                           <a:cs typeface="Arial" pitchFamily="34" charset="-120"/>
                         </a:rPr>
-                        <a:t>17,3</a:t>
+                        <a:t>17</a:t>
+                      </a:r>
+                      <a:endParaRPr lang="en-US" sz="1250" dirty="0">
+                        <a:latin typeface="Arial" charset="0"/>
+                        <a:ea typeface="Arial" charset="0"/>
+                        <a:cs typeface="Arial" charset="0"/>
+                      </a:endParaRPr>
+                    </a:p>
+                  </a:txBody>
+                  <a:tcPr marL="91440" marR="91440" marT="45720" marB="45720">
+                    <a:lnL w="12700" cap="flat" cmpd="sng" algn="ctr">
+                      <a:solidFill>
+                        <a:srgbClr val="FFFFFF"/>
+                      </a:solidFill>
+                      <a:prstDash val="solid"/>
+                      <a:round/>
+                      <a:headEnd type="none" w="med" len="med"/>
+                      <a:tailEnd type="none" w="med" len="med"/>
+                    </a:lnL>
+                    <a:lnR w="12700" cap="flat" cmpd="sng" algn="ctr">
+                      <a:solidFill>
+                        <a:srgbClr val="FFFFFF"/>
+                      </a:solidFill>
+                      <a:prstDash val="solid"/>
+                      <a:round/>
+                      <a:headEnd type="none" w="med" len="med"/>
+                      <a:tailEnd type="none" w="med" len="med"/>
+                    </a:lnR>
+                    <a:lnT w="12700" cap="flat" cmpd="sng" algn="ctr">
+                      <a:solidFill>
+                        <a:srgbClr val="FFFFFF"/>
+                      </a:solidFill>
+                      <a:prstDash val="solid"/>
+                      <a:round/>
+                      <a:headEnd type="none" w="med" len="med"/>
+                      <a:tailEnd type="none" w="med" len="med"/>
+                    </a:lnT>
+                    <a:lnB w="12700" cap="flat" cmpd="sng" algn="ctr">
+                      <a:solidFill>
+                        <a:srgbClr val="FFFFFF"/>
+                      </a:solidFill>
+                      <a:prstDash val="solid"/>
+                      <a:round/>
+                      <a:headEnd type="none" w="med" len="med"/>
+                      <a:tailEnd type="none" w="med" len="med"/>
+                    </a:lnB>
+                  </a:tcPr>
+                </a:tc>
+                <a:tc>
+                  <a:txBody>
+                    <a:bodyPr/>
+                    <a:lstStyle/>
+                    <a:p>
+                      <a:pPr algn="r" indent="0" marL="0">
+                        <a:buNone/>
+                      </a:pPr>
+                      <a:r>
+                        <a:rPr lang="en-US" sz="1250" dirty="0">
+                          <a:solidFill>
+                            <a:srgbClr val="000000"/>
+                          </a:solidFill>
+                          <a:latin typeface="Arial" pitchFamily="34" charset="0"/>
+                          <a:ea typeface="Arial" pitchFamily="34" charset="-122"/>
+                          <a:cs typeface="Arial" pitchFamily="34" charset="-120"/>
+                        </a:rPr>
+                        <a:t>25</a:t>
+                      </a:r>
+                      <a:endParaRPr lang="en-US" sz="1250" dirty="0">
+                        <a:latin typeface="Arial" charset="0"/>
+                        <a:ea typeface="Arial" charset="0"/>
+                        <a:cs typeface="Arial" charset="0"/>
+                      </a:endParaRPr>
+                    </a:p>
+                  </a:txBody>
+                  <a:tcPr marL="91440" marR="91440" marT="45720" marB="45720">
+                    <a:lnL w="12700" cap="flat" cmpd="sng" algn="ctr">
+                      <a:solidFill>
+                        <a:srgbClr val="FFFFFF"/>
+                      </a:solidFill>
+                      <a:prstDash val="solid"/>
+                      <a:round/>
+                      <a:headEnd type="none" w="med" len="med"/>
+                      <a:tailEnd type="none" w="med" len="med"/>
+                    </a:lnL>
+                    <a:lnR w="12700" cap="flat" cmpd="sng" algn="ctr">
+                      <a:solidFill>
+                        <a:srgbClr val="FFFFFF"/>
+                      </a:solidFill>
+                      <a:prstDash val="solid"/>
+                      <a:round/>
+                      <a:headEnd type="none" w="med" len="med"/>
+                      <a:tailEnd type="none" w="med" len="med"/>
+                    </a:lnR>
+                    <a:lnT w="12700" cap="flat" cmpd="sng" algn="ctr">
+                      <a:solidFill>
+                        <a:srgbClr val="FFFFFF"/>
+                      </a:solidFill>
+                      <a:prstDash val="solid"/>
+                      <a:round/>
+                      <a:headEnd type="none" w="med" len="med"/>
+                      <a:tailEnd type="none" w="med" len="med"/>
+                    </a:lnT>
+                    <a:lnB w="12700" cap="flat" cmpd="sng" algn="ctr">
+                      <a:solidFill>
+                        <a:srgbClr val="FFFFFF"/>
+                      </a:solidFill>
+                      <a:prstDash val="solid"/>
+                      <a:round/>
+                      <a:headEnd type="none" w="med" len="med"/>
+                      <a:tailEnd type="none" w="med" len="med"/>
+                    </a:lnB>
+                  </a:tcPr>
+                </a:tc>
+                <a:tc>
+                  <a:txBody>
+                    <a:bodyPr/>
+                    <a:lstStyle/>
+                    <a:p>
+                      <a:pPr algn="r" indent="0" marL="0">
+                        <a:buNone/>
+                      </a:pPr>
+                      <a:r>
+                        <a:rPr lang="en-US" sz="1250" dirty="0">
+                          <a:solidFill>
+                            <a:srgbClr val="000000"/>
+                          </a:solidFill>
+                          <a:latin typeface="Arial" pitchFamily="34" charset="0"/>
+                          <a:ea typeface="Arial" pitchFamily="34" charset="-122"/>
+                          <a:cs typeface="Arial" pitchFamily="34" charset="-120"/>
+                        </a:rPr>
+                        <a:t>11 €</a:t>
+                      </a:r>
+                      <a:endParaRPr lang="en-US" sz="1250" dirty="0">
+                        <a:latin typeface="Arial" charset="0"/>
+                        <a:ea typeface="Arial" charset="0"/>
+                        <a:cs typeface="Arial" charset="0"/>
+                      </a:endParaRPr>
+                    </a:p>
+                  </a:txBody>
+                  <a:tcPr marL="91440" marR="91440" marT="45720" marB="45720">
+                    <a:lnL w="12700" cap="flat" cmpd="sng" algn="ctr">
+                      <a:solidFill>
+                        <a:srgbClr val="FFFFFF"/>
+                      </a:solidFill>
+                      <a:prstDash val="solid"/>
+                      <a:round/>
+                      <a:headEnd type="none" w="med" len="med"/>
+                      <a:tailEnd type="none" w="med" len="med"/>
+                    </a:lnL>
+                    <a:lnR w="12700" cap="flat" cmpd="sng" algn="ctr">
+                      <a:solidFill>
+                        <a:srgbClr val="FFFFFF"/>
+                      </a:solidFill>
+                      <a:prstDash val="solid"/>
+                      <a:round/>
+                      <a:headEnd type="none" w="med" len="med"/>
+                      <a:tailEnd type="none" w="med" len="med"/>
+                    </a:lnR>
+                    <a:lnT w="12700" cap="flat" cmpd="sng" algn="ctr">
+                      <a:solidFill>
+                        <a:srgbClr val="FFFFFF"/>
+                      </a:solidFill>
+                      <a:prstDash val="solid"/>
+                      <a:round/>
+                      <a:headEnd type="none" w="med" len="med"/>
+                      <a:tailEnd type="none" w="med" len="med"/>
+                    </a:lnT>
+                    <a:lnB w="12700" cap="flat" cmpd="sng" algn="ctr">
+                      <a:solidFill>
+                        <a:srgbClr val="FFFFFF"/>
+                      </a:solidFill>
+                      <a:prstDash val="solid"/>
+                      <a:round/>
+                      <a:headEnd type="none" w="med" len="med"/>
+                      <a:tailEnd type="none" w="med" len="med"/>
+                    </a:lnB>
+                  </a:tcPr>
+                </a:tc>
+                <a:tc>
+                  <a:txBody>
+                    <a:bodyPr/>
+                    <a:lstStyle/>
+                    <a:p>
+                      <a:pPr algn="r" indent="0" marL="0">
+                        <a:buNone/>
+                      </a:pPr>
+                      <a:r>
+                        <a:rPr lang="en-US" sz="1250" dirty="0">
+                          <a:solidFill>
+                            <a:srgbClr val="000000"/>
+                          </a:solidFill>
+                          <a:latin typeface="Arial" pitchFamily="34" charset="0"/>
+                          <a:ea typeface="Arial" pitchFamily="34" charset="-122"/>
+                          <a:cs typeface="Arial" pitchFamily="34" charset="-120"/>
+                        </a:rPr>
+                        <a:t>4.675 €</a:t>
+                      </a:r>
+                      <a:endParaRPr lang="en-US" sz="1250" dirty="0">
+                        <a:latin typeface="Arial" charset="0"/>
+                        <a:ea typeface="Arial" charset="0"/>
+                        <a:cs typeface="Arial" charset="0"/>
+                      </a:endParaRPr>
+                    </a:p>
+                  </a:txBody>
+                  <a:tcPr marL="91440" marR="91440" marT="45720" marB="45720">
+                    <a:lnL w="12700" cap="flat" cmpd="sng" algn="ctr">
+                      <a:solidFill>
+                        <a:srgbClr val="FFFFFF"/>
+                      </a:solidFill>
+                      <a:prstDash val="solid"/>
+                      <a:round/>
+                      <a:headEnd type="none" w="med" len="med"/>
+                      <a:tailEnd type="none" w="med" len="med"/>
+                    </a:lnL>
+                    <a:lnR w="12700" cap="flat" cmpd="sng" algn="ctr">
+                      <a:solidFill>
+                        <a:srgbClr val="FFFFFF"/>
+                      </a:solidFill>
+                      <a:prstDash val="solid"/>
+                      <a:round/>
+                      <a:headEnd type="none" w="med" len="med"/>
+                      <a:tailEnd type="none" w="med" len="med"/>
+                    </a:lnR>
+                    <a:lnT w="12700" cap="flat" cmpd="sng" algn="ctr">
+                      <a:solidFill>
+                        <a:srgbClr val="FFFFFF"/>
+                      </a:solidFill>
+                      <a:prstDash val="solid"/>
+                      <a:round/>
+                      <a:headEnd type="none" w="med" len="med"/>
+                      <a:tailEnd type="none" w="med" len="med"/>
+                    </a:lnT>
+                    <a:lnB w="12700" cap="flat" cmpd="sng" algn="ctr">
+                      <a:solidFill>
+                        <a:srgbClr val="FFFFFF"/>
+                      </a:solidFill>
+                      <a:prstDash val="solid"/>
+                      <a:round/>
+                      <a:headEnd type="none" w="med" len="med"/>
+                      <a:tailEnd type="none" w="med" len="med"/>
+                    </a:lnB>
+                  </a:tcPr>
+                </a:tc>
+              </a:tr>
+              <a:tr h="457200">
+                <a:tc>
+                  <a:txBody>
+                    <a:bodyPr/>
+                    <a:lstStyle/>
+                    <a:p>
+                      <a:pPr indent="0" marL="0">
+                        <a:buNone/>
+                      </a:pPr>
+                      <a:r>
+                        <a:rPr lang="en-US" sz="1250" dirty="0">
+                          <a:solidFill>
+                            <a:srgbClr val="000000"/>
+                          </a:solidFill>
+                          <a:latin typeface="Arial" pitchFamily="34" charset="0"/>
+                          <a:ea typeface="Arial" pitchFamily="34" charset="-122"/>
+                          <a:cs typeface="Arial" pitchFamily="34" charset="-120"/>
+                        </a:rPr>
+                        <a:t>Brunch am Wochenende (Sa, So 09:00–14:00)</a:t>
+                      </a:r>
+                      <a:endParaRPr lang="en-US" sz="1250" dirty="0">
+                        <a:latin typeface="Arial" charset="0"/>
+                        <a:ea typeface="Arial" charset="0"/>
+                        <a:cs typeface="Arial" charset="0"/>
+                      </a:endParaRPr>
+                    </a:p>
+                  </a:txBody>
+                  <a:tcPr marL="91440" marR="91440" marT="45720" marB="45720">
+                    <a:lnL w="12700" cap="flat" cmpd="sng" algn="ctr">
+                      <a:solidFill>
+                        <a:srgbClr val="FFFFFF"/>
+                      </a:solidFill>
+                      <a:prstDash val="solid"/>
+                      <a:round/>
+                      <a:headEnd type="none" w="med" len="med"/>
+                      <a:tailEnd type="none" w="med" len="med"/>
+                    </a:lnL>
+                    <a:lnR w="12700" cap="flat" cmpd="sng" algn="ctr">
+                      <a:solidFill>
+                        <a:srgbClr val="FFFFFF"/>
+                      </a:solidFill>
+                      <a:prstDash val="solid"/>
+                      <a:round/>
+                      <a:headEnd type="none" w="med" len="med"/>
+                      <a:tailEnd type="none" w="med" len="med"/>
+                    </a:lnR>
+                    <a:lnT w="12700" cap="flat" cmpd="sng" algn="ctr">
+                      <a:solidFill>
+                        <a:srgbClr val="FFFFFF"/>
+                      </a:solidFill>
+                      <a:prstDash val="solid"/>
+                      <a:round/>
+                      <a:headEnd type="none" w="med" len="med"/>
+                      <a:tailEnd type="none" w="med" len="med"/>
+                    </a:lnT>
+                    <a:lnB w="12700" cap="flat" cmpd="sng" algn="ctr">
+                      <a:solidFill>
+                        <a:srgbClr val="FFFFFF"/>
+                      </a:solidFill>
+                      <a:prstDash val="solid"/>
+                      <a:round/>
+                      <a:headEnd type="none" w="med" len="med"/>
+                      <a:tailEnd type="none" w="med" len="med"/>
+                    </a:lnB>
+                  </a:tcPr>
+                </a:tc>
+                <a:tc>
+                  <a:txBody>
+                    <a:bodyPr/>
+                    <a:lstStyle/>
+                    <a:p>
+                      <a:pPr algn="r" indent="0" marL="0">
+                        <a:buNone/>
+                      </a:pPr>
+                      <a:r>
+                        <a:rPr lang="en-US" sz="1250" dirty="0">
+                          <a:solidFill>
+                            <a:srgbClr val="000000"/>
+                          </a:solidFill>
+                          <a:latin typeface="Arial" pitchFamily="34" charset="0"/>
+                          <a:ea typeface="Arial" pitchFamily="34" charset="-122"/>
+                          <a:cs typeface="Arial" pitchFamily="34" charset="-120"/>
+                        </a:rPr>
+                        <a:t>9</a:t>
+                      </a:r>
+                      <a:endParaRPr lang="en-US" sz="1250" dirty="0">
+                        <a:latin typeface="Arial" charset="0"/>
+                        <a:ea typeface="Arial" charset="0"/>
+                        <a:cs typeface="Arial" charset="0"/>
+                      </a:endParaRPr>
+                    </a:p>
+                  </a:txBody>
+                  <a:tcPr marL="91440" marR="91440" marT="45720" marB="45720">
+                    <a:lnL w="12700" cap="flat" cmpd="sng" algn="ctr">
+                      <a:solidFill>
+                        <a:srgbClr val="FFFFFF"/>
+                      </a:solidFill>
+                      <a:prstDash val="solid"/>
+                      <a:round/>
+                      <a:headEnd type="none" w="med" len="med"/>
+                      <a:tailEnd type="none" w="med" len="med"/>
+                    </a:lnL>
+                    <a:lnR w="12700" cap="flat" cmpd="sng" algn="ctr">
+                      <a:solidFill>
+                        <a:srgbClr val="FFFFFF"/>
+                      </a:solidFill>
+                      <a:prstDash val="solid"/>
+                      <a:round/>
+                      <a:headEnd type="none" w="med" len="med"/>
+                      <a:tailEnd type="none" w="med" len="med"/>
+                    </a:lnR>
+                    <a:lnT w="12700" cap="flat" cmpd="sng" algn="ctr">
+                      <a:solidFill>
+                        <a:srgbClr val="FFFFFF"/>
+                      </a:solidFill>
+                      <a:prstDash val="solid"/>
+                      <a:round/>
+                      <a:headEnd type="none" w="med" len="med"/>
+                      <a:tailEnd type="none" w="med" len="med"/>
+                    </a:lnT>
+                    <a:lnB w="12700" cap="flat" cmpd="sng" algn="ctr">
+                      <a:solidFill>
+                        <a:srgbClr val="FFFFFF"/>
+                      </a:solidFill>
+                      <a:prstDash val="solid"/>
+                      <a:round/>
+                      <a:headEnd type="none" w="med" len="med"/>
+                      <a:tailEnd type="none" w="med" len="med"/>
+                    </a:lnB>
+                  </a:tcPr>
+                </a:tc>
+                <a:tc>
+                  <a:txBody>
+                    <a:bodyPr/>
+                    <a:lstStyle/>
+                    <a:p>
+                      <a:pPr algn="r" indent="0" marL="0">
+                        <a:buNone/>
+                      </a:pPr>
+                      <a:r>
+                        <a:rPr lang="en-US" sz="1250" dirty="0">
+                          <a:solidFill>
+                            <a:srgbClr val="000000"/>
+                          </a:solidFill>
+                          <a:latin typeface="Arial" pitchFamily="34" charset="0"/>
+                          <a:ea typeface="Arial" pitchFamily="34" charset="-122"/>
+                          <a:cs typeface="Arial" pitchFamily="34" charset="-120"/>
+                        </a:rPr>
+                        <a:t>60</a:t>
+                      </a:r>
+                      <a:endParaRPr lang="en-US" sz="1250" dirty="0">
+                        <a:latin typeface="Arial" charset="0"/>
+                        <a:ea typeface="Arial" charset="0"/>
+                        <a:cs typeface="Arial" charset="0"/>
+                      </a:endParaRPr>
+                    </a:p>
+                  </a:txBody>
+                  <a:tcPr marL="91440" marR="91440" marT="45720" marB="45720">
+                    <a:lnL w="12700" cap="flat" cmpd="sng" algn="ctr">
+                      <a:solidFill>
+                        <a:srgbClr val="FFFFFF"/>
+                      </a:solidFill>
+                      <a:prstDash val="solid"/>
+                      <a:round/>
+                      <a:headEnd type="none" w="med" len="med"/>
+                      <a:tailEnd type="none" w="med" len="med"/>
+                    </a:lnL>
+                    <a:lnR w="12700" cap="flat" cmpd="sng" algn="ctr">
+                      <a:solidFill>
+                        <a:srgbClr val="FFFFFF"/>
+                      </a:solidFill>
+                      <a:prstDash val="solid"/>
+                      <a:round/>
+                      <a:headEnd type="none" w="med" len="med"/>
+                      <a:tailEnd type="none" w="med" len="med"/>
+                    </a:lnR>
+                    <a:lnT w="12700" cap="flat" cmpd="sng" algn="ctr">
+                      <a:solidFill>
+                        <a:srgbClr val="FFFFFF"/>
+                      </a:solidFill>
+                      <a:prstDash val="solid"/>
+                      <a:round/>
+                      <a:headEnd type="none" w="med" len="med"/>
+                      <a:tailEnd type="none" w="med" len="med"/>
+                    </a:lnT>
+                    <a:lnB w="12700" cap="flat" cmpd="sng" algn="ctr">
+                      <a:solidFill>
+                        <a:srgbClr val="FFFFFF"/>
+                      </a:solidFill>
+                      <a:prstDash val="solid"/>
+                      <a:round/>
+                      <a:headEnd type="none" w="med" len="med"/>
+                      <a:tailEnd type="none" w="med" len="med"/>
+                    </a:lnB>
+                  </a:tcPr>
+                </a:tc>
+                <a:tc>
+                  <a:txBody>
+                    <a:bodyPr/>
+                    <a:lstStyle/>
+                    <a:p>
+                      <a:pPr algn="r" indent="0" marL="0">
+                        <a:buNone/>
+                      </a:pPr>
+                      <a:r>
+                        <a:rPr lang="en-US" sz="1250" dirty="0">
+                          <a:solidFill>
+                            <a:srgbClr val="000000"/>
+                          </a:solidFill>
+                          <a:latin typeface="Arial" pitchFamily="34" charset="0"/>
+                          <a:ea typeface="Arial" pitchFamily="34" charset="-122"/>
+                          <a:cs typeface="Arial" pitchFamily="34" charset="-120"/>
+                        </a:rPr>
+                        <a:t>14 €</a:t>
+                      </a:r>
+                      <a:endParaRPr lang="en-US" sz="1250" dirty="0">
+                        <a:latin typeface="Arial" charset="0"/>
+                        <a:ea typeface="Arial" charset="0"/>
+                        <a:cs typeface="Arial" charset="0"/>
+                      </a:endParaRPr>
+                    </a:p>
+                  </a:txBody>
+                  <a:tcPr marL="91440" marR="91440" marT="45720" marB="45720">
+                    <a:lnL w="12700" cap="flat" cmpd="sng" algn="ctr">
+                      <a:solidFill>
+                        <a:srgbClr val="FFFFFF"/>
+                      </a:solidFill>
+                      <a:prstDash val="solid"/>
+                      <a:round/>
+                      <a:headEnd type="none" w="med" len="med"/>
+                      <a:tailEnd type="none" w="med" len="med"/>
+                    </a:lnL>
+                    <a:lnR w="12700" cap="flat" cmpd="sng" algn="ctr">
+                      <a:solidFill>
+                        <a:srgbClr val="FFFFFF"/>
+                      </a:solidFill>
+                      <a:prstDash val="solid"/>
+                      <a:round/>
+                      <a:headEnd type="none" w="med" len="med"/>
+                      <a:tailEnd type="none" w="med" len="med"/>
+                    </a:lnR>
+                    <a:lnT w="12700" cap="flat" cmpd="sng" algn="ctr">
+                      <a:solidFill>
+                        <a:srgbClr val="FFFFFF"/>
+                      </a:solidFill>
+                      <a:prstDash val="solid"/>
+                      <a:round/>
+                      <a:headEnd type="none" w="med" len="med"/>
+                      <a:tailEnd type="none" w="med" len="med"/>
+                    </a:lnT>
+                    <a:lnB w="12700" cap="flat" cmpd="sng" algn="ctr">
+                      <a:solidFill>
+                        <a:srgbClr val="FFFFFF"/>
+                      </a:solidFill>
+                      <a:prstDash val="solid"/>
+                      <a:round/>
+                      <a:headEnd type="none" w="med" len="med"/>
+                      <a:tailEnd type="none" w="med" len="med"/>
+                    </a:lnB>
+                  </a:tcPr>
+                </a:tc>
+                <a:tc>
+                  <a:txBody>
+                    <a:bodyPr/>
+                    <a:lstStyle/>
+                    <a:p>
+                      <a:pPr algn="r" indent="0" marL="0">
+                        <a:buNone/>
+                      </a:pPr>
+                      <a:r>
+                        <a:rPr lang="en-US" sz="1250" dirty="0">
+                          <a:solidFill>
+                            <a:srgbClr val="000000"/>
+                          </a:solidFill>
+                          <a:latin typeface="Arial" pitchFamily="34" charset="0"/>
+                          <a:ea typeface="Arial" pitchFamily="34" charset="-122"/>
+                          <a:cs typeface="Arial" pitchFamily="34" charset="-120"/>
+                        </a:rPr>
+                        <a:t>7.560 €</a:t>
+                      </a:r>
+                      <a:endParaRPr lang="en-US" sz="1250" dirty="0">
+                        <a:latin typeface="Arial" charset="0"/>
+                        <a:ea typeface="Arial" charset="0"/>
+                        <a:cs typeface="Arial" charset="0"/>
+                      </a:endParaRPr>
+                    </a:p>
+                  </a:txBody>
+                  <a:tcPr marL="91440" marR="91440" marT="45720" marB="45720">
+                    <a:lnL w="12700" cap="flat" cmpd="sng" algn="ctr">
+                      <a:solidFill>
+                        <a:srgbClr val="FFFFFF"/>
+                      </a:solidFill>
+                      <a:prstDash val="solid"/>
+                      <a:round/>
+                      <a:headEnd type="none" w="med" len="med"/>
+                      <a:tailEnd type="none" w="med" len="med"/>
+                    </a:lnL>
+                    <a:lnR w="12700" cap="flat" cmpd="sng" algn="ctr">
+                      <a:solidFill>
+                        <a:srgbClr val="FFFFFF"/>
+                      </a:solidFill>
+                      <a:prstDash val="solid"/>
+                      <a:round/>
+                      <a:headEnd type="none" w="med" len="med"/>
+                      <a:tailEnd type="none" w="med" len="med"/>
+                    </a:lnR>
+                    <a:lnT w="12700" cap="flat" cmpd="sng" algn="ctr">
+                      <a:solidFill>
+                        <a:srgbClr val="FFFFFF"/>
+                      </a:solidFill>
+                      <a:prstDash val="solid"/>
+                      <a:round/>
+                      <a:headEnd type="none" w="med" len="med"/>
+                      <a:tailEnd type="none" w="med" len="med"/>
+                    </a:lnT>
+                    <a:lnB w="12700" cap="flat" cmpd="sng" algn="ctr">
+                      <a:solidFill>
+                        <a:srgbClr val="FFFFFF"/>
+                      </a:solidFill>
+                      <a:prstDash val="solid"/>
+                      <a:round/>
+                      <a:headEnd type="none" w="med" len="med"/>
+                      <a:tailEnd type="none" w="med" len="med"/>
+                    </a:lnB>
+                  </a:tcPr>
+                </a:tc>
+              </a:tr>
+              <a:tr h="457200">
+                <a:tc>
+                  <a:txBody>
+                    <a:bodyPr/>
+                    <a:lstStyle/>
+                    <a:p>
+                      <a:pPr indent="0" marL="0">
+                        <a:buNone/>
+                      </a:pPr>
+                      <a:r>
+                        <a:rPr lang="en-US" sz="1250" dirty="0">
+                          <a:solidFill>
+                            <a:srgbClr val="000000"/>
+                          </a:solidFill>
+                          <a:latin typeface="Arial" pitchFamily="34" charset="0"/>
+                          <a:ea typeface="Arial" pitchFamily="34" charset="-122"/>
+                          <a:cs typeface="Arial" pitchFamily="34" charset="-120"/>
+                        </a:rPr>
+                        <a:t>Mittagstisch (Di–Fr 11:30–14:30)</a:t>
+                      </a:r>
+                      <a:endParaRPr lang="en-US" sz="1250" dirty="0">
+                        <a:latin typeface="Arial" charset="0"/>
+                        <a:ea typeface="Arial" charset="0"/>
+                        <a:cs typeface="Arial" charset="0"/>
+                      </a:endParaRPr>
+                    </a:p>
+                  </a:txBody>
+                  <a:tcPr marL="91440" marR="91440" marT="45720" marB="45720">
+                    <a:lnL w="12700" cap="flat" cmpd="sng" algn="ctr">
+                      <a:solidFill>
+                        <a:srgbClr val="FFFFFF"/>
+                      </a:solidFill>
+                      <a:prstDash val="solid"/>
+                      <a:round/>
+                      <a:headEnd type="none" w="med" len="med"/>
+                      <a:tailEnd type="none" w="med" len="med"/>
+                    </a:lnL>
+                    <a:lnR w="12700" cap="flat" cmpd="sng" algn="ctr">
+                      <a:solidFill>
+                        <a:srgbClr val="FFFFFF"/>
+                      </a:solidFill>
+                      <a:prstDash val="solid"/>
+                      <a:round/>
+                      <a:headEnd type="none" w="med" len="med"/>
+                      <a:tailEnd type="none" w="med" len="med"/>
+                    </a:lnR>
+                    <a:lnT w="12700" cap="flat" cmpd="sng" algn="ctr">
+                      <a:solidFill>
+                        <a:srgbClr val="FFFFFF"/>
+                      </a:solidFill>
+                      <a:prstDash val="solid"/>
+                      <a:round/>
+                      <a:headEnd type="none" w="med" len="med"/>
+                      <a:tailEnd type="none" w="med" len="med"/>
+                    </a:lnT>
+                    <a:lnB w="12700" cap="flat" cmpd="sng" algn="ctr">
+                      <a:solidFill>
+                        <a:srgbClr val="FFFFFF"/>
+                      </a:solidFill>
+                      <a:prstDash val="solid"/>
+                      <a:round/>
+                      <a:headEnd type="none" w="med" len="med"/>
+                      <a:tailEnd type="none" w="med" len="med"/>
+                    </a:lnB>
+                  </a:tcPr>
+                </a:tc>
+                <a:tc>
+                  <a:txBody>
+                    <a:bodyPr/>
+                    <a:lstStyle/>
+                    <a:p>
+                      <a:pPr algn="r" indent="0" marL="0">
+                        <a:buNone/>
+                      </a:pPr>
+                      <a:r>
+                        <a:rPr lang="en-US" sz="1250" dirty="0">
+                          <a:solidFill>
+                            <a:srgbClr val="000000"/>
+                          </a:solidFill>
+                          <a:latin typeface="Arial" pitchFamily="34" charset="0"/>
+                          <a:ea typeface="Arial" pitchFamily="34" charset="-122"/>
+                          <a:cs typeface="Arial" pitchFamily="34" charset="-120"/>
+                        </a:rPr>
+                        <a:t>17</a:t>
                       </a:r>
                       <a:endParaRPr lang="en-US" sz="1250" dirty="0">
                         <a:latin typeface="Arial" charset="0"/>
@@ -3302,7 +4325,7 @@
                           <a:ea typeface="Arial" pitchFamily="34" charset="-122"/>
                           <a:cs typeface="Arial" pitchFamily="34" charset="-120"/>
                         </a:rPr>
-                        <a:t>12.110 €</a:t>
+                        <a:t>11.900 €</a:t>
                       </a:r>
                       <a:endParaRPr lang="en-US" sz="1250" dirty="0">
                         <a:latin typeface="Arial" charset="0"/>
@@ -3351,7 +4374,7 @@
                   </a:tcPr>
                 </a:tc>
               </a:tr>
-              <a:tr h="475488">
+              <a:tr h="457200">
                 <a:tc>
                   <a:txBody>
                     <a:bodyPr/>
@@ -3369,334 +4392,7 @@
                           <a:ea typeface="Arial" pitchFamily="34" charset="-122"/>
                           <a:cs typeface="Arial" pitchFamily="34" charset="-120"/>
                         </a:rPr>
-                        <a:t>Frühstück und Brunch (Sa, So)</a:t>
-                      </a:r>
-                      <a:endParaRPr lang="en-US" sz="1250" dirty="0">
-                        <a:latin typeface="Arial" charset="0"/>
-                        <a:ea typeface="Arial" charset="0"/>
-                        <a:cs typeface="Arial" charset="0"/>
-                      </a:endParaRPr>
-                    </a:p>
-                  </a:txBody>
-                  <a:tcPr marL="91440" marR="91440" marT="45720" marB="45720">
-                    <a:lnL w="12700" cap="flat" cmpd="sng" algn="ctr">
-                      <a:solidFill>
-                        <a:srgbClr val="FFFFFF"/>
-                      </a:solidFill>
-                      <a:prstDash val="solid"/>
-                      <a:round/>
-                      <a:headEnd type="none" w="med" len="med"/>
-                      <a:tailEnd type="none" w="med" len="med"/>
-                    </a:lnL>
-                    <a:lnR w="12700" cap="flat" cmpd="sng" algn="ctr">
-                      <a:solidFill>
-                        <a:srgbClr val="FFFFFF"/>
-                      </a:solidFill>
-                      <a:prstDash val="solid"/>
-                      <a:round/>
-                      <a:headEnd type="none" w="med" len="med"/>
-                      <a:tailEnd type="none" w="med" len="med"/>
-                    </a:lnR>
-                    <a:lnT w="12700" cap="flat" cmpd="sng" algn="ctr">
-                      <a:solidFill>
-                        <a:srgbClr val="FFFFFF"/>
-                      </a:solidFill>
-                      <a:prstDash val="solid"/>
-                      <a:round/>
-                      <a:headEnd type="none" w="med" len="med"/>
-                      <a:tailEnd type="none" w="med" len="med"/>
-                    </a:lnT>
-                    <a:lnB w="12700" cap="flat" cmpd="sng" algn="ctr">
-                      <a:solidFill>
-                        <a:srgbClr val="FFFFFF"/>
-                      </a:solidFill>
-                      <a:prstDash val="solid"/>
-                      <a:round/>
-                      <a:headEnd type="none" w="med" len="med"/>
-                      <a:tailEnd type="none" w="med" len="med"/>
-                    </a:lnB>
-                  </a:tcPr>
-                </a:tc>
-                <a:tc>
-                  <a:txBody>
-                    <a:bodyPr/>
-                    <a:lstStyle/>
-                    <a:p>
-                      <a:pPr algn="r" indent="0" marL="0">
-                        <a:buNone/>
-                      </a:pPr>
-                      <a:r>
-                        <a:rPr lang="en-US" sz="1250" dirty="0">
-                          <a:solidFill>
-                            <a:srgbClr val="000000"/>
-                          </a:solidFill>
-                          <a:latin typeface="Arial" pitchFamily="34" charset="0"/>
-                          <a:ea typeface="Arial" pitchFamily="34" charset="-122"/>
-                          <a:cs typeface="Arial" pitchFamily="34" charset="-120"/>
-                        </a:rPr>
-                        <a:t>8,7</a:t>
-                      </a:r>
-                      <a:endParaRPr lang="en-US" sz="1250" dirty="0">
-                        <a:latin typeface="Arial" charset="0"/>
-                        <a:ea typeface="Arial" charset="0"/>
-                        <a:cs typeface="Arial" charset="0"/>
-                      </a:endParaRPr>
-                    </a:p>
-                  </a:txBody>
-                  <a:tcPr marL="91440" marR="91440" marT="45720" marB="45720">
-                    <a:lnL w="12700" cap="flat" cmpd="sng" algn="ctr">
-                      <a:solidFill>
-                        <a:srgbClr val="FFFFFF"/>
-                      </a:solidFill>
-                      <a:prstDash val="solid"/>
-                      <a:round/>
-                      <a:headEnd type="none" w="med" len="med"/>
-                      <a:tailEnd type="none" w="med" len="med"/>
-                    </a:lnL>
-                    <a:lnR w="12700" cap="flat" cmpd="sng" algn="ctr">
-                      <a:solidFill>
-                        <a:srgbClr val="FFFFFF"/>
-                      </a:solidFill>
-                      <a:prstDash val="solid"/>
-                      <a:round/>
-                      <a:headEnd type="none" w="med" len="med"/>
-                      <a:tailEnd type="none" w="med" len="med"/>
-                    </a:lnR>
-                    <a:lnT w="12700" cap="flat" cmpd="sng" algn="ctr">
-                      <a:solidFill>
-                        <a:srgbClr val="FFFFFF"/>
-                      </a:solidFill>
-                      <a:prstDash val="solid"/>
-                      <a:round/>
-                      <a:headEnd type="none" w="med" len="med"/>
-                      <a:tailEnd type="none" w="med" len="med"/>
-                    </a:lnT>
-                    <a:lnB w="12700" cap="flat" cmpd="sng" algn="ctr">
-                      <a:solidFill>
-                        <a:srgbClr val="FFFFFF"/>
-                      </a:solidFill>
-                      <a:prstDash val="solid"/>
-                      <a:round/>
-                      <a:headEnd type="none" w="med" len="med"/>
-                      <a:tailEnd type="none" w="med" len="med"/>
-                    </a:lnB>
-                  </a:tcPr>
-                </a:tc>
-                <a:tc>
-                  <a:txBody>
-                    <a:bodyPr/>
-                    <a:lstStyle/>
-                    <a:p>
-                      <a:pPr algn="r" indent="0" marL="0">
-                        <a:buNone/>
-                      </a:pPr>
-                      <a:r>
-                        <a:rPr lang="en-US" sz="1250" dirty="0">
-                          <a:solidFill>
-                            <a:srgbClr val="000000"/>
-                          </a:solidFill>
-                          <a:latin typeface="Arial" pitchFamily="34" charset="0"/>
-                          <a:ea typeface="Arial" pitchFamily="34" charset="-122"/>
-                          <a:cs typeface="Arial" pitchFamily="34" charset="-120"/>
-                        </a:rPr>
-                        <a:t>60</a:t>
-                      </a:r>
-                      <a:endParaRPr lang="en-US" sz="1250" dirty="0">
-                        <a:latin typeface="Arial" charset="0"/>
-                        <a:ea typeface="Arial" charset="0"/>
-                        <a:cs typeface="Arial" charset="0"/>
-                      </a:endParaRPr>
-                    </a:p>
-                  </a:txBody>
-                  <a:tcPr marL="91440" marR="91440" marT="45720" marB="45720">
-                    <a:lnL w="12700" cap="flat" cmpd="sng" algn="ctr">
-                      <a:solidFill>
-                        <a:srgbClr val="FFFFFF"/>
-                      </a:solidFill>
-                      <a:prstDash val="solid"/>
-                      <a:round/>
-                      <a:headEnd type="none" w="med" len="med"/>
-                      <a:tailEnd type="none" w="med" len="med"/>
-                    </a:lnL>
-                    <a:lnR w="12700" cap="flat" cmpd="sng" algn="ctr">
-                      <a:solidFill>
-                        <a:srgbClr val="FFFFFF"/>
-                      </a:solidFill>
-                      <a:prstDash val="solid"/>
-                      <a:round/>
-                      <a:headEnd type="none" w="med" len="med"/>
-                      <a:tailEnd type="none" w="med" len="med"/>
-                    </a:lnR>
-                    <a:lnT w="12700" cap="flat" cmpd="sng" algn="ctr">
-                      <a:solidFill>
-                        <a:srgbClr val="FFFFFF"/>
-                      </a:solidFill>
-                      <a:prstDash val="solid"/>
-                      <a:round/>
-                      <a:headEnd type="none" w="med" len="med"/>
-                      <a:tailEnd type="none" w="med" len="med"/>
-                    </a:lnT>
-                    <a:lnB w="12700" cap="flat" cmpd="sng" algn="ctr">
-                      <a:solidFill>
-                        <a:srgbClr val="FFFFFF"/>
-                      </a:solidFill>
-                      <a:prstDash val="solid"/>
-                      <a:round/>
-                      <a:headEnd type="none" w="med" len="med"/>
-                      <a:tailEnd type="none" w="med" len="med"/>
-                    </a:lnB>
-                  </a:tcPr>
-                </a:tc>
-                <a:tc>
-                  <a:txBody>
-                    <a:bodyPr/>
-                    <a:lstStyle/>
-                    <a:p>
-                      <a:pPr algn="r" indent="0" marL="0">
-                        <a:buNone/>
-                      </a:pPr>
-                      <a:r>
-                        <a:rPr lang="en-US" sz="1250" dirty="0">
-                          <a:solidFill>
-                            <a:srgbClr val="000000"/>
-                          </a:solidFill>
-                          <a:latin typeface="Arial" pitchFamily="34" charset="0"/>
-                          <a:ea typeface="Arial" pitchFamily="34" charset="-122"/>
-                          <a:cs typeface="Arial" pitchFamily="34" charset="-120"/>
-                        </a:rPr>
-                        <a:t>13 €</a:t>
-                      </a:r>
-                      <a:endParaRPr lang="en-US" sz="1250" dirty="0">
-                        <a:latin typeface="Arial" charset="0"/>
-                        <a:ea typeface="Arial" charset="0"/>
-                        <a:cs typeface="Arial" charset="0"/>
-                      </a:endParaRPr>
-                    </a:p>
-                  </a:txBody>
-                  <a:tcPr marL="91440" marR="91440" marT="45720" marB="45720">
-                    <a:lnL w="12700" cap="flat" cmpd="sng" algn="ctr">
-                      <a:solidFill>
-                        <a:srgbClr val="FFFFFF"/>
-                      </a:solidFill>
-                      <a:prstDash val="solid"/>
-                      <a:round/>
-                      <a:headEnd type="none" w="med" len="med"/>
-                      <a:tailEnd type="none" w="med" len="med"/>
-                    </a:lnL>
-                    <a:lnR w="12700" cap="flat" cmpd="sng" algn="ctr">
-                      <a:solidFill>
-                        <a:srgbClr val="FFFFFF"/>
-                      </a:solidFill>
-                      <a:prstDash val="solid"/>
-                      <a:round/>
-                      <a:headEnd type="none" w="med" len="med"/>
-                      <a:tailEnd type="none" w="med" len="med"/>
-                    </a:lnR>
-                    <a:lnT w="12700" cap="flat" cmpd="sng" algn="ctr">
-                      <a:solidFill>
-                        <a:srgbClr val="FFFFFF"/>
-                      </a:solidFill>
-                      <a:prstDash val="solid"/>
-                      <a:round/>
-                      <a:headEnd type="none" w="med" len="med"/>
-                      <a:tailEnd type="none" w="med" len="med"/>
-                    </a:lnT>
-                    <a:lnB w="12700" cap="flat" cmpd="sng" algn="ctr">
-                      <a:solidFill>
-                        <a:srgbClr val="FFFFFF"/>
-                      </a:solidFill>
-                      <a:prstDash val="solid"/>
-                      <a:round/>
-                      <a:headEnd type="none" w="med" len="med"/>
-                      <a:tailEnd type="none" w="med" len="med"/>
-                    </a:lnB>
-                  </a:tcPr>
-                </a:tc>
-                <a:tc>
-                  <a:txBody>
-                    <a:bodyPr/>
-                    <a:lstStyle/>
-                    <a:p>
-                      <a:pPr algn="r" indent="0" marL="0">
-                        <a:buNone/>
-                      </a:pPr>
-                      <a:r>
-                        <a:rPr lang="en-US" sz="1250" dirty="0">
-                          <a:solidFill>
-                            <a:srgbClr val="000000"/>
-                          </a:solidFill>
-                          <a:latin typeface="Arial" pitchFamily="34" charset="0"/>
-                          <a:ea typeface="Arial" pitchFamily="34" charset="-122"/>
-                          <a:cs typeface="Arial" pitchFamily="34" charset="-120"/>
-                        </a:rPr>
-                        <a:t>6.786 €</a:t>
-                      </a:r>
-                      <a:endParaRPr lang="en-US" sz="1250" dirty="0">
-                        <a:latin typeface="Arial" charset="0"/>
-                        <a:ea typeface="Arial" charset="0"/>
-                        <a:cs typeface="Arial" charset="0"/>
-                      </a:endParaRPr>
-                    </a:p>
-                  </a:txBody>
-                  <a:tcPr marL="91440" marR="91440" marT="45720" marB="45720">
-                    <a:lnL w="12700" cap="flat" cmpd="sng" algn="ctr">
-                      <a:solidFill>
-                        <a:srgbClr val="FFFFFF"/>
-                      </a:solidFill>
-                      <a:prstDash val="solid"/>
-                      <a:round/>
-                      <a:headEnd type="none" w="med" len="med"/>
-                      <a:tailEnd type="none" w="med" len="med"/>
-                    </a:lnL>
-                    <a:lnR w="12700" cap="flat" cmpd="sng" algn="ctr">
-                      <a:solidFill>
-                        <a:srgbClr val="FFFFFF"/>
-                      </a:solidFill>
-                      <a:prstDash val="solid"/>
-                      <a:round/>
-                      <a:headEnd type="none" w="med" len="med"/>
-                      <a:tailEnd type="none" w="med" len="med"/>
-                    </a:lnR>
-                    <a:lnT w="12700" cap="flat" cmpd="sng" algn="ctr">
-                      <a:solidFill>
-                        <a:srgbClr val="FFFFFF"/>
-                      </a:solidFill>
-                      <a:prstDash val="solid"/>
-                      <a:round/>
-                      <a:headEnd type="none" w="med" len="med"/>
-                      <a:tailEnd type="none" w="med" len="med"/>
-                    </a:lnT>
-                    <a:lnB w="12700" cap="flat" cmpd="sng" algn="ctr">
-                      <a:solidFill>
-                        <a:srgbClr val="FFFFFF"/>
-                      </a:solidFill>
-                      <a:prstDash val="solid"/>
-                      <a:round/>
-                      <a:headEnd type="none" w="med" len="med"/>
-                      <a:tailEnd type="none" w="med" len="med"/>
-                    </a:lnB>
-                  </a:tcPr>
-                </a:tc>
-              </a:tr>
-              <a:tr h="475488">
-                <a:tc>
-                  <a:txBody>
-                    <a:bodyPr/>
-                    <a:lstStyle/>
-                    <a:p>
-                      <a:pPr indent="0" marL="0">
-                        <a:buNone/>
-                      </a:pPr>
-                      <a:r>
-                        <a:rPr lang="en-US" sz="1250" dirty="0">
-                          <a:solidFill>
-                            <a:srgbClr val="000000"/>
-                          </a:solidFill>
-                          <a:latin typeface="Arial" pitchFamily="34" charset="0"/>
-                          <a:ea typeface="Arial" pitchFamily="34" charset="-122"/>
-                          <a:cs typeface="Arial" pitchFamily="34" charset="-120"/>
-                        </a:rPr>
-                        <a:t>Abendessen (Di–So)</a:t>
+                        <a:t>Abendessen Restaurant (Di–So 17:30–22:00)</a:t>
                       </a:r>
                       <a:endParaRPr lang="en-US" sz="1250" dirty="0">
                         <a:latin typeface="Arial" charset="0"/>
@@ -3826,7 +4522,7 @@
                           <a:ea typeface="Arial" pitchFamily="34" charset="-122"/>
                           <a:cs typeface="Arial" pitchFamily="34" charset="-120"/>
                         </a:rPr>
-                        <a:t>48</a:t>
+                        <a:t>55</a:t>
                       </a:r>
                       <a:endParaRPr lang="en-US" sz="1250" dirty="0">
                         <a:latin typeface="Arial" charset="0"/>
@@ -3891,7 +4587,7 @@
                           <a:ea typeface="Arial" pitchFamily="34" charset="-122"/>
                           <a:cs typeface="Arial" pitchFamily="34" charset="-120"/>
                         </a:rPr>
-                        <a:t>29 €</a:t>
+                        <a:t>32 €</a:t>
                       </a:r>
                       <a:endParaRPr lang="en-US" sz="1250" dirty="0">
                         <a:latin typeface="Arial" charset="0"/>
@@ -3956,7 +4652,7 @@
                           <a:ea typeface="Arial" pitchFamily="34" charset="-122"/>
                           <a:cs typeface="Arial" pitchFamily="34" charset="-120"/>
                         </a:rPr>
-                        <a:t>36.192 €</a:t>
+                        <a:t>45.760 €</a:t>
                       </a:r>
                       <a:endParaRPr lang="en-US" sz="1250" dirty="0">
                         <a:latin typeface="Arial" charset="0"/>
@@ -4005,7 +4701,7 @@
                   </a:tcPr>
                 </a:tc>
               </a:tr>
-              <a:tr h="475488">
+              <a:tr h="457200">
                 <a:tc>
                   <a:txBody>
                     <a:bodyPr/>
@@ -4023,7 +4719,7 @@
                           <a:ea typeface="Arial" pitchFamily="34" charset="-122"/>
                           <a:cs typeface="Arial" pitchFamily="34" charset="-120"/>
                         </a:rPr>
-                        <a:t>Bar am Abend (Fr, Sa)</a:t>
+                        <a:t>Bar Di–Do (ab 21:00)</a:t>
                       </a:r>
                       <a:endParaRPr lang="en-US" sz="1250" dirty="0">
                         <a:latin typeface="Arial" charset="0"/>
@@ -4088,7 +4784,7 @@
                           <a:ea typeface="Arial" pitchFamily="34" charset="-122"/>
                           <a:cs typeface="Arial" pitchFamily="34" charset="-120"/>
                         </a:rPr>
-                        <a:t>8,7</a:t>
+                        <a:t>13</a:t>
                       </a:r>
                       <a:endParaRPr lang="en-US" sz="1250" dirty="0">
                         <a:latin typeface="Arial" charset="0"/>
@@ -4153,7 +4849,7 @@
                           <a:ea typeface="Arial" pitchFamily="34" charset="-122"/>
                           <a:cs typeface="Arial" pitchFamily="34" charset="-120"/>
                         </a:rPr>
-                        <a:t>45</a:t>
+                        <a:t>20</a:t>
                       </a:r>
                       <a:endParaRPr lang="en-US" sz="1250" dirty="0">
                         <a:latin typeface="Arial" charset="0"/>
@@ -4218,7 +4914,7 @@
                           <a:ea typeface="Arial" pitchFamily="34" charset="-122"/>
                           <a:cs typeface="Arial" pitchFamily="34" charset="-120"/>
                         </a:rPr>
-                        <a:t>15 €</a:t>
+                        <a:t>18 €</a:t>
                       </a:r>
                       <a:endParaRPr lang="en-US" sz="1250" dirty="0">
                         <a:latin typeface="Arial" charset="0"/>
@@ -4283,7 +4979,7 @@
                           <a:ea typeface="Arial" pitchFamily="34" charset="-122"/>
                           <a:cs typeface="Arial" pitchFamily="34" charset="-120"/>
                         </a:rPr>
-                        <a:t>5.872 €</a:t>
+                        <a:t>4.680 €</a:t>
                       </a:r>
                       <a:endParaRPr lang="en-US" sz="1250" dirty="0">
                         <a:latin typeface="Arial" charset="0"/>
@@ -4332,7 +5028,7 @@
                   </a:tcPr>
                 </a:tc>
               </a:tr>
-              <a:tr h="475488">
+              <a:tr h="457200">
                 <a:tc>
                   <a:txBody>
                     <a:bodyPr/>
@@ -4350,7 +5046,7 @@
                           <a:ea typeface="Arial" pitchFamily="34" charset="-122"/>
                           <a:cs typeface="Arial" pitchFamily="34" charset="-120"/>
                         </a:rPr>
-                        <a:t>Feiern im Séparée (3 pro Monat)</a:t>
+                        <a:t>Bar Fr, Sa (bis 01:00) (Cocktails, Wein, Bier, Musik)</a:t>
                       </a:r>
                       <a:endParaRPr lang="en-US" sz="1250" dirty="0">
                         <a:latin typeface="Arial" charset="0"/>
@@ -4415,7 +5111,7 @@
                           <a:ea typeface="Arial" pitchFamily="34" charset="-122"/>
                           <a:cs typeface="Arial" pitchFamily="34" charset="-120"/>
                         </a:rPr>
-                        <a:t>3</a:t>
+                        <a:t>9</a:t>
                       </a:r>
                       <a:endParaRPr lang="en-US" sz="1250" dirty="0">
                         <a:latin typeface="Arial" charset="0"/>
@@ -4480,7 +5176,334 @@
                           <a:ea typeface="Arial" pitchFamily="34" charset="-122"/>
                           <a:cs typeface="Arial" pitchFamily="34" charset="-120"/>
                         </a:rPr>
-                        <a:t>30</a:t>
+                        <a:t>70</a:t>
+                      </a:r>
+                      <a:endParaRPr lang="en-US" sz="1250" dirty="0">
+                        <a:latin typeface="Arial" charset="0"/>
+                        <a:ea typeface="Arial" charset="0"/>
+                        <a:cs typeface="Arial" charset="0"/>
+                      </a:endParaRPr>
+                    </a:p>
+                  </a:txBody>
+                  <a:tcPr marL="91440" marR="91440" marT="45720" marB="45720">
+                    <a:lnL w="12700" cap="flat" cmpd="sng" algn="ctr">
+                      <a:solidFill>
+                        <a:srgbClr val="FFFFFF"/>
+                      </a:solidFill>
+                      <a:prstDash val="solid"/>
+                      <a:round/>
+                      <a:headEnd type="none" w="med" len="med"/>
+                      <a:tailEnd type="none" w="med" len="med"/>
+                    </a:lnL>
+                    <a:lnR w="12700" cap="flat" cmpd="sng" algn="ctr">
+                      <a:solidFill>
+                        <a:srgbClr val="FFFFFF"/>
+                      </a:solidFill>
+                      <a:prstDash val="solid"/>
+                      <a:round/>
+                      <a:headEnd type="none" w="med" len="med"/>
+                      <a:tailEnd type="none" w="med" len="med"/>
+                    </a:lnR>
+                    <a:lnT w="12700" cap="flat" cmpd="sng" algn="ctr">
+                      <a:solidFill>
+                        <a:srgbClr val="FFFFFF"/>
+                      </a:solidFill>
+                      <a:prstDash val="solid"/>
+                      <a:round/>
+                      <a:headEnd type="none" w="med" len="med"/>
+                      <a:tailEnd type="none" w="med" len="med"/>
+                    </a:lnT>
+                    <a:lnB w="12700" cap="flat" cmpd="sng" algn="ctr">
+                      <a:solidFill>
+                        <a:srgbClr val="FFFFFF"/>
+                      </a:solidFill>
+                      <a:prstDash val="solid"/>
+                      <a:round/>
+                      <a:headEnd type="none" w="med" len="med"/>
+                      <a:tailEnd type="none" w="med" len="med"/>
+                    </a:lnB>
+                  </a:tcPr>
+                </a:tc>
+                <a:tc>
+                  <a:txBody>
+                    <a:bodyPr/>
+                    <a:lstStyle/>
+                    <a:p>
+                      <a:pPr algn="r" indent="0" marL="0">
+                        <a:buNone/>
+                      </a:pPr>
+                      <a:r>
+                        <a:rPr lang="en-US" sz="1250" dirty="0">
+                          <a:solidFill>
+                            <a:srgbClr val="000000"/>
+                          </a:solidFill>
+                          <a:latin typeface="Arial" pitchFamily="34" charset="0"/>
+                          <a:ea typeface="Arial" pitchFamily="34" charset="-122"/>
+                          <a:cs typeface="Arial" pitchFamily="34" charset="-120"/>
+                        </a:rPr>
+                        <a:t>22 €</a:t>
+                      </a:r>
+                      <a:endParaRPr lang="en-US" sz="1250" dirty="0">
+                        <a:latin typeface="Arial" charset="0"/>
+                        <a:ea typeface="Arial" charset="0"/>
+                        <a:cs typeface="Arial" charset="0"/>
+                      </a:endParaRPr>
+                    </a:p>
+                  </a:txBody>
+                  <a:tcPr marL="91440" marR="91440" marT="45720" marB="45720">
+                    <a:lnL w="12700" cap="flat" cmpd="sng" algn="ctr">
+                      <a:solidFill>
+                        <a:srgbClr val="FFFFFF"/>
+                      </a:solidFill>
+                      <a:prstDash val="solid"/>
+                      <a:round/>
+                      <a:headEnd type="none" w="med" len="med"/>
+                      <a:tailEnd type="none" w="med" len="med"/>
+                    </a:lnL>
+                    <a:lnR w="12700" cap="flat" cmpd="sng" algn="ctr">
+                      <a:solidFill>
+                        <a:srgbClr val="FFFFFF"/>
+                      </a:solidFill>
+                      <a:prstDash val="solid"/>
+                      <a:round/>
+                      <a:headEnd type="none" w="med" len="med"/>
+                      <a:tailEnd type="none" w="med" len="med"/>
+                    </a:lnR>
+                    <a:lnT w="12700" cap="flat" cmpd="sng" algn="ctr">
+                      <a:solidFill>
+                        <a:srgbClr val="FFFFFF"/>
+                      </a:solidFill>
+                      <a:prstDash val="solid"/>
+                      <a:round/>
+                      <a:headEnd type="none" w="med" len="med"/>
+                      <a:tailEnd type="none" w="med" len="med"/>
+                    </a:lnT>
+                    <a:lnB w="12700" cap="flat" cmpd="sng" algn="ctr">
+                      <a:solidFill>
+                        <a:srgbClr val="FFFFFF"/>
+                      </a:solidFill>
+                      <a:prstDash val="solid"/>
+                      <a:round/>
+                      <a:headEnd type="none" w="med" len="med"/>
+                      <a:tailEnd type="none" w="med" len="med"/>
+                    </a:lnB>
+                  </a:tcPr>
+                </a:tc>
+                <a:tc>
+                  <a:txBody>
+                    <a:bodyPr/>
+                    <a:lstStyle/>
+                    <a:p>
+                      <a:pPr algn="r" indent="0" marL="0">
+                        <a:buNone/>
+                      </a:pPr>
+                      <a:r>
+                        <a:rPr lang="en-US" sz="1250" dirty="0">
+                          <a:solidFill>
+                            <a:srgbClr val="000000"/>
+                          </a:solidFill>
+                          <a:latin typeface="Arial" pitchFamily="34" charset="0"/>
+                          <a:ea typeface="Arial" pitchFamily="34" charset="-122"/>
+                          <a:cs typeface="Arial" pitchFamily="34" charset="-120"/>
+                        </a:rPr>
+                        <a:t>13.860 €</a:t>
+                      </a:r>
+                      <a:endParaRPr lang="en-US" sz="1250" dirty="0">
+                        <a:latin typeface="Arial" charset="0"/>
+                        <a:ea typeface="Arial" charset="0"/>
+                        <a:cs typeface="Arial" charset="0"/>
+                      </a:endParaRPr>
+                    </a:p>
+                  </a:txBody>
+                  <a:tcPr marL="91440" marR="91440" marT="45720" marB="45720">
+                    <a:lnL w="12700" cap="flat" cmpd="sng" algn="ctr">
+                      <a:solidFill>
+                        <a:srgbClr val="FFFFFF"/>
+                      </a:solidFill>
+                      <a:prstDash val="solid"/>
+                      <a:round/>
+                      <a:headEnd type="none" w="med" len="med"/>
+                      <a:tailEnd type="none" w="med" len="med"/>
+                    </a:lnL>
+                    <a:lnR w="12700" cap="flat" cmpd="sng" algn="ctr">
+                      <a:solidFill>
+                        <a:srgbClr val="FFFFFF"/>
+                      </a:solidFill>
+                      <a:prstDash val="solid"/>
+                      <a:round/>
+                      <a:headEnd type="none" w="med" len="med"/>
+                      <a:tailEnd type="none" w="med" len="med"/>
+                    </a:lnR>
+                    <a:lnT w="12700" cap="flat" cmpd="sng" algn="ctr">
+                      <a:solidFill>
+                        <a:srgbClr val="FFFFFF"/>
+                      </a:solidFill>
+                      <a:prstDash val="solid"/>
+                      <a:round/>
+                      <a:headEnd type="none" w="med" len="med"/>
+                      <a:tailEnd type="none" w="med" len="med"/>
+                    </a:lnT>
+                    <a:lnB w="12700" cap="flat" cmpd="sng" algn="ctr">
+                      <a:solidFill>
+                        <a:srgbClr val="FFFFFF"/>
+                      </a:solidFill>
+                      <a:prstDash val="solid"/>
+                      <a:round/>
+                      <a:headEnd type="none" w="med" len="med"/>
+                      <a:tailEnd type="none" w="med" len="med"/>
+                    </a:lnB>
+                  </a:tcPr>
+                </a:tc>
+              </a:tr>
+              <a:tr h="457200">
+                <a:tc>
+                  <a:txBody>
+                    <a:bodyPr/>
+                    <a:lstStyle/>
+                    <a:p>
+                      <a:pPr indent="0" marL="0">
+                        <a:buNone/>
+                      </a:pPr>
+                      <a:r>
+                        <a:rPr lang="en-US" sz="1250" dirty="0">
+                          <a:solidFill>
+                            <a:srgbClr val="000000"/>
+                          </a:solidFill>
+                          <a:latin typeface="Arial" pitchFamily="34" charset="0"/>
+                          <a:ea typeface="Arial" pitchFamily="34" charset="-122"/>
+                          <a:cs typeface="Arial" pitchFamily="34" charset="-120"/>
+                        </a:rPr>
+                        <a:t>Feiern, Live-Abende, Séparée (nach Absprache, 4 pro Monat)</a:t>
+                      </a:r>
+                      <a:endParaRPr lang="en-US" sz="1250" dirty="0">
+                        <a:latin typeface="Arial" charset="0"/>
+                        <a:ea typeface="Arial" charset="0"/>
+                        <a:cs typeface="Arial" charset="0"/>
+                      </a:endParaRPr>
+                    </a:p>
+                  </a:txBody>
+                  <a:tcPr marL="91440" marR="91440" marT="45720" marB="45720">
+                    <a:lnL w="12700" cap="flat" cmpd="sng" algn="ctr">
+                      <a:solidFill>
+                        <a:srgbClr val="FFFFFF"/>
+                      </a:solidFill>
+                      <a:prstDash val="solid"/>
+                      <a:round/>
+                      <a:headEnd type="none" w="med" len="med"/>
+                      <a:tailEnd type="none" w="med" len="med"/>
+                    </a:lnL>
+                    <a:lnR w="12700" cap="flat" cmpd="sng" algn="ctr">
+                      <a:solidFill>
+                        <a:srgbClr val="FFFFFF"/>
+                      </a:solidFill>
+                      <a:prstDash val="solid"/>
+                      <a:round/>
+                      <a:headEnd type="none" w="med" len="med"/>
+                      <a:tailEnd type="none" w="med" len="med"/>
+                    </a:lnR>
+                    <a:lnT w="12700" cap="flat" cmpd="sng" algn="ctr">
+                      <a:solidFill>
+                        <a:srgbClr val="FFFFFF"/>
+                      </a:solidFill>
+                      <a:prstDash val="solid"/>
+                      <a:round/>
+                      <a:headEnd type="none" w="med" len="med"/>
+                      <a:tailEnd type="none" w="med" len="med"/>
+                    </a:lnT>
+                    <a:lnB w="12700" cap="flat" cmpd="sng" algn="ctr">
+                      <a:solidFill>
+                        <a:srgbClr val="FFFFFF"/>
+                      </a:solidFill>
+                      <a:prstDash val="solid"/>
+                      <a:round/>
+                      <a:headEnd type="none" w="med" len="med"/>
+                      <a:tailEnd type="none" w="med" len="med"/>
+                    </a:lnB>
+                  </a:tcPr>
+                </a:tc>
+                <a:tc>
+                  <a:txBody>
+                    <a:bodyPr/>
+                    <a:lstStyle/>
+                    <a:p>
+                      <a:pPr algn="r" indent="0" marL="0">
+                        <a:buNone/>
+                      </a:pPr>
+                      <a:r>
+                        <a:rPr lang="en-US" sz="1250" dirty="0">
+                          <a:solidFill>
+                            <a:srgbClr val="000000"/>
+                          </a:solidFill>
+                          <a:latin typeface="Arial" pitchFamily="34" charset="0"/>
+                          <a:ea typeface="Arial" pitchFamily="34" charset="-122"/>
+                          <a:cs typeface="Arial" pitchFamily="34" charset="-120"/>
+                        </a:rPr>
+                        <a:t>4</a:t>
+                      </a:r>
+                      <a:endParaRPr lang="en-US" sz="1250" dirty="0">
+                        <a:latin typeface="Arial" charset="0"/>
+                        <a:ea typeface="Arial" charset="0"/>
+                        <a:cs typeface="Arial" charset="0"/>
+                      </a:endParaRPr>
+                    </a:p>
+                  </a:txBody>
+                  <a:tcPr marL="91440" marR="91440" marT="45720" marB="45720">
+                    <a:lnL w="12700" cap="flat" cmpd="sng" algn="ctr">
+                      <a:solidFill>
+                        <a:srgbClr val="FFFFFF"/>
+                      </a:solidFill>
+                      <a:prstDash val="solid"/>
+                      <a:round/>
+                      <a:headEnd type="none" w="med" len="med"/>
+                      <a:tailEnd type="none" w="med" len="med"/>
+                    </a:lnL>
+                    <a:lnR w="12700" cap="flat" cmpd="sng" algn="ctr">
+                      <a:solidFill>
+                        <a:srgbClr val="FFFFFF"/>
+                      </a:solidFill>
+                      <a:prstDash val="solid"/>
+                      <a:round/>
+                      <a:headEnd type="none" w="med" len="med"/>
+                      <a:tailEnd type="none" w="med" len="med"/>
+                    </a:lnR>
+                    <a:lnT w="12700" cap="flat" cmpd="sng" algn="ctr">
+                      <a:solidFill>
+                        <a:srgbClr val="FFFFFF"/>
+                      </a:solidFill>
+                      <a:prstDash val="solid"/>
+                      <a:round/>
+                      <a:headEnd type="none" w="med" len="med"/>
+                      <a:tailEnd type="none" w="med" len="med"/>
+                    </a:lnT>
+                    <a:lnB w="12700" cap="flat" cmpd="sng" algn="ctr">
+                      <a:solidFill>
+                        <a:srgbClr val="FFFFFF"/>
+                      </a:solidFill>
+                      <a:prstDash val="solid"/>
+                      <a:round/>
+                      <a:headEnd type="none" w="med" len="med"/>
+                      <a:tailEnd type="none" w="med" len="med"/>
+                    </a:lnB>
+                  </a:tcPr>
+                </a:tc>
+                <a:tc>
+                  <a:txBody>
+                    <a:bodyPr/>
+                    <a:lstStyle/>
+                    <a:p>
+                      <a:pPr algn="r" indent="0" marL="0">
+                        <a:buNone/>
+                      </a:pPr>
+                      <a:r>
+                        <a:rPr lang="en-US" sz="1250" dirty="0">
+                          <a:solidFill>
+                            <a:srgbClr val="000000"/>
+                          </a:solidFill>
+                          <a:latin typeface="Arial" pitchFamily="34" charset="0"/>
+                          <a:ea typeface="Arial" pitchFamily="34" charset="-122"/>
+                          <a:cs typeface="Arial" pitchFamily="34" charset="-120"/>
+                        </a:rPr>
+                        <a:t>40</a:t>
                       </a:r>
                       <a:endParaRPr lang="en-US" sz="1250" dirty="0">
                         <a:latin typeface="Arial" charset="0"/>
@@ -4610,7 +5633,7 @@
                           <a:ea typeface="Arial" pitchFamily="34" charset="-122"/>
                           <a:cs typeface="Arial" pitchFamily="34" charset="-120"/>
                         </a:rPr>
-                        <a:t>4.050 €</a:t>
+                        <a:t>7.200 €</a:t>
                       </a:r>
                       <a:endParaRPr lang="en-US" sz="1250" dirty="0">
                         <a:latin typeface="Arial" charset="0"/>
@@ -4659,7 +5682,7 @@
                   </a:tcPr>
                 </a:tc>
               </a:tr>
-              <a:tr h="475488">
+              <a:tr h="457200">
                 <a:tc>
                   <a:txBody>
                     <a:bodyPr/>
@@ -4904,7 +5927,7 @@
                           <a:ea typeface="Arial" pitchFamily="34" charset="-122"/>
                           <a:cs typeface="Arial" pitchFamily="34" charset="-120"/>
                         </a:rPr>
-                        <a:t>65.011 €</a:t>
+                        <a:t>95.635 €</a:t>
                       </a:r>
                       <a:endParaRPr lang="en-US" sz="1250" dirty="0">
                         <a:latin typeface="Arial" charset="0"/>
@@ -5034,7 +6057,7 @@
                 <a:ea typeface="Arial" pitchFamily="34" charset="-122"/>
                 <a:cs typeface="Arial" pitchFamily="34" charset="-120"/>
               </a:rPr>
-              <a:t>Ca. 3.117 Gäste im Monat, im Schnitt ca. 120 pro Öffnungstag bei 190 Plätzen.</a:t>
+              <a:t>Ca. 4.295 Gäste im Monat, im Schnitt ca. 165 pro Öffnungstag bei 190 Plätzen. Der Abend (Restaurant, Bar, Feiern) bringt 75 % vom Umsatz.</a:t>
             </a:r>
             <a:endParaRPr lang="en-US" sz="1300" dirty="0"/>
           </a:p>
@@ -5085,7 +6108,7 @@
                 <a:ea typeface="Arial" pitchFamily="34" charset="-122"/>
                 <a:cs typeface="Arial" pitchFamily="34" charset="-120"/>
               </a:rPr>
-              <a:t>Terrasse im Sommer, Catering, Weihnachtsfeiern und ein Mittagstisch an Samstagen. Das ist Spielraum nach oben.</a:t>
+              <a:t>Terrasse im Sommer, Catering und Weihnachtsfeiern. Das ist Spielraum nach oben.</a:t>
             </a:r>
             <a:endParaRPr lang="en-US" sz="1300" dirty="0"/>
           </a:p>
@@ -5130,7 +6153,7 @@
             <a:pPr algn="r"/>
             <a:fld id="{F7021451-1387-4CA6-816F-3879F97B5CBC}" type="slidenum">
               <a:rPr b="0" lang="en-US"/>
-              <a:t>10</a:t>
+              <a:t>11</a:t>
             </a:fld>
             <a:endParaRPr lang="en-US"/>
           </a:p>
@@ -5144,9 +6167,9 @@
 </p:sld>
 </file>
 
-<file path=ppt/slides/slide11.xml><?xml version="1.0" encoding="utf-8"?>
+<file path=ppt/slides/slide12.xml><?xml version="1.0" encoding="utf-8"?>
 <p:sld xmlns:a="http://schemas.openxmlformats.org/drawingml/2006/main" xmlns:r="http://schemas.openxmlformats.org/officeDocument/2006/relationships" xmlns:p="http://schemas.openxmlformats.org/presentationml/2006/main">
-  <p:cSld name="Slide 11">
+  <p:cSld name="Slide 12">
     <p:spTree>
       <p:nvGrpSpPr>
         <p:cNvPr id="1" name=""/>
@@ -5240,7 +6263,7 @@
       </p:sp>
       <p:graphicFrame>
         <p:nvGraphicFramePr>
-          <p:cNvPr id="12" name="Tabelle Personal"/>
+          <p:cNvPr id="13" name="Tabelle Personal"/>
           <p:cNvGraphicFramePr>
             <a:graphicFrameLocks noGrp="1"/>
           </p:cNvGraphicFramePr>
@@ -6539,7 +7562,7 @@
                           <a:ea typeface="Arial" pitchFamily="34" charset="-122"/>
                           <a:cs typeface="Arial" pitchFamily="34" charset="-120"/>
                         </a:rPr>
-                        <a:t>entspricht 30 % vom Umsatz</a:t>
+                        <a:t>entspricht 20 % vom Umsatz</a:t>
                       </a:r>
                       <a:endParaRPr lang="en-US" sz="1250" dirty="0">
                         <a:latin typeface="Arial" charset="0"/>
@@ -6734,7 +7757,7 @@
                 <a:ea typeface="Arial" pitchFamily="34" charset="-122"/>
                 <a:cs typeface="Arial" pitchFamily="34" charset="-120"/>
               </a:rPr>
-              <a:t>Du führst die Gastro selbst oder verpachtest sie. Bei Verpachtung zahlt der Betreiber ca. 10 €/m² Pacht, das sind bei 510 m² ca. 5.100 € im Monat (ca. 8 % vom Umsatz).</a:t>
+              <a:t>Du führst die Gastro selbst oder verpachtest sie. Bei Verpachtung zahlt der Betreiber ca. 10 €/m² Pacht, das sind bei 510 m² ca. 5.100 € im Monat (ca. 5.3 % vom Umsatz).</a:t>
             </a:r>
             <a:endParaRPr lang="en-US" sz="1300" dirty="0"/>
           </a:p>
@@ -6830,7 +7853,7 @@
             <a:pPr algn="r"/>
             <a:fld id="{F7021451-1387-4CA6-816F-3879F97B5CBC}" type="slidenum">
               <a:rPr b="0" lang="en-US"/>
-              <a:t>11</a:t>
+              <a:t>12</a:t>
             </a:fld>
             <a:endParaRPr lang="en-US"/>
           </a:p>
@@ -6844,9 +7867,9 @@
 </p:sld>
 </file>
 
-<file path=ppt/slides/slide12.xml><?xml version="1.0" encoding="utf-8"?>
+<file path=ppt/slides/slide13.xml><?xml version="1.0" encoding="utf-8"?>
 <p:sld xmlns:a="http://schemas.openxmlformats.org/drawingml/2006/main" xmlns:r="http://schemas.openxmlformats.org/officeDocument/2006/relationships" xmlns:p="http://schemas.openxmlformats.org/presentationml/2006/main">
-  <p:cSld name="Slide 12">
+  <p:cSld name="Slide 13">
     <p:spTree>
       <p:nvGrpSpPr>
         <p:cNvPr id="1" name=""/>
@@ -6940,7 +7963,7 @@
       </p:sp>
       <p:graphicFrame>
         <p:nvGraphicFramePr>
-          <p:cNvPr id="13" name="Tabelle Gastro Gewinn"/>
+          <p:cNvPr id="14" name="Tabelle Gastro Gewinn"/>
           <p:cNvGraphicFramePr>
             <a:graphicFrameLocks noGrp="1"/>
           </p:cNvGraphicFramePr>
@@ -7258,7 +8281,7 @@
                           <a:ea typeface="Arial" pitchFamily="34" charset="-122"/>
                           <a:cs typeface="Arial" pitchFamily="34" charset="-120"/>
                         </a:rPr>
-                        <a:t>40.000 €</a:t>
+                        <a:t>50.000 €</a:t>
                       </a:r>
                       <a:endParaRPr lang="en-US" sz="1250" dirty="0">
                         <a:latin typeface="Arial" charset="0"/>
@@ -7323,7 +8346,7 @@
                           <a:ea typeface="Arial" pitchFamily="34" charset="-122"/>
                           <a:cs typeface="Arial" pitchFamily="34" charset="-120"/>
                         </a:rPr>
-                        <a:t>12.200 €</a:t>
+                        <a:t>15.250 €</a:t>
                       </a:r>
                       <a:endParaRPr lang="en-US" sz="1250" dirty="0">
                         <a:latin typeface="Arial" charset="0"/>
@@ -7453,7 +8476,7 @@
                           <a:ea typeface="Arial" pitchFamily="34" charset="-122"/>
                           <a:cs typeface="Arial" pitchFamily="34" charset="-120"/>
                         </a:rPr>
-                        <a:t>+7.100 €</a:t>
+                        <a:t>+10.150 €</a:t>
                       </a:r>
                       <a:endParaRPr lang="en-US" sz="1250" dirty="0">
                         <a:latin typeface="Arial" charset="0"/>
@@ -7516,271 +8539,6 @@
                       </a:pPr>
                       <a:r>
                         <a:rPr lang="en-US" sz="1250" dirty="0">
-                          <a:solidFill>
-                            <a:srgbClr val="000000"/>
-                          </a:solidFill>
-                          <a:latin typeface="Arial" pitchFamily="34" charset="0"/>
-                          <a:ea typeface="Arial" pitchFamily="34" charset="-122"/>
-                          <a:cs typeface="Arial" pitchFamily="34" charset="-120"/>
-                        </a:rPr>
-                        <a:t>50.000 €</a:t>
-                      </a:r>
-                      <a:endParaRPr lang="en-US" sz="1250" dirty="0">
-                        <a:latin typeface="Arial" charset="0"/>
-                        <a:ea typeface="Arial" charset="0"/>
-                        <a:cs typeface="Arial" charset="0"/>
-                      </a:endParaRPr>
-                    </a:p>
-                  </a:txBody>
-                  <a:tcPr marL="91440" marR="91440" marT="45720" marB="45720">
-                    <a:lnL w="12700" cap="flat" cmpd="sng" algn="ctr">
-                      <a:solidFill>
-                        <a:srgbClr val="FFFFFF"/>
-                      </a:solidFill>
-                      <a:prstDash val="solid"/>
-                      <a:round/>
-                      <a:headEnd type="none" w="med" len="med"/>
-                      <a:tailEnd type="none" w="med" len="med"/>
-                    </a:lnL>
-                    <a:lnR w="12700" cap="flat" cmpd="sng" algn="ctr">
-                      <a:solidFill>
-                        <a:srgbClr val="FFFFFF"/>
-                      </a:solidFill>
-                      <a:prstDash val="solid"/>
-                      <a:round/>
-                      <a:headEnd type="none" w="med" len="med"/>
-                      <a:tailEnd type="none" w="med" len="med"/>
-                    </a:lnR>
-                    <a:lnT w="12700" cap="flat" cmpd="sng" algn="ctr">
-                      <a:solidFill>
-                        <a:srgbClr val="FFFFFF"/>
-                      </a:solidFill>
-                      <a:prstDash val="solid"/>
-                      <a:round/>
-                      <a:headEnd type="none" w="med" len="med"/>
-                      <a:tailEnd type="none" w="med" len="med"/>
-                    </a:lnT>
-                    <a:lnB w="12700" cap="flat" cmpd="sng" algn="ctr">
-                      <a:solidFill>
-                        <a:srgbClr val="FFFFFF"/>
-                      </a:solidFill>
-                      <a:prstDash val="solid"/>
-                      <a:round/>
-                      <a:headEnd type="none" w="med" len="med"/>
-                      <a:tailEnd type="none" w="med" len="med"/>
-                    </a:lnB>
-                  </a:tcPr>
-                </a:tc>
-                <a:tc>
-                  <a:txBody>
-                    <a:bodyPr/>
-                    <a:lstStyle/>
-                    <a:p>
-                      <a:pPr algn="r" indent="0" marL="0">
-                        <a:buNone/>
-                      </a:pPr>
-                      <a:r>
-                        <a:rPr lang="en-US" sz="1250" dirty="0">
-                          <a:solidFill>
-                            <a:srgbClr val="000000"/>
-                          </a:solidFill>
-                          <a:latin typeface="Arial" pitchFamily="34" charset="0"/>
-                          <a:ea typeface="Arial" pitchFamily="34" charset="-122"/>
-                          <a:cs typeface="Arial" pitchFamily="34" charset="-120"/>
-                        </a:rPr>
-                        <a:t>15.250 €</a:t>
-                      </a:r>
-                      <a:endParaRPr lang="en-US" sz="1250" dirty="0">
-                        <a:latin typeface="Arial" charset="0"/>
-                        <a:ea typeface="Arial" charset="0"/>
-                        <a:cs typeface="Arial" charset="0"/>
-                      </a:endParaRPr>
-                    </a:p>
-                  </a:txBody>
-                  <a:tcPr marL="91440" marR="91440" marT="45720" marB="45720">
-                    <a:lnL w="12700" cap="flat" cmpd="sng" algn="ctr">
-                      <a:solidFill>
-                        <a:srgbClr val="FFFFFF"/>
-                      </a:solidFill>
-                      <a:prstDash val="solid"/>
-                      <a:round/>
-                      <a:headEnd type="none" w="med" len="med"/>
-                      <a:tailEnd type="none" w="med" len="med"/>
-                    </a:lnL>
-                    <a:lnR w="12700" cap="flat" cmpd="sng" algn="ctr">
-                      <a:solidFill>
-                        <a:srgbClr val="FFFFFF"/>
-                      </a:solidFill>
-                      <a:prstDash val="solid"/>
-                      <a:round/>
-                      <a:headEnd type="none" w="med" len="med"/>
-                      <a:tailEnd type="none" w="med" len="med"/>
-                    </a:lnR>
-                    <a:lnT w="12700" cap="flat" cmpd="sng" algn="ctr">
-                      <a:solidFill>
-                        <a:srgbClr val="FFFFFF"/>
-                      </a:solidFill>
-                      <a:prstDash val="solid"/>
-                      <a:round/>
-                      <a:headEnd type="none" w="med" len="med"/>
-                      <a:tailEnd type="none" w="med" len="med"/>
-                    </a:lnT>
-                    <a:lnB w="12700" cap="flat" cmpd="sng" algn="ctr">
-                      <a:solidFill>
-                        <a:srgbClr val="FFFFFF"/>
-                      </a:solidFill>
-                      <a:prstDash val="solid"/>
-                      <a:round/>
-                      <a:headEnd type="none" w="med" len="med"/>
-                      <a:tailEnd type="none" w="med" len="med"/>
-                    </a:lnB>
-                  </a:tcPr>
-                </a:tc>
-                <a:tc>
-                  <a:txBody>
-                    <a:bodyPr/>
-                    <a:lstStyle/>
-                    <a:p>
-                      <a:pPr algn="r" indent="0" marL="0">
-                        <a:buNone/>
-                      </a:pPr>
-                      <a:r>
-                        <a:rPr lang="en-US" sz="1250" dirty="0">
-                          <a:solidFill>
-                            <a:srgbClr val="000000"/>
-                          </a:solidFill>
-                          <a:latin typeface="Arial" pitchFamily="34" charset="0"/>
-                          <a:ea typeface="Arial" pitchFamily="34" charset="-122"/>
-                          <a:cs typeface="Arial" pitchFamily="34" charset="-120"/>
-                        </a:rPr>
-                        <a:t>−5.100 €</a:t>
-                      </a:r>
-                      <a:endParaRPr lang="en-US" sz="1250" dirty="0">
-                        <a:latin typeface="Arial" charset="0"/>
-                        <a:ea typeface="Arial" charset="0"/>
-                        <a:cs typeface="Arial" charset="0"/>
-                      </a:endParaRPr>
-                    </a:p>
-                  </a:txBody>
-                  <a:tcPr marL="91440" marR="91440" marT="45720" marB="45720">
-                    <a:lnL w="12700" cap="flat" cmpd="sng" algn="ctr">
-                      <a:solidFill>
-                        <a:srgbClr val="FFFFFF"/>
-                      </a:solidFill>
-                      <a:prstDash val="solid"/>
-                      <a:round/>
-                      <a:headEnd type="none" w="med" len="med"/>
-                      <a:tailEnd type="none" w="med" len="med"/>
-                    </a:lnL>
-                    <a:lnR w="12700" cap="flat" cmpd="sng" algn="ctr">
-                      <a:solidFill>
-                        <a:srgbClr val="FFFFFF"/>
-                      </a:solidFill>
-                      <a:prstDash val="solid"/>
-                      <a:round/>
-                      <a:headEnd type="none" w="med" len="med"/>
-                      <a:tailEnd type="none" w="med" len="med"/>
-                    </a:lnR>
-                    <a:lnT w="12700" cap="flat" cmpd="sng" algn="ctr">
-                      <a:solidFill>
-                        <a:srgbClr val="FFFFFF"/>
-                      </a:solidFill>
-                      <a:prstDash val="solid"/>
-                      <a:round/>
-                      <a:headEnd type="none" w="med" len="med"/>
-                      <a:tailEnd type="none" w="med" len="med"/>
-                    </a:lnT>
-                    <a:lnB w="12700" cap="flat" cmpd="sng" algn="ctr">
-                      <a:solidFill>
-                        <a:srgbClr val="FFFFFF"/>
-                      </a:solidFill>
-                      <a:prstDash val="solid"/>
-                      <a:round/>
-                      <a:headEnd type="none" w="med" len="med"/>
-                      <a:tailEnd type="none" w="med" len="med"/>
-                    </a:lnB>
-                  </a:tcPr>
-                </a:tc>
-                <a:tc>
-                  <a:txBody>
-                    <a:bodyPr/>
-                    <a:lstStyle/>
-                    <a:p>
-                      <a:pPr algn="r" indent="0" marL="0">
-                        <a:buNone/>
-                      </a:pPr>
-                      <a:r>
-                        <a:rPr lang="en-US" sz="1250" b="1" dirty="0">
-                          <a:solidFill>
-                            <a:schemeClr val="accent5"/>
-                          </a:solidFill>
-                          <a:latin typeface="Arial" pitchFamily="34" charset="0"/>
-                          <a:ea typeface="Arial" pitchFamily="34" charset="-122"/>
-                          <a:cs typeface="Arial" pitchFamily="34" charset="-120"/>
-                        </a:rPr>
-                        <a:t>+10.150 €</a:t>
-                      </a:r>
-                      <a:endParaRPr lang="en-US" sz="1250" dirty="0">
-                        <a:latin typeface="Arial" charset="0"/>
-                        <a:ea typeface="Arial" charset="0"/>
-                        <a:cs typeface="Arial" charset="0"/>
-                      </a:endParaRPr>
-                    </a:p>
-                  </a:txBody>
-                  <a:tcPr marL="91440" marR="91440" marT="45720" marB="45720">
-                    <a:lnL w="12700" cap="flat" cmpd="sng" algn="ctr">
-                      <a:solidFill>
-                        <a:srgbClr val="FFFFFF"/>
-                      </a:solidFill>
-                      <a:prstDash val="solid"/>
-                      <a:round/>
-                      <a:headEnd type="none" w="med" len="med"/>
-                      <a:tailEnd type="none" w="med" len="med"/>
-                    </a:lnL>
-                    <a:lnR w="12700" cap="flat" cmpd="sng" algn="ctr">
-                      <a:solidFill>
-                        <a:srgbClr val="FFFFFF"/>
-                      </a:solidFill>
-                      <a:prstDash val="solid"/>
-                      <a:round/>
-                      <a:headEnd type="none" w="med" len="med"/>
-                      <a:tailEnd type="none" w="med" len="med"/>
-                    </a:lnR>
-                    <a:lnT w="12700" cap="flat" cmpd="sng" algn="ctr">
-                      <a:solidFill>
-                        <a:srgbClr val="FFFFFF"/>
-                      </a:solidFill>
-                      <a:prstDash val="solid"/>
-                      <a:round/>
-                      <a:headEnd type="none" w="med" len="med"/>
-                      <a:tailEnd type="none" w="med" len="med"/>
-                    </a:lnT>
-                    <a:lnB w="12700" cap="flat" cmpd="sng" algn="ctr">
-                      <a:solidFill>
-                        <a:srgbClr val="FFFFFF"/>
-                      </a:solidFill>
-                      <a:prstDash val="solid"/>
-                      <a:round/>
-                      <a:headEnd type="none" w="med" len="med"/>
-                      <a:tailEnd type="none" w="med" len="med"/>
-                    </a:lnB>
-                    <a:solidFill>
-                      <a:srgbClr val="E3F1EA"/>
-                    </a:solidFill>
-                  </a:tcPr>
-                </a:tc>
-              </a:tr>
-              <a:tr h="502920">
-                <a:tc>
-                  <a:txBody>
-                    <a:bodyPr/>
-                    <a:lstStyle/>
-                    <a:p>
-                      <a:pPr indent="0" marL="0">
-                        <a:buNone/>
-                      </a:pPr>
-                      <a:r>
-                        <a:rPr lang="en-US" sz="1250" b="1" dirty="0">
                           <a:solidFill>
                             <a:srgbClr val="000000"/>
                           </a:solidFill>
@@ -8310,7 +9068,7 @@
                         <a:buNone/>
                       </a:pPr>
                       <a:r>
-                        <a:rPr lang="en-US" sz="1250" dirty="0">
+                        <a:rPr lang="en-US" sz="1250" b="1" dirty="0">
                           <a:solidFill>
                             <a:srgbClr val="000000"/>
                           </a:solidFill>
@@ -8318,7 +9076,7 @@
                           <a:ea typeface="Arial" pitchFamily="34" charset="-122"/>
                           <a:cs typeface="Arial" pitchFamily="34" charset="-120"/>
                         </a:rPr>
-                        <a:t>90.000 €</a:t>
+                        <a:t>95.635 €</a:t>
                       </a:r>
                       <a:endParaRPr lang="en-US" sz="1250" dirty="0">
                         <a:latin typeface="Arial" charset="0"/>
@@ -8383,7 +9141,7 @@
                           <a:ea typeface="Arial" pitchFamily="34" charset="-122"/>
                           <a:cs typeface="Arial" pitchFamily="34" charset="-120"/>
                         </a:rPr>
-                        <a:t>27.450 €</a:t>
+                        <a:t>29.169 €</a:t>
                       </a:r>
                       <a:endParaRPr lang="en-US" sz="1250" dirty="0">
                         <a:latin typeface="Arial" charset="0"/>
@@ -8513,7 +9271,272 @@
                           <a:ea typeface="Arial" pitchFamily="34" charset="-122"/>
                           <a:cs typeface="Arial" pitchFamily="34" charset="-120"/>
                         </a:rPr>
-                        <a:t>+22.350 €</a:t>
+                        <a:t>+24.069 €</a:t>
+                      </a:r>
+                      <a:endParaRPr lang="en-US" sz="1250" dirty="0">
+                        <a:latin typeface="Arial" charset="0"/>
+                        <a:ea typeface="Arial" charset="0"/>
+                        <a:cs typeface="Arial" charset="0"/>
+                      </a:endParaRPr>
+                    </a:p>
+                  </a:txBody>
+                  <a:tcPr marL="91440" marR="91440" marT="45720" marB="45720">
+                    <a:lnL w="12700" cap="flat" cmpd="sng" algn="ctr">
+                      <a:solidFill>
+                        <a:srgbClr val="FFFFFF"/>
+                      </a:solidFill>
+                      <a:prstDash val="solid"/>
+                      <a:round/>
+                      <a:headEnd type="none" w="med" len="med"/>
+                      <a:tailEnd type="none" w="med" len="med"/>
+                    </a:lnL>
+                    <a:lnR w="12700" cap="flat" cmpd="sng" algn="ctr">
+                      <a:solidFill>
+                        <a:srgbClr val="FFFFFF"/>
+                      </a:solidFill>
+                      <a:prstDash val="solid"/>
+                      <a:round/>
+                      <a:headEnd type="none" w="med" len="med"/>
+                      <a:tailEnd type="none" w="med" len="med"/>
+                    </a:lnR>
+                    <a:lnT w="12700" cap="flat" cmpd="sng" algn="ctr">
+                      <a:solidFill>
+                        <a:srgbClr val="FFFFFF"/>
+                      </a:solidFill>
+                      <a:prstDash val="solid"/>
+                      <a:round/>
+                      <a:headEnd type="none" w="med" len="med"/>
+                      <a:tailEnd type="none" w="med" len="med"/>
+                    </a:lnT>
+                    <a:lnB w="12700" cap="flat" cmpd="sng" algn="ctr">
+                      <a:solidFill>
+                        <a:srgbClr val="FFFFFF"/>
+                      </a:solidFill>
+                      <a:prstDash val="solid"/>
+                      <a:round/>
+                      <a:headEnd type="none" w="med" len="med"/>
+                      <a:tailEnd type="none" w="med" len="med"/>
+                    </a:lnB>
+                    <a:solidFill>
+                      <a:srgbClr val="E3F1EA"/>
+                    </a:solidFill>
+                  </a:tcPr>
+                </a:tc>
+              </a:tr>
+              <a:tr h="502920">
+                <a:tc>
+                  <a:txBody>
+                    <a:bodyPr/>
+                    <a:lstStyle/>
+                    <a:p>
+                      <a:pPr indent="0" marL="0">
+                        <a:buNone/>
+                      </a:pPr>
+                      <a:r>
+                        <a:rPr lang="en-US" sz="1250" dirty="0">
+                          <a:solidFill>
+                            <a:srgbClr val="000000"/>
+                          </a:solidFill>
+                          <a:latin typeface="Arial" pitchFamily="34" charset="0"/>
+                          <a:ea typeface="Arial" pitchFamily="34" charset="-122"/>
+                          <a:cs typeface="Arial" pitchFamily="34" charset="-120"/>
+                        </a:rPr>
+                        <a:t>110.000 €</a:t>
+                      </a:r>
+                      <a:endParaRPr lang="en-US" sz="1250" dirty="0">
+                        <a:latin typeface="Arial" charset="0"/>
+                        <a:ea typeface="Arial" charset="0"/>
+                        <a:cs typeface="Arial" charset="0"/>
+                      </a:endParaRPr>
+                    </a:p>
+                  </a:txBody>
+                  <a:tcPr marL="91440" marR="91440" marT="45720" marB="45720">
+                    <a:lnL w="12700" cap="flat" cmpd="sng" algn="ctr">
+                      <a:solidFill>
+                        <a:srgbClr val="FFFFFF"/>
+                      </a:solidFill>
+                      <a:prstDash val="solid"/>
+                      <a:round/>
+                      <a:headEnd type="none" w="med" len="med"/>
+                      <a:tailEnd type="none" w="med" len="med"/>
+                    </a:lnL>
+                    <a:lnR w="12700" cap="flat" cmpd="sng" algn="ctr">
+                      <a:solidFill>
+                        <a:srgbClr val="FFFFFF"/>
+                      </a:solidFill>
+                      <a:prstDash val="solid"/>
+                      <a:round/>
+                      <a:headEnd type="none" w="med" len="med"/>
+                      <a:tailEnd type="none" w="med" len="med"/>
+                    </a:lnR>
+                    <a:lnT w="12700" cap="flat" cmpd="sng" algn="ctr">
+                      <a:solidFill>
+                        <a:srgbClr val="FFFFFF"/>
+                      </a:solidFill>
+                      <a:prstDash val="solid"/>
+                      <a:round/>
+                      <a:headEnd type="none" w="med" len="med"/>
+                      <a:tailEnd type="none" w="med" len="med"/>
+                    </a:lnT>
+                    <a:lnB w="12700" cap="flat" cmpd="sng" algn="ctr">
+                      <a:solidFill>
+                        <a:srgbClr val="FFFFFF"/>
+                      </a:solidFill>
+                      <a:prstDash val="solid"/>
+                      <a:round/>
+                      <a:headEnd type="none" w="med" len="med"/>
+                      <a:tailEnd type="none" w="med" len="med"/>
+                    </a:lnB>
+                  </a:tcPr>
+                </a:tc>
+                <a:tc>
+                  <a:txBody>
+                    <a:bodyPr/>
+                    <a:lstStyle/>
+                    <a:p>
+                      <a:pPr algn="r" indent="0" marL="0">
+                        <a:buNone/>
+                      </a:pPr>
+                      <a:r>
+                        <a:rPr lang="en-US" sz="1250" dirty="0">
+                          <a:solidFill>
+                            <a:srgbClr val="000000"/>
+                          </a:solidFill>
+                          <a:latin typeface="Arial" pitchFamily="34" charset="0"/>
+                          <a:ea typeface="Arial" pitchFamily="34" charset="-122"/>
+                          <a:cs typeface="Arial" pitchFamily="34" charset="-120"/>
+                        </a:rPr>
+                        <a:t>33.550 €</a:t>
+                      </a:r>
+                      <a:endParaRPr lang="en-US" sz="1250" dirty="0">
+                        <a:latin typeface="Arial" charset="0"/>
+                        <a:ea typeface="Arial" charset="0"/>
+                        <a:cs typeface="Arial" charset="0"/>
+                      </a:endParaRPr>
+                    </a:p>
+                  </a:txBody>
+                  <a:tcPr marL="91440" marR="91440" marT="45720" marB="45720">
+                    <a:lnL w="12700" cap="flat" cmpd="sng" algn="ctr">
+                      <a:solidFill>
+                        <a:srgbClr val="FFFFFF"/>
+                      </a:solidFill>
+                      <a:prstDash val="solid"/>
+                      <a:round/>
+                      <a:headEnd type="none" w="med" len="med"/>
+                      <a:tailEnd type="none" w="med" len="med"/>
+                    </a:lnL>
+                    <a:lnR w="12700" cap="flat" cmpd="sng" algn="ctr">
+                      <a:solidFill>
+                        <a:srgbClr val="FFFFFF"/>
+                      </a:solidFill>
+                      <a:prstDash val="solid"/>
+                      <a:round/>
+                      <a:headEnd type="none" w="med" len="med"/>
+                      <a:tailEnd type="none" w="med" len="med"/>
+                    </a:lnR>
+                    <a:lnT w="12700" cap="flat" cmpd="sng" algn="ctr">
+                      <a:solidFill>
+                        <a:srgbClr val="FFFFFF"/>
+                      </a:solidFill>
+                      <a:prstDash val="solid"/>
+                      <a:round/>
+                      <a:headEnd type="none" w="med" len="med"/>
+                      <a:tailEnd type="none" w="med" len="med"/>
+                    </a:lnT>
+                    <a:lnB w="12700" cap="flat" cmpd="sng" algn="ctr">
+                      <a:solidFill>
+                        <a:srgbClr val="FFFFFF"/>
+                      </a:solidFill>
+                      <a:prstDash val="solid"/>
+                      <a:round/>
+                      <a:headEnd type="none" w="med" len="med"/>
+                      <a:tailEnd type="none" w="med" len="med"/>
+                    </a:lnB>
+                  </a:tcPr>
+                </a:tc>
+                <a:tc>
+                  <a:txBody>
+                    <a:bodyPr/>
+                    <a:lstStyle/>
+                    <a:p>
+                      <a:pPr algn="r" indent="0" marL="0">
+                        <a:buNone/>
+                      </a:pPr>
+                      <a:r>
+                        <a:rPr lang="en-US" sz="1250" dirty="0">
+                          <a:solidFill>
+                            <a:srgbClr val="000000"/>
+                          </a:solidFill>
+                          <a:latin typeface="Arial" pitchFamily="34" charset="0"/>
+                          <a:ea typeface="Arial" pitchFamily="34" charset="-122"/>
+                          <a:cs typeface="Arial" pitchFamily="34" charset="-120"/>
+                        </a:rPr>
+                        <a:t>−5.100 €</a:t>
+                      </a:r>
+                      <a:endParaRPr lang="en-US" sz="1250" dirty="0">
+                        <a:latin typeface="Arial" charset="0"/>
+                        <a:ea typeface="Arial" charset="0"/>
+                        <a:cs typeface="Arial" charset="0"/>
+                      </a:endParaRPr>
+                    </a:p>
+                  </a:txBody>
+                  <a:tcPr marL="91440" marR="91440" marT="45720" marB="45720">
+                    <a:lnL w="12700" cap="flat" cmpd="sng" algn="ctr">
+                      <a:solidFill>
+                        <a:srgbClr val="FFFFFF"/>
+                      </a:solidFill>
+                      <a:prstDash val="solid"/>
+                      <a:round/>
+                      <a:headEnd type="none" w="med" len="med"/>
+                      <a:tailEnd type="none" w="med" len="med"/>
+                    </a:lnL>
+                    <a:lnR w="12700" cap="flat" cmpd="sng" algn="ctr">
+                      <a:solidFill>
+                        <a:srgbClr val="FFFFFF"/>
+                      </a:solidFill>
+                      <a:prstDash val="solid"/>
+                      <a:round/>
+                      <a:headEnd type="none" w="med" len="med"/>
+                      <a:tailEnd type="none" w="med" len="med"/>
+                    </a:lnR>
+                    <a:lnT w="12700" cap="flat" cmpd="sng" algn="ctr">
+                      <a:solidFill>
+                        <a:srgbClr val="FFFFFF"/>
+                      </a:solidFill>
+                      <a:prstDash val="solid"/>
+                      <a:round/>
+                      <a:headEnd type="none" w="med" len="med"/>
+                      <a:tailEnd type="none" w="med" len="med"/>
+                    </a:lnT>
+                    <a:lnB w="12700" cap="flat" cmpd="sng" algn="ctr">
+                      <a:solidFill>
+                        <a:srgbClr val="FFFFFF"/>
+                      </a:solidFill>
+                      <a:prstDash val="solid"/>
+                      <a:round/>
+                      <a:headEnd type="none" w="med" len="med"/>
+                      <a:tailEnd type="none" w="med" len="med"/>
+                    </a:lnB>
+                  </a:tcPr>
+                </a:tc>
+                <a:tc>
+                  <a:txBody>
+                    <a:bodyPr/>
+                    <a:lstStyle/>
+                    <a:p>
+                      <a:pPr algn="r" indent="0" marL="0">
+                        <a:buNone/>
+                      </a:pPr>
+                      <a:r>
+                        <a:rPr lang="en-US" sz="1250" b="1" dirty="0">
+                          <a:solidFill>
+                            <a:schemeClr val="accent5"/>
+                          </a:solidFill>
+                          <a:latin typeface="Arial" pitchFamily="34" charset="0"/>
+                          <a:ea typeface="Arial" pitchFamily="34" charset="-122"/>
+                          <a:cs typeface="Arial" pitchFamily="34" charset="-120"/>
+                        </a:rPr>
+                        <a:t>+28.450 €</a:t>
                       </a:r>
                       <a:endParaRPr lang="en-US" sz="1250" dirty="0">
                         <a:latin typeface="Arial" charset="0"/>
@@ -8646,7 +9669,7 @@
                 <a:ea typeface="Arial" pitchFamily="34" charset="-122"/>
                 <a:cs typeface="Arial" pitchFamily="34" charset="-120"/>
               </a:rPr>
-              <a:t>Mit 65.000 € Umsatz bleiben im ganzen Haus +9.610 € pro Monat nach Zinsen und Tilgung (KfW-Kredite und Hausbank, ohne Lohn). Die Gastro braucht für Break-even im Haus ca. 33.500 € Umsatz.</a:t>
+              <a:t>Mit 95.635 € Umsatz bleiben im ganzen Haus +18.954 € pro Monat nach Zinsen und Tilgung (KfW-Kredite und Hausbank, ohne Lohn). Die Gastro braucht für Break-even im Haus ca. 33.500 € Umsatz.</a:t>
             </a:r>
             <a:endParaRPr lang="en-US" sz="1300" dirty="0"/>
           </a:p>
@@ -8730,7 +9753,7 @@
             <a:pPr algn="r"/>
             <a:fld id="{F7021451-1387-4CA6-816F-3879F97B5CBC}" type="slidenum">
               <a:rPr b="0" lang="en-US"/>
-              <a:t>12</a:t>
+              <a:t>13</a:t>
             </a:fld>
             <a:endParaRPr lang="en-US"/>
           </a:p>
@@ -8744,9 +9767,9 @@
 </p:sld>
 </file>
 
-<file path=ppt/slides/slide13.xml><?xml version="1.0" encoding="utf-8"?>
+<file path=ppt/slides/slide14.xml><?xml version="1.0" encoding="utf-8"?>
 <p:sld xmlns:a="http://schemas.openxmlformats.org/drawingml/2006/main" xmlns:r="http://schemas.openxmlformats.org/officeDocument/2006/relationships" xmlns:p="http://schemas.openxmlformats.org/presentationml/2006/main">
-  <p:cSld name="Slide 13">
+  <p:cSld name="Slide 14">
     <p:spTree>
       <p:nvGrpSpPr>
         <p:cNvPr id="1" name=""/>
@@ -8840,7 +9863,7 @@
       </p:sp>
       <p:graphicFrame>
         <p:nvGraphicFramePr>
-          <p:cNvPr id="14" name="Tabelle Ausbau"/>
+          <p:cNvPr id="15" name="Tabelle Ausbau"/>
           <p:cNvGraphicFramePr>
             <a:graphicFrameLocks noGrp="1"/>
           </p:cNvGraphicFramePr>
@@ -10827,7 +11850,7 @@
             <a:pPr algn="r"/>
             <a:fld id="{F7021451-1387-4CA6-816F-3879F97B5CBC}" type="slidenum">
               <a:rPr b="0" lang="en-US"/>
-              <a:t>13</a:t>
+              <a:t>14</a:t>
             </a:fld>
             <a:endParaRPr lang="en-US"/>
           </a:p>
@@ -10841,9 +11864,9 @@
 </p:sld>
 </file>
 
-<file path=ppt/slides/slide14.xml><?xml version="1.0" encoding="utf-8"?>
+<file path=ppt/slides/slide15.xml><?xml version="1.0" encoding="utf-8"?>
 <p:sld xmlns:a="http://schemas.openxmlformats.org/drawingml/2006/main" xmlns:r="http://schemas.openxmlformats.org/officeDocument/2006/relationships" xmlns:p="http://schemas.openxmlformats.org/presentationml/2006/main">
-  <p:cSld name="Slide 14">
+  <p:cSld name="Slide 15">
     <p:spTree>
       <p:nvGrpSpPr>
         <p:cNvPr id="1" name=""/>
@@ -11352,1005 +12375,6 @@
               <a:t>Keine Marktdaten für Werlte. Erfahrener Betreiber oder Küchenchef früh gewinnen, Probebetrieb und vorsichtiger Start.</a:t>
             </a:r>
             <a:endParaRPr lang="en-US" sz="1300" dirty="0"/>
-          </a:p>
-        </p:txBody>
-      </p:sp>
-      <p:sp>
-        <p:nvSpPr>
-          <p:cNvPr id="25" name="Slide Number Placeholder 0"/>
-          <p:cNvSpPr>
-            <a:spLocks noGrp="1"/>
-          </p:cNvSpPr>
-          <p:nvPr>
-            <p:ph type="sldNum" sz="quarter" idx="4294967295"/>
-          </p:nvPr>
-        </p:nvSpPr>
-        <p:spPr>
-          <a:xfrm>
-            <a:off x="11183112" y="6446520"/>
-            <a:ext cx="548640" cy="274320"/>
-          </a:xfrm>
-          <a:prstGeom prst="rect">
-            <a:avLst/>
-          </a:prstGeom>
-          <a:extLst>
-            <a:ext uri="{C572A759-6A51-4108-AA02-DFA0A04FC94B}">
-              <ma14:wrappingTextBoxFlag xmlns:ma14="http://schemas.microsoft.com/office/mac/drawingml/2011/main" val="0"/>
-            </a:ext>
-          </a:extLst>
-        </p:spPr>
-        <p:txBody>
-          <a:bodyPr/>
-          <a:lstStyle>
-            <a:lvl1pPr>
-              <a:defRPr sz="1000">
-                <a:solidFill>
-                  <a:schemeClr val="accent4"/>
-                </a:solidFill>
-              </a:defRPr>
-            </a:lvl1pPr>
-          </a:lstStyle>
-          <a:p>
-            <a:pPr algn="r"/>
-            <a:fld id="{F7021451-1387-4CA6-816F-3879F97B5CBC}" type="slidenum">
-              <a:rPr b="0" lang="en-US"/>
-              <a:t>14</a:t>
-            </a:fld>
-            <a:endParaRPr lang="en-US"/>
-          </a:p>
-        </p:txBody>
-      </p:sp>
-    </p:spTree>
-  </p:cSld>
-  <p:clrMapOvr>
-    <a:masterClrMapping/>
-  </p:clrMapOvr>
-</p:sld>
-</file>
-
-<file path=ppt/slides/slide15.xml><?xml version="1.0" encoding="utf-8"?>
-<p:sld xmlns:a="http://schemas.openxmlformats.org/drawingml/2006/main" xmlns:r="http://schemas.openxmlformats.org/officeDocument/2006/relationships" xmlns:p="http://schemas.openxmlformats.org/presentationml/2006/main">
-  <p:cSld name="Slide 15">
-    <p:spTree>
-      <p:nvGrpSpPr>
-        <p:cNvPr id="1" name=""/>
-        <p:cNvGrpSpPr/>
-        <p:nvPr/>
-      </p:nvGrpSpPr>
-      <p:grpSpPr>
-        <a:xfrm>
-          <a:off x="0" y="0"/>
-          <a:ext cx="0" cy="0"/>
-          <a:chOff x="0" y="0"/>
-          <a:chExt cx="0" cy="0"/>
-        </a:xfrm>
-      </p:grpSpPr>
-      <p:sp>
-        <p:nvSpPr>
-          <p:cNvPr id="2" name="Text 1"/>
-          <p:cNvSpPr/>
-          <p:nvPr>
-            <p:ph idx="101" type="title" hasCustomPrompt="1"/>
-          </p:nvPr>
-        </p:nvSpPr>
-        <p:spPr>
-          <a:xfrm>
-            <a:off x="548640" y="320040"/>
-            <a:ext cx="11091672" cy="822960"/>
-          </a:xfrm>
-          <a:prstGeom prst="rect">
-            <a:avLst/>
-          </a:prstGeom>
-          <a:noFill/>
-          <a:ln/>
-        </p:spPr>
-        <p:txBody>
-          <a:bodyPr wrap="square" lIns="0" tIns="0" rIns="0" bIns="0" rtlCol="0" anchor="ctr"/>
-          <a:lstStyle/>
-          <a:p>
-            <a:pPr algn="l" indent="0" marL="0">
-              <a:buNone/>
-            </a:pPr>
-            <a:r>
-              <a:rPr lang="en-US" sz="2700" dirty="0">
-                <a:solidFill>
-                  <a:schemeClr val="accent1"/>
-                </a:solidFill>
-                <a:latin typeface="Georgia" pitchFamily="34" charset="0"/>
-                <a:ea typeface="Georgia" pitchFamily="34" charset="-122"/>
-                <a:cs typeface="Georgia" pitchFamily="34" charset="-120"/>
-              </a:rPr>
-              <a:t>Nächste Schritte für die Gastro</a:t>
-            </a:r>
-            <a:endParaRPr lang="en-US" sz="2700" dirty="0"/>
-          </a:p>
-        </p:txBody>
-      </p:sp>
-      <p:sp>
-        <p:nvSpPr>
-          <p:cNvPr id="3" name="Zielgruppe"/>
-          <p:cNvSpPr txBox="1"/>
-          <p:nvPr/>
-        </p:nvSpPr>
-        <p:spPr>
-          <a:xfrm>
-            <a:off x="548640" y="6446520"/>
-            <a:ext cx="5486400" cy="274320"/>
-          </a:xfrm>
-          <a:prstGeom prst="rect">
-            <a:avLst/>
-          </a:prstGeom>
-          <a:noFill/>
-          <a:ln/>
-        </p:spPr>
-        <p:txBody>
-          <a:bodyPr wrap="square" lIns="0" tIns="0" rIns="0" bIns="0" rtlCol="0" anchor="ctr"/>
-          <a:lstStyle/>
-          <a:p>
-            <a:pPr indent="0" marL="0">
-              <a:buNone/>
-            </a:pPr>
-            <a:r>
-              <a:rPr lang="en-US" sz="1000" dirty="0">
-                <a:solidFill>
-                  <a:schemeClr val="accent4"/>
-                </a:solidFill>
-              </a:rPr>
-              <a:t>Für Stadt und Bank</a:t>
-            </a:r>
-            <a:endParaRPr lang="en-US" sz="1000" dirty="0"/>
-          </a:p>
-        </p:txBody>
-      </p:sp>
-      <p:sp>
-        <p:nvSpPr>
-          <p:cNvPr id="5" name="Schritt 1"/>
-          <p:cNvSpPr/>
-          <p:nvPr/>
-        </p:nvSpPr>
-        <p:spPr>
-          <a:xfrm>
-            <a:off x="548640" y="1371600"/>
-            <a:ext cx="502920" cy="502920"/>
-          </a:xfrm>
-          <a:prstGeom prst="ellipse">
-            <a:avLst/>
-          </a:prstGeom>
-          <a:solidFill>
-            <a:schemeClr val="accent2"/>
-          </a:solidFill>
-          <a:ln w="12700">
-            <a:solidFill>
-              <a:schemeClr val="bg1"/>
-            </a:solidFill>
-            <a:prstDash val="solid"/>
-          </a:ln>
-        </p:spPr>
-      </p:sp>
-      <p:sp>
-        <p:nvSpPr>
-          <p:cNvPr id="6" name="Text 3"/>
-          <p:cNvSpPr txBox="1"/>
-          <p:nvPr/>
-        </p:nvSpPr>
-        <p:spPr>
-          <a:xfrm>
-            <a:off x="548640" y="1371600"/>
-            <a:ext cx="502920" cy="502920"/>
-          </a:xfrm>
-          <a:prstGeom prst="rect">
-            <a:avLst/>
-          </a:prstGeom>
-          <a:noFill/>
-          <a:ln/>
-        </p:spPr>
-        <p:txBody>
-          <a:bodyPr wrap="square" lIns="0" tIns="0" rIns="0" bIns="0" rtlCol="0" anchor="ctr"/>
-          <a:lstStyle/>
-          <a:p>
-            <a:pPr algn="ctr" indent="0" marL="0">
-              <a:buNone/>
-            </a:pPr>
-            <a:r>
-              <a:rPr lang="en-US" sz="1600" b="1" dirty="0">
-                <a:solidFill>
-                  <a:schemeClr val="bg1"/>
-                </a:solidFill>
-                <a:latin typeface="Arial" pitchFamily="34" charset="0"/>
-                <a:ea typeface="Arial" pitchFamily="34" charset="-122"/>
-                <a:cs typeface="Arial" pitchFamily="34" charset="-120"/>
-              </a:rPr>
-              <a:t>1</a:t>
-            </a:r>
-            <a:endParaRPr lang="en-US" sz="1600" dirty="0"/>
-          </a:p>
-        </p:txBody>
-      </p:sp>
-      <p:sp>
-        <p:nvSpPr>
-          <p:cNvPr id="7" name="Text 4"/>
-          <p:cNvSpPr txBox="1"/>
-          <p:nvPr/>
-        </p:nvSpPr>
-        <p:spPr>
-          <a:xfrm>
-            <a:off x="1325880" y="1389888"/>
-            <a:ext cx="1645920" cy="457200"/>
-          </a:xfrm>
-          <a:prstGeom prst="rect">
-            <a:avLst/>
-          </a:prstGeom>
-          <a:noFill/>
-          <a:ln/>
-        </p:spPr>
-        <p:txBody>
-          <a:bodyPr wrap="square" lIns="0" tIns="0" rIns="0" bIns="0" rtlCol="0" anchor="ctr"/>
-          <a:lstStyle/>
-          <a:p>
-            <a:pPr indent="0" marL="0">
-              <a:buNone/>
-            </a:pPr>
-            <a:r>
-              <a:rPr lang="en-US" sz="1700" b="1" dirty="0">
-                <a:solidFill>
-                  <a:schemeClr val="accent1"/>
-                </a:solidFill>
-                <a:latin typeface="Arial" pitchFamily="34" charset="0"/>
-                <a:ea typeface="Arial" pitchFamily="34" charset="-122"/>
-                <a:cs typeface="Arial" pitchFamily="34" charset="-120"/>
-              </a:rPr>
-              <a:t>Jetzt</a:t>
-            </a:r>
-            <a:endParaRPr lang="en-US" sz="1700" dirty="0"/>
-          </a:p>
-        </p:txBody>
-      </p:sp>
-      <p:sp>
-        <p:nvSpPr>
-          <p:cNvPr id="8" name="Text 5"/>
-          <p:cNvSpPr txBox="1"/>
-          <p:nvPr/>
-        </p:nvSpPr>
-        <p:spPr>
-          <a:xfrm>
-            <a:off x="3017520" y="1389888"/>
-            <a:ext cx="8229600" cy="457200"/>
-          </a:xfrm>
-          <a:prstGeom prst="rect">
-            <a:avLst/>
-          </a:prstGeom>
-          <a:noFill/>
-          <a:ln/>
-        </p:spPr>
-        <p:txBody>
-          <a:bodyPr wrap="square" lIns="0" tIns="0" rIns="0" bIns="0" rtlCol="0" anchor="ctr"/>
-          <a:lstStyle/>
-          <a:p>
-            <a:pPr indent="0" marL="0">
-              <a:buNone/>
-            </a:pPr>
-            <a:r>
-              <a:rPr lang="en-US" sz="1500" dirty="0">
-                <a:solidFill>
-                  <a:schemeClr val="tx1"/>
-                </a:solidFill>
-                <a:latin typeface="Arial" pitchFamily="34" charset="0"/>
-                <a:ea typeface="Arial" pitchFamily="34" charset="-122"/>
-                <a:cs typeface="Arial" pitchFamily="34" charset="-120"/>
-              </a:rPr>
-              <a:t>Name, Marke und Zielgruppe festlegen, Betreiber oder Küchenchef ansprechen</a:t>
-            </a:r>
-            <a:endParaRPr lang="en-US" sz="1500" dirty="0"/>
-          </a:p>
-        </p:txBody>
-      </p:sp>
-      <p:sp>
-        <p:nvSpPr>
-          <p:cNvPr id="9" name="Schritt 2"/>
-          <p:cNvSpPr/>
-          <p:nvPr/>
-        </p:nvSpPr>
-        <p:spPr>
-          <a:xfrm>
-            <a:off x="548640" y="2148840"/>
-            <a:ext cx="502920" cy="502920"/>
-          </a:xfrm>
-          <a:prstGeom prst="ellipse">
-            <a:avLst/>
-          </a:prstGeom>
-          <a:solidFill>
-            <a:schemeClr val="accent2"/>
-          </a:solidFill>
-          <a:ln w="12700">
-            <a:solidFill>
-              <a:schemeClr val="bg1"/>
-            </a:solidFill>
-            <a:prstDash val="solid"/>
-          </a:ln>
-        </p:spPr>
-      </p:sp>
-      <p:sp>
-        <p:nvSpPr>
-          <p:cNvPr id="10" name="Text 7"/>
-          <p:cNvSpPr txBox="1"/>
-          <p:nvPr/>
-        </p:nvSpPr>
-        <p:spPr>
-          <a:xfrm>
-            <a:off x="548640" y="2148840"/>
-            <a:ext cx="502920" cy="502920"/>
-          </a:xfrm>
-          <a:prstGeom prst="rect">
-            <a:avLst/>
-          </a:prstGeom>
-          <a:noFill/>
-          <a:ln/>
-        </p:spPr>
-        <p:txBody>
-          <a:bodyPr wrap="square" lIns="0" tIns="0" rIns="0" bIns="0" rtlCol="0" anchor="ctr"/>
-          <a:lstStyle/>
-          <a:p>
-            <a:pPr algn="ctr" indent="0" marL="0">
-              <a:buNone/>
-            </a:pPr>
-            <a:r>
-              <a:rPr lang="en-US" sz="1600" b="1" dirty="0">
-                <a:solidFill>
-                  <a:schemeClr val="bg1"/>
-                </a:solidFill>
-                <a:latin typeface="Arial" pitchFamily="34" charset="0"/>
-                <a:ea typeface="Arial" pitchFamily="34" charset="-122"/>
-                <a:cs typeface="Arial" pitchFamily="34" charset="-120"/>
-              </a:rPr>
-              <a:t>2</a:t>
-            </a:r>
-            <a:endParaRPr lang="en-US" sz="1600" dirty="0"/>
-          </a:p>
-        </p:txBody>
-      </p:sp>
-      <p:sp>
-        <p:nvSpPr>
-          <p:cNvPr id="11" name="Text 8"/>
-          <p:cNvSpPr txBox="1"/>
-          <p:nvPr/>
-        </p:nvSpPr>
-        <p:spPr>
-          <a:xfrm>
-            <a:off x="1325880" y="2167128"/>
-            <a:ext cx="1645920" cy="457200"/>
-          </a:xfrm>
-          <a:prstGeom prst="rect">
-            <a:avLst/>
-          </a:prstGeom>
-          <a:noFill/>
-          <a:ln/>
-        </p:spPr>
-        <p:txBody>
-          <a:bodyPr wrap="square" lIns="0" tIns="0" rIns="0" bIns="0" rtlCol="0" anchor="ctr"/>
-          <a:lstStyle/>
-          <a:p>
-            <a:pPr indent="0" marL="0">
-              <a:buNone/>
-            </a:pPr>
-            <a:r>
-              <a:rPr lang="en-US" sz="1700" b="1" dirty="0">
-                <a:solidFill>
-                  <a:schemeClr val="accent1"/>
-                </a:solidFill>
-                <a:latin typeface="Arial" pitchFamily="34" charset="0"/>
-                <a:ea typeface="Arial" pitchFamily="34" charset="-122"/>
-                <a:cs typeface="Arial" pitchFamily="34" charset="-120"/>
-              </a:rPr>
-              <a:t>Q4 2026</a:t>
-            </a:r>
-            <a:endParaRPr lang="en-US" sz="1700" dirty="0"/>
-          </a:p>
-        </p:txBody>
-      </p:sp>
-      <p:sp>
-        <p:nvSpPr>
-          <p:cNvPr id="12" name="Text 9"/>
-          <p:cNvSpPr txBox="1"/>
-          <p:nvPr/>
-        </p:nvSpPr>
-        <p:spPr>
-          <a:xfrm>
-            <a:off x="3017520" y="2167128"/>
-            <a:ext cx="8229600" cy="457200"/>
-          </a:xfrm>
-          <a:prstGeom prst="rect">
-            <a:avLst/>
-          </a:prstGeom>
-          <a:noFill/>
-          <a:ln/>
-        </p:spPr>
-        <p:txBody>
-          <a:bodyPr wrap="square" lIns="0" tIns="0" rIns="0" bIns="0" rtlCol="0" anchor="ctr"/>
-          <a:lstStyle/>
-          <a:p>
-            <a:pPr indent="0" marL="0">
-              <a:buNone/>
-            </a:pPr>
-            <a:r>
-              <a:rPr lang="en-US" sz="1500" dirty="0">
-                <a:solidFill>
-                  <a:schemeClr val="tx1"/>
-                </a:solidFill>
-                <a:latin typeface="Arial" pitchFamily="34" charset="0"/>
-                <a:ea typeface="Arial" pitchFamily="34" charset="-122"/>
-                <a:cs typeface="Arial" pitchFamily="34" charset="-120"/>
-              </a:rPr>
-              <a:t>Gastro-Fachplaner: Küche, Lüftung, Schallschutz, genaue Plätze</a:t>
-            </a:r>
-            <a:endParaRPr lang="en-US" sz="1500" dirty="0"/>
-          </a:p>
-        </p:txBody>
-      </p:sp>
-      <p:sp>
-        <p:nvSpPr>
-          <p:cNvPr id="13" name="Schritt 3"/>
-          <p:cNvSpPr/>
-          <p:nvPr/>
-        </p:nvSpPr>
-        <p:spPr>
-          <a:xfrm>
-            <a:off x="548640" y="2926080"/>
-            <a:ext cx="502920" cy="502920"/>
-          </a:xfrm>
-          <a:prstGeom prst="ellipse">
-            <a:avLst/>
-          </a:prstGeom>
-          <a:solidFill>
-            <a:schemeClr val="accent2"/>
-          </a:solidFill>
-          <a:ln w="12700">
-            <a:solidFill>
-              <a:schemeClr val="bg1"/>
-            </a:solidFill>
-            <a:prstDash val="solid"/>
-          </a:ln>
-        </p:spPr>
-      </p:sp>
-      <p:sp>
-        <p:nvSpPr>
-          <p:cNvPr id="14" name="Text 11"/>
-          <p:cNvSpPr txBox="1"/>
-          <p:nvPr/>
-        </p:nvSpPr>
-        <p:spPr>
-          <a:xfrm>
-            <a:off x="548640" y="2926080"/>
-            <a:ext cx="502920" cy="502920"/>
-          </a:xfrm>
-          <a:prstGeom prst="rect">
-            <a:avLst/>
-          </a:prstGeom>
-          <a:noFill/>
-          <a:ln/>
-        </p:spPr>
-        <p:txBody>
-          <a:bodyPr wrap="square" lIns="0" tIns="0" rIns="0" bIns="0" rtlCol="0" anchor="ctr"/>
-          <a:lstStyle/>
-          <a:p>
-            <a:pPr algn="ctr" indent="0" marL="0">
-              <a:buNone/>
-            </a:pPr>
-            <a:r>
-              <a:rPr lang="en-US" sz="1600" b="1" dirty="0">
-                <a:solidFill>
-                  <a:schemeClr val="bg1"/>
-                </a:solidFill>
-                <a:latin typeface="Arial" pitchFamily="34" charset="0"/>
-                <a:ea typeface="Arial" pitchFamily="34" charset="-122"/>
-                <a:cs typeface="Arial" pitchFamily="34" charset="-120"/>
-              </a:rPr>
-              <a:t>3</a:t>
-            </a:r>
-            <a:endParaRPr lang="en-US" sz="1600" dirty="0"/>
-          </a:p>
-        </p:txBody>
-      </p:sp>
-      <p:sp>
-        <p:nvSpPr>
-          <p:cNvPr id="15" name="Text 12"/>
-          <p:cNvSpPr txBox="1"/>
-          <p:nvPr/>
-        </p:nvSpPr>
-        <p:spPr>
-          <a:xfrm>
-            <a:off x="1325880" y="2944368"/>
-            <a:ext cx="1645920" cy="457200"/>
-          </a:xfrm>
-          <a:prstGeom prst="rect">
-            <a:avLst/>
-          </a:prstGeom>
-          <a:noFill/>
-          <a:ln/>
-        </p:spPr>
-        <p:txBody>
-          <a:bodyPr wrap="square" lIns="0" tIns="0" rIns="0" bIns="0" rtlCol="0" anchor="ctr"/>
-          <a:lstStyle/>
-          <a:p>
-            <a:pPr indent="0" marL="0">
-              <a:buNone/>
-            </a:pPr>
-            <a:r>
-              <a:rPr lang="en-US" sz="1700" b="1" dirty="0">
-                <a:solidFill>
-                  <a:schemeClr val="accent1"/>
-                </a:solidFill>
-                <a:latin typeface="Arial" pitchFamily="34" charset="0"/>
-                <a:ea typeface="Arial" pitchFamily="34" charset="-122"/>
-                <a:cs typeface="Arial" pitchFamily="34" charset="-120"/>
-              </a:rPr>
-              <a:t>Q1 2027</a:t>
-            </a:r>
-            <a:endParaRPr lang="en-US" sz="1700" dirty="0"/>
-          </a:p>
-        </p:txBody>
-      </p:sp>
-      <p:sp>
-        <p:nvSpPr>
-          <p:cNvPr id="16" name="Text 13"/>
-          <p:cNvSpPr txBox="1"/>
-          <p:nvPr/>
-        </p:nvSpPr>
-        <p:spPr>
-          <a:xfrm>
-            <a:off x="3017520" y="2944368"/>
-            <a:ext cx="8229600" cy="457200"/>
-          </a:xfrm>
-          <a:prstGeom prst="rect">
-            <a:avLst/>
-          </a:prstGeom>
-          <a:noFill/>
-          <a:ln/>
-        </p:spPr>
-        <p:txBody>
-          <a:bodyPr wrap="square" lIns="0" tIns="0" rIns="0" bIns="0" rtlCol="0" anchor="ctr"/>
-          <a:lstStyle/>
-          <a:p>
-            <a:pPr indent="0" marL="0">
-              <a:buNone/>
-            </a:pPr>
-            <a:r>
-              <a:rPr lang="en-US" sz="1500" dirty="0">
-                <a:solidFill>
-                  <a:schemeClr val="tx1"/>
-                </a:solidFill>
-                <a:latin typeface="Arial" pitchFamily="34" charset="0"/>
-                <a:ea typeface="Arial" pitchFamily="34" charset="-122"/>
-                <a:cs typeface="Arial" pitchFamily="34" charset="-120"/>
-              </a:rPr>
-              <a:t>Angebote für Ausbau einholen, Budget prüfen (190.000 €)</a:t>
-            </a:r>
-            <a:endParaRPr lang="en-US" sz="1500" dirty="0"/>
-          </a:p>
-        </p:txBody>
-      </p:sp>
-      <p:sp>
-        <p:nvSpPr>
-          <p:cNvPr id="17" name="Schritt 4"/>
-          <p:cNvSpPr/>
-          <p:nvPr/>
-        </p:nvSpPr>
-        <p:spPr>
-          <a:xfrm>
-            <a:off x="548640" y="3703320"/>
-            <a:ext cx="502920" cy="502920"/>
-          </a:xfrm>
-          <a:prstGeom prst="ellipse">
-            <a:avLst/>
-          </a:prstGeom>
-          <a:solidFill>
-            <a:schemeClr val="accent2"/>
-          </a:solidFill>
-          <a:ln w="12700">
-            <a:solidFill>
-              <a:schemeClr val="bg1"/>
-            </a:solidFill>
-            <a:prstDash val="solid"/>
-          </a:ln>
-        </p:spPr>
-      </p:sp>
-      <p:sp>
-        <p:nvSpPr>
-          <p:cNvPr id="18" name="Text 15"/>
-          <p:cNvSpPr txBox="1"/>
-          <p:nvPr/>
-        </p:nvSpPr>
-        <p:spPr>
-          <a:xfrm>
-            <a:off x="548640" y="3703320"/>
-            <a:ext cx="502920" cy="502920"/>
-          </a:xfrm>
-          <a:prstGeom prst="rect">
-            <a:avLst/>
-          </a:prstGeom>
-          <a:noFill/>
-          <a:ln/>
-        </p:spPr>
-        <p:txBody>
-          <a:bodyPr wrap="square" lIns="0" tIns="0" rIns="0" bIns="0" rtlCol="0" anchor="ctr"/>
-          <a:lstStyle/>
-          <a:p>
-            <a:pPr algn="ctr" indent="0" marL="0">
-              <a:buNone/>
-            </a:pPr>
-            <a:r>
-              <a:rPr lang="en-US" sz="1600" b="1" dirty="0">
-                <a:solidFill>
-                  <a:schemeClr val="bg1"/>
-                </a:solidFill>
-                <a:latin typeface="Arial" pitchFamily="34" charset="0"/>
-                <a:ea typeface="Arial" pitchFamily="34" charset="-122"/>
-                <a:cs typeface="Arial" pitchFamily="34" charset="-120"/>
-              </a:rPr>
-              <a:t>4</a:t>
-            </a:r>
-            <a:endParaRPr lang="en-US" sz="1600" dirty="0"/>
-          </a:p>
-        </p:txBody>
-      </p:sp>
-      <p:sp>
-        <p:nvSpPr>
-          <p:cNvPr id="19" name="Text 16"/>
-          <p:cNvSpPr txBox="1"/>
-          <p:nvPr/>
-        </p:nvSpPr>
-        <p:spPr>
-          <a:xfrm>
-            <a:off x="1325880" y="3721608"/>
-            <a:ext cx="1645920" cy="457200"/>
-          </a:xfrm>
-          <a:prstGeom prst="rect">
-            <a:avLst/>
-          </a:prstGeom>
-          <a:noFill/>
-          <a:ln/>
-        </p:spPr>
-        <p:txBody>
-          <a:bodyPr wrap="square" lIns="0" tIns="0" rIns="0" bIns="0" rtlCol="0" anchor="ctr"/>
-          <a:lstStyle/>
-          <a:p>
-            <a:pPr indent="0" marL="0">
-              <a:buNone/>
-            </a:pPr>
-            <a:r>
-              <a:rPr lang="en-US" sz="1700" b="1" dirty="0">
-                <a:solidFill>
-                  <a:schemeClr val="accent1"/>
-                </a:solidFill>
-                <a:latin typeface="Arial" pitchFamily="34" charset="0"/>
-                <a:ea typeface="Arial" pitchFamily="34" charset="-122"/>
-                <a:cs typeface="Arial" pitchFamily="34" charset="-120"/>
-              </a:rPr>
-              <a:t>2027</a:t>
-            </a:r>
-            <a:endParaRPr lang="en-US" sz="1700" dirty="0"/>
-          </a:p>
-        </p:txBody>
-      </p:sp>
-      <p:sp>
-        <p:nvSpPr>
-          <p:cNvPr id="20" name="Text 17"/>
-          <p:cNvSpPr txBox="1"/>
-          <p:nvPr/>
-        </p:nvSpPr>
-        <p:spPr>
-          <a:xfrm>
-            <a:off x="3017520" y="3721608"/>
-            <a:ext cx="8229600" cy="457200"/>
-          </a:xfrm>
-          <a:prstGeom prst="rect">
-            <a:avLst/>
-          </a:prstGeom>
-          <a:noFill/>
-          <a:ln/>
-        </p:spPr>
-        <p:txBody>
-          <a:bodyPr wrap="square" lIns="0" tIns="0" rIns="0" bIns="0" rtlCol="0" anchor="ctr"/>
-          <a:lstStyle/>
-          <a:p>
-            <a:pPr indent="0" marL="0">
-              <a:buNone/>
-            </a:pPr>
-            <a:r>
-              <a:rPr lang="en-US" sz="1500" dirty="0">
-                <a:solidFill>
-                  <a:schemeClr val="tx1"/>
-                </a:solidFill>
-                <a:latin typeface="Arial" pitchFamily="34" charset="0"/>
-                <a:ea typeface="Arial" pitchFamily="34" charset="-122"/>
-                <a:cs typeface="Arial" pitchFamily="34" charset="-120"/>
-              </a:rPr>
-              <a:t>Innenarchitektur und Möbel bestellen, Speisekarte und Preise kalkulieren</a:t>
-            </a:r>
-            <a:endParaRPr lang="en-US" sz="1500" dirty="0"/>
-          </a:p>
-        </p:txBody>
-      </p:sp>
-      <p:sp>
-        <p:nvSpPr>
-          <p:cNvPr id="21" name="Schritt 5"/>
-          <p:cNvSpPr/>
-          <p:nvPr/>
-        </p:nvSpPr>
-        <p:spPr>
-          <a:xfrm>
-            <a:off x="548640" y="4480560"/>
-            <a:ext cx="502920" cy="502920"/>
-          </a:xfrm>
-          <a:prstGeom prst="ellipse">
-            <a:avLst/>
-          </a:prstGeom>
-          <a:solidFill>
-            <a:schemeClr val="accent2"/>
-          </a:solidFill>
-          <a:ln w="12700">
-            <a:solidFill>
-              <a:schemeClr val="bg1"/>
-            </a:solidFill>
-            <a:prstDash val="solid"/>
-          </a:ln>
-        </p:spPr>
-      </p:sp>
-      <p:sp>
-        <p:nvSpPr>
-          <p:cNvPr id="22" name="Text 19"/>
-          <p:cNvSpPr txBox="1"/>
-          <p:nvPr/>
-        </p:nvSpPr>
-        <p:spPr>
-          <a:xfrm>
-            <a:off x="548640" y="4480560"/>
-            <a:ext cx="502920" cy="502920"/>
-          </a:xfrm>
-          <a:prstGeom prst="rect">
-            <a:avLst/>
-          </a:prstGeom>
-          <a:noFill/>
-          <a:ln/>
-        </p:spPr>
-        <p:txBody>
-          <a:bodyPr wrap="square" lIns="0" tIns="0" rIns="0" bIns="0" rtlCol="0" anchor="ctr"/>
-          <a:lstStyle/>
-          <a:p>
-            <a:pPr algn="ctr" indent="0" marL="0">
-              <a:buNone/>
-            </a:pPr>
-            <a:r>
-              <a:rPr lang="en-US" sz="1600" b="1" dirty="0">
-                <a:solidFill>
-                  <a:schemeClr val="bg1"/>
-                </a:solidFill>
-                <a:latin typeface="Arial" pitchFamily="34" charset="0"/>
-                <a:ea typeface="Arial" pitchFamily="34" charset="-122"/>
-                <a:cs typeface="Arial" pitchFamily="34" charset="-120"/>
-              </a:rPr>
-              <a:t>5</a:t>
-            </a:r>
-            <a:endParaRPr lang="en-US" sz="1600" dirty="0"/>
-          </a:p>
-        </p:txBody>
-      </p:sp>
-      <p:sp>
-        <p:nvSpPr>
-          <p:cNvPr id="23" name="Text 20"/>
-          <p:cNvSpPr txBox="1"/>
-          <p:nvPr/>
-        </p:nvSpPr>
-        <p:spPr>
-          <a:xfrm>
-            <a:off x="1325880" y="4498848"/>
-            <a:ext cx="1645920" cy="457200"/>
-          </a:xfrm>
-          <a:prstGeom prst="rect">
-            <a:avLst/>
-          </a:prstGeom>
-          <a:noFill/>
-          <a:ln/>
-        </p:spPr>
-        <p:txBody>
-          <a:bodyPr wrap="square" lIns="0" tIns="0" rIns="0" bIns="0" rtlCol="0" anchor="ctr"/>
-          <a:lstStyle/>
-          <a:p>
-            <a:pPr indent="0" marL="0">
-              <a:buNone/>
-            </a:pPr>
-            <a:r>
-              <a:rPr lang="en-US" sz="1700" b="1" dirty="0">
-                <a:solidFill>
-                  <a:schemeClr val="accent1"/>
-                </a:solidFill>
-                <a:latin typeface="Arial" pitchFamily="34" charset="0"/>
-                <a:ea typeface="Arial" pitchFamily="34" charset="-122"/>
-                <a:cs typeface="Arial" pitchFamily="34" charset="-120"/>
-              </a:rPr>
-              <a:t>Mitte 2028</a:t>
-            </a:r>
-            <a:endParaRPr lang="en-US" sz="1700" dirty="0"/>
-          </a:p>
-        </p:txBody>
-      </p:sp>
-      <p:sp>
-        <p:nvSpPr>
-          <p:cNvPr id="24" name="Text 21"/>
-          <p:cNvSpPr txBox="1"/>
-          <p:nvPr/>
-        </p:nvSpPr>
-        <p:spPr>
-          <a:xfrm>
-            <a:off x="3017520" y="4498848"/>
-            <a:ext cx="8229600" cy="457200"/>
-          </a:xfrm>
-          <a:prstGeom prst="rect">
-            <a:avLst/>
-          </a:prstGeom>
-          <a:noFill/>
-          <a:ln/>
-        </p:spPr>
-        <p:txBody>
-          <a:bodyPr wrap="square" lIns="0" tIns="0" rIns="0" bIns="0" rtlCol="0" anchor="ctr"/>
-          <a:lstStyle/>
-          <a:p>
-            <a:pPr indent="0" marL="0">
-              <a:buNone/>
-            </a:pPr>
-            <a:r>
-              <a:rPr lang="en-US" sz="1500" dirty="0">
-                <a:solidFill>
-                  <a:schemeClr val="tx1"/>
-                </a:solidFill>
-                <a:latin typeface="Arial" pitchFamily="34" charset="0"/>
-                <a:ea typeface="Arial" pitchFamily="34" charset="-122"/>
-                <a:cs typeface="Arial" pitchFamily="34" charset="-120"/>
-              </a:rPr>
-              <a:t>Personal einstellen, Probebetrieb, Genehmigungen</a:t>
-            </a:r>
-            <a:endParaRPr lang="en-US" sz="1500" dirty="0"/>
-          </a:p>
-        </p:txBody>
-      </p:sp>
-      <p:sp>
-        <p:nvSpPr>
-          <p:cNvPr id="25" name="Schritt 6"/>
-          <p:cNvSpPr/>
-          <p:nvPr/>
-        </p:nvSpPr>
-        <p:spPr>
-          <a:xfrm>
-            <a:off x="548640" y="5257800"/>
-            <a:ext cx="502920" cy="502920"/>
-          </a:xfrm>
-          <a:prstGeom prst="ellipse">
-            <a:avLst/>
-          </a:prstGeom>
-          <a:solidFill>
-            <a:schemeClr val="accent1"/>
-          </a:solidFill>
-          <a:ln w="12700">
-            <a:solidFill>
-              <a:schemeClr val="bg1"/>
-            </a:solidFill>
-            <a:prstDash val="solid"/>
-          </a:ln>
-        </p:spPr>
-      </p:sp>
-      <p:sp>
-        <p:nvSpPr>
-          <p:cNvPr id="26" name="Text 23"/>
-          <p:cNvSpPr txBox="1"/>
-          <p:nvPr/>
-        </p:nvSpPr>
-        <p:spPr>
-          <a:xfrm>
-            <a:off x="548640" y="5257800"/>
-            <a:ext cx="502920" cy="502920"/>
-          </a:xfrm>
-          <a:prstGeom prst="rect">
-            <a:avLst/>
-          </a:prstGeom>
-          <a:noFill/>
-          <a:ln/>
-        </p:spPr>
-        <p:txBody>
-          <a:bodyPr wrap="square" lIns="0" tIns="0" rIns="0" bIns="0" rtlCol="0" anchor="ctr"/>
-          <a:lstStyle/>
-          <a:p>
-            <a:pPr algn="ctr" indent="0" marL="0">
-              <a:buNone/>
-            </a:pPr>
-            <a:r>
-              <a:rPr lang="en-US" sz="1600" b="1" dirty="0">
-                <a:solidFill>
-                  <a:schemeClr val="bg1"/>
-                </a:solidFill>
-                <a:latin typeface="Arial" pitchFamily="34" charset="0"/>
-                <a:ea typeface="Arial" pitchFamily="34" charset="-122"/>
-                <a:cs typeface="Arial" pitchFamily="34" charset="-120"/>
-              </a:rPr>
-              <a:t>6</a:t>
-            </a:r>
-            <a:endParaRPr lang="en-US" sz="1600" dirty="0"/>
-          </a:p>
-        </p:txBody>
-      </p:sp>
-      <p:sp>
-        <p:nvSpPr>
-          <p:cNvPr id="27" name="Text 24"/>
-          <p:cNvSpPr txBox="1"/>
-          <p:nvPr/>
-        </p:nvSpPr>
-        <p:spPr>
-          <a:xfrm>
-            <a:off x="1325880" y="5276088"/>
-            <a:ext cx="1645920" cy="457200"/>
-          </a:xfrm>
-          <a:prstGeom prst="rect">
-            <a:avLst/>
-          </a:prstGeom>
-          <a:noFill/>
-          <a:ln/>
-        </p:spPr>
-        <p:txBody>
-          <a:bodyPr wrap="square" lIns="0" tIns="0" rIns="0" bIns="0" rtlCol="0" anchor="ctr"/>
-          <a:lstStyle/>
-          <a:p>
-            <a:pPr indent="0" marL="0">
-              <a:buNone/>
-            </a:pPr>
-            <a:r>
-              <a:rPr lang="en-US" sz="1700" b="1" dirty="0">
-                <a:solidFill>
-                  <a:schemeClr val="accent1"/>
-                </a:solidFill>
-                <a:latin typeface="Arial" pitchFamily="34" charset="0"/>
-                <a:ea typeface="Arial" pitchFamily="34" charset="-122"/>
-                <a:cs typeface="Arial" pitchFamily="34" charset="-120"/>
-              </a:rPr>
-              <a:t>Ende 2028</a:t>
-            </a:r>
-            <a:endParaRPr lang="en-US" sz="1700" dirty="0"/>
-          </a:p>
-        </p:txBody>
-      </p:sp>
-      <p:sp>
-        <p:nvSpPr>
-          <p:cNvPr id="28" name="Text 25"/>
-          <p:cNvSpPr txBox="1"/>
-          <p:nvPr/>
-        </p:nvSpPr>
-        <p:spPr>
-          <a:xfrm>
-            <a:off x="3017520" y="5276088"/>
-            <a:ext cx="8229600" cy="457200"/>
-          </a:xfrm>
-          <a:prstGeom prst="rect">
-            <a:avLst/>
-          </a:prstGeom>
-          <a:noFill/>
-          <a:ln/>
-        </p:spPr>
-        <p:txBody>
-          <a:bodyPr wrap="square" lIns="0" tIns="0" rIns="0" bIns="0" rtlCol="0" anchor="ctr"/>
-          <a:lstStyle/>
-          <a:p>
-            <a:pPr indent="0" marL="0">
-              <a:buNone/>
-            </a:pPr>
-            <a:r>
-              <a:rPr lang="en-US" sz="1500" dirty="0">
-                <a:solidFill>
-                  <a:schemeClr val="tx1"/>
-                </a:solidFill>
-                <a:latin typeface="Arial" pitchFamily="34" charset="0"/>
-                <a:ea typeface="Arial" pitchFamily="34" charset="-122"/>
-                <a:cs typeface="Arial" pitchFamily="34" charset="-120"/>
-              </a:rPr>
-              <a:t>Eröffnung zusammen mit der neuen Mitte</a:t>
-            </a:r>
-            <a:endParaRPr lang="en-US" sz="1500" dirty="0"/>
           </a:p>
         </p:txBody>
       </p:sp>
@@ -12407,6 +12431,1005 @@
 </p:sld>
 </file>
 
+<file path=ppt/slides/slide16.xml><?xml version="1.0" encoding="utf-8"?>
+<p:sld xmlns:a="http://schemas.openxmlformats.org/drawingml/2006/main" xmlns:r="http://schemas.openxmlformats.org/officeDocument/2006/relationships" xmlns:p="http://schemas.openxmlformats.org/presentationml/2006/main">
+  <p:cSld name="Slide 16">
+    <p:spTree>
+      <p:nvGrpSpPr>
+        <p:cNvPr id="1" name=""/>
+        <p:cNvGrpSpPr/>
+        <p:nvPr/>
+      </p:nvGrpSpPr>
+      <p:grpSpPr>
+        <a:xfrm>
+          <a:off x="0" y="0"/>
+          <a:ext cx="0" cy="0"/>
+          <a:chOff x="0" y="0"/>
+          <a:chExt cx="0" cy="0"/>
+        </a:xfrm>
+      </p:grpSpPr>
+      <p:sp>
+        <p:nvSpPr>
+          <p:cNvPr id="2" name="Text 1"/>
+          <p:cNvSpPr/>
+          <p:nvPr>
+            <p:ph idx="101" type="title" hasCustomPrompt="1"/>
+          </p:nvPr>
+        </p:nvSpPr>
+        <p:spPr>
+          <a:xfrm>
+            <a:off x="548640" y="320040"/>
+            <a:ext cx="11091672" cy="822960"/>
+          </a:xfrm>
+          <a:prstGeom prst="rect">
+            <a:avLst/>
+          </a:prstGeom>
+          <a:noFill/>
+          <a:ln/>
+        </p:spPr>
+        <p:txBody>
+          <a:bodyPr wrap="square" lIns="0" tIns="0" rIns="0" bIns="0" rtlCol="0" anchor="ctr"/>
+          <a:lstStyle/>
+          <a:p>
+            <a:pPr algn="l" indent="0" marL="0">
+              <a:buNone/>
+            </a:pPr>
+            <a:r>
+              <a:rPr lang="en-US" sz="2700" dirty="0">
+                <a:solidFill>
+                  <a:schemeClr val="accent1"/>
+                </a:solidFill>
+                <a:latin typeface="Georgia" pitchFamily="34" charset="0"/>
+                <a:ea typeface="Georgia" pitchFamily="34" charset="-122"/>
+                <a:cs typeface="Georgia" pitchFamily="34" charset="-120"/>
+              </a:rPr>
+              <a:t>Nächste Schritte für die Gastro</a:t>
+            </a:r>
+            <a:endParaRPr lang="en-US" sz="2700" dirty="0"/>
+          </a:p>
+        </p:txBody>
+      </p:sp>
+      <p:sp>
+        <p:nvSpPr>
+          <p:cNvPr id="3" name="Zielgruppe"/>
+          <p:cNvSpPr txBox="1"/>
+          <p:nvPr/>
+        </p:nvSpPr>
+        <p:spPr>
+          <a:xfrm>
+            <a:off x="548640" y="6446520"/>
+            <a:ext cx="5486400" cy="274320"/>
+          </a:xfrm>
+          <a:prstGeom prst="rect">
+            <a:avLst/>
+          </a:prstGeom>
+          <a:noFill/>
+          <a:ln/>
+        </p:spPr>
+        <p:txBody>
+          <a:bodyPr wrap="square" lIns="0" tIns="0" rIns="0" bIns="0" rtlCol="0" anchor="ctr"/>
+          <a:lstStyle/>
+          <a:p>
+            <a:pPr indent="0" marL="0">
+              <a:buNone/>
+            </a:pPr>
+            <a:r>
+              <a:rPr lang="en-US" sz="1000" dirty="0">
+                <a:solidFill>
+                  <a:schemeClr val="accent4"/>
+                </a:solidFill>
+              </a:rPr>
+              <a:t>Für Stadt und Bank</a:t>
+            </a:r>
+            <a:endParaRPr lang="en-US" sz="1000" dirty="0"/>
+          </a:p>
+        </p:txBody>
+      </p:sp>
+      <p:sp>
+        <p:nvSpPr>
+          <p:cNvPr id="5" name="Schritt 1"/>
+          <p:cNvSpPr/>
+          <p:nvPr/>
+        </p:nvSpPr>
+        <p:spPr>
+          <a:xfrm>
+            <a:off x="548640" y="1371600"/>
+            <a:ext cx="502920" cy="502920"/>
+          </a:xfrm>
+          <a:prstGeom prst="ellipse">
+            <a:avLst/>
+          </a:prstGeom>
+          <a:solidFill>
+            <a:schemeClr val="accent2"/>
+          </a:solidFill>
+          <a:ln w="12700">
+            <a:solidFill>
+              <a:schemeClr val="bg1"/>
+            </a:solidFill>
+            <a:prstDash val="solid"/>
+          </a:ln>
+        </p:spPr>
+      </p:sp>
+      <p:sp>
+        <p:nvSpPr>
+          <p:cNvPr id="6" name="Text 3"/>
+          <p:cNvSpPr txBox="1"/>
+          <p:nvPr/>
+        </p:nvSpPr>
+        <p:spPr>
+          <a:xfrm>
+            <a:off x="548640" y="1371600"/>
+            <a:ext cx="502920" cy="502920"/>
+          </a:xfrm>
+          <a:prstGeom prst="rect">
+            <a:avLst/>
+          </a:prstGeom>
+          <a:noFill/>
+          <a:ln/>
+        </p:spPr>
+        <p:txBody>
+          <a:bodyPr wrap="square" lIns="0" tIns="0" rIns="0" bIns="0" rtlCol="0" anchor="ctr"/>
+          <a:lstStyle/>
+          <a:p>
+            <a:pPr algn="ctr" indent="0" marL="0">
+              <a:buNone/>
+            </a:pPr>
+            <a:r>
+              <a:rPr lang="en-US" sz="1600" b="1" dirty="0">
+                <a:solidFill>
+                  <a:schemeClr val="bg1"/>
+                </a:solidFill>
+                <a:latin typeface="Arial" pitchFamily="34" charset="0"/>
+                <a:ea typeface="Arial" pitchFamily="34" charset="-122"/>
+                <a:cs typeface="Arial" pitchFamily="34" charset="-120"/>
+              </a:rPr>
+              <a:t>1</a:t>
+            </a:r>
+            <a:endParaRPr lang="en-US" sz="1600" dirty="0"/>
+          </a:p>
+        </p:txBody>
+      </p:sp>
+      <p:sp>
+        <p:nvSpPr>
+          <p:cNvPr id="7" name="Text 4"/>
+          <p:cNvSpPr txBox="1"/>
+          <p:nvPr/>
+        </p:nvSpPr>
+        <p:spPr>
+          <a:xfrm>
+            <a:off x="1325880" y="1389888"/>
+            <a:ext cx="1645920" cy="457200"/>
+          </a:xfrm>
+          <a:prstGeom prst="rect">
+            <a:avLst/>
+          </a:prstGeom>
+          <a:noFill/>
+          <a:ln/>
+        </p:spPr>
+        <p:txBody>
+          <a:bodyPr wrap="square" lIns="0" tIns="0" rIns="0" bIns="0" rtlCol="0" anchor="ctr"/>
+          <a:lstStyle/>
+          <a:p>
+            <a:pPr indent="0" marL="0">
+              <a:buNone/>
+            </a:pPr>
+            <a:r>
+              <a:rPr lang="en-US" sz="1700" b="1" dirty="0">
+                <a:solidFill>
+                  <a:schemeClr val="accent1"/>
+                </a:solidFill>
+                <a:latin typeface="Arial" pitchFamily="34" charset="0"/>
+                <a:ea typeface="Arial" pitchFamily="34" charset="-122"/>
+                <a:cs typeface="Arial" pitchFamily="34" charset="-120"/>
+              </a:rPr>
+              <a:t>Jetzt</a:t>
+            </a:r>
+            <a:endParaRPr lang="en-US" sz="1700" dirty="0"/>
+          </a:p>
+        </p:txBody>
+      </p:sp>
+      <p:sp>
+        <p:nvSpPr>
+          <p:cNvPr id="8" name="Text 5"/>
+          <p:cNvSpPr txBox="1"/>
+          <p:nvPr/>
+        </p:nvSpPr>
+        <p:spPr>
+          <a:xfrm>
+            <a:off x="3017520" y="1389888"/>
+            <a:ext cx="8229600" cy="457200"/>
+          </a:xfrm>
+          <a:prstGeom prst="rect">
+            <a:avLst/>
+          </a:prstGeom>
+          <a:noFill/>
+          <a:ln/>
+        </p:spPr>
+        <p:txBody>
+          <a:bodyPr wrap="square" lIns="0" tIns="0" rIns="0" bIns="0" rtlCol="0" anchor="ctr"/>
+          <a:lstStyle/>
+          <a:p>
+            <a:pPr indent="0" marL="0">
+              <a:buNone/>
+            </a:pPr>
+            <a:r>
+              <a:rPr lang="en-US" sz="1500" dirty="0">
+                <a:solidFill>
+                  <a:schemeClr val="tx1"/>
+                </a:solidFill>
+                <a:latin typeface="Arial" pitchFamily="34" charset="0"/>
+                <a:ea typeface="Arial" pitchFamily="34" charset="-122"/>
+                <a:cs typeface="Arial" pitchFamily="34" charset="-120"/>
+              </a:rPr>
+              <a:t>Name, Marke und Zielgruppe festlegen, Betreiber oder Küchenchef ansprechen</a:t>
+            </a:r>
+            <a:endParaRPr lang="en-US" sz="1500" dirty="0"/>
+          </a:p>
+        </p:txBody>
+      </p:sp>
+      <p:sp>
+        <p:nvSpPr>
+          <p:cNvPr id="9" name="Schritt 2"/>
+          <p:cNvSpPr/>
+          <p:nvPr/>
+        </p:nvSpPr>
+        <p:spPr>
+          <a:xfrm>
+            <a:off x="548640" y="2148840"/>
+            <a:ext cx="502920" cy="502920"/>
+          </a:xfrm>
+          <a:prstGeom prst="ellipse">
+            <a:avLst/>
+          </a:prstGeom>
+          <a:solidFill>
+            <a:schemeClr val="accent2"/>
+          </a:solidFill>
+          <a:ln w="12700">
+            <a:solidFill>
+              <a:schemeClr val="bg1"/>
+            </a:solidFill>
+            <a:prstDash val="solid"/>
+          </a:ln>
+        </p:spPr>
+      </p:sp>
+      <p:sp>
+        <p:nvSpPr>
+          <p:cNvPr id="10" name="Text 7"/>
+          <p:cNvSpPr txBox="1"/>
+          <p:nvPr/>
+        </p:nvSpPr>
+        <p:spPr>
+          <a:xfrm>
+            <a:off x="548640" y="2148840"/>
+            <a:ext cx="502920" cy="502920"/>
+          </a:xfrm>
+          <a:prstGeom prst="rect">
+            <a:avLst/>
+          </a:prstGeom>
+          <a:noFill/>
+          <a:ln/>
+        </p:spPr>
+        <p:txBody>
+          <a:bodyPr wrap="square" lIns="0" tIns="0" rIns="0" bIns="0" rtlCol="0" anchor="ctr"/>
+          <a:lstStyle/>
+          <a:p>
+            <a:pPr algn="ctr" indent="0" marL="0">
+              <a:buNone/>
+            </a:pPr>
+            <a:r>
+              <a:rPr lang="en-US" sz="1600" b="1" dirty="0">
+                <a:solidFill>
+                  <a:schemeClr val="bg1"/>
+                </a:solidFill>
+                <a:latin typeface="Arial" pitchFamily="34" charset="0"/>
+                <a:ea typeface="Arial" pitchFamily="34" charset="-122"/>
+                <a:cs typeface="Arial" pitchFamily="34" charset="-120"/>
+              </a:rPr>
+              <a:t>2</a:t>
+            </a:r>
+            <a:endParaRPr lang="en-US" sz="1600" dirty="0"/>
+          </a:p>
+        </p:txBody>
+      </p:sp>
+      <p:sp>
+        <p:nvSpPr>
+          <p:cNvPr id="11" name="Text 8"/>
+          <p:cNvSpPr txBox="1"/>
+          <p:nvPr/>
+        </p:nvSpPr>
+        <p:spPr>
+          <a:xfrm>
+            <a:off x="1325880" y="2167128"/>
+            <a:ext cx="1645920" cy="457200"/>
+          </a:xfrm>
+          <a:prstGeom prst="rect">
+            <a:avLst/>
+          </a:prstGeom>
+          <a:noFill/>
+          <a:ln/>
+        </p:spPr>
+        <p:txBody>
+          <a:bodyPr wrap="square" lIns="0" tIns="0" rIns="0" bIns="0" rtlCol="0" anchor="ctr"/>
+          <a:lstStyle/>
+          <a:p>
+            <a:pPr indent="0" marL="0">
+              <a:buNone/>
+            </a:pPr>
+            <a:r>
+              <a:rPr lang="en-US" sz="1700" b="1" dirty="0">
+                <a:solidFill>
+                  <a:schemeClr val="accent1"/>
+                </a:solidFill>
+                <a:latin typeface="Arial" pitchFamily="34" charset="0"/>
+                <a:ea typeface="Arial" pitchFamily="34" charset="-122"/>
+                <a:cs typeface="Arial" pitchFamily="34" charset="-120"/>
+              </a:rPr>
+              <a:t>Q4 2026</a:t>
+            </a:r>
+            <a:endParaRPr lang="en-US" sz="1700" dirty="0"/>
+          </a:p>
+        </p:txBody>
+      </p:sp>
+      <p:sp>
+        <p:nvSpPr>
+          <p:cNvPr id="12" name="Text 9"/>
+          <p:cNvSpPr txBox="1"/>
+          <p:nvPr/>
+        </p:nvSpPr>
+        <p:spPr>
+          <a:xfrm>
+            <a:off x="3017520" y="2167128"/>
+            <a:ext cx="8229600" cy="457200"/>
+          </a:xfrm>
+          <a:prstGeom prst="rect">
+            <a:avLst/>
+          </a:prstGeom>
+          <a:noFill/>
+          <a:ln/>
+        </p:spPr>
+        <p:txBody>
+          <a:bodyPr wrap="square" lIns="0" tIns="0" rIns="0" bIns="0" rtlCol="0" anchor="ctr"/>
+          <a:lstStyle/>
+          <a:p>
+            <a:pPr indent="0" marL="0">
+              <a:buNone/>
+            </a:pPr>
+            <a:r>
+              <a:rPr lang="en-US" sz="1500" dirty="0">
+                <a:solidFill>
+                  <a:schemeClr val="tx1"/>
+                </a:solidFill>
+                <a:latin typeface="Arial" pitchFamily="34" charset="0"/>
+                <a:ea typeface="Arial" pitchFamily="34" charset="-122"/>
+                <a:cs typeface="Arial" pitchFamily="34" charset="-120"/>
+              </a:rPr>
+              <a:t>Gastro-Fachplaner: Küche, Lüftung, Schallschutz, genaue Plätze</a:t>
+            </a:r>
+            <a:endParaRPr lang="en-US" sz="1500" dirty="0"/>
+          </a:p>
+        </p:txBody>
+      </p:sp>
+      <p:sp>
+        <p:nvSpPr>
+          <p:cNvPr id="13" name="Schritt 3"/>
+          <p:cNvSpPr/>
+          <p:nvPr/>
+        </p:nvSpPr>
+        <p:spPr>
+          <a:xfrm>
+            <a:off x="548640" y="2926080"/>
+            <a:ext cx="502920" cy="502920"/>
+          </a:xfrm>
+          <a:prstGeom prst="ellipse">
+            <a:avLst/>
+          </a:prstGeom>
+          <a:solidFill>
+            <a:schemeClr val="accent2"/>
+          </a:solidFill>
+          <a:ln w="12700">
+            <a:solidFill>
+              <a:schemeClr val="bg1"/>
+            </a:solidFill>
+            <a:prstDash val="solid"/>
+          </a:ln>
+        </p:spPr>
+      </p:sp>
+      <p:sp>
+        <p:nvSpPr>
+          <p:cNvPr id="14" name="Text 11"/>
+          <p:cNvSpPr txBox="1"/>
+          <p:nvPr/>
+        </p:nvSpPr>
+        <p:spPr>
+          <a:xfrm>
+            <a:off x="548640" y="2926080"/>
+            <a:ext cx="502920" cy="502920"/>
+          </a:xfrm>
+          <a:prstGeom prst="rect">
+            <a:avLst/>
+          </a:prstGeom>
+          <a:noFill/>
+          <a:ln/>
+        </p:spPr>
+        <p:txBody>
+          <a:bodyPr wrap="square" lIns="0" tIns="0" rIns="0" bIns="0" rtlCol="0" anchor="ctr"/>
+          <a:lstStyle/>
+          <a:p>
+            <a:pPr algn="ctr" indent="0" marL="0">
+              <a:buNone/>
+            </a:pPr>
+            <a:r>
+              <a:rPr lang="en-US" sz="1600" b="1" dirty="0">
+                <a:solidFill>
+                  <a:schemeClr val="bg1"/>
+                </a:solidFill>
+                <a:latin typeface="Arial" pitchFamily="34" charset="0"/>
+                <a:ea typeface="Arial" pitchFamily="34" charset="-122"/>
+                <a:cs typeface="Arial" pitchFamily="34" charset="-120"/>
+              </a:rPr>
+              <a:t>3</a:t>
+            </a:r>
+            <a:endParaRPr lang="en-US" sz="1600" dirty="0"/>
+          </a:p>
+        </p:txBody>
+      </p:sp>
+      <p:sp>
+        <p:nvSpPr>
+          <p:cNvPr id="15" name="Text 12"/>
+          <p:cNvSpPr txBox="1"/>
+          <p:nvPr/>
+        </p:nvSpPr>
+        <p:spPr>
+          <a:xfrm>
+            <a:off x="1325880" y="2944368"/>
+            <a:ext cx="1645920" cy="457200"/>
+          </a:xfrm>
+          <a:prstGeom prst="rect">
+            <a:avLst/>
+          </a:prstGeom>
+          <a:noFill/>
+          <a:ln/>
+        </p:spPr>
+        <p:txBody>
+          <a:bodyPr wrap="square" lIns="0" tIns="0" rIns="0" bIns="0" rtlCol="0" anchor="ctr"/>
+          <a:lstStyle/>
+          <a:p>
+            <a:pPr indent="0" marL="0">
+              <a:buNone/>
+            </a:pPr>
+            <a:r>
+              <a:rPr lang="en-US" sz="1700" b="1" dirty="0">
+                <a:solidFill>
+                  <a:schemeClr val="accent1"/>
+                </a:solidFill>
+                <a:latin typeface="Arial" pitchFamily="34" charset="0"/>
+                <a:ea typeface="Arial" pitchFamily="34" charset="-122"/>
+                <a:cs typeface="Arial" pitchFamily="34" charset="-120"/>
+              </a:rPr>
+              <a:t>Q1 2027</a:t>
+            </a:r>
+            <a:endParaRPr lang="en-US" sz="1700" dirty="0"/>
+          </a:p>
+        </p:txBody>
+      </p:sp>
+      <p:sp>
+        <p:nvSpPr>
+          <p:cNvPr id="16" name="Text 13"/>
+          <p:cNvSpPr txBox="1"/>
+          <p:nvPr/>
+        </p:nvSpPr>
+        <p:spPr>
+          <a:xfrm>
+            <a:off x="3017520" y="2944368"/>
+            <a:ext cx="8229600" cy="457200"/>
+          </a:xfrm>
+          <a:prstGeom prst="rect">
+            <a:avLst/>
+          </a:prstGeom>
+          <a:noFill/>
+          <a:ln/>
+        </p:spPr>
+        <p:txBody>
+          <a:bodyPr wrap="square" lIns="0" tIns="0" rIns="0" bIns="0" rtlCol="0" anchor="ctr"/>
+          <a:lstStyle/>
+          <a:p>
+            <a:pPr indent="0" marL="0">
+              <a:buNone/>
+            </a:pPr>
+            <a:r>
+              <a:rPr lang="en-US" sz="1500" dirty="0">
+                <a:solidFill>
+                  <a:schemeClr val="tx1"/>
+                </a:solidFill>
+                <a:latin typeface="Arial" pitchFamily="34" charset="0"/>
+                <a:ea typeface="Arial" pitchFamily="34" charset="-122"/>
+                <a:cs typeface="Arial" pitchFamily="34" charset="-120"/>
+              </a:rPr>
+              <a:t>Angebote für Ausbau einholen, Budget prüfen (190.000 €)</a:t>
+            </a:r>
+            <a:endParaRPr lang="en-US" sz="1500" dirty="0"/>
+          </a:p>
+        </p:txBody>
+      </p:sp>
+      <p:sp>
+        <p:nvSpPr>
+          <p:cNvPr id="17" name="Schritt 4"/>
+          <p:cNvSpPr/>
+          <p:nvPr/>
+        </p:nvSpPr>
+        <p:spPr>
+          <a:xfrm>
+            <a:off x="548640" y="3703320"/>
+            <a:ext cx="502920" cy="502920"/>
+          </a:xfrm>
+          <a:prstGeom prst="ellipse">
+            <a:avLst/>
+          </a:prstGeom>
+          <a:solidFill>
+            <a:schemeClr val="accent2"/>
+          </a:solidFill>
+          <a:ln w="12700">
+            <a:solidFill>
+              <a:schemeClr val="bg1"/>
+            </a:solidFill>
+            <a:prstDash val="solid"/>
+          </a:ln>
+        </p:spPr>
+      </p:sp>
+      <p:sp>
+        <p:nvSpPr>
+          <p:cNvPr id="18" name="Text 15"/>
+          <p:cNvSpPr txBox="1"/>
+          <p:nvPr/>
+        </p:nvSpPr>
+        <p:spPr>
+          <a:xfrm>
+            <a:off x="548640" y="3703320"/>
+            <a:ext cx="502920" cy="502920"/>
+          </a:xfrm>
+          <a:prstGeom prst="rect">
+            <a:avLst/>
+          </a:prstGeom>
+          <a:noFill/>
+          <a:ln/>
+        </p:spPr>
+        <p:txBody>
+          <a:bodyPr wrap="square" lIns="0" tIns="0" rIns="0" bIns="0" rtlCol="0" anchor="ctr"/>
+          <a:lstStyle/>
+          <a:p>
+            <a:pPr algn="ctr" indent="0" marL="0">
+              <a:buNone/>
+            </a:pPr>
+            <a:r>
+              <a:rPr lang="en-US" sz="1600" b="1" dirty="0">
+                <a:solidFill>
+                  <a:schemeClr val="bg1"/>
+                </a:solidFill>
+                <a:latin typeface="Arial" pitchFamily="34" charset="0"/>
+                <a:ea typeface="Arial" pitchFamily="34" charset="-122"/>
+                <a:cs typeface="Arial" pitchFamily="34" charset="-120"/>
+              </a:rPr>
+              <a:t>4</a:t>
+            </a:r>
+            <a:endParaRPr lang="en-US" sz="1600" dirty="0"/>
+          </a:p>
+        </p:txBody>
+      </p:sp>
+      <p:sp>
+        <p:nvSpPr>
+          <p:cNvPr id="19" name="Text 16"/>
+          <p:cNvSpPr txBox="1"/>
+          <p:nvPr/>
+        </p:nvSpPr>
+        <p:spPr>
+          <a:xfrm>
+            <a:off x="1325880" y="3721608"/>
+            <a:ext cx="1645920" cy="457200"/>
+          </a:xfrm>
+          <a:prstGeom prst="rect">
+            <a:avLst/>
+          </a:prstGeom>
+          <a:noFill/>
+          <a:ln/>
+        </p:spPr>
+        <p:txBody>
+          <a:bodyPr wrap="square" lIns="0" tIns="0" rIns="0" bIns="0" rtlCol="0" anchor="ctr"/>
+          <a:lstStyle/>
+          <a:p>
+            <a:pPr indent="0" marL="0">
+              <a:buNone/>
+            </a:pPr>
+            <a:r>
+              <a:rPr lang="en-US" sz="1700" b="1" dirty="0">
+                <a:solidFill>
+                  <a:schemeClr val="accent1"/>
+                </a:solidFill>
+                <a:latin typeface="Arial" pitchFamily="34" charset="0"/>
+                <a:ea typeface="Arial" pitchFamily="34" charset="-122"/>
+                <a:cs typeface="Arial" pitchFamily="34" charset="-120"/>
+              </a:rPr>
+              <a:t>2027</a:t>
+            </a:r>
+            <a:endParaRPr lang="en-US" sz="1700" dirty="0"/>
+          </a:p>
+        </p:txBody>
+      </p:sp>
+      <p:sp>
+        <p:nvSpPr>
+          <p:cNvPr id="20" name="Text 17"/>
+          <p:cNvSpPr txBox="1"/>
+          <p:nvPr/>
+        </p:nvSpPr>
+        <p:spPr>
+          <a:xfrm>
+            <a:off x="3017520" y="3721608"/>
+            <a:ext cx="8229600" cy="457200"/>
+          </a:xfrm>
+          <a:prstGeom prst="rect">
+            <a:avLst/>
+          </a:prstGeom>
+          <a:noFill/>
+          <a:ln/>
+        </p:spPr>
+        <p:txBody>
+          <a:bodyPr wrap="square" lIns="0" tIns="0" rIns="0" bIns="0" rtlCol="0" anchor="ctr"/>
+          <a:lstStyle/>
+          <a:p>
+            <a:pPr indent="0" marL="0">
+              <a:buNone/>
+            </a:pPr>
+            <a:r>
+              <a:rPr lang="en-US" sz="1500" dirty="0">
+                <a:solidFill>
+                  <a:schemeClr val="tx1"/>
+                </a:solidFill>
+                <a:latin typeface="Arial" pitchFamily="34" charset="0"/>
+                <a:ea typeface="Arial" pitchFamily="34" charset="-122"/>
+                <a:cs typeface="Arial" pitchFamily="34" charset="-120"/>
+              </a:rPr>
+              <a:t>Innenarchitektur und Möbel bestellen, Speisekarte und Preise kalkulieren</a:t>
+            </a:r>
+            <a:endParaRPr lang="en-US" sz="1500" dirty="0"/>
+          </a:p>
+        </p:txBody>
+      </p:sp>
+      <p:sp>
+        <p:nvSpPr>
+          <p:cNvPr id="21" name="Schritt 5"/>
+          <p:cNvSpPr/>
+          <p:nvPr/>
+        </p:nvSpPr>
+        <p:spPr>
+          <a:xfrm>
+            <a:off x="548640" y="4480560"/>
+            <a:ext cx="502920" cy="502920"/>
+          </a:xfrm>
+          <a:prstGeom prst="ellipse">
+            <a:avLst/>
+          </a:prstGeom>
+          <a:solidFill>
+            <a:schemeClr val="accent2"/>
+          </a:solidFill>
+          <a:ln w="12700">
+            <a:solidFill>
+              <a:schemeClr val="bg1"/>
+            </a:solidFill>
+            <a:prstDash val="solid"/>
+          </a:ln>
+        </p:spPr>
+      </p:sp>
+      <p:sp>
+        <p:nvSpPr>
+          <p:cNvPr id="22" name="Text 19"/>
+          <p:cNvSpPr txBox="1"/>
+          <p:nvPr/>
+        </p:nvSpPr>
+        <p:spPr>
+          <a:xfrm>
+            <a:off x="548640" y="4480560"/>
+            <a:ext cx="502920" cy="502920"/>
+          </a:xfrm>
+          <a:prstGeom prst="rect">
+            <a:avLst/>
+          </a:prstGeom>
+          <a:noFill/>
+          <a:ln/>
+        </p:spPr>
+        <p:txBody>
+          <a:bodyPr wrap="square" lIns="0" tIns="0" rIns="0" bIns="0" rtlCol="0" anchor="ctr"/>
+          <a:lstStyle/>
+          <a:p>
+            <a:pPr algn="ctr" indent="0" marL="0">
+              <a:buNone/>
+            </a:pPr>
+            <a:r>
+              <a:rPr lang="en-US" sz="1600" b="1" dirty="0">
+                <a:solidFill>
+                  <a:schemeClr val="bg1"/>
+                </a:solidFill>
+                <a:latin typeface="Arial" pitchFamily="34" charset="0"/>
+                <a:ea typeface="Arial" pitchFamily="34" charset="-122"/>
+                <a:cs typeface="Arial" pitchFamily="34" charset="-120"/>
+              </a:rPr>
+              <a:t>5</a:t>
+            </a:r>
+            <a:endParaRPr lang="en-US" sz="1600" dirty="0"/>
+          </a:p>
+        </p:txBody>
+      </p:sp>
+      <p:sp>
+        <p:nvSpPr>
+          <p:cNvPr id="23" name="Text 20"/>
+          <p:cNvSpPr txBox="1"/>
+          <p:nvPr/>
+        </p:nvSpPr>
+        <p:spPr>
+          <a:xfrm>
+            <a:off x="1325880" y="4498848"/>
+            <a:ext cx="1645920" cy="457200"/>
+          </a:xfrm>
+          <a:prstGeom prst="rect">
+            <a:avLst/>
+          </a:prstGeom>
+          <a:noFill/>
+          <a:ln/>
+        </p:spPr>
+        <p:txBody>
+          <a:bodyPr wrap="square" lIns="0" tIns="0" rIns="0" bIns="0" rtlCol="0" anchor="ctr"/>
+          <a:lstStyle/>
+          <a:p>
+            <a:pPr indent="0" marL="0">
+              <a:buNone/>
+            </a:pPr>
+            <a:r>
+              <a:rPr lang="en-US" sz="1700" b="1" dirty="0">
+                <a:solidFill>
+                  <a:schemeClr val="accent1"/>
+                </a:solidFill>
+                <a:latin typeface="Arial" pitchFamily="34" charset="0"/>
+                <a:ea typeface="Arial" pitchFamily="34" charset="-122"/>
+                <a:cs typeface="Arial" pitchFamily="34" charset="-120"/>
+              </a:rPr>
+              <a:t>Mitte 2028</a:t>
+            </a:r>
+            <a:endParaRPr lang="en-US" sz="1700" dirty="0"/>
+          </a:p>
+        </p:txBody>
+      </p:sp>
+      <p:sp>
+        <p:nvSpPr>
+          <p:cNvPr id="24" name="Text 21"/>
+          <p:cNvSpPr txBox="1"/>
+          <p:nvPr/>
+        </p:nvSpPr>
+        <p:spPr>
+          <a:xfrm>
+            <a:off x="3017520" y="4498848"/>
+            <a:ext cx="8229600" cy="457200"/>
+          </a:xfrm>
+          <a:prstGeom prst="rect">
+            <a:avLst/>
+          </a:prstGeom>
+          <a:noFill/>
+          <a:ln/>
+        </p:spPr>
+        <p:txBody>
+          <a:bodyPr wrap="square" lIns="0" tIns="0" rIns="0" bIns="0" rtlCol="0" anchor="ctr"/>
+          <a:lstStyle/>
+          <a:p>
+            <a:pPr indent="0" marL="0">
+              <a:buNone/>
+            </a:pPr>
+            <a:r>
+              <a:rPr lang="en-US" sz="1500" dirty="0">
+                <a:solidFill>
+                  <a:schemeClr val="tx1"/>
+                </a:solidFill>
+                <a:latin typeface="Arial" pitchFamily="34" charset="0"/>
+                <a:ea typeface="Arial" pitchFamily="34" charset="-122"/>
+                <a:cs typeface="Arial" pitchFamily="34" charset="-120"/>
+              </a:rPr>
+              <a:t>Personal einstellen, Probebetrieb, Genehmigungen</a:t>
+            </a:r>
+            <a:endParaRPr lang="en-US" sz="1500" dirty="0"/>
+          </a:p>
+        </p:txBody>
+      </p:sp>
+      <p:sp>
+        <p:nvSpPr>
+          <p:cNvPr id="25" name="Schritt 6"/>
+          <p:cNvSpPr/>
+          <p:nvPr/>
+        </p:nvSpPr>
+        <p:spPr>
+          <a:xfrm>
+            <a:off x="548640" y="5257800"/>
+            <a:ext cx="502920" cy="502920"/>
+          </a:xfrm>
+          <a:prstGeom prst="ellipse">
+            <a:avLst/>
+          </a:prstGeom>
+          <a:solidFill>
+            <a:schemeClr val="accent1"/>
+          </a:solidFill>
+          <a:ln w="12700">
+            <a:solidFill>
+              <a:schemeClr val="bg1"/>
+            </a:solidFill>
+            <a:prstDash val="solid"/>
+          </a:ln>
+        </p:spPr>
+      </p:sp>
+      <p:sp>
+        <p:nvSpPr>
+          <p:cNvPr id="26" name="Text 23"/>
+          <p:cNvSpPr txBox="1"/>
+          <p:nvPr/>
+        </p:nvSpPr>
+        <p:spPr>
+          <a:xfrm>
+            <a:off x="548640" y="5257800"/>
+            <a:ext cx="502920" cy="502920"/>
+          </a:xfrm>
+          <a:prstGeom prst="rect">
+            <a:avLst/>
+          </a:prstGeom>
+          <a:noFill/>
+          <a:ln/>
+        </p:spPr>
+        <p:txBody>
+          <a:bodyPr wrap="square" lIns="0" tIns="0" rIns="0" bIns="0" rtlCol="0" anchor="ctr"/>
+          <a:lstStyle/>
+          <a:p>
+            <a:pPr algn="ctr" indent="0" marL="0">
+              <a:buNone/>
+            </a:pPr>
+            <a:r>
+              <a:rPr lang="en-US" sz="1600" b="1" dirty="0">
+                <a:solidFill>
+                  <a:schemeClr val="bg1"/>
+                </a:solidFill>
+                <a:latin typeface="Arial" pitchFamily="34" charset="0"/>
+                <a:ea typeface="Arial" pitchFamily="34" charset="-122"/>
+                <a:cs typeface="Arial" pitchFamily="34" charset="-120"/>
+              </a:rPr>
+              <a:t>6</a:t>
+            </a:r>
+            <a:endParaRPr lang="en-US" sz="1600" dirty="0"/>
+          </a:p>
+        </p:txBody>
+      </p:sp>
+      <p:sp>
+        <p:nvSpPr>
+          <p:cNvPr id="27" name="Text 24"/>
+          <p:cNvSpPr txBox="1"/>
+          <p:nvPr/>
+        </p:nvSpPr>
+        <p:spPr>
+          <a:xfrm>
+            <a:off x="1325880" y="5276088"/>
+            <a:ext cx="1645920" cy="457200"/>
+          </a:xfrm>
+          <a:prstGeom prst="rect">
+            <a:avLst/>
+          </a:prstGeom>
+          <a:noFill/>
+          <a:ln/>
+        </p:spPr>
+        <p:txBody>
+          <a:bodyPr wrap="square" lIns="0" tIns="0" rIns="0" bIns="0" rtlCol="0" anchor="ctr"/>
+          <a:lstStyle/>
+          <a:p>
+            <a:pPr indent="0" marL="0">
+              <a:buNone/>
+            </a:pPr>
+            <a:r>
+              <a:rPr lang="en-US" sz="1700" b="1" dirty="0">
+                <a:solidFill>
+                  <a:schemeClr val="accent1"/>
+                </a:solidFill>
+                <a:latin typeface="Arial" pitchFamily="34" charset="0"/>
+                <a:ea typeface="Arial" pitchFamily="34" charset="-122"/>
+                <a:cs typeface="Arial" pitchFamily="34" charset="-120"/>
+              </a:rPr>
+              <a:t>Ende 2028</a:t>
+            </a:r>
+            <a:endParaRPr lang="en-US" sz="1700" dirty="0"/>
+          </a:p>
+        </p:txBody>
+      </p:sp>
+      <p:sp>
+        <p:nvSpPr>
+          <p:cNvPr id="28" name="Text 25"/>
+          <p:cNvSpPr txBox="1"/>
+          <p:nvPr/>
+        </p:nvSpPr>
+        <p:spPr>
+          <a:xfrm>
+            <a:off x="3017520" y="5276088"/>
+            <a:ext cx="8229600" cy="457200"/>
+          </a:xfrm>
+          <a:prstGeom prst="rect">
+            <a:avLst/>
+          </a:prstGeom>
+          <a:noFill/>
+          <a:ln/>
+        </p:spPr>
+        <p:txBody>
+          <a:bodyPr wrap="square" lIns="0" tIns="0" rIns="0" bIns="0" rtlCol="0" anchor="ctr"/>
+          <a:lstStyle/>
+          <a:p>
+            <a:pPr indent="0" marL="0">
+              <a:buNone/>
+            </a:pPr>
+            <a:r>
+              <a:rPr lang="en-US" sz="1500" dirty="0">
+                <a:solidFill>
+                  <a:schemeClr val="tx1"/>
+                </a:solidFill>
+                <a:latin typeface="Arial" pitchFamily="34" charset="0"/>
+                <a:ea typeface="Arial" pitchFamily="34" charset="-122"/>
+                <a:cs typeface="Arial" pitchFamily="34" charset="-120"/>
+              </a:rPr>
+              <a:t>Eröffnung zusammen mit der neuen Mitte</a:t>
+            </a:r>
+            <a:endParaRPr lang="en-US" sz="1500" dirty="0"/>
+          </a:p>
+        </p:txBody>
+      </p:sp>
+      <p:sp>
+        <p:nvSpPr>
+          <p:cNvPr id="25" name="Slide Number Placeholder 0"/>
+          <p:cNvSpPr>
+            <a:spLocks noGrp="1"/>
+          </p:cNvSpPr>
+          <p:nvPr>
+            <p:ph type="sldNum" sz="quarter" idx="4294967295"/>
+          </p:nvPr>
+        </p:nvSpPr>
+        <p:spPr>
+          <a:xfrm>
+            <a:off x="11183112" y="6446520"/>
+            <a:ext cx="548640" cy="274320"/>
+          </a:xfrm>
+          <a:prstGeom prst="rect">
+            <a:avLst/>
+          </a:prstGeom>
+          <a:extLst>
+            <a:ext uri="{C572A759-6A51-4108-AA02-DFA0A04FC94B}">
+              <ma14:wrappingTextBoxFlag xmlns:ma14="http://schemas.microsoft.com/office/mac/drawingml/2011/main" val="0"/>
+            </a:ext>
+          </a:extLst>
+        </p:spPr>
+        <p:txBody>
+          <a:bodyPr/>
+          <a:lstStyle>
+            <a:lvl1pPr>
+              <a:defRPr sz="1000">
+                <a:solidFill>
+                  <a:schemeClr val="accent4"/>
+                </a:solidFill>
+              </a:defRPr>
+            </a:lvl1pPr>
+          </a:lstStyle>
+          <a:p>
+            <a:pPr algn="r"/>
+            <a:fld id="{F7021451-1387-4CA6-816F-3879F97B5CBC}" type="slidenum">
+              <a:rPr b="0" lang="en-US"/>
+              <a:t>16</a:t>
+            </a:fld>
+            <a:endParaRPr lang="en-US"/>
+          </a:p>
+        </p:txBody>
+      </p:sp>
+    </p:spTree>
+  </p:cSld>
+  <p:clrMapOvr>
+    <a:masterClrMapping/>
+  </p:clrMapOvr>
+</p:sld>
+</file>
+
 <file path=ppt/slides/slide2.xml><?xml version="1.0" encoding="utf-8"?>
 <p:sld xmlns:a="http://schemas.openxmlformats.org/drawingml/2006/main" xmlns:r="http://schemas.openxmlformats.org/officeDocument/2006/relationships" xmlns:p="http://schemas.openxmlformats.org/presentationml/2006/main">
   <p:cSld name="Slide 2">
@@ -12503,7 +13526,7 @@
       </p:sp>
       <p:sp>
         <p:nvSpPr>
-          <p:cNvPr id="5" name="Tagsüber"/>
+          <p:cNvPr id="5" name="Morgens und mittags"/>
           <p:cNvSpPr/>
           <p:nvPr/>
         </p:nvSpPr>
@@ -12561,7 +13584,7 @@
                 <a:ea typeface="Georgia" pitchFamily="34" charset="-122"/>
                 <a:cs typeface="Georgia" pitchFamily="34" charset="-120"/>
               </a:rPr>
-              <a:t>Tagsüber</a:t>
+              <a:t>Morgens und mittags</a:t>
             </a:r>
             <a:endParaRPr lang="en-US" sz="2000" dirty="0"/>
           </a:p>
@@ -12600,7 +13623,7 @@
                 <a:ea typeface="Arial" pitchFamily="34" charset="-122"/>
                 <a:cs typeface="Arial" pitchFamily="34" charset="-120"/>
               </a:rPr>
-              <a:t>Frühstück, Mittagstisch und Kaffee am Marktplatz. Regional, frisch, schnell für Beschäftigte aus Rathaus und Umgebung.</a:t>
+              <a:t>Frühstück, Brunch am Wochenende und Mittagstisch am Marktplatz. Regional, frisch, schnell für Beschäftigte aus Rathaus und Umgebung.</a:t>
             </a:r>
             <a:endParaRPr lang="en-US" sz="1400" dirty="0"/>
           </a:p>
@@ -12608,7 +13631,7 @@
       </p:sp>
       <p:sp>
         <p:nvSpPr>
-          <p:cNvPr id="8" name="Abends"/>
+          <p:cNvPr id="8" name="Abends (Hauptfokus)"/>
           <p:cNvSpPr/>
           <p:nvPr/>
         </p:nvSpPr>
@@ -12666,7 +13689,7 @@
                 <a:ea typeface="Georgia" pitchFamily="34" charset="-122"/>
                 <a:cs typeface="Georgia" pitchFamily="34" charset="-120"/>
               </a:rPr>
-              <a:t>Abends</a:t>
+              <a:t>Abends (Hauptfokus)</a:t>
             </a:r>
             <a:endParaRPr lang="en-US" sz="2000" dirty="0"/>
           </a:p>
@@ -12705,7 +13728,7 @@
                 <a:ea typeface="Arial" pitchFamily="34" charset="-122"/>
                 <a:cs typeface="Arial" pitchFamily="34" charset="-120"/>
               </a:rPr>
-              <a:t>Restaurant mit moderner, regionaler Küche. Gemütlich, mit Banketten, Kerzenlicht und offener Bar.</a:t>
+              <a:t>Moderne, regionale Küche in warmer, dunkler Atmosphäre mit Cognac-Banketten und Kerzenlicht. Der Abend bringt ca. 75 % vom Umsatz.</a:t>
             </a:r>
             <a:endParaRPr lang="en-US" sz="1400" dirty="0"/>
           </a:p>
@@ -12810,7 +13833,7 @@
                 <a:ea typeface="Arial" pitchFamily="34" charset="-122"/>
                 <a:cs typeface="Arial" pitchFamily="34" charset="-120"/>
               </a:rPr>
-              <a:t>Cocktails, Wein und Bier an der Theke. Séparée mit 30 Plätzen für Geburtstage, Firmen- und Vereinsfeiern.</a:t>
+              <a:t>Ab 21 Uhr Cocktails, Wein und Bier an der Theke, Fr und Sa bis 01 Uhr. Live-Abende, Séparée mit 30 Plätzen für Feiern.</a:t>
             </a:r>
             <a:endParaRPr lang="en-US" sz="1400" dirty="0"/>
           </a:p>
@@ -14894,9 +15917,9 @@
             <a:tbl>
               <a:tblPr/>
               <a:tblGrid>
-                <a:gridCol w="2011680"/>
-                <a:gridCol w="2377440"/>
-                <a:gridCol w="2011680"/>
+                <a:gridCol w="2194560"/>
+                <a:gridCol w="2286000"/>
+                <a:gridCol w="1920240"/>
               </a:tblGrid>
               <a:tr h="566928">
                 <a:tc>
@@ -15122,7 +16145,7 @@
                           <a:ea typeface="Arial" pitchFamily="34" charset="-122"/>
                           <a:cs typeface="Arial" pitchFamily="34" charset="-120"/>
                         </a:rPr>
-                        <a:t>10:00–14:00 (Sa, So)</a:t>
+                        <a:t>08:00–11:00 (Di–Fr), 09:00–14:00 (Sa, So)</a:t>
                       </a:r>
                       <a:endParaRPr lang="en-US" sz="1250" dirty="0">
                         <a:latin typeface="Arial" charset="0"/>
@@ -15187,7 +16210,7 @@
                           <a:ea typeface="Arial" pitchFamily="34" charset="-122"/>
                           <a:cs typeface="Arial" pitchFamily="34" charset="-120"/>
                         </a:rPr>
-                        <a:t>Frühstück und Brunch, Kaffee</a:t>
+                        <a:t>Frühstück, am Wochenende Brunch, Kaffee</a:t>
                       </a:r>
                       <a:endParaRPr lang="en-US" sz="1250" dirty="0">
                         <a:latin typeface="Arial" charset="0"/>
@@ -15516,7 +16539,7 @@
                           <a:ea typeface="Arial" pitchFamily="34" charset="-122"/>
                           <a:cs typeface="Arial" pitchFamily="34" charset="-120"/>
                         </a:rPr>
-                        <a:t>14:30–17:00</a:t>
+                        <a:t>14:30–17:30</a:t>
                       </a:r>
                       <a:endParaRPr lang="en-US" sz="1250" dirty="0">
                         <a:latin typeface="Arial" charset="0"/>
@@ -15581,7 +16604,7 @@
                           <a:ea typeface="Arial" pitchFamily="34" charset="-122"/>
                           <a:cs typeface="Arial" pitchFamily="34" charset="-120"/>
                         </a:rPr>
-                        <a:t>Kaffee, Kuchen, Eis, kleine Karte</a:t>
+                        <a:t>Kaffee, Kuchen, kleine Karte</a:t>
                       </a:r>
                       <a:endParaRPr lang="en-US" sz="1250" dirty="0">
                         <a:latin typeface="Arial" charset="0"/>
@@ -15713,7 +16736,7 @@
                           <a:ea typeface="Arial" pitchFamily="34" charset="-122"/>
                           <a:cs typeface="Arial" pitchFamily="34" charset="-120"/>
                         </a:rPr>
-                        <a:t>17:00–22:00</a:t>
+                        <a:t>17:30–22:00 (Di–So)</a:t>
                       </a:r>
                       <a:endParaRPr lang="en-US" sz="1250" dirty="0">
                         <a:latin typeface="Arial" charset="0"/>
@@ -15843,7 +16866,7 @@
                           <a:ea typeface="Arial" pitchFamily="34" charset="-122"/>
                           <a:cs typeface="Arial" pitchFamily="34" charset="-120"/>
                         </a:rPr>
-                        <a:t>Kerzenlicht, Banketten, Bar</a:t>
+                        <a:t>Kerzenlicht, Banketten, Hauptgeschäft</a:t>
                       </a:r>
                       <a:endParaRPr lang="en-US" sz="1250" dirty="0">
                         <a:latin typeface="Arial" charset="0"/>
@@ -15975,7 +16998,7 @@
                           <a:ea typeface="Arial" pitchFamily="34" charset="-122"/>
                           <a:cs typeface="Arial" pitchFamily="34" charset="-120"/>
                         </a:rPr>
-                        <a:t>Bar, Cocktails, Musik leise</a:t>
+                        <a:t>Bar, Cocktails, Live-Abende, leise Musik</a:t>
                       </a:r>
                       <a:endParaRPr lang="en-US" sz="1250" dirty="0">
                         <a:latin typeface="Arial" charset="0"/>
@@ -16040,7 +17063,7 @@
                           <a:ea typeface="Arial" pitchFamily="34" charset="-122"/>
                           <a:cs typeface="Arial" pitchFamily="34" charset="-120"/>
                         </a:rPr>
-                        <a:t>Theke, Lounge</a:t>
+                        <a:t>Theke, Lounge, Séparée</a:t>
                       </a:r>
                       <a:endParaRPr lang="en-US" sz="1250" dirty="0">
                         <a:latin typeface="Arial" charset="0"/>
@@ -17087,7 +18110,7 @@
                 <a:ea typeface="Arial" pitchFamily="34" charset="-122"/>
                 <a:cs typeface="Arial" pitchFamily="34" charset="-120"/>
               </a:rPr>
-              <a:t>Durchschnittlicher Bon (Annahme): Mittag 14 €, Brunch 13 €, Abend 29 € mit Getränk.</a:t>
+              <a:t>Durchschnittlicher Bon (Annahme): Frühstück 11 €, Brunch 14 €, Mittag 14 €, Abendessen 32 €, Bar 18–22 €, Feiern 45 €.</a:t>
             </a:r>
             <a:endParaRPr lang="en-US" sz="1400" dirty="0"/>
           </a:p>
@@ -17149,6 +18172,2380 @@
 <file path=ppt/slides/slide6.xml><?xml version="1.0" encoding="utf-8"?>
 <p:sld xmlns:a="http://schemas.openxmlformats.org/drawingml/2006/main" xmlns:r="http://schemas.openxmlformats.org/officeDocument/2006/relationships" xmlns:p="http://schemas.openxmlformats.org/presentationml/2006/main">
   <p:cSld name="Slide 6">
+    <p:spTree>
+      <p:nvGrpSpPr>
+        <p:cNvPr id="1" name=""/>
+        <p:cNvGrpSpPr/>
+        <p:nvPr/>
+      </p:nvGrpSpPr>
+      <p:grpSpPr>
+        <a:xfrm>
+          <a:off x="0" y="0"/>
+          <a:ext cx="0" cy="0"/>
+          <a:chOff x="0" y="0"/>
+          <a:chExt cx="0" cy="0"/>
+        </a:xfrm>
+      </p:grpSpPr>
+      <p:sp>
+        <p:nvSpPr>
+          <p:cNvPr id="2" name="Text 1"/>
+          <p:cNvSpPr/>
+          <p:nvPr>
+            <p:ph idx="101" type="title" hasCustomPrompt="1"/>
+          </p:nvPr>
+        </p:nvSpPr>
+        <p:spPr>
+          <a:xfrm>
+            <a:off x="548640" y="320040"/>
+            <a:ext cx="11091672" cy="822960"/>
+          </a:xfrm>
+          <a:prstGeom prst="rect">
+            <a:avLst/>
+          </a:prstGeom>
+          <a:noFill/>
+          <a:ln/>
+        </p:spPr>
+        <p:txBody>
+          <a:bodyPr wrap="square" lIns="0" tIns="0" rIns="0" bIns="0" rtlCol="0" anchor="ctr"/>
+          <a:lstStyle/>
+          <a:p>
+            <a:pPr algn="l" indent="0" marL="0">
+              <a:buNone/>
+            </a:pPr>
+            <a:r>
+              <a:rPr lang="en-US" sz="2700" dirty="0">
+                <a:solidFill>
+                  <a:schemeClr val="accent1"/>
+                </a:solidFill>
+                <a:latin typeface="Georgia" pitchFamily="34" charset="0"/>
+                <a:ea typeface="Georgia" pitchFamily="34" charset="-122"/>
+                <a:cs typeface="Georgia" pitchFamily="34" charset="-120"/>
+              </a:rPr>
+              <a:t>Hauptfokus Abend: Restaurant und Bar</a:t>
+            </a:r>
+            <a:endParaRPr lang="en-US" sz="2700" dirty="0"/>
+          </a:p>
+        </p:txBody>
+      </p:sp>
+      <p:sp>
+        <p:nvSpPr>
+          <p:cNvPr id="3" name="Zielgruppe"/>
+          <p:cNvSpPr txBox="1"/>
+          <p:nvPr/>
+        </p:nvSpPr>
+        <p:spPr>
+          <a:xfrm>
+            <a:off x="548640" y="6446520"/>
+            <a:ext cx="5486400" cy="274320"/>
+          </a:xfrm>
+          <a:prstGeom prst="rect">
+            <a:avLst/>
+          </a:prstGeom>
+          <a:noFill/>
+          <a:ln/>
+        </p:spPr>
+        <p:txBody>
+          <a:bodyPr wrap="square" lIns="0" tIns="0" rIns="0" bIns="0" rtlCol="0" anchor="ctr"/>
+          <a:lstStyle/>
+          <a:p>
+            <a:pPr indent="0" marL="0">
+              <a:buNone/>
+            </a:pPr>
+            <a:r>
+              <a:rPr lang="en-US" sz="1000" dirty="0">
+                <a:solidFill>
+                  <a:schemeClr val="accent4"/>
+                </a:solidFill>
+              </a:rPr>
+              <a:t>Für Stadt und Bank</a:t>
+            </a:r>
+            <a:endParaRPr lang="en-US" sz="1000" dirty="0"/>
+          </a:p>
+        </p:txBody>
+      </p:sp>
+      <p:pic>
+        <p:nvPicPr>
+          <p:cNvPr id="5" name="Image 0" descr="Bar am Abend mit beleuchteter Backbar">    </p:cNvPr>
+          <p:cNvPicPr>
+            <a:picLocks noChangeAspect="1"/>
+          </p:cNvPicPr>
+          <p:nvPr/>
+        </p:nvPicPr>
+        <p:blipFill>
+          <a:blip r:embed="rId1"/>
+          <a:stretch>
+            <a:fillRect/>
+          </a:stretch>
+        </p:blipFill>
+        <p:spPr>
+          <a:xfrm>
+            <a:off x="548640" y="1371600"/>
+            <a:ext cx="4206240" cy="2743200"/>
+          </a:xfrm>
+          <a:prstGeom prst="rect">
+            <a:avLst/>
+          </a:prstGeom>
+        </p:spPr>
+      </p:pic>
+      <p:sp>
+        <p:nvSpPr>
+          <p:cNvPr id="6" name="Text 2"/>
+          <p:cNvSpPr txBox="1"/>
+          <p:nvPr/>
+        </p:nvSpPr>
+        <p:spPr>
+          <a:xfrm>
+            <a:off x="5029200" y="1371600"/>
+            <a:ext cx="6611112" cy="3108960"/>
+          </a:xfrm>
+          <a:prstGeom prst="rect">
+            <a:avLst/>
+          </a:prstGeom>
+          <a:noFill/>
+          <a:ln/>
+        </p:spPr>
+        <p:txBody>
+          <a:bodyPr wrap="square" lIns="0" tIns="0" rIns="0" bIns="0" rtlCol="0" anchor="t"/>
+          <a:lstStyle/>
+          <a:p>
+            <a:pPr indent="0" marL="0">
+              <a:spcAft>
+                <a:spcPts val="300"/>
+              </a:spcAft>
+              <a:buNone/>
+            </a:pPr>
+            <a:r>
+              <a:rPr lang="en-US" sz="1300" b="1" dirty="0">
+                <a:solidFill>
+                  <a:schemeClr val="accent1"/>
+                </a:solidFill>
+                <a:latin typeface="Arial" pitchFamily="34" charset="0"/>
+                <a:ea typeface="Arial" pitchFamily="34" charset="-122"/>
+                <a:cs typeface="Arial" pitchFamily="34" charset="-120"/>
+              </a:rPr>
+              <a:t>Restaurant (17:30–22:00)</a:t>
+            </a:r>
+            <a:endParaRPr lang="en-US" sz="1300" dirty="0"/>
+          </a:p>
+          <a:p>
+            <a:pPr marL="342900" indent="-342900">
+              <a:spcAft>
+                <a:spcPts val="300"/>
+              </a:spcAft>
+              <a:buSzPct val="100000"/>
+              <a:buChar char="•"/>
+            </a:pPr>
+            <a:r>
+              <a:rPr lang="en-US" sz="1300" dirty="0">
+                <a:solidFill>
+                  <a:schemeClr val="tx1"/>
+                </a:solidFill>
+                <a:latin typeface="Arial" pitchFamily="34" charset="0"/>
+                <a:ea typeface="Arial" pitchFamily="34" charset="-122"/>
+                <a:cs typeface="Arial" pitchFamily="34" charset="-120"/>
+              </a:rPr>
+              <a:t>Kurze, moderne Karte mit regionalen Zutaten, Steaks und Burger, Wein-Empfehlung zum Essen</a:t>
+            </a:r>
+            <a:endParaRPr lang="en-US" sz="1300" dirty="0"/>
+          </a:p>
+          <a:p>
+            <a:pPr marL="342900" indent="-342900">
+              <a:spcAft>
+                <a:spcPts val="300"/>
+              </a:spcAft>
+              <a:buSzPct val="100000"/>
+              <a:buChar char="•"/>
+            </a:pPr>
+            <a:r>
+              <a:rPr lang="en-US" sz="1300" dirty="0">
+                <a:solidFill>
+                  <a:schemeClr val="tx1"/>
+                </a:solidFill>
+                <a:latin typeface="Arial" pitchFamily="34" charset="0"/>
+                <a:ea typeface="Arial" pitchFamily="34" charset="-122"/>
+                <a:cs typeface="Arial" pitchFamily="34" charset="-120"/>
+              </a:rPr>
+              <a:t>Reservierung für Gruppen, Tische für zwei bis acht</a:t>
+            </a:r>
+            <a:endParaRPr lang="en-US" sz="1300" dirty="0"/>
+          </a:p>
+          <a:p>
+            <a:pPr indent="0" marL="0">
+              <a:spcAft>
+                <a:spcPts val="300"/>
+              </a:spcAft>
+              <a:buNone/>
+            </a:pPr>
+            <a:r>
+              <a:rPr lang="en-US" sz="1300" b="1" dirty="0">
+                <a:solidFill>
+                  <a:schemeClr val="accent1"/>
+                </a:solidFill>
+                <a:latin typeface="Arial" pitchFamily="34" charset="0"/>
+                <a:ea typeface="Arial" pitchFamily="34" charset="-122"/>
+                <a:cs typeface="Arial" pitchFamily="34" charset="-120"/>
+              </a:rPr>
+              <a:t>Bar (ab 21:00, Fr und Sa bis 01:00)</a:t>
+            </a:r>
+            <a:endParaRPr lang="en-US" sz="1300" dirty="0"/>
+          </a:p>
+          <a:p>
+            <a:pPr marL="342900" indent="-342900">
+              <a:spcAft>
+                <a:spcPts val="300"/>
+              </a:spcAft>
+              <a:buSzPct val="100000"/>
+              <a:buChar char="•"/>
+            </a:pPr>
+            <a:r>
+              <a:rPr lang="en-US" sz="1300" dirty="0">
+                <a:solidFill>
+                  <a:schemeClr val="tx1"/>
+                </a:solidFill>
+                <a:latin typeface="Arial" pitchFamily="34" charset="0"/>
+                <a:ea typeface="Arial" pitchFamily="34" charset="-122"/>
+                <a:cs typeface="Arial" pitchFamily="34" charset="-120"/>
+              </a:rPr>
+              <a:t>Signature-Cocktails, regionale Weine, Craft-Bier vom Fass, alkoholfreie Drinks</a:t>
+            </a:r>
+            <a:endParaRPr lang="en-US" sz="1300" dirty="0"/>
+          </a:p>
+          <a:p>
+            <a:pPr marL="342900" indent="-342900">
+              <a:spcAft>
+                <a:spcPts val="300"/>
+              </a:spcAft>
+              <a:buSzPct val="100000"/>
+              <a:buChar char="•"/>
+            </a:pPr>
+            <a:r>
+              <a:rPr lang="en-US" sz="1300" dirty="0">
+                <a:solidFill>
+                  <a:schemeClr val="tx1"/>
+                </a:solidFill>
+                <a:latin typeface="Arial" pitchFamily="34" charset="0"/>
+                <a:ea typeface="Arial" pitchFamily="34" charset="-122"/>
+                <a:cs typeface="Arial" pitchFamily="34" charset="-120"/>
+              </a:rPr>
+              <a:t>After-Work am Donnerstag, Live-Musik oder DJ am Freitag</a:t>
+            </a:r>
+            <a:endParaRPr lang="en-US" sz="1300" dirty="0"/>
+          </a:p>
+          <a:p>
+            <a:pPr indent="0" marL="0">
+              <a:spcAft>
+                <a:spcPts val="300"/>
+              </a:spcAft>
+              <a:buNone/>
+            </a:pPr>
+            <a:r>
+              <a:rPr lang="en-US" sz="1300" b="1" dirty="0">
+                <a:solidFill>
+                  <a:schemeClr val="accent1"/>
+                </a:solidFill>
+                <a:latin typeface="Arial" pitchFamily="34" charset="0"/>
+                <a:ea typeface="Arial" pitchFamily="34" charset="-122"/>
+                <a:cs typeface="Arial" pitchFamily="34" charset="-120"/>
+              </a:rPr>
+              <a:t>Feiern und Events</a:t>
+            </a:r>
+            <a:endParaRPr lang="en-US" sz="1300" dirty="0"/>
+          </a:p>
+          <a:p>
+            <a:pPr marL="342900" indent="-342900">
+              <a:spcAft>
+                <a:spcPts val="300"/>
+              </a:spcAft>
+              <a:buSzPct val="100000"/>
+              <a:buChar char="•"/>
+            </a:pPr>
+            <a:r>
+              <a:rPr lang="en-US" sz="1300" dirty="0">
+                <a:solidFill>
+                  <a:schemeClr val="tx1"/>
+                </a:solidFill>
+                <a:latin typeface="Arial" pitchFamily="34" charset="0"/>
+                <a:ea typeface="Arial" pitchFamily="34" charset="-122"/>
+                <a:cs typeface="Arial" pitchFamily="34" charset="-120"/>
+              </a:rPr>
+              <a:t>Séparée, Themenabende, Firmen- und Vereinsfeiern, Weihnachtsfeiern</a:t>
+            </a:r>
+            <a:endParaRPr lang="en-US" sz="1300" dirty="0"/>
+          </a:p>
+        </p:txBody>
+      </p:sp>
+      <p:graphicFrame>
+        <p:nvGraphicFramePr>
+          <p:cNvPr id="7" name="Tabelle Abend"/>
+          <p:cNvGraphicFramePr>
+            <a:graphicFrameLocks noGrp="1"/>
+          </p:cNvGraphicFramePr>
+          <p:nvPr>
+            <p:extLst>
+              <p:ext uri="{D42A27DB-BD31-4B8C-83A1-F6EECF244321}">
+                <p14:modId xmlns:p14="http://schemas.microsoft.com/office/powerpoint/2010/main" val="1579011935"/>
+              </p:ext>
+            </p:extLst>
+          </p:nvPr>
+        </p:nvGraphicFramePr>
+        <p:xfrm>
+          <a:off x="548640" y="4251960"/>
+          <a:ext cx="7498080" cy="914400"/>
+        </p:xfrm>
+        <a:graphic>
+          <a:graphicData uri="http://schemas.openxmlformats.org/drawingml/2006/table">
+            <a:tbl>
+              <a:tblPr/>
+              <a:tblGrid>
+                <a:gridCol w="3474720"/>
+                <a:gridCol w="822960"/>
+                <a:gridCol w="1005840"/>
+                <a:gridCol w="914400"/>
+                <a:gridCol w="1280160"/>
+              </a:tblGrid>
+              <a:tr h="246888">
+                <a:tc>
+                  <a:txBody>
+                    <a:bodyPr/>
+                    <a:lstStyle/>
+                    <a:p>
+                      <a:pPr algn="l" indent="0" marL="0">
+                        <a:buNone/>
+                      </a:pPr>
+                      <a:r>
+                        <a:rPr lang="en-US" sz="1250" b="1" dirty="0">
+                          <a:solidFill>
+                            <a:schemeClr val="bg1"/>
+                          </a:solidFill>
+                          <a:latin typeface="Arial" pitchFamily="34" charset="0"/>
+                          <a:ea typeface="Arial" pitchFamily="34" charset="-122"/>
+                          <a:cs typeface="Arial" pitchFamily="34" charset="-120"/>
+                        </a:rPr>
+                        <a:t>Abend-Bereich</a:t>
+                      </a:r>
+                      <a:endParaRPr lang="en-US" sz="1250" dirty="0">
+                        <a:latin typeface="Arial" charset="0"/>
+                        <a:ea typeface="Arial" charset="0"/>
+                        <a:cs typeface="Arial" charset="0"/>
+                      </a:endParaRPr>
+                    </a:p>
+                  </a:txBody>
+                  <a:tcPr marL="91440" marR="91440" marT="45720" marB="45720">
+                    <a:lnL w="12700" cap="flat" cmpd="sng" algn="ctr">
+                      <a:solidFill>
+                        <a:srgbClr val="FFFFFF"/>
+                      </a:solidFill>
+                      <a:prstDash val="solid"/>
+                      <a:round/>
+                      <a:headEnd type="none" w="med" len="med"/>
+                      <a:tailEnd type="none" w="med" len="med"/>
+                    </a:lnL>
+                    <a:lnR w="12700" cap="flat" cmpd="sng" algn="ctr">
+                      <a:solidFill>
+                        <a:srgbClr val="FFFFFF"/>
+                      </a:solidFill>
+                      <a:prstDash val="solid"/>
+                      <a:round/>
+                      <a:headEnd type="none" w="med" len="med"/>
+                      <a:tailEnd type="none" w="med" len="med"/>
+                    </a:lnR>
+                    <a:lnT w="12700" cap="flat" cmpd="sng" algn="ctr">
+                      <a:solidFill>
+                        <a:srgbClr val="FFFFFF"/>
+                      </a:solidFill>
+                      <a:prstDash val="solid"/>
+                      <a:round/>
+                      <a:headEnd type="none" w="med" len="med"/>
+                      <a:tailEnd type="none" w="med" len="med"/>
+                    </a:lnT>
+                    <a:lnB w="12700" cap="flat" cmpd="sng" algn="ctr">
+                      <a:solidFill>
+                        <a:srgbClr val="FFFFFF"/>
+                      </a:solidFill>
+                      <a:prstDash val="solid"/>
+                      <a:round/>
+                      <a:headEnd type="none" w="med" len="med"/>
+                      <a:tailEnd type="none" w="med" len="med"/>
+                    </a:lnB>
+                    <a:solidFill>
+                      <a:schemeClr val="accent2"/>
+                    </a:solidFill>
+                  </a:tcPr>
+                </a:tc>
+                <a:tc>
+                  <a:txBody>
+                    <a:bodyPr/>
+                    <a:lstStyle/>
+                    <a:p>
+                      <a:pPr algn="r" indent="0" marL="0">
+                        <a:buNone/>
+                      </a:pPr>
+                      <a:r>
+                        <a:rPr lang="en-US" sz="1250" b="1" dirty="0">
+                          <a:solidFill>
+                            <a:schemeClr val="bg1"/>
+                          </a:solidFill>
+                          <a:latin typeface="Arial" pitchFamily="34" charset="0"/>
+                          <a:ea typeface="Arial" pitchFamily="34" charset="-122"/>
+                          <a:cs typeface="Arial" pitchFamily="34" charset="-120"/>
+                        </a:rPr>
+                        <a:t>Tage</a:t>
+                      </a:r>
+                      <a:endParaRPr lang="en-US" sz="1250" dirty="0">
+                        <a:latin typeface="Arial" charset="0"/>
+                        <a:ea typeface="Arial" charset="0"/>
+                        <a:cs typeface="Arial" charset="0"/>
+                      </a:endParaRPr>
+                    </a:p>
+                  </a:txBody>
+                  <a:tcPr marL="91440" marR="91440" marT="45720" marB="45720">
+                    <a:lnL w="12700" cap="flat" cmpd="sng" algn="ctr">
+                      <a:solidFill>
+                        <a:srgbClr val="FFFFFF"/>
+                      </a:solidFill>
+                      <a:prstDash val="solid"/>
+                      <a:round/>
+                      <a:headEnd type="none" w="med" len="med"/>
+                      <a:tailEnd type="none" w="med" len="med"/>
+                    </a:lnL>
+                    <a:lnR w="12700" cap="flat" cmpd="sng" algn="ctr">
+                      <a:solidFill>
+                        <a:srgbClr val="FFFFFF"/>
+                      </a:solidFill>
+                      <a:prstDash val="solid"/>
+                      <a:round/>
+                      <a:headEnd type="none" w="med" len="med"/>
+                      <a:tailEnd type="none" w="med" len="med"/>
+                    </a:lnR>
+                    <a:lnT w="12700" cap="flat" cmpd="sng" algn="ctr">
+                      <a:solidFill>
+                        <a:srgbClr val="FFFFFF"/>
+                      </a:solidFill>
+                      <a:prstDash val="solid"/>
+                      <a:round/>
+                      <a:headEnd type="none" w="med" len="med"/>
+                      <a:tailEnd type="none" w="med" len="med"/>
+                    </a:lnT>
+                    <a:lnB w="12700" cap="flat" cmpd="sng" algn="ctr">
+                      <a:solidFill>
+                        <a:srgbClr val="FFFFFF"/>
+                      </a:solidFill>
+                      <a:prstDash val="solid"/>
+                      <a:round/>
+                      <a:headEnd type="none" w="med" len="med"/>
+                      <a:tailEnd type="none" w="med" len="med"/>
+                    </a:lnB>
+                    <a:solidFill>
+                      <a:schemeClr val="accent2"/>
+                    </a:solidFill>
+                  </a:tcPr>
+                </a:tc>
+                <a:tc>
+                  <a:txBody>
+                    <a:bodyPr/>
+                    <a:lstStyle/>
+                    <a:p>
+                      <a:pPr algn="r" indent="0" marL="0">
+                        <a:buNone/>
+                      </a:pPr>
+                      <a:r>
+                        <a:rPr lang="en-US" sz="1250" b="1" dirty="0">
+                          <a:solidFill>
+                            <a:schemeClr val="bg1"/>
+                          </a:solidFill>
+                          <a:latin typeface="Arial" pitchFamily="34" charset="0"/>
+                          <a:ea typeface="Arial" pitchFamily="34" charset="-122"/>
+                          <a:cs typeface="Arial" pitchFamily="34" charset="-120"/>
+                        </a:rPr>
+                        <a:t>Gäste/Tag</a:t>
+                      </a:r>
+                      <a:endParaRPr lang="en-US" sz="1250" dirty="0">
+                        <a:latin typeface="Arial" charset="0"/>
+                        <a:ea typeface="Arial" charset="0"/>
+                        <a:cs typeface="Arial" charset="0"/>
+                      </a:endParaRPr>
+                    </a:p>
+                  </a:txBody>
+                  <a:tcPr marL="91440" marR="91440" marT="45720" marB="45720">
+                    <a:lnL w="12700" cap="flat" cmpd="sng" algn="ctr">
+                      <a:solidFill>
+                        <a:srgbClr val="FFFFFF"/>
+                      </a:solidFill>
+                      <a:prstDash val="solid"/>
+                      <a:round/>
+                      <a:headEnd type="none" w="med" len="med"/>
+                      <a:tailEnd type="none" w="med" len="med"/>
+                    </a:lnL>
+                    <a:lnR w="12700" cap="flat" cmpd="sng" algn="ctr">
+                      <a:solidFill>
+                        <a:srgbClr val="FFFFFF"/>
+                      </a:solidFill>
+                      <a:prstDash val="solid"/>
+                      <a:round/>
+                      <a:headEnd type="none" w="med" len="med"/>
+                      <a:tailEnd type="none" w="med" len="med"/>
+                    </a:lnR>
+                    <a:lnT w="12700" cap="flat" cmpd="sng" algn="ctr">
+                      <a:solidFill>
+                        <a:srgbClr val="FFFFFF"/>
+                      </a:solidFill>
+                      <a:prstDash val="solid"/>
+                      <a:round/>
+                      <a:headEnd type="none" w="med" len="med"/>
+                      <a:tailEnd type="none" w="med" len="med"/>
+                    </a:lnT>
+                    <a:lnB w="12700" cap="flat" cmpd="sng" algn="ctr">
+                      <a:solidFill>
+                        <a:srgbClr val="FFFFFF"/>
+                      </a:solidFill>
+                      <a:prstDash val="solid"/>
+                      <a:round/>
+                      <a:headEnd type="none" w="med" len="med"/>
+                      <a:tailEnd type="none" w="med" len="med"/>
+                    </a:lnB>
+                    <a:solidFill>
+                      <a:schemeClr val="accent2"/>
+                    </a:solidFill>
+                  </a:tcPr>
+                </a:tc>
+                <a:tc>
+                  <a:txBody>
+                    <a:bodyPr/>
+                    <a:lstStyle/>
+                    <a:p>
+                      <a:pPr algn="r" indent="0" marL="0">
+                        <a:buNone/>
+                      </a:pPr>
+                      <a:r>
+                        <a:rPr lang="en-US" sz="1250" b="1" dirty="0">
+                          <a:solidFill>
+                            <a:schemeClr val="bg1"/>
+                          </a:solidFill>
+                          <a:latin typeface="Arial" pitchFamily="34" charset="0"/>
+                          <a:ea typeface="Arial" pitchFamily="34" charset="-122"/>
+                          <a:cs typeface="Arial" pitchFamily="34" charset="-120"/>
+                        </a:rPr>
+                        <a:t>Ø Bon</a:t>
+                      </a:r>
+                      <a:endParaRPr lang="en-US" sz="1250" dirty="0">
+                        <a:latin typeface="Arial" charset="0"/>
+                        <a:ea typeface="Arial" charset="0"/>
+                        <a:cs typeface="Arial" charset="0"/>
+                      </a:endParaRPr>
+                    </a:p>
+                  </a:txBody>
+                  <a:tcPr marL="91440" marR="91440" marT="45720" marB="45720">
+                    <a:lnL w="12700" cap="flat" cmpd="sng" algn="ctr">
+                      <a:solidFill>
+                        <a:srgbClr val="FFFFFF"/>
+                      </a:solidFill>
+                      <a:prstDash val="solid"/>
+                      <a:round/>
+                      <a:headEnd type="none" w="med" len="med"/>
+                      <a:tailEnd type="none" w="med" len="med"/>
+                    </a:lnL>
+                    <a:lnR w="12700" cap="flat" cmpd="sng" algn="ctr">
+                      <a:solidFill>
+                        <a:srgbClr val="FFFFFF"/>
+                      </a:solidFill>
+                      <a:prstDash val="solid"/>
+                      <a:round/>
+                      <a:headEnd type="none" w="med" len="med"/>
+                      <a:tailEnd type="none" w="med" len="med"/>
+                    </a:lnR>
+                    <a:lnT w="12700" cap="flat" cmpd="sng" algn="ctr">
+                      <a:solidFill>
+                        <a:srgbClr val="FFFFFF"/>
+                      </a:solidFill>
+                      <a:prstDash val="solid"/>
+                      <a:round/>
+                      <a:headEnd type="none" w="med" len="med"/>
+                      <a:tailEnd type="none" w="med" len="med"/>
+                    </a:lnT>
+                    <a:lnB w="12700" cap="flat" cmpd="sng" algn="ctr">
+                      <a:solidFill>
+                        <a:srgbClr val="FFFFFF"/>
+                      </a:solidFill>
+                      <a:prstDash val="solid"/>
+                      <a:round/>
+                      <a:headEnd type="none" w="med" len="med"/>
+                      <a:tailEnd type="none" w="med" len="med"/>
+                    </a:lnB>
+                    <a:solidFill>
+                      <a:schemeClr val="accent2"/>
+                    </a:solidFill>
+                  </a:tcPr>
+                </a:tc>
+                <a:tc>
+                  <a:txBody>
+                    <a:bodyPr/>
+                    <a:lstStyle/>
+                    <a:p>
+                      <a:pPr algn="r" indent="0" marL="0">
+                        <a:buNone/>
+                      </a:pPr>
+                      <a:r>
+                        <a:rPr lang="en-US" sz="1250" b="1" dirty="0">
+                          <a:solidFill>
+                            <a:schemeClr val="bg1"/>
+                          </a:solidFill>
+                          <a:latin typeface="Arial" pitchFamily="34" charset="0"/>
+                          <a:ea typeface="Arial" pitchFamily="34" charset="-122"/>
+                          <a:cs typeface="Arial" pitchFamily="34" charset="-120"/>
+                        </a:rPr>
+                        <a:t>Umsatz/Monat</a:t>
+                      </a:r>
+                      <a:endParaRPr lang="en-US" sz="1250" dirty="0">
+                        <a:latin typeface="Arial" charset="0"/>
+                        <a:ea typeface="Arial" charset="0"/>
+                        <a:cs typeface="Arial" charset="0"/>
+                      </a:endParaRPr>
+                    </a:p>
+                  </a:txBody>
+                  <a:tcPr marL="91440" marR="91440" marT="45720" marB="45720">
+                    <a:lnL w="12700" cap="flat" cmpd="sng" algn="ctr">
+                      <a:solidFill>
+                        <a:srgbClr val="FFFFFF"/>
+                      </a:solidFill>
+                      <a:prstDash val="solid"/>
+                      <a:round/>
+                      <a:headEnd type="none" w="med" len="med"/>
+                      <a:tailEnd type="none" w="med" len="med"/>
+                    </a:lnL>
+                    <a:lnR w="12700" cap="flat" cmpd="sng" algn="ctr">
+                      <a:solidFill>
+                        <a:srgbClr val="FFFFFF"/>
+                      </a:solidFill>
+                      <a:prstDash val="solid"/>
+                      <a:round/>
+                      <a:headEnd type="none" w="med" len="med"/>
+                      <a:tailEnd type="none" w="med" len="med"/>
+                    </a:lnR>
+                    <a:lnT w="12700" cap="flat" cmpd="sng" algn="ctr">
+                      <a:solidFill>
+                        <a:srgbClr val="FFFFFF"/>
+                      </a:solidFill>
+                      <a:prstDash val="solid"/>
+                      <a:round/>
+                      <a:headEnd type="none" w="med" len="med"/>
+                      <a:tailEnd type="none" w="med" len="med"/>
+                    </a:lnT>
+                    <a:lnB w="12700" cap="flat" cmpd="sng" algn="ctr">
+                      <a:solidFill>
+                        <a:srgbClr val="FFFFFF"/>
+                      </a:solidFill>
+                      <a:prstDash val="solid"/>
+                      <a:round/>
+                      <a:headEnd type="none" w="med" len="med"/>
+                      <a:tailEnd type="none" w="med" len="med"/>
+                    </a:lnB>
+                    <a:solidFill>
+                      <a:schemeClr val="accent2"/>
+                    </a:solidFill>
+                  </a:tcPr>
+                </a:tc>
+              </a:tr>
+              <a:tr h="246888">
+                <a:tc>
+                  <a:txBody>
+                    <a:bodyPr/>
+                    <a:lstStyle/>
+                    <a:p>
+                      <a:pPr indent="0" marL="0">
+                        <a:buNone/>
+                      </a:pPr>
+                      <a:r>
+                        <a:rPr lang="en-US" sz="1250" dirty="0">
+                          <a:solidFill>
+                            <a:srgbClr val="000000"/>
+                          </a:solidFill>
+                          <a:latin typeface="Arial" pitchFamily="34" charset="0"/>
+                          <a:ea typeface="Arial" pitchFamily="34" charset="-122"/>
+                          <a:cs typeface="Arial" pitchFamily="34" charset="-120"/>
+                        </a:rPr>
+                        <a:t>Abendessen Restaurant</a:t>
+                      </a:r>
+                      <a:endParaRPr lang="en-US" sz="1250" dirty="0">
+                        <a:latin typeface="Arial" charset="0"/>
+                        <a:ea typeface="Arial" charset="0"/>
+                        <a:cs typeface="Arial" charset="0"/>
+                      </a:endParaRPr>
+                    </a:p>
+                  </a:txBody>
+                  <a:tcPr marL="91440" marR="91440" marT="45720" marB="45720">
+                    <a:lnL w="12700" cap="flat" cmpd="sng" algn="ctr">
+                      <a:solidFill>
+                        <a:srgbClr val="FFFFFF"/>
+                      </a:solidFill>
+                      <a:prstDash val="solid"/>
+                      <a:round/>
+                      <a:headEnd type="none" w="med" len="med"/>
+                      <a:tailEnd type="none" w="med" len="med"/>
+                    </a:lnL>
+                    <a:lnR w="12700" cap="flat" cmpd="sng" algn="ctr">
+                      <a:solidFill>
+                        <a:srgbClr val="FFFFFF"/>
+                      </a:solidFill>
+                      <a:prstDash val="solid"/>
+                      <a:round/>
+                      <a:headEnd type="none" w="med" len="med"/>
+                      <a:tailEnd type="none" w="med" len="med"/>
+                    </a:lnR>
+                    <a:lnT w="12700" cap="flat" cmpd="sng" algn="ctr">
+                      <a:solidFill>
+                        <a:srgbClr val="FFFFFF"/>
+                      </a:solidFill>
+                      <a:prstDash val="solid"/>
+                      <a:round/>
+                      <a:headEnd type="none" w="med" len="med"/>
+                      <a:tailEnd type="none" w="med" len="med"/>
+                    </a:lnT>
+                    <a:lnB w="12700" cap="flat" cmpd="sng" algn="ctr">
+                      <a:solidFill>
+                        <a:srgbClr val="FFFFFF"/>
+                      </a:solidFill>
+                      <a:prstDash val="solid"/>
+                      <a:round/>
+                      <a:headEnd type="none" w="med" len="med"/>
+                      <a:tailEnd type="none" w="med" len="med"/>
+                    </a:lnB>
+                  </a:tcPr>
+                </a:tc>
+                <a:tc>
+                  <a:txBody>
+                    <a:bodyPr/>
+                    <a:lstStyle/>
+                    <a:p>
+                      <a:pPr algn="r" indent="0" marL="0">
+                        <a:buNone/>
+                      </a:pPr>
+                      <a:r>
+                        <a:rPr lang="en-US" sz="1250" dirty="0">
+                          <a:solidFill>
+                            <a:srgbClr val="000000"/>
+                          </a:solidFill>
+                          <a:latin typeface="Arial" pitchFamily="34" charset="0"/>
+                          <a:ea typeface="Arial" pitchFamily="34" charset="-122"/>
+                          <a:cs typeface="Arial" pitchFamily="34" charset="-120"/>
+                        </a:rPr>
+                        <a:t>26</a:t>
+                      </a:r>
+                      <a:endParaRPr lang="en-US" sz="1250" dirty="0">
+                        <a:latin typeface="Arial" charset="0"/>
+                        <a:ea typeface="Arial" charset="0"/>
+                        <a:cs typeface="Arial" charset="0"/>
+                      </a:endParaRPr>
+                    </a:p>
+                  </a:txBody>
+                  <a:tcPr marL="91440" marR="91440" marT="45720" marB="45720">
+                    <a:lnL w="12700" cap="flat" cmpd="sng" algn="ctr">
+                      <a:solidFill>
+                        <a:srgbClr val="FFFFFF"/>
+                      </a:solidFill>
+                      <a:prstDash val="solid"/>
+                      <a:round/>
+                      <a:headEnd type="none" w="med" len="med"/>
+                      <a:tailEnd type="none" w="med" len="med"/>
+                    </a:lnL>
+                    <a:lnR w="12700" cap="flat" cmpd="sng" algn="ctr">
+                      <a:solidFill>
+                        <a:srgbClr val="FFFFFF"/>
+                      </a:solidFill>
+                      <a:prstDash val="solid"/>
+                      <a:round/>
+                      <a:headEnd type="none" w="med" len="med"/>
+                      <a:tailEnd type="none" w="med" len="med"/>
+                    </a:lnR>
+                    <a:lnT w="12700" cap="flat" cmpd="sng" algn="ctr">
+                      <a:solidFill>
+                        <a:srgbClr val="FFFFFF"/>
+                      </a:solidFill>
+                      <a:prstDash val="solid"/>
+                      <a:round/>
+                      <a:headEnd type="none" w="med" len="med"/>
+                      <a:tailEnd type="none" w="med" len="med"/>
+                    </a:lnT>
+                    <a:lnB w="12700" cap="flat" cmpd="sng" algn="ctr">
+                      <a:solidFill>
+                        <a:srgbClr val="FFFFFF"/>
+                      </a:solidFill>
+                      <a:prstDash val="solid"/>
+                      <a:round/>
+                      <a:headEnd type="none" w="med" len="med"/>
+                      <a:tailEnd type="none" w="med" len="med"/>
+                    </a:lnB>
+                  </a:tcPr>
+                </a:tc>
+                <a:tc>
+                  <a:txBody>
+                    <a:bodyPr/>
+                    <a:lstStyle/>
+                    <a:p>
+                      <a:pPr algn="r" indent="0" marL="0">
+                        <a:buNone/>
+                      </a:pPr>
+                      <a:r>
+                        <a:rPr lang="en-US" sz="1250" dirty="0">
+                          <a:solidFill>
+                            <a:srgbClr val="000000"/>
+                          </a:solidFill>
+                          <a:latin typeface="Arial" pitchFamily="34" charset="0"/>
+                          <a:ea typeface="Arial" pitchFamily="34" charset="-122"/>
+                          <a:cs typeface="Arial" pitchFamily="34" charset="-120"/>
+                        </a:rPr>
+                        <a:t>55</a:t>
+                      </a:r>
+                      <a:endParaRPr lang="en-US" sz="1250" dirty="0">
+                        <a:latin typeface="Arial" charset="0"/>
+                        <a:ea typeface="Arial" charset="0"/>
+                        <a:cs typeface="Arial" charset="0"/>
+                      </a:endParaRPr>
+                    </a:p>
+                  </a:txBody>
+                  <a:tcPr marL="91440" marR="91440" marT="45720" marB="45720">
+                    <a:lnL w="12700" cap="flat" cmpd="sng" algn="ctr">
+                      <a:solidFill>
+                        <a:srgbClr val="FFFFFF"/>
+                      </a:solidFill>
+                      <a:prstDash val="solid"/>
+                      <a:round/>
+                      <a:headEnd type="none" w="med" len="med"/>
+                      <a:tailEnd type="none" w="med" len="med"/>
+                    </a:lnL>
+                    <a:lnR w="12700" cap="flat" cmpd="sng" algn="ctr">
+                      <a:solidFill>
+                        <a:srgbClr val="FFFFFF"/>
+                      </a:solidFill>
+                      <a:prstDash val="solid"/>
+                      <a:round/>
+                      <a:headEnd type="none" w="med" len="med"/>
+                      <a:tailEnd type="none" w="med" len="med"/>
+                    </a:lnR>
+                    <a:lnT w="12700" cap="flat" cmpd="sng" algn="ctr">
+                      <a:solidFill>
+                        <a:srgbClr val="FFFFFF"/>
+                      </a:solidFill>
+                      <a:prstDash val="solid"/>
+                      <a:round/>
+                      <a:headEnd type="none" w="med" len="med"/>
+                      <a:tailEnd type="none" w="med" len="med"/>
+                    </a:lnT>
+                    <a:lnB w="12700" cap="flat" cmpd="sng" algn="ctr">
+                      <a:solidFill>
+                        <a:srgbClr val="FFFFFF"/>
+                      </a:solidFill>
+                      <a:prstDash val="solid"/>
+                      <a:round/>
+                      <a:headEnd type="none" w="med" len="med"/>
+                      <a:tailEnd type="none" w="med" len="med"/>
+                    </a:lnB>
+                  </a:tcPr>
+                </a:tc>
+                <a:tc>
+                  <a:txBody>
+                    <a:bodyPr/>
+                    <a:lstStyle/>
+                    <a:p>
+                      <a:pPr algn="r" indent="0" marL="0">
+                        <a:buNone/>
+                      </a:pPr>
+                      <a:r>
+                        <a:rPr lang="en-US" sz="1250" dirty="0">
+                          <a:solidFill>
+                            <a:srgbClr val="000000"/>
+                          </a:solidFill>
+                          <a:latin typeface="Arial" pitchFamily="34" charset="0"/>
+                          <a:ea typeface="Arial" pitchFamily="34" charset="-122"/>
+                          <a:cs typeface="Arial" pitchFamily="34" charset="-120"/>
+                        </a:rPr>
+                        <a:t>32 €</a:t>
+                      </a:r>
+                      <a:endParaRPr lang="en-US" sz="1250" dirty="0">
+                        <a:latin typeface="Arial" charset="0"/>
+                        <a:ea typeface="Arial" charset="0"/>
+                        <a:cs typeface="Arial" charset="0"/>
+                      </a:endParaRPr>
+                    </a:p>
+                  </a:txBody>
+                  <a:tcPr marL="91440" marR="91440" marT="45720" marB="45720">
+                    <a:lnL w="12700" cap="flat" cmpd="sng" algn="ctr">
+                      <a:solidFill>
+                        <a:srgbClr val="FFFFFF"/>
+                      </a:solidFill>
+                      <a:prstDash val="solid"/>
+                      <a:round/>
+                      <a:headEnd type="none" w="med" len="med"/>
+                      <a:tailEnd type="none" w="med" len="med"/>
+                    </a:lnL>
+                    <a:lnR w="12700" cap="flat" cmpd="sng" algn="ctr">
+                      <a:solidFill>
+                        <a:srgbClr val="FFFFFF"/>
+                      </a:solidFill>
+                      <a:prstDash val="solid"/>
+                      <a:round/>
+                      <a:headEnd type="none" w="med" len="med"/>
+                      <a:tailEnd type="none" w="med" len="med"/>
+                    </a:lnR>
+                    <a:lnT w="12700" cap="flat" cmpd="sng" algn="ctr">
+                      <a:solidFill>
+                        <a:srgbClr val="FFFFFF"/>
+                      </a:solidFill>
+                      <a:prstDash val="solid"/>
+                      <a:round/>
+                      <a:headEnd type="none" w="med" len="med"/>
+                      <a:tailEnd type="none" w="med" len="med"/>
+                    </a:lnT>
+                    <a:lnB w="12700" cap="flat" cmpd="sng" algn="ctr">
+                      <a:solidFill>
+                        <a:srgbClr val="FFFFFF"/>
+                      </a:solidFill>
+                      <a:prstDash val="solid"/>
+                      <a:round/>
+                      <a:headEnd type="none" w="med" len="med"/>
+                      <a:tailEnd type="none" w="med" len="med"/>
+                    </a:lnB>
+                  </a:tcPr>
+                </a:tc>
+                <a:tc>
+                  <a:txBody>
+                    <a:bodyPr/>
+                    <a:lstStyle/>
+                    <a:p>
+                      <a:pPr algn="r" indent="0" marL="0">
+                        <a:buNone/>
+                      </a:pPr>
+                      <a:r>
+                        <a:rPr lang="en-US" sz="1250" dirty="0">
+                          <a:solidFill>
+                            <a:srgbClr val="000000"/>
+                          </a:solidFill>
+                          <a:latin typeface="Arial" pitchFamily="34" charset="0"/>
+                          <a:ea typeface="Arial" pitchFamily="34" charset="-122"/>
+                          <a:cs typeface="Arial" pitchFamily="34" charset="-120"/>
+                        </a:rPr>
+                        <a:t>45.760 €</a:t>
+                      </a:r>
+                      <a:endParaRPr lang="en-US" sz="1250" dirty="0">
+                        <a:latin typeface="Arial" charset="0"/>
+                        <a:ea typeface="Arial" charset="0"/>
+                        <a:cs typeface="Arial" charset="0"/>
+                      </a:endParaRPr>
+                    </a:p>
+                  </a:txBody>
+                  <a:tcPr marL="91440" marR="91440" marT="45720" marB="45720">
+                    <a:lnL w="12700" cap="flat" cmpd="sng" algn="ctr">
+                      <a:solidFill>
+                        <a:srgbClr val="FFFFFF"/>
+                      </a:solidFill>
+                      <a:prstDash val="solid"/>
+                      <a:round/>
+                      <a:headEnd type="none" w="med" len="med"/>
+                      <a:tailEnd type="none" w="med" len="med"/>
+                    </a:lnL>
+                    <a:lnR w="12700" cap="flat" cmpd="sng" algn="ctr">
+                      <a:solidFill>
+                        <a:srgbClr val="FFFFFF"/>
+                      </a:solidFill>
+                      <a:prstDash val="solid"/>
+                      <a:round/>
+                      <a:headEnd type="none" w="med" len="med"/>
+                      <a:tailEnd type="none" w="med" len="med"/>
+                    </a:lnR>
+                    <a:lnT w="12700" cap="flat" cmpd="sng" algn="ctr">
+                      <a:solidFill>
+                        <a:srgbClr val="FFFFFF"/>
+                      </a:solidFill>
+                      <a:prstDash val="solid"/>
+                      <a:round/>
+                      <a:headEnd type="none" w="med" len="med"/>
+                      <a:tailEnd type="none" w="med" len="med"/>
+                    </a:lnT>
+                    <a:lnB w="12700" cap="flat" cmpd="sng" algn="ctr">
+                      <a:solidFill>
+                        <a:srgbClr val="FFFFFF"/>
+                      </a:solidFill>
+                      <a:prstDash val="solid"/>
+                      <a:round/>
+                      <a:headEnd type="none" w="med" len="med"/>
+                      <a:tailEnd type="none" w="med" len="med"/>
+                    </a:lnB>
+                  </a:tcPr>
+                </a:tc>
+              </a:tr>
+              <a:tr h="246888">
+                <a:tc>
+                  <a:txBody>
+                    <a:bodyPr/>
+                    <a:lstStyle/>
+                    <a:p>
+                      <a:pPr indent="0" marL="0">
+                        <a:buNone/>
+                      </a:pPr>
+                      <a:r>
+                        <a:rPr lang="en-US" sz="1250" dirty="0">
+                          <a:solidFill>
+                            <a:srgbClr val="000000"/>
+                          </a:solidFill>
+                          <a:latin typeface="Arial" pitchFamily="34" charset="0"/>
+                          <a:ea typeface="Arial" pitchFamily="34" charset="-122"/>
+                          <a:cs typeface="Arial" pitchFamily="34" charset="-120"/>
+                        </a:rPr>
+                        <a:t>Bar Di–Do</a:t>
+                      </a:r>
+                      <a:endParaRPr lang="en-US" sz="1250" dirty="0">
+                        <a:latin typeface="Arial" charset="0"/>
+                        <a:ea typeface="Arial" charset="0"/>
+                        <a:cs typeface="Arial" charset="0"/>
+                      </a:endParaRPr>
+                    </a:p>
+                  </a:txBody>
+                  <a:tcPr marL="91440" marR="91440" marT="45720" marB="45720">
+                    <a:lnL w="12700" cap="flat" cmpd="sng" algn="ctr">
+                      <a:solidFill>
+                        <a:srgbClr val="FFFFFF"/>
+                      </a:solidFill>
+                      <a:prstDash val="solid"/>
+                      <a:round/>
+                      <a:headEnd type="none" w="med" len="med"/>
+                      <a:tailEnd type="none" w="med" len="med"/>
+                    </a:lnL>
+                    <a:lnR w="12700" cap="flat" cmpd="sng" algn="ctr">
+                      <a:solidFill>
+                        <a:srgbClr val="FFFFFF"/>
+                      </a:solidFill>
+                      <a:prstDash val="solid"/>
+                      <a:round/>
+                      <a:headEnd type="none" w="med" len="med"/>
+                      <a:tailEnd type="none" w="med" len="med"/>
+                    </a:lnR>
+                    <a:lnT w="12700" cap="flat" cmpd="sng" algn="ctr">
+                      <a:solidFill>
+                        <a:srgbClr val="FFFFFF"/>
+                      </a:solidFill>
+                      <a:prstDash val="solid"/>
+                      <a:round/>
+                      <a:headEnd type="none" w="med" len="med"/>
+                      <a:tailEnd type="none" w="med" len="med"/>
+                    </a:lnT>
+                    <a:lnB w="12700" cap="flat" cmpd="sng" algn="ctr">
+                      <a:solidFill>
+                        <a:srgbClr val="FFFFFF"/>
+                      </a:solidFill>
+                      <a:prstDash val="solid"/>
+                      <a:round/>
+                      <a:headEnd type="none" w="med" len="med"/>
+                      <a:tailEnd type="none" w="med" len="med"/>
+                    </a:lnB>
+                  </a:tcPr>
+                </a:tc>
+                <a:tc>
+                  <a:txBody>
+                    <a:bodyPr/>
+                    <a:lstStyle/>
+                    <a:p>
+                      <a:pPr algn="r" indent="0" marL="0">
+                        <a:buNone/>
+                      </a:pPr>
+                      <a:r>
+                        <a:rPr lang="en-US" sz="1250" dirty="0">
+                          <a:solidFill>
+                            <a:srgbClr val="000000"/>
+                          </a:solidFill>
+                          <a:latin typeface="Arial" pitchFamily="34" charset="0"/>
+                          <a:ea typeface="Arial" pitchFamily="34" charset="-122"/>
+                          <a:cs typeface="Arial" pitchFamily="34" charset="-120"/>
+                        </a:rPr>
+                        <a:t>13</a:t>
+                      </a:r>
+                      <a:endParaRPr lang="en-US" sz="1250" dirty="0">
+                        <a:latin typeface="Arial" charset="0"/>
+                        <a:ea typeface="Arial" charset="0"/>
+                        <a:cs typeface="Arial" charset="0"/>
+                      </a:endParaRPr>
+                    </a:p>
+                  </a:txBody>
+                  <a:tcPr marL="91440" marR="91440" marT="45720" marB="45720">
+                    <a:lnL w="12700" cap="flat" cmpd="sng" algn="ctr">
+                      <a:solidFill>
+                        <a:srgbClr val="FFFFFF"/>
+                      </a:solidFill>
+                      <a:prstDash val="solid"/>
+                      <a:round/>
+                      <a:headEnd type="none" w="med" len="med"/>
+                      <a:tailEnd type="none" w="med" len="med"/>
+                    </a:lnL>
+                    <a:lnR w="12700" cap="flat" cmpd="sng" algn="ctr">
+                      <a:solidFill>
+                        <a:srgbClr val="FFFFFF"/>
+                      </a:solidFill>
+                      <a:prstDash val="solid"/>
+                      <a:round/>
+                      <a:headEnd type="none" w="med" len="med"/>
+                      <a:tailEnd type="none" w="med" len="med"/>
+                    </a:lnR>
+                    <a:lnT w="12700" cap="flat" cmpd="sng" algn="ctr">
+                      <a:solidFill>
+                        <a:srgbClr val="FFFFFF"/>
+                      </a:solidFill>
+                      <a:prstDash val="solid"/>
+                      <a:round/>
+                      <a:headEnd type="none" w="med" len="med"/>
+                      <a:tailEnd type="none" w="med" len="med"/>
+                    </a:lnT>
+                    <a:lnB w="12700" cap="flat" cmpd="sng" algn="ctr">
+                      <a:solidFill>
+                        <a:srgbClr val="FFFFFF"/>
+                      </a:solidFill>
+                      <a:prstDash val="solid"/>
+                      <a:round/>
+                      <a:headEnd type="none" w="med" len="med"/>
+                      <a:tailEnd type="none" w="med" len="med"/>
+                    </a:lnB>
+                  </a:tcPr>
+                </a:tc>
+                <a:tc>
+                  <a:txBody>
+                    <a:bodyPr/>
+                    <a:lstStyle/>
+                    <a:p>
+                      <a:pPr algn="r" indent="0" marL="0">
+                        <a:buNone/>
+                      </a:pPr>
+                      <a:r>
+                        <a:rPr lang="en-US" sz="1250" dirty="0">
+                          <a:solidFill>
+                            <a:srgbClr val="000000"/>
+                          </a:solidFill>
+                          <a:latin typeface="Arial" pitchFamily="34" charset="0"/>
+                          <a:ea typeface="Arial" pitchFamily="34" charset="-122"/>
+                          <a:cs typeface="Arial" pitchFamily="34" charset="-120"/>
+                        </a:rPr>
+                        <a:t>20</a:t>
+                      </a:r>
+                      <a:endParaRPr lang="en-US" sz="1250" dirty="0">
+                        <a:latin typeface="Arial" charset="0"/>
+                        <a:ea typeface="Arial" charset="0"/>
+                        <a:cs typeface="Arial" charset="0"/>
+                      </a:endParaRPr>
+                    </a:p>
+                  </a:txBody>
+                  <a:tcPr marL="91440" marR="91440" marT="45720" marB="45720">
+                    <a:lnL w="12700" cap="flat" cmpd="sng" algn="ctr">
+                      <a:solidFill>
+                        <a:srgbClr val="FFFFFF"/>
+                      </a:solidFill>
+                      <a:prstDash val="solid"/>
+                      <a:round/>
+                      <a:headEnd type="none" w="med" len="med"/>
+                      <a:tailEnd type="none" w="med" len="med"/>
+                    </a:lnL>
+                    <a:lnR w="12700" cap="flat" cmpd="sng" algn="ctr">
+                      <a:solidFill>
+                        <a:srgbClr val="FFFFFF"/>
+                      </a:solidFill>
+                      <a:prstDash val="solid"/>
+                      <a:round/>
+                      <a:headEnd type="none" w="med" len="med"/>
+                      <a:tailEnd type="none" w="med" len="med"/>
+                    </a:lnR>
+                    <a:lnT w="12700" cap="flat" cmpd="sng" algn="ctr">
+                      <a:solidFill>
+                        <a:srgbClr val="FFFFFF"/>
+                      </a:solidFill>
+                      <a:prstDash val="solid"/>
+                      <a:round/>
+                      <a:headEnd type="none" w="med" len="med"/>
+                      <a:tailEnd type="none" w="med" len="med"/>
+                    </a:lnT>
+                    <a:lnB w="12700" cap="flat" cmpd="sng" algn="ctr">
+                      <a:solidFill>
+                        <a:srgbClr val="FFFFFF"/>
+                      </a:solidFill>
+                      <a:prstDash val="solid"/>
+                      <a:round/>
+                      <a:headEnd type="none" w="med" len="med"/>
+                      <a:tailEnd type="none" w="med" len="med"/>
+                    </a:lnB>
+                  </a:tcPr>
+                </a:tc>
+                <a:tc>
+                  <a:txBody>
+                    <a:bodyPr/>
+                    <a:lstStyle/>
+                    <a:p>
+                      <a:pPr algn="r" indent="0" marL="0">
+                        <a:buNone/>
+                      </a:pPr>
+                      <a:r>
+                        <a:rPr lang="en-US" sz="1250" dirty="0">
+                          <a:solidFill>
+                            <a:srgbClr val="000000"/>
+                          </a:solidFill>
+                          <a:latin typeface="Arial" pitchFamily="34" charset="0"/>
+                          <a:ea typeface="Arial" pitchFamily="34" charset="-122"/>
+                          <a:cs typeface="Arial" pitchFamily="34" charset="-120"/>
+                        </a:rPr>
+                        <a:t>18 €</a:t>
+                      </a:r>
+                      <a:endParaRPr lang="en-US" sz="1250" dirty="0">
+                        <a:latin typeface="Arial" charset="0"/>
+                        <a:ea typeface="Arial" charset="0"/>
+                        <a:cs typeface="Arial" charset="0"/>
+                      </a:endParaRPr>
+                    </a:p>
+                  </a:txBody>
+                  <a:tcPr marL="91440" marR="91440" marT="45720" marB="45720">
+                    <a:lnL w="12700" cap="flat" cmpd="sng" algn="ctr">
+                      <a:solidFill>
+                        <a:srgbClr val="FFFFFF"/>
+                      </a:solidFill>
+                      <a:prstDash val="solid"/>
+                      <a:round/>
+                      <a:headEnd type="none" w="med" len="med"/>
+                      <a:tailEnd type="none" w="med" len="med"/>
+                    </a:lnL>
+                    <a:lnR w="12700" cap="flat" cmpd="sng" algn="ctr">
+                      <a:solidFill>
+                        <a:srgbClr val="FFFFFF"/>
+                      </a:solidFill>
+                      <a:prstDash val="solid"/>
+                      <a:round/>
+                      <a:headEnd type="none" w="med" len="med"/>
+                      <a:tailEnd type="none" w="med" len="med"/>
+                    </a:lnR>
+                    <a:lnT w="12700" cap="flat" cmpd="sng" algn="ctr">
+                      <a:solidFill>
+                        <a:srgbClr val="FFFFFF"/>
+                      </a:solidFill>
+                      <a:prstDash val="solid"/>
+                      <a:round/>
+                      <a:headEnd type="none" w="med" len="med"/>
+                      <a:tailEnd type="none" w="med" len="med"/>
+                    </a:lnT>
+                    <a:lnB w="12700" cap="flat" cmpd="sng" algn="ctr">
+                      <a:solidFill>
+                        <a:srgbClr val="FFFFFF"/>
+                      </a:solidFill>
+                      <a:prstDash val="solid"/>
+                      <a:round/>
+                      <a:headEnd type="none" w="med" len="med"/>
+                      <a:tailEnd type="none" w="med" len="med"/>
+                    </a:lnB>
+                  </a:tcPr>
+                </a:tc>
+                <a:tc>
+                  <a:txBody>
+                    <a:bodyPr/>
+                    <a:lstStyle/>
+                    <a:p>
+                      <a:pPr algn="r" indent="0" marL="0">
+                        <a:buNone/>
+                      </a:pPr>
+                      <a:r>
+                        <a:rPr lang="en-US" sz="1250" dirty="0">
+                          <a:solidFill>
+                            <a:srgbClr val="000000"/>
+                          </a:solidFill>
+                          <a:latin typeface="Arial" pitchFamily="34" charset="0"/>
+                          <a:ea typeface="Arial" pitchFamily="34" charset="-122"/>
+                          <a:cs typeface="Arial" pitchFamily="34" charset="-120"/>
+                        </a:rPr>
+                        <a:t>4.680 €</a:t>
+                      </a:r>
+                      <a:endParaRPr lang="en-US" sz="1250" dirty="0">
+                        <a:latin typeface="Arial" charset="0"/>
+                        <a:ea typeface="Arial" charset="0"/>
+                        <a:cs typeface="Arial" charset="0"/>
+                      </a:endParaRPr>
+                    </a:p>
+                  </a:txBody>
+                  <a:tcPr marL="91440" marR="91440" marT="45720" marB="45720">
+                    <a:lnL w="12700" cap="flat" cmpd="sng" algn="ctr">
+                      <a:solidFill>
+                        <a:srgbClr val="FFFFFF"/>
+                      </a:solidFill>
+                      <a:prstDash val="solid"/>
+                      <a:round/>
+                      <a:headEnd type="none" w="med" len="med"/>
+                      <a:tailEnd type="none" w="med" len="med"/>
+                    </a:lnL>
+                    <a:lnR w="12700" cap="flat" cmpd="sng" algn="ctr">
+                      <a:solidFill>
+                        <a:srgbClr val="FFFFFF"/>
+                      </a:solidFill>
+                      <a:prstDash val="solid"/>
+                      <a:round/>
+                      <a:headEnd type="none" w="med" len="med"/>
+                      <a:tailEnd type="none" w="med" len="med"/>
+                    </a:lnR>
+                    <a:lnT w="12700" cap="flat" cmpd="sng" algn="ctr">
+                      <a:solidFill>
+                        <a:srgbClr val="FFFFFF"/>
+                      </a:solidFill>
+                      <a:prstDash val="solid"/>
+                      <a:round/>
+                      <a:headEnd type="none" w="med" len="med"/>
+                      <a:tailEnd type="none" w="med" len="med"/>
+                    </a:lnT>
+                    <a:lnB w="12700" cap="flat" cmpd="sng" algn="ctr">
+                      <a:solidFill>
+                        <a:srgbClr val="FFFFFF"/>
+                      </a:solidFill>
+                      <a:prstDash val="solid"/>
+                      <a:round/>
+                      <a:headEnd type="none" w="med" len="med"/>
+                      <a:tailEnd type="none" w="med" len="med"/>
+                    </a:lnB>
+                  </a:tcPr>
+                </a:tc>
+              </a:tr>
+              <a:tr h="246888">
+                <a:tc>
+                  <a:txBody>
+                    <a:bodyPr/>
+                    <a:lstStyle/>
+                    <a:p>
+                      <a:pPr indent="0" marL="0">
+                        <a:buNone/>
+                      </a:pPr>
+                      <a:r>
+                        <a:rPr lang="en-US" sz="1250" dirty="0">
+                          <a:solidFill>
+                            <a:srgbClr val="000000"/>
+                          </a:solidFill>
+                          <a:latin typeface="Arial" pitchFamily="34" charset="0"/>
+                          <a:ea typeface="Arial" pitchFamily="34" charset="-122"/>
+                          <a:cs typeface="Arial" pitchFamily="34" charset="-120"/>
+                        </a:rPr>
+                        <a:t>Bar Fr, Sa (bis 01:00)</a:t>
+                      </a:r>
+                      <a:endParaRPr lang="en-US" sz="1250" dirty="0">
+                        <a:latin typeface="Arial" charset="0"/>
+                        <a:ea typeface="Arial" charset="0"/>
+                        <a:cs typeface="Arial" charset="0"/>
+                      </a:endParaRPr>
+                    </a:p>
+                  </a:txBody>
+                  <a:tcPr marL="91440" marR="91440" marT="45720" marB="45720">
+                    <a:lnL w="12700" cap="flat" cmpd="sng" algn="ctr">
+                      <a:solidFill>
+                        <a:srgbClr val="FFFFFF"/>
+                      </a:solidFill>
+                      <a:prstDash val="solid"/>
+                      <a:round/>
+                      <a:headEnd type="none" w="med" len="med"/>
+                      <a:tailEnd type="none" w="med" len="med"/>
+                    </a:lnL>
+                    <a:lnR w="12700" cap="flat" cmpd="sng" algn="ctr">
+                      <a:solidFill>
+                        <a:srgbClr val="FFFFFF"/>
+                      </a:solidFill>
+                      <a:prstDash val="solid"/>
+                      <a:round/>
+                      <a:headEnd type="none" w="med" len="med"/>
+                      <a:tailEnd type="none" w="med" len="med"/>
+                    </a:lnR>
+                    <a:lnT w="12700" cap="flat" cmpd="sng" algn="ctr">
+                      <a:solidFill>
+                        <a:srgbClr val="FFFFFF"/>
+                      </a:solidFill>
+                      <a:prstDash val="solid"/>
+                      <a:round/>
+                      <a:headEnd type="none" w="med" len="med"/>
+                      <a:tailEnd type="none" w="med" len="med"/>
+                    </a:lnT>
+                    <a:lnB w="12700" cap="flat" cmpd="sng" algn="ctr">
+                      <a:solidFill>
+                        <a:srgbClr val="FFFFFF"/>
+                      </a:solidFill>
+                      <a:prstDash val="solid"/>
+                      <a:round/>
+                      <a:headEnd type="none" w="med" len="med"/>
+                      <a:tailEnd type="none" w="med" len="med"/>
+                    </a:lnB>
+                  </a:tcPr>
+                </a:tc>
+                <a:tc>
+                  <a:txBody>
+                    <a:bodyPr/>
+                    <a:lstStyle/>
+                    <a:p>
+                      <a:pPr algn="r" indent="0" marL="0">
+                        <a:buNone/>
+                      </a:pPr>
+                      <a:r>
+                        <a:rPr lang="en-US" sz="1250" dirty="0">
+                          <a:solidFill>
+                            <a:srgbClr val="000000"/>
+                          </a:solidFill>
+                          <a:latin typeface="Arial" pitchFamily="34" charset="0"/>
+                          <a:ea typeface="Arial" pitchFamily="34" charset="-122"/>
+                          <a:cs typeface="Arial" pitchFamily="34" charset="-120"/>
+                        </a:rPr>
+                        <a:t>9</a:t>
+                      </a:r>
+                      <a:endParaRPr lang="en-US" sz="1250" dirty="0">
+                        <a:latin typeface="Arial" charset="0"/>
+                        <a:ea typeface="Arial" charset="0"/>
+                        <a:cs typeface="Arial" charset="0"/>
+                      </a:endParaRPr>
+                    </a:p>
+                  </a:txBody>
+                  <a:tcPr marL="91440" marR="91440" marT="45720" marB="45720">
+                    <a:lnL w="12700" cap="flat" cmpd="sng" algn="ctr">
+                      <a:solidFill>
+                        <a:srgbClr val="FFFFFF"/>
+                      </a:solidFill>
+                      <a:prstDash val="solid"/>
+                      <a:round/>
+                      <a:headEnd type="none" w="med" len="med"/>
+                      <a:tailEnd type="none" w="med" len="med"/>
+                    </a:lnL>
+                    <a:lnR w="12700" cap="flat" cmpd="sng" algn="ctr">
+                      <a:solidFill>
+                        <a:srgbClr val="FFFFFF"/>
+                      </a:solidFill>
+                      <a:prstDash val="solid"/>
+                      <a:round/>
+                      <a:headEnd type="none" w="med" len="med"/>
+                      <a:tailEnd type="none" w="med" len="med"/>
+                    </a:lnR>
+                    <a:lnT w="12700" cap="flat" cmpd="sng" algn="ctr">
+                      <a:solidFill>
+                        <a:srgbClr val="FFFFFF"/>
+                      </a:solidFill>
+                      <a:prstDash val="solid"/>
+                      <a:round/>
+                      <a:headEnd type="none" w="med" len="med"/>
+                      <a:tailEnd type="none" w="med" len="med"/>
+                    </a:lnT>
+                    <a:lnB w="12700" cap="flat" cmpd="sng" algn="ctr">
+                      <a:solidFill>
+                        <a:srgbClr val="FFFFFF"/>
+                      </a:solidFill>
+                      <a:prstDash val="solid"/>
+                      <a:round/>
+                      <a:headEnd type="none" w="med" len="med"/>
+                      <a:tailEnd type="none" w="med" len="med"/>
+                    </a:lnB>
+                  </a:tcPr>
+                </a:tc>
+                <a:tc>
+                  <a:txBody>
+                    <a:bodyPr/>
+                    <a:lstStyle/>
+                    <a:p>
+                      <a:pPr algn="r" indent="0" marL="0">
+                        <a:buNone/>
+                      </a:pPr>
+                      <a:r>
+                        <a:rPr lang="en-US" sz="1250" dirty="0">
+                          <a:solidFill>
+                            <a:srgbClr val="000000"/>
+                          </a:solidFill>
+                          <a:latin typeface="Arial" pitchFamily="34" charset="0"/>
+                          <a:ea typeface="Arial" pitchFamily="34" charset="-122"/>
+                          <a:cs typeface="Arial" pitchFamily="34" charset="-120"/>
+                        </a:rPr>
+                        <a:t>70</a:t>
+                      </a:r>
+                      <a:endParaRPr lang="en-US" sz="1250" dirty="0">
+                        <a:latin typeface="Arial" charset="0"/>
+                        <a:ea typeface="Arial" charset="0"/>
+                        <a:cs typeface="Arial" charset="0"/>
+                      </a:endParaRPr>
+                    </a:p>
+                  </a:txBody>
+                  <a:tcPr marL="91440" marR="91440" marT="45720" marB="45720">
+                    <a:lnL w="12700" cap="flat" cmpd="sng" algn="ctr">
+                      <a:solidFill>
+                        <a:srgbClr val="FFFFFF"/>
+                      </a:solidFill>
+                      <a:prstDash val="solid"/>
+                      <a:round/>
+                      <a:headEnd type="none" w="med" len="med"/>
+                      <a:tailEnd type="none" w="med" len="med"/>
+                    </a:lnL>
+                    <a:lnR w="12700" cap="flat" cmpd="sng" algn="ctr">
+                      <a:solidFill>
+                        <a:srgbClr val="FFFFFF"/>
+                      </a:solidFill>
+                      <a:prstDash val="solid"/>
+                      <a:round/>
+                      <a:headEnd type="none" w="med" len="med"/>
+                      <a:tailEnd type="none" w="med" len="med"/>
+                    </a:lnR>
+                    <a:lnT w="12700" cap="flat" cmpd="sng" algn="ctr">
+                      <a:solidFill>
+                        <a:srgbClr val="FFFFFF"/>
+                      </a:solidFill>
+                      <a:prstDash val="solid"/>
+                      <a:round/>
+                      <a:headEnd type="none" w="med" len="med"/>
+                      <a:tailEnd type="none" w="med" len="med"/>
+                    </a:lnT>
+                    <a:lnB w="12700" cap="flat" cmpd="sng" algn="ctr">
+                      <a:solidFill>
+                        <a:srgbClr val="FFFFFF"/>
+                      </a:solidFill>
+                      <a:prstDash val="solid"/>
+                      <a:round/>
+                      <a:headEnd type="none" w="med" len="med"/>
+                      <a:tailEnd type="none" w="med" len="med"/>
+                    </a:lnB>
+                  </a:tcPr>
+                </a:tc>
+                <a:tc>
+                  <a:txBody>
+                    <a:bodyPr/>
+                    <a:lstStyle/>
+                    <a:p>
+                      <a:pPr algn="r" indent="0" marL="0">
+                        <a:buNone/>
+                      </a:pPr>
+                      <a:r>
+                        <a:rPr lang="en-US" sz="1250" dirty="0">
+                          <a:solidFill>
+                            <a:srgbClr val="000000"/>
+                          </a:solidFill>
+                          <a:latin typeface="Arial" pitchFamily="34" charset="0"/>
+                          <a:ea typeface="Arial" pitchFamily="34" charset="-122"/>
+                          <a:cs typeface="Arial" pitchFamily="34" charset="-120"/>
+                        </a:rPr>
+                        <a:t>22 €</a:t>
+                      </a:r>
+                      <a:endParaRPr lang="en-US" sz="1250" dirty="0">
+                        <a:latin typeface="Arial" charset="0"/>
+                        <a:ea typeface="Arial" charset="0"/>
+                        <a:cs typeface="Arial" charset="0"/>
+                      </a:endParaRPr>
+                    </a:p>
+                  </a:txBody>
+                  <a:tcPr marL="91440" marR="91440" marT="45720" marB="45720">
+                    <a:lnL w="12700" cap="flat" cmpd="sng" algn="ctr">
+                      <a:solidFill>
+                        <a:srgbClr val="FFFFFF"/>
+                      </a:solidFill>
+                      <a:prstDash val="solid"/>
+                      <a:round/>
+                      <a:headEnd type="none" w="med" len="med"/>
+                      <a:tailEnd type="none" w="med" len="med"/>
+                    </a:lnL>
+                    <a:lnR w="12700" cap="flat" cmpd="sng" algn="ctr">
+                      <a:solidFill>
+                        <a:srgbClr val="FFFFFF"/>
+                      </a:solidFill>
+                      <a:prstDash val="solid"/>
+                      <a:round/>
+                      <a:headEnd type="none" w="med" len="med"/>
+                      <a:tailEnd type="none" w="med" len="med"/>
+                    </a:lnR>
+                    <a:lnT w="12700" cap="flat" cmpd="sng" algn="ctr">
+                      <a:solidFill>
+                        <a:srgbClr val="FFFFFF"/>
+                      </a:solidFill>
+                      <a:prstDash val="solid"/>
+                      <a:round/>
+                      <a:headEnd type="none" w="med" len="med"/>
+                      <a:tailEnd type="none" w="med" len="med"/>
+                    </a:lnT>
+                    <a:lnB w="12700" cap="flat" cmpd="sng" algn="ctr">
+                      <a:solidFill>
+                        <a:srgbClr val="FFFFFF"/>
+                      </a:solidFill>
+                      <a:prstDash val="solid"/>
+                      <a:round/>
+                      <a:headEnd type="none" w="med" len="med"/>
+                      <a:tailEnd type="none" w="med" len="med"/>
+                    </a:lnB>
+                  </a:tcPr>
+                </a:tc>
+                <a:tc>
+                  <a:txBody>
+                    <a:bodyPr/>
+                    <a:lstStyle/>
+                    <a:p>
+                      <a:pPr algn="r" indent="0" marL="0">
+                        <a:buNone/>
+                      </a:pPr>
+                      <a:r>
+                        <a:rPr lang="en-US" sz="1250" dirty="0">
+                          <a:solidFill>
+                            <a:srgbClr val="000000"/>
+                          </a:solidFill>
+                          <a:latin typeface="Arial" pitchFamily="34" charset="0"/>
+                          <a:ea typeface="Arial" pitchFamily="34" charset="-122"/>
+                          <a:cs typeface="Arial" pitchFamily="34" charset="-120"/>
+                        </a:rPr>
+                        <a:t>13.860 €</a:t>
+                      </a:r>
+                      <a:endParaRPr lang="en-US" sz="1250" dirty="0">
+                        <a:latin typeface="Arial" charset="0"/>
+                        <a:ea typeface="Arial" charset="0"/>
+                        <a:cs typeface="Arial" charset="0"/>
+                      </a:endParaRPr>
+                    </a:p>
+                  </a:txBody>
+                  <a:tcPr marL="91440" marR="91440" marT="45720" marB="45720">
+                    <a:lnL w="12700" cap="flat" cmpd="sng" algn="ctr">
+                      <a:solidFill>
+                        <a:srgbClr val="FFFFFF"/>
+                      </a:solidFill>
+                      <a:prstDash val="solid"/>
+                      <a:round/>
+                      <a:headEnd type="none" w="med" len="med"/>
+                      <a:tailEnd type="none" w="med" len="med"/>
+                    </a:lnL>
+                    <a:lnR w="12700" cap="flat" cmpd="sng" algn="ctr">
+                      <a:solidFill>
+                        <a:srgbClr val="FFFFFF"/>
+                      </a:solidFill>
+                      <a:prstDash val="solid"/>
+                      <a:round/>
+                      <a:headEnd type="none" w="med" len="med"/>
+                      <a:tailEnd type="none" w="med" len="med"/>
+                    </a:lnR>
+                    <a:lnT w="12700" cap="flat" cmpd="sng" algn="ctr">
+                      <a:solidFill>
+                        <a:srgbClr val="FFFFFF"/>
+                      </a:solidFill>
+                      <a:prstDash val="solid"/>
+                      <a:round/>
+                      <a:headEnd type="none" w="med" len="med"/>
+                      <a:tailEnd type="none" w="med" len="med"/>
+                    </a:lnT>
+                    <a:lnB w="12700" cap="flat" cmpd="sng" algn="ctr">
+                      <a:solidFill>
+                        <a:srgbClr val="FFFFFF"/>
+                      </a:solidFill>
+                      <a:prstDash val="solid"/>
+                      <a:round/>
+                      <a:headEnd type="none" w="med" len="med"/>
+                      <a:tailEnd type="none" w="med" len="med"/>
+                    </a:lnB>
+                  </a:tcPr>
+                </a:tc>
+              </a:tr>
+              <a:tr h="246888">
+                <a:tc>
+                  <a:txBody>
+                    <a:bodyPr/>
+                    <a:lstStyle/>
+                    <a:p>
+                      <a:pPr indent="0" marL="0">
+                        <a:buNone/>
+                      </a:pPr>
+                      <a:r>
+                        <a:rPr lang="en-US" sz="1250" dirty="0">
+                          <a:solidFill>
+                            <a:srgbClr val="000000"/>
+                          </a:solidFill>
+                          <a:latin typeface="Arial" pitchFamily="34" charset="0"/>
+                          <a:ea typeface="Arial" pitchFamily="34" charset="-122"/>
+                          <a:cs typeface="Arial" pitchFamily="34" charset="-120"/>
+                        </a:rPr>
+                        <a:t>Feiern, Live-Abende, Séparée</a:t>
+                      </a:r>
+                      <a:endParaRPr lang="en-US" sz="1250" dirty="0">
+                        <a:latin typeface="Arial" charset="0"/>
+                        <a:ea typeface="Arial" charset="0"/>
+                        <a:cs typeface="Arial" charset="0"/>
+                      </a:endParaRPr>
+                    </a:p>
+                  </a:txBody>
+                  <a:tcPr marL="91440" marR="91440" marT="45720" marB="45720">
+                    <a:lnL w="12700" cap="flat" cmpd="sng" algn="ctr">
+                      <a:solidFill>
+                        <a:srgbClr val="FFFFFF"/>
+                      </a:solidFill>
+                      <a:prstDash val="solid"/>
+                      <a:round/>
+                      <a:headEnd type="none" w="med" len="med"/>
+                      <a:tailEnd type="none" w="med" len="med"/>
+                    </a:lnL>
+                    <a:lnR w="12700" cap="flat" cmpd="sng" algn="ctr">
+                      <a:solidFill>
+                        <a:srgbClr val="FFFFFF"/>
+                      </a:solidFill>
+                      <a:prstDash val="solid"/>
+                      <a:round/>
+                      <a:headEnd type="none" w="med" len="med"/>
+                      <a:tailEnd type="none" w="med" len="med"/>
+                    </a:lnR>
+                    <a:lnT w="12700" cap="flat" cmpd="sng" algn="ctr">
+                      <a:solidFill>
+                        <a:srgbClr val="FFFFFF"/>
+                      </a:solidFill>
+                      <a:prstDash val="solid"/>
+                      <a:round/>
+                      <a:headEnd type="none" w="med" len="med"/>
+                      <a:tailEnd type="none" w="med" len="med"/>
+                    </a:lnT>
+                    <a:lnB w="12700" cap="flat" cmpd="sng" algn="ctr">
+                      <a:solidFill>
+                        <a:srgbClr val="FFFFFF"/>
+                      </a:solidFill>
+                      <a:prstDash val="solid"/>
+                      <a:round/>
+                      <a:headEnd type="none" w="med" len="med"/>
+                      <a:tailEnd type="none" w="med" len="med"/>
+                    </a:lnB>
+                  </a:tcPr>
+                </a:tc>
+                <a:tc>
+                  <a:txBody>
+                    <a:bodyPr/>
+                    <a:lstStyle/>
+                    <a:p>
+                      <a:pPr algn="r" indent="0" marL="0">
+                        <a:buNone/>
+                      </a:pPr>
+                      <a:r>
+                        <a:rPr lang="en-US" sz="1250" dirty="0">
+                          <a:solidFill>
+                            <a:srgbClr val="000000"/>
+                          </a:solidFill>
+                          <a:latin typeface="Arial" pitchFamily="34" charset="0"/>
+                          <a:ea typeface="Arial" pitchFamily="34" charset="-122"/>
+                          <a:cs typeface="Arial" pitchFamily="34" charset="-120"/>
+                        </a:rPr>
+                        <a:t>4</a:t>
+                      </a:r>
+                      <a:endParaRPr lang="en-US" sz="1250" dirty="0">
+                        <a:latin typeface="Arial" charset="0"/>
+                        <a:ea typeface="Arial" charset="0"/>
+                        <a:cs typeface="Arial" charset="0"/>
+                      </a:endParaRPr>
+                    </a:p>
+                  </a:txBody>
+                  <a:tcPr marL="91440" marR="91440" marT="45720" marB="45720">
+                    <a:lnL w="12700" cap="flat" cmpd="sng" algn="ctr">
+                      <a:solidFill>
+                        <a:srgbClr val="FFFFFF"/>
+                      </a:solidFill>
+                      <a:prstDash val="solid"/>
+                      <a:round/>
+                      <a:headEnd type="none" w="med" len="med"/>
+                      <a:tailEnd type="none" w="med" len="med"/>
+                    </a:lnL>
+                    <a:lnR w="12700" cap="flat" cmpd="sng" algn="ctr">
+                      <a:solidFill>
+                        <a:srgbClr val="FFFFFF"/>
+                      </a:solidFill>
+                      <a:prstDash val="solid"/>
+                      <a:round/>
+                      <a:headEnd type="none" w="med" len="med"/>
+                      <a:tailEnd type="none" w="med" len="med"/>
+                    </a:lnR>
+                    <a:lnT w="12700" cap="flat" cmpd="sng" algn="ctr">
+                      <a:solidFill>
+                        <a:srgbClr val="FFFFFF"/>
+                      </a:solidFill>
+                      <a:prstDash val="solid"/>
+                      <a:round/>
+                      <a:headEnd type="none" w="med" len="med"/>
+                      <a:tailEnd type="none" w="med" len="med"/>
+                    </a:lnT>
+                    <a:lnB w="12700" cap="flat" cmpd="sng" algn="ctr">
+                      <a:solidFill>
+                        <a:srgbClr val="FFFFFF"/>
+                      </a:solidFill>
+                      <a:prstDash val="solid"/>
+                      <a:round/>
+                      <a:headEnd type="none" w="med" len="med"/>
+                      <a:tailEnd type="none" w="med" len="med"/>
+                    </a:lnB>
+                  </a:tcPr>
+                </a:tc>
+                <a:tc>
+                  <a:txBody>
+                    <a:bodyPr/>
+                    <a:lstStyle/>
+                    <a:p>
+                      <a:pPr algn="r" indent="0" marL="0">
+                        <a:buNone/>
+                      </a:pPr>
+                      <a:r>
+                        <a:rPr lang="en-US" sz="1250" dirty="0">
+                          <a:solidFill>
+                            <a:srgbClr val="000000"/>
+                          </a:solidFill>
+                          <a:latin typeface="Arial" pitchFamily="34" charset="0"/>
+                          <a:ea typeface="Arial" pitchFamily="34" charset="-122"/>
+                          <a:cs typeface="Arial" pitchFamily="34" charset="-120"/>
+                        </a:rPr>
+                        <a:t>40</a:t>
+                      </a:r>
+                      <a:endParaRPr lang="en-US" sz="1250" dirty="0">
+                        <a:latin typeface="Arial" charset="0"/>
+                        <a:ea typeface="Arial" charset="0"/>
+                        <a:cs typeface="Arial" charset="0"/>
+                      </a:endParaRPr>
+                    </a:p>
+                  </a:txBody>
+                  <a:tcPr marL="91440" marR="91440" marT="45720" marB="45720">
+                    <a:lnL w="12700" cap="flat" cmpd="sng" algn="ctr">
+                      <a:solidFill>
+                        <a:srgbClr val="FFFFFF"/>
+                      </a:solidFill>
+                      <a:prstDash val="solid"/>
+                      <a:round/>
+                      <a:headEnd type="none" w="med" len="med"/>
+                      <a:tailEnd type="none" w="med" len="med"/>
+                    </a:lnL>
+                    <a:lnR w="12700" cap="flat" cmpd="sng" algn="ctr">
+                      <a:solidFill>
+                        <a:srgbClr val="FFFFFF"/>
+                      </a:solidFill>
+                      <a:prstDash val="solid"/>
+                      <a:round/>
+                      <a:headEnd type="none" w="med" len="med"/>
+                      <a:tailEnd type="none" w="med" len="med"/>
+                    </a:lnR>
+                    <a:lnT w="12700" cap="flat" cmpd="sng" algn="ctr">
+                      <a:solidFill>
+                        <a:srgbClr val="FFFFFF"/>
+                      </a:solidFill>
+                      <a:prstDash val="solid"/>
+                      <a:round/>
+                      <a:headEnd type="none" w="med" len="med"/>
+                      <a:tailEnd type="none" w="med" len="med"/>
+                    </a:lnT>
+                    <a:lnB w="12700" cap="flat" cmpd="sng" algn="ctr">
+                      <a:solidFill>
+                        <a:srgbClr val="FFFFFF"/>
+                      </a:solidFill>
+                      <a:prstDash val="solid"/>
+                      <a:round/>
+                      <a:headEnd type="none" w="med" len="med"/>
+                      <a:tailEnd type="none" w="med" len="med"/>
+                    </a:lnB>
+                  </a:tcPr>
+                </a:tc>
+                <a:tc>
+                  <a:txBody>
+                    <a:bodyPr/>
+                    <a:lstStyle/>
+                    <a:p>
+                      <a:pPr algn="r" indent="0" marL="0">
+                        <a:buNone/>
+                      </a:pPr>
+                      <a:r>
+                        <a:rPr lang="en-US" sz="1250" dirty="0">
+                          <a:solidFill>
+                            <a:srgbClr val="000000"/>
+                          </a:solidFill>
+                          <a:latin typeface="Arial" pitchFamily="34" charset="0"/>
+                          <a:ea typeface="Arial" pitchFamily="34" charset="-122"/>
+                          <a:cs typeface="Arial" pitchFamily="34" charset="-120"/>
+                        </a:rPr>
+                        <a:t>45 €</a:t>
+                      </a:r>
+                      <a:endParaRPr lang="en-US" sz="1250" dirty="0">
+                        <a:latin typeface="Arial" charset="0"/>
+                        <a:ea typeface="Arial" charset="0"/>
+                        <a:cs typeface="Arial" charset="0"/>
+                      </a:endParaRPr>
+                    </a:p>
+                  </a:txBody>
+                  <a:tcPr marL="91440" marR="91440" marT="45720" marB="45720">
+                    <a:lnL w="12700" cap="flat" cmpd="sng" algn="ctr">
+                      <a:solidFill>
+                        <a:srgbClr val="FFFFFF"/>
+                      </a:solidFill>
+                      <a:prstDash val="solid"/>
+                      <a:round/>
+                      <a:headEnd type="none" w="med" len="med"/>
+                      <a:tailEnd type="none" w="med" len="med"/>
+                    </a:lnL>
+                    <a:lnR w="12700" cap="flat" cmpd="sng" algn="ctr">
+                      <a:solidFill>
+                        <a:srgbClr val="FFFFFF"/>
+                      </a:solidFill>
+                      <a:prstDash val="solid"/>
+                      <a:round/>
+                      <a:headEnd type="none" w="med" len="med"/>
+                      <a:tailEnd type="none" w="med" len="med"/>
+                    </a:lnR>
+                    <a:lnT w="12700" cap="flat" cmpd="sng" algn="ctr">
+                      <a:solidFill>
+                        <a:srgbClr val="FFFFFF"/>
+                      </a:solidFill>
+                      <a:prstDash val="solid"/>
+                      <a:round/>
+                      <a:headEnd type="none" w="med" len="med"/>
+                      <a:tailEnd type="none" w="med" len="med"/>
+                    </a:lnT>
+                    <a:lnB w="12700" cap="flat" cmpd="sng" algn="ctr">
+                      <a:solidFill>
+                        <a:srgbClr val="FFFFFF"/>
+                      </a:solidFill>
+                      <a:prstDash val="solid"/>
+                      <a:round/>
+                      <a:headEnd type="none" w="med" len="med"/>
+                      <a:tailEnd type="none" w="med" len="med"/>
+                    </a:lnB>
+                  </a:tcPr>
+                </a:tc>
+                <a:tc>
+                  <a:txBody>
+                    <a:bodyPr/>
+                    <a:lstStyle/>
+                    <a:p>
+                      <a:pPr algn="r" indent="0" marL="0">
+                        <a:buNone/>
+                      </a:pPr>
+                      <a:r>
+                        <a:rPr lang="en-US" sz="1250" dirty="0">
+                          <a:solidFill>
+                            <a:srgbClr val="000000"/>
+                          </a:solidFill>
+                          <a:latin typeface="Arial" pitchFamily="34" charset="0"/>
+                          <a:ea typeface="Arial" pitchFamily="34" charset="-122"/>
+                          <a:cs typeface="Arial" pitchFamily="34" charset="-120"/>
+                        </a:rPr>
+                        <a:t>7.200 €</a:t>
+                      </a:r>
+                      <a:endParaRPr lang="en-US" sz="1250" dirty="0">
+                        <a:latin typeface="Arial" charset="0"/>
+                        <a:ea typeface="Arial" charset="0"/>
+                        <a:cs typeface="Arial" charset="0"/>
+                      </a:endParaRPr>
+                    </a:p>
+                  </a:txBody>
+                  <a:tcPr marL="91440" marR="91440" marT="45720" marB="45720">
+                    <a:lnL w="12700" cap="flat" cmpd="sng" algn="ctr">
+                      <a:solidFill>
+                        <a:srgbClr val="FFFFFF"/>
+                      </a:solidFill>
+                      <a:prstDash val="solid"/>
+                      <a:round/>
+                      <a:headEnd type="none" w="med" len="med"/>
+                      <a:tailEnd type="none" w="med" len="med"/>
+                    </a:lnL>
+                    <a:lnR w="12700" cap="flat" cmpd="sng" algn="ctr">
+                      <a:solidFill>
+                        <a:srgbClr val="FFFFFF"/>
+                      </a:solidFill>
+                      <a:prstDash val="solid"/>
+                      <a:round/>
+                      <a:headEnd type="none" w="med" len="med"/>
+                      <a:tailEnd type="none" w="med" len="med"/>
+                    </a:lnR>
+                    <a:lnT w="12700" cap="flat" cmpd="sng" algn="ctr">
+                      <a:solidFill>
+                        <a:srgbClr val="FFFFFF"/>
+                      </a:solidFill>
+                      <a:prstDash val="solid"/>
+                      <a:round/>
+                      <a:headEnd type="none" w="med" len="med"/>
+                      <a:tailEnd type="none" w="med" len="med"/>
+                    </a:lnT>
+                    <a:lnB w="12700" cap="flat" cmpd="sng" algn="ctr">
+                      <a:solidFill>
+                        <a:srgbClr val="FFFFFF"/>
+                      </a:solidFill>
+                      <a:prstDash val="solid"/>
+                      <a:round/>
+                      <a:headEnd type="none" w="med" len="med"/>
+                      <a:tailEnd type="none" w="med" len="med"/>
+                    </a:lnB>
+                  </a:tcPr>
+                </a:tc>
+              </a:tr>
+              <a:tr h="246888">
+                <a:tc>
+                  <a:txBody>
+                    <a:bodyPr/>
+                    <a:lstStyle/>
+                    <a:p>
+                      <a:pPr indent="0" marL="0">
+                        <a:buNone/>
+                      </a:pPr>
+                      <a:r>
+                        <a:rPr lang="en-US" sz="1250" b="1" dirty="0">
+                          <a:solidFill>
+                            <a:srgbClr val="000000"/>
+                          </a:solidFill>
+                          <a:latin typeface="Arial" pitchFamily="34" charset="0"/>
+                          <a:ea typeface="Arial" pitchFamily="34" charset="-122"/>
+                          <a:cs typeface="Arial" pitchFamily="34" charset="-120"/>
+                        </a:rPr>
+                        <a:t>Summe Abend</a:t>
+                      </a:r>
+                      <a:endParaRPr lang="en-US" sz="1250" dirty="0">
+                        <a:latin typeface="Arial" charset="0"/>
+                        <a:ea typeface="Arial" charset="0"/>
+                        <a:cs typeface="Arial" charset="0"/>
+                      </a:endParaRPr>
+                    </a:p>
+                  </a:txBody>
+                  <a:tcPr marL="91440" marR="91440" marT="45720" marB="45720">
+                    <a:lnL w="12700" cap="flat" cmpd="sng" algn="ctr">
+                      <a:solidFill>
+                        <a:srgbClr val="FFFFFF"/>
+                      </a:solidFill>
+                      <a:prstDash val="solid"/>
+                      <a:round/>
+                      <a:headEnd type="none" w="med" len="med"/>
+                      <a:tailEnd type="none" w="med" len="med"/>
+                    </a:lnL>
+                    <a:lnR w="12700" cap="flat" cmpd="sng" algn="ctr">
+                      <a:solidFill>
+                        <a:srgbClr val="FFFFFF"/>
+                      </a:solidFill>
+                      <a:prstDash val="solid"/>
+                      <a:round/>
+                      <a:headEnd type="none" w="med" len="med"/>
+                      <a:tailEnd type="none" w="med" len="med"/>
+                    </a:lnR>
+                    <a:lnT w="12700" cap="flat" cmpd="sng" algn="ctr">
+                      <a:solidFill>
+                        <a:srgbClr val="FFFFFF"/>
+                      </a:solidFill>
+                      <a:prstDash val="solid"/>
+                      <a:round/>
+                      <a:headEnd type="none" w="med" len="med"/>
+                      <a:tailEnd type="none" w="med" len="med"/>
+                    </a:lnT>
+                    <a:lnB w="12700" cap="flat" cmpd="sng" algn="ctr">
+                      <a:solidFill>
+                        <a:srgbClr val="FFFFFF"/>
+                      </a:solidFill>
+                      <a:prstDash val="solid"/>
+                      <a:round/>
+                      <a:headEnd type="none" w="med" len="med"/>
+                      <a:tailEnd type="none" w="med" len="med"/>
+                    </a:lnB>
+                  </a:tcPr>
+                </a:tc>
+                <a:tc>
+                  <a:txBody>
+                    <a:bodyPr/>
+                    <a:lstStyle/>
+                    <a:p>
+                      <a:pPr algn="r" indent="0" marL="0">
+                        <a:buNone/>
+                      </a:pPr>
+                      <a:endParaRPr lang="en-US" sz="1250" dirty="0">
+                        <a:latin typeface="Arial" charset="0"/>
+                        <a:ea typeface="Arial" charset="0"/>
+                        <a:cs typeface="Arial" charset="0"/>
+                      </a:endParaRPr>
+                    </a:p>
+                  </a:txBody>
+                  <a:tcPr marL="91440" marR="91440" marT="45720" marB="45720">
+                    <a:lnL w="12700" cap="flat" cmpd="sng" algn="ctr">
+                      <a:solidFill>
+                        <a:srgbClr val="FFFFFF"/>
+                      </a:solidFill>
+                      <a:prstDash val="solid"/>
+                      <a:round/>
+                      <a:headEnd type="none" w="med" len="med"/>
+                      <a:tailEnd type="none" w="med" len="med"/>
+                    </a:lnL>
+                    <a:lnR w="12700" cap="flat" cmpd="sng" algn="ctr">
+                      <a:solidFill>
+                        <a:srgbClr val="FFFFFF"/>
+                      </a:solidFill>
+                      <a:prstDash val="solid"/>
+                      <a:round/>
+                      <a:headEnd type="none" w="med" len="med"/>
+                      <a:tailEnd type="none" w="med" len="med"/>
+                    </a:lnR>
+                    <a:lnT w="12700" cap="flat" cmpd="sng" algn="ctr">
+                      <a:solidFill>
+                        <a:srgbClr val="FFFFFF"/>
+                      </a:solidFill>
+                      <a:prstDash val="solid"/>
+                      <a:round/>
+                      <a:headEnd type="none" w="med" len="med"/>
+                      <a:tailEnd type="none" w="med" len="med"/>
+                    </a:lnT>
+                    <a:lnB w="12700" cap="flat" cmpd="sng" algn="ctr">
+                      <a:solidFill>
+                        <a:srgbClr val="FFFFFF"/>
+                      </a:solidFill>
+                      <a:prstDash val="solid"/>
+                      <a:round/>
+                      <a:headEnd type="none" w="med" len="med"/>
+                      <a:tailEnd type="none" w="med" len="med"/>
+                    </a:lnB>
+                  </a:tcPr>
+                </a:tc>
+                <a:tc>
+                  <a:txBody>
+                    <a:bodyPr/>
+                    <a:lstStyle/>
+                    <a:p>
+                      <a:pPr algn="r" indent="0" marL="0">
+                        <a:buNone/>
+                      </a:pPr>
+                      <a:endParaRPr lang="en-US" sz="1250" dirty="0">
+                        <a:latin typeface="Arial" charset="0"/>
+                        <a:ea typeface="Arial" charset="0"/>
+                        <a:cs typeface="Arial" charset="0"/>
+                      </a:endParaRPr>
+                    </a:p>
+                  </a:txBody>
+                  <a:tcPr marL="91440" marR="91440" marT="45720" marB="45720">
+                    <a:lnL w="12700" cap="flat" cmpd="sng" algn="ctr">
+                      <a:solidFill>
+                        <a:srgbClr val="FFFFFF"/>
+                      </a:solidFill>
+                      <a:prstDash val="solid"/>
+                      <a:round/>
+                      <a:headEnd type="none" w="med" len="med"/>
+                      <a:tailEnd type="none" w="med" len="med"/>
+                    </a:lnL>
+                    <a:lnR w="12700" cap="flat" cmpd="sng" algn="ctr">
+                      <a:solidFill>
+                        <a:srgbClr val="FFFFFF"/>
+                      </a:solidFill>
+                      <a:prstDash val="solid"/>
+                      <a:round/>
+                      <a:headEnd type="none" w="med" len="med"/>
+                      <a:tailEnd type="none" w="med" len="med"/>
+                    </a:lnR>
+                    <a:lnT w="12700" cap="flat" cmpd="sng" algn="ctr">
+                      <a:solidFill>
+                        <a:srgbClr val="FFFFFF"/>
+                      </a:solidFill>
+                      <a:prstDash val="solid"/>
+                      <a:round/>
+                      <a:headEnd type="none" w="med" len="med"/>
+                      <a:tailEnd type="none" w="med" len="med"/>
+                    </a:lnT>
+                    <a:lnB w="12700" cap="flat" cmpd="sng" algn="ctr">
+                      <a:solidFill>
+                        <a:srgbClr val="FFFFFF"/>
+                      </a:solidFill>
+                      <a:prstDash val="solid"/>
+                      <a:round/>
+                      <a:headEnd type="none" w="med" len="med"/>
+                      <a:tailEnd type="none" w="med" len="med"/>
+                    </a:lnB>
+                  </a:tcPr>
+                </a:tc>
+                <a:tc>
+                  <a:txBody>
+                    <a:bodyPr/>
+                    <a:lstStyle/>
+                    <a:p>
+                      <a:pPr algn="r" indent="0" marL="0">
+                        <a:buNone/>
+                      </a:pPr>
+                      <a:endParaRPr lang="en-US" sz="1250" dirty="0">
+                        <a:latin typeface="Arial" charset="0"/>
+                        <a:ea typeface="Arial" charset="0"/>
+                        <a:cs typeface="Arial" charset="0"/>
+                      </a:endParaRPr>
+                    </a:p>
+                  </a:txBody>
+                  <a:tcPr marL="91440" marR="91440" marT="45720" marB="45720">
+                    <a:lnL w="12700" cap="flat" cmpd="sng" algn="ctr">
+                      <a:solidFill>
+                        <a:srgbClr val="FFFFFF"/>
+                      </a:solidFill>
+                      <a:prstDash val="solid"/>
+                      <a:round/>
+                      <a:headEnd type="none" w="med" len="med"/>
+                      <a:tailEnd type="none" w="med" len="med"/>
+                    </a:lnL>
+                    <a:lnR w="12700" cap="flat" cmpd="sng" algn="ctr">
+                      <a:solidFill>
+                        <a:srgbClr val="FFFFFF"/>
+                      </a:solidFill>
+                      <a:prstDash val="solid"/>
+                      <a:round/>
+                      <a:headEnd type="none" w="med" len="med"/>
+                      <a:tailEnd type="none" w="med" len="med"/>
+                    </a:lnR>
+                    <a:lnT w="12700" cap="flat" cmpd="sng" algn="ctr">
+                      <a:solidFill>
+                        <a:srgbClr val="FFFFFF"/>
+                      </a:solidFill>
+                      <a:prstDash val="solid"/>
+                      <a:round/>
+                      <a:headEnd type="none" w="med" len="med"/>
+                      <a:tailEnd type="none" w="med" len="med"/>
+                    </a:lnT>
+                    <a:lnB w="12700" cap="flat" cmpd="sng" algn="ctr">
+                      <a:solidFill>
+                        <a:srgbClr val="FFFFFF"/>
+                      </a:solidFill>
+                      <a:prstDash val="solid"/>
+                      <a:round/>
+                      <a:headEnd type="none" w="med" len="med"/>
+                      <a:tailEnd type="none" w="med" len="med"/>
+                    </a:lnB>
+                  </a:tcPr>
+                </a:tc>
+                <a:tc>
+                  <a:txBody>
+                    <a:bodyPr/>
+                    <a:lstStyle/>
+                    <a:p>
+                      <a:pPr algn="r" indent="0" marL="0">
+                        <a:buNone/>
+                      </a:pPr>
+                      <a:r>
+                        <a:rPr lang="en-US" sz="1250" b="1" dirty="0">
+                          <a:solidFill>
+                            <a:srgbClr val="000000"/>
+                          </a:solidFill>
+                          <a:latin typeface="Arial" pitchFamily="34" charset="0"/>
+                          <a:ea typeface="Arial" pitchFamily="34" charset="-122"/>
+                          <a:cs typeface="Arial" pitchFamily="34" charset="-120"/>
+                        </a:rPr>
+                        <a:t>71.500 €</a:t>
+                      </a:r>
+                      <a:endParaRPr lang="en-US" sz="1250" dirty="0">
+                        <a:latin typeface="Arial" charset="0"/>
+                        <a:ea typeface="Arial" charset="0"/>
+                        <a:cs typeface="Arial" charset="0"/>
+                      </a:endParaRPr>
+                    </a:p>
+                  </a:txBody>
+                  <a:tcPr marL="91440" marR="91440" marT="45720" marB="45720">
+                    <a:lnL w="12700" cap="flat" cmpd="sng" algn="ctr">
+                      <a:solidFill>
+                        <a:srgbClr val="FFFFFF"/>
+                      </a:solidFill>
+                      <a:prstDash val="solid"/>
+                      <a:round/>
+                      <a:headEnd type="none" w="med" len="med"/>
+                      <a:tailEnd type="none" w="med" len="med"/>
+                    </a:lnL>
+                    <a:lnR w="12700" cap="flat" cmpd="sng" algn="ctr">
+                      <a:solidFill>
+                        <a:srgbClr val="FFFFFF"/>
+                      </a:solidFill>
+                      <a:prstDash val="solid"/>
+                      <a:round/>
+                      <a:headEnd type="none" w="med" len="med"/>
+                      <a:tailEnd type="none" w="med" len="med"/>
+                    </a:lnR>
+                    <a:lnT w="12700" cap="flat" cmpd="sng" algn="ctr">
+                      <a:solidFill>
+                        <a:srgbClr val="FFFFFF"/>
+                      </a:solidFill>
+                      <a:prstDash val="solid"/>
+                      <a:round/>
+                      <a:headEnd type="none" w="med" len="med"/>
+                      <a:tailEnd type="none" w="med" len="med"/>
+                    </a:lnT>
+                    <a:lnB w="12700" cap="flat" cmpd="sng" algn="ctr">
+                      <a:solidFill>
+                        <a:srgbClr val="FFFFFF"/>
+                      </a:solidFill>
+                      <a:prstDash val="solid"/>
+                      <a:round/>
+                      <a:headEnd type="none" w="med" len="med"/>
+                      <a:tailEnd type="none" w="med" len="med"/>
+                    </a:lnB>
+                  </a:tcPr>
+                </a:tc>
+              </a:tr>
+            </a:tbl>
+          </a:graphicData>
+        </a:graphic>
+      </p:graphicFrame>
+      <p:sp>
+        <p:nvSpPr>
+          <p:cNvPr id="8" name="Text 3"/>
+          <p:cNvSpPr txBox="1"/>
+          <p:nvPr/>
+        </p:nvSpPr>
+        <p:spPr>
+          <a:xfrm>
+            <a:off x="8229600" y="4663440"/>
+            <a:ext cx="3410712" cy="731520"/>
+          </a:xfrm>
+          <a:prstGeom prst="rect">
+            <a:avLst/>
+          </a:prstGeom>
+          <a:noFill/>
+          <a:ln/>
+        </p:spPr>
+        <p:txBody>
+          <a:bodyPr wrap="square" lIns="0" tIns="0" rIns="0" bIns="0" rtlCol="0" anchor="ctr"/>
+          <a:lstStyle/>
+          <a:p>
+            <a:pPr indent="0" marL="0">
+              <a:buNone/>
+            </a:pPr>
+            <a:r>
+              <a:rPr lang="en-US" sz="2400" dirty="0">
+                <a:solidFill>
+                  <a:schemeClr val="accent2"/>
+                </a:solidFill>
+                <a:latin typeface="Georgia" pitchFamily="34" charset="0"/>
+                <a:ea typeface="Georgia" pitchFamily="34" charset="-122"/>
+                <a:cs typeface="Georgia" pitchFamily="34" charset="-120"/>
+              </a:rPr>
+              <a:t>75 % vom Gastro-Umsatz</a:t>
+            </a:r>
+            <a:endParaRPr lang="en-US" sz="2400" dirty="0"/>
+          </a:p>
+        </p:txBody>
+      </p:sp>
+      <p:sp>
+        <p:nvSpPr>
+          <p:cNvPr id="25" name="Slide Number Placeholder 0"/>
+          <p:cNvSpPr>
+            <a:spLocks noGrp="1"/>
+          </p:cNvSpPr>
+          <p:nvPr>
+            <p:ph type="sldNum" sz="quarter" idx="4294967295"/>
+          </p:nvPr>
+        </p:nvSpPr>
+        <p:spPr>
+          <a:xfrm>
+            <a:off x="11183112" y="6446520"/>
+            <a:ext cx="548640" cy="274320"/>
+          </a:xfrm>
+          <a:prstGeom prst="rect">
+            <a:avLst/>
+          </a:prstGeom>
+          <a:extLst>
+            <a:ext uri="{C572A759-6A51-4108-AA02-DFA0A04FC94B}">
+              <ma14:wrappingTextBoxFlag xmlns:ma14="http://schemas.microsoft.com/office/mac/drawingml/2011/main" val="0"/>
+            </a:ext>
+          </a:extLst>
+        </p:spPr>
+        <p:txBody>
+          <a:bodyPr/>
+          <a:lstStyle>
+            <a:lvl1pPr>
+              <a:defRPr sz="1000">
+                <a:solidFill>
+                  <a:schemeClr val="accent4"/>
+                </a:solidFill>
+              </a:defRPr>
+            </a:lvl1pPr>
+          </a:lstStyle>
+          <a:p>
+            <a:pPr algn="r"/>
+            <a:fld id="{F7021451-1387-4CA6-816F-3879F97B5CBC}" type="slidenum">
+              <a:rPr b="0" lang="en-US"/>
+              <a:t>6</a:t>
+            </a:fld>
+            <a:endParaRPr lang="en-US"/>
+          </a:p>
+        </p:txBody>
+      </p:sp>
+    </p:spTree>
+  </p:cSld>
+  <p:clrMapOvr>
+    <a:masterClrMapping/>
+  </p:clrMapOvr>
+</p:sld>
+</file>
+
+<file path=ppt/slides/slide7.xml><?xml version="1.0" encoding="utf-8"?>
+<p:sld xmlns:a="http://schemas.openxmlformats.org/drawingml/2006/main" xmlns:r="http://schemas.openxmlformats.org/officeDocument/2006/relationships" xmlns:p="http://schemas.openxmlformats.org/presentationml/2006/main">
+  <p:cSld name="Slide 7">
     <p:spTree>
       <p:nvGrpSpPr>
         <p:cNvPr id="1" name=""/>
@@ -18697,7 +22094,7 @@
       </p:sp>
       <p:graphicFrame>
         <p:nvGraphicFramePr>
-          <p:cNvPr id="7" name="Tabelle Zonen"/>
+          <p:cNvPr id="8" name="Tabelle Zonen"/>
           <p:cNvGraphicFramePr>
             <a:graphicFrameLocks noGrp="1"/>
           </p:cNvGraphicFramePr>
@@ -20389,7 +23786,7 @@
             <a:pPr algn="r"/>
             <a:fld id="{F7021451-1387-4CA6-816F-3879F97B5CBC}" type="slidenum">
               <a:rPr b="0" lang="en-US"/>
-              <a:t>6</a:t>
+              <a:t>7</a:t>
             </a:fld>
             <a:endParaRPr lang="en-US"/>
           </a:p>
@@ -20403,9 +23800,9 @@
 </p:sld>
 </file>
 
-<file path=ppt/slides/slide7.xml><?xml version="1.0" encoding="utf-8"?>
+<file path=ppt/slides/slide8.xml><?xml version="1.0" encoding="utf-8"?>
 <p:sld xmlns:a="http://schemas.openxmlformats.org/drawingml/2006/main" xmlns:r="http://schemas.openxmlformats.org/officeDocument/2006/relationships" xmlns:p="http://schemas.openxmlformats.org/presentationml/2006/main">
-  <p:cSld name="Slide 7">
+  <p:cSld name="Slide 8">
     <p:spTree>
       <p:nvGrpSpPr>
         <p:cNvPr id="1" name=""/>
@@ -21517,7 +24914,7 @@
             <a:pPr algn="r"/>
             <a:fld id="{F7021451-1387-4CA6-816F-3879F97B5CBC}" type="slidenum">
               <a:rPr b="0" lang="en-US"/>
-              <a:t>7</a:t>
+              <a:t>8</a:t>
             </a:fld>
             <a:endParaRPr lang="en-US"/>
           </a:p>
@@ -21531,9 +24928,9 @@
 </p:sld>
 </file>
 
-<file path=ppt/slides/slide8.xml><?xml version="1.0" encoding="utf-8"?>
+<file path=ppt/slides/slide9.xml><?xml version="1.0" encoding="utf-8"?>
 <p:sld xmlns:a="http://schemas.openxmlformats.org/drawingml/2006/main" xmlns:r="http://schemas.openxmlformats.org/officeDocument/2006/relationships" xmlns:p="http://schemas.openxmlformats.org/presentationml/2006/main">
-  <p:cSld name="Slide 8">
+  <p:cSld name="Slide 9">
     <p:spTree>
       <p:nvGrpSpPr>
         <p:cNvPr id="1" name=""/>
@@ -21748,286 +25145,6 @@
               <a:t>Séparée für Feiern mit 30 Plätzen, hinter Stahl und Glas</a:t>
             </a:r>
             <a:endParaRPr lang="en-US" sz="1200" dirty="0"/>
-          </a:p>
-        </p:txBody>
-      </p:sp>
-      <p:sp>
-        <p:nvSpPr>
-          <p:cNvPr id="25" name="Slide Number Placeholder 0"/>
-          <p:cNvSpPr>
-            <a:spLocks noGrp="1"/>
-          </p:cNvSpPr>
-          <p:nvPr>
-            <p:ph type="sldNum" sz="quarter" idx="4294967295"/>
-          </p:nvPr>
-        </p:nvSpPr>
-        <p:spPr>
-          <a:xfrm>
-            <a:off x="11183112" y="6446520"/>
-            <a:ext cx="548640" cy="274320"/>
-          </a:xfrm>
-          <a:prstGeom prst="rect">
-            <a:avLst/>
-          </a:prstGeom>
-          <a:extLst>
-            <a:ext uri="{C572A759-6A51-4108-AA02-DFA0A04FC94B}">
-              <ma14:wrappingTextBoxFlag xmlns:ma14="http://schemas.microsoft.com/office/mac/drawingml/2011/main" val="0"/>
-            </a:ext>
-          </a:extLst>
-        </p:spPr>
-        <p:txBody>
-          <a:bodyPr/>
-          <a:lstStyle>
-            <a:lvl1pPr>
-              <a:defRPr sz="1000">
-                <a:solidFill>
-                  <a:schemeClr val="accent4"/>
-                </a:solidFill>
-              </a:defRPr>
-            </a:lvl1pPr>
-          </a:lstStyle>
-          <a:p>
-            <a:pPr algn="r"/>
-            <a:fld id="{F7021451-1387-4CA6-816F-3879F97B5CBC}" type="slidenum">
-              <a:rPr b="0" lang="en-US"/>
-              <a:t>8</a:t>
-            </a:fld>
-            <a:endParaRPr lang="en-US"/>
-          </a:p>
-        </p:txBody>
-      </p:sp>
-    </p:spTree>
-  </p:cSld>
-  <p:clrMapOvr>
-    <a:masterClrMapping/>
-  </p:clrMapOvr>
-</p:sld>
-</file>
-
-<file path=ppt/slides/slide9.xml><?xml version="1.0" encoding="utf-8"?>
-<p:sld xmlns:a="http://schemas.openxmlformats.org/drawingml/2006/main" xmlns:r="http://schemas.openxmlformats.org/officeDocument/2006/relationships" xmlns:p="http://schemas.openxmlformats.org/presentationml/2006/main">
-  <p:cSld name="Slide 9">
-    <p:spTree>
-      <p:nvGrpSpPr>
-        <p:cNvPr id="1" name=""/>
-        <p:cNvGrpSpPr/>
-        <p:nvPr/>
-      </p:nvGrpSpPr>
-      <p:grpSpPr>
-        <a:xfrm>
-          <a:off x="0" y="0"/>
-          <a:ext cx="0" cy="0"/>
-          <a:chOff x="0" y="0"/>
-          <a:chExt cx="0" cy="0"/>
-        </a:xfrm>
-      </p:grpSpPr>
-      <p:sp>
-        <p:nvSpPr>
-          <p:cNvPr id="2" name="Text 1"/>
-          <p:cNvSpPr/>
-          <p:nvPr>
-            <p:ph idx="101" type="title" hasCustomPrompt="1"/>
-          </p:nvPr>
-        </p:nvSpPr>
-        <p:spPr>
-          <a:xfrm>
-            <a:off x="548640" y="320040"/>
-            <a:ext cx="11091672" cy="822960"/>
-          </a:xfrm>
-          <a:prstGeom prst="rect">
-            <a:avLst/>
-          </a:prstGeom>
-          <a:noFill/>
-          <a:ln/>
-        </p:spPr>
-        <p:txBody>
-          <a:bodyPr wrap="square" lIns="0" tIns="0" rIns="0" bIns="0" rtlCol="0" anchor="ctr"/>
-          <a:lstStyle/>
-          <a:p>
-            <a:pPr algn="l" indent="0" marL="0">
-              <a:buNone/>
-            </a:pPr>
-            <a:r>
-              <a:rPr lang="en-US" sz="2700" dirty="0">
-                <a:solidFill>
-                  <a:schemeClr val="accent1"/>
-                </a:solidFill>
-                <a:latin typeface="Georgia" pitchFamily="34" charset="0"/>
-                <a:ea typeface="Georgia" pitchFamily="34" charset="-122"/>
-                <a:cs typeface="Georgia" pitchFamily="34" charset="-120"/>
-              </a:rPr>
-              <a:t>Terrasse und Außenwirkung</a:t>
-            </a:r>
-            <a:endParaRPr lang="en-US" sz="2700" dirty="0"/>
-          </a:p>
-        </p:txBody>
-      </p:sp>
-      <p:sp>
-        <p:nvSpPr>
-          <p:cNvPr id="3" name="Zielgruppe"/>
-          <p:cNvSpPr txBox="1"/>
-          <p:nvPr/>
-        </p:nvSpPr>
-        <p:spPr>
-          <a:xfrm>
-            <a:off x="548640" y="6446520"/>
-            <a:ext cx="5486400" cy="274320"/>
-          </a:xfrm>
-          <a:prstGeom prst="rect">
-            <a:avLst/>
-          </a:prstGeom>
-          <a:noFill/>
-          <a:ln/>
-        </p:spPr>
-        <p:txBody>
-          <a:bodyPr wrap="square" lIns="0" tIns="0" rIns="0" bIns="0" rtlCol="0" anchor="ctr"/>
-          <a:lstStyle/>
-          <a:p>
-            <a:pPr indent="0" marL="0">
-              <a:buNone/>
-            </a:pPr>
-            <a:r>
-              <a:rPr lang="en-US" sz="1000" dirty="0">
-                <a:solidFill>
-                  <a:schemeClr val="accent4"/>
-                </a:solidFill>
-              </a:rPr>
-              <a:t>Für Stadt und Bank</a:t>
-            </a:r>
-            <a:endParaRPr lang="en-US" sz="1000" dirty="0"/>
-          </a:p>
-        </p:txBody>
-      </p:sp>
-      <p:pic>
-        <p:nvPicPr>
-          <p:cNvPr id="5" name="Image 0" descr="Terrasse am Abend">    </p:cNvPr>
-          <p:cNvPicPr>
-            <a:picLocks noChangeAspect="1"/>
-          </p:cNvPicPr>
-          <p:nvPr/>
-        </p:nvPicPr>
-        <p:blipFill>
-          <a:blip r:embed="rId1"/>
-          <a:stretch>
-            <a:fillRect/>
-          </a:stretch>
-        </p:blipFill>
-        <p:spPr>
-          <a:xfrm>
-            <a:off x="548640" y="1371600"/>
-            <a:ext cx="5486400" cy="3086100"/>
-          </a:xfrm>
-          <a:prstGeom prst="rect">
-            <a:avLst/>
-          </a:prstGeom>
-        </p:spPr>
-      </p:pic>
-      <p:pic>
-        <p:nvPicPr>
-          <p:cNvPr id="6" name="Image 1" descr="Haus am Abend">    </p:cNvPr>
-          <p:cNvPicPr>
-            <a:picLocks noChangeAspect="1"/>
-          </p:cNvPicPr>
-          <p:nvPr/>
-        </p:nvPicPr>
-        <p:blipFill>
-          <a:blip r:embed="rId2"/>
-          <a:stretch>
-            <a:fillRect/>
-          </a:stretch>
-        </p:blipFill>
-        <p:spPr>
-          <a:xfrm>
-            <a:off x="6309360" y="1371600"/>
-            <a:ext cx="5486400" cy="3086100"/>
-          </a:xfrm>
-          <a:prstGeom prst="rect">
-            <a:avLst/>
-          </a:prstGeom>
-        </p:spPr>
-      </p:pic>
-      <p:sp>
-        <p:nvSpPr>
-          <p:cNvPr id="7" name="Text 2"/>
-          <p:cNvSpPr txBox="1"/>
-          <p:nvPr/>
-        </p:nvSpPr>
-        <p:spPr>
-          <a:xfrm>
-            <a:off x="548640" y="4640580"/>
-            <a:ext cx="11091672" cy="1280160"/>
-          </a:xfrm>
-          <a:prstGeom prst="rect">
-            <a:avLst/>
-          </a:prstGeom>
-          <a:noFill/>
-          <a:ln/>
-        </p:spPr>
-        <p:txBody>
-          <a:bodyPr wrap="square" lIns="0" tIns="0" rIns="0" bIns="0" rtlCol="0" anchor="t"/>
-          <a:lstStyle/>
-          <a:p>
-            <a:pPr marL="342900" indent="-342900">
-              <a:spcAft>
-                <a:spcPts val="500"/>
-              </a:spcAft>
-              <a:buSzPct val="100000"/>
-              <a:buChar char="•"/>
-            </a:pPr>
-            <a:r>
-              <a:rPr lang="en-US" sz="1400" dirty="0">
-                <a:solidFill>
-                  <a:schemeClr val="tx1"/>
-                </a:solidFill>
-                <a:latin typeface="Arial" pitchFamily="34" charset="0"/>
-                <a:ea typeface="Arial" pitchFamily="34" charset="-122"/>
-                <a:cs typeface="Arial" pitchFamily="34" charset="-120"/>
-              </a:rPr>
-              <a:t>ca. 60 Plätze auf Holzdeck unter dunklem Stahl-Vordach, Heizstrahler und Windschutz verlängern die Saison.</a:t>
-            </a:r>
-            <a:endParaRPr lang="en-US" sz="1400" dirty="0"/>
-          </a:p>
-          <a:p>
-            <a:pPr marL="342900" indent="-342900">
-              <a:spcAft>
-                <a:spcPts val="500"/>
-              </a:spcAft>
-              <a:buSzPct val="100000"/>
-              <a:buChar char="•"/>
-            </a:pPr>
-            <a:r>
-              <a:rPr lang="en-US" sz="1400" dirty="0">
-                <a:solidFill>
-                  <a:schemeClr val="tx1"/>
-                </a:solidFill>
-                <a:latin typeface="Arial" pitchFamily="34" charset="0"/>
-                <a:ea typeface="Arial" pitchFamily="34" charset="-122"/>
-                <a:cs typeface="Arial" pitchFamily="34" charset="-120"/>
-              </a:rPr>
-              <a:t>Die vollverglaste Fassade über die ganze Länge zeigt das Leben im Haus und zieht Gäste an.</a:t>
-            </a:r>
-            <a:endParaRPr lang="en-US" sz="1400" dirty="0"/>
-          </a:p>
-          <a:p>
-            <a:pPr marL="342900" indent="-342900">
-              <a:spcAft>
-                <a:spcPts val="500"/>
-              </a:spcAft>
-              <a:buSzPct val="100000"/>
-              <a:buChar char="•"/>
-            </a:pPr>
-            <a:r>
-              <a:rPr lang="en-US" sz="1400" dirty="0">
-                <a:solidFill>
-                  <a:schemeClr val="tx1"/>
-                </a:solidFill>
-                <a:latin typeface="Arial" pitchFamily="34" charset="0"/>
-                <a:ea typeface="Arial" pitchFamily="34" charset="-122"/>
-                <a:cs typeface="Arial" pitchFamily="34" charset="-120"/>
-              </a:rPr>
-              <a:t>Die Wohnungen darüber haben eigene Eingänge und Balkone zur anderen Seite, wichtig für Ruhe.</a:t>
-            </a:r>
-            <a:endParaRPr lang="en-US" sz="1400" dirty="0"/>
           </a:p>
         </p:txBody>
       </p:sp>

--- a/praesentation/Neue-Mitte-Werlte_Baufeld3_Gastro-Konzept.pptx
+++ b/praesentation/Neue-Mitte-Werlte_Baufeld3_Gastro-Konzept.pptx
@@ -693,7 +693,7 @@
           <a:p>
             <a:r>
               <a:rPr lang="en-US" dirty="0"/>
-              <a:t>Plausibilitätsrechnung mit Annahmen für Gäste und Bon. Ca. 6.000 € Umsatz je Sitzplatz und Jahr bei 190 Plätzen, Branchen-Median Österreich ca. 12.000 €.</a:t>
+              <a:t>Plausibilitätsrechnung mit Annahmen für Gäste und Bon. Ca. 4.100 € Umsatz je Sitzplatz und Jahr bei 190 Plätzen, Branchen-Median Österreich ca. 12.000 €.</a:t>
             </a:r>
             <a:endParaRPr lang="en-US" dirty="0"/>
           </a:p>
@@ -1397,7 +1397,7 @@
           <a:p>
             <a:r>
               <a:rPr lang="en-US" dirty="0"/>
-              <a:t>Vorschlag für Öffnungszeiten, Ruhetag Montag. Hauptfokus ist der Abend. Küche warm bis ca. 21:30 Uhr.</a:t>
+              <a:t>Vorschlag für Öffnungszeiten, Ruhetag Montag. Hauptfokus ist der Abend an der Bar. Snacks bis kurz vor Schluss.</a:t>
             </a:r>
             <a:endParaRPr lang="en-US" dirty="0"/>
           </a:p>
@@ -2561,7 +2561,7 @@
                 <a:ea typeface="Arial" pitchFamily="34" charset="-122"/>
                 <a:cs typeface="Arial" pitchFamily="34" charset="-120"/>
               </a:rPr>
-              <a:t>Bar-Restaurant für den ganzen Tag, ca. 510 m² im ganzen EG</a:t>
+              <a:t>Frühstück, Bowls und Bar für den ganzen Tag, ca. 510 m² im ganzen EG</a:t>
             </a:r>
             <a:endParaRPr lang="en-US" sz="1700" dirty="0"/>
           </a:p>
@@ -2980,7 +2980,7 @@
                 <a:ea typeface="Georgia" pitchFamily="34" charset="-122"/>
                 <a:cs typeface="Georgia" pitchFamily="34" charset="-120"/>
               </a:rPr>
-              <a:t>Wie 95.635 € Umsatz im Monat zusammenkommen</a:t>
+              <a:t>Wie 65.010 € Umsatz im Monat zusammenkommen</a:t>
             </a:r>
             <a:endParaRPr lang="en-US" sz="2700" dirty="0"/>
           </a:p>
@@ -3541,7 +3541,7 @@
                           <a:ea typeface="Arial" pitchFamily="34" charset="-122"/>
                           <a:cs typeface="Arial" pitchFamily="34" charset="-120"/>
                         </a:rPr>
-                        <a:t>25</a:t>
+                        <a:t>30</a:t>
                       </a:r>
                       <a:endParaRPr lang="en-US" sz="1250" dirty="0">
                         <a:latin typeface="Arial" charset="0"/>
@@ -3671,7 +3671,7 @@
                           <a:ea typeface="Arial" pitchFamily="34" charset="-122"/>
                           <a:cs typeface="Arial" pitchFamily="34" charset="-120"/>
                         </a:rPr>
-                        <a:t>4.675 €</a:t>
+                        <a:t>5.610 €</a:t>
                       </a:r>
                       <a:endParaRPr lang="en-US" sz="1250" dirty="0">
                         <a:latin typeface="Arial" charset="0"/>
@@ -4065,7 +4065,7 @@
                           <a:ea typeface="Arial" pitchFamily="34" charset="-122"/>
                           <a:cs typeface="Arial" pitchFamily="34" charset="-120"/>
                         </a:rPr>
-                        <a:t>Mittagstisch (Di–Fr 11:30–14:30)</a:t>
+                        <a:t>Mittag: Bowls, Salate, Suppe (Di–Fr 11:30–14:30)</a:t>
                       </a:r>
                       <a:endParaRPr lang="en-US" sz="1250" dirty="0">
                         <a:latin typeface="Arial" charset="0"/>
@@ -4195,7 +4195,7 @@
                           <a:ea typeface="Arial" pitchFamily="34" charset="-122"/>
                           <a:cs typeface="Arial" pitchFamily="34" charset="-120"/>
                         </a:rPr>
-                        <a:t>50</a:t>
+                        <a:t>40</a:t>
                       </a:r>
                       <a:endParaRPr lang="en-US" sz="1250" dirty="0">
                         <a:latin typeface="Arial" charset="0"/>
@@ -4260,7 +4260,661 @@
                           <a:ea typeface="Arial" pitchFamily="34" charset="-122"/>
                           <a:cs typeface="Arial" pitchFamily="34" charset="-120"/>
                         </a:rPr>
-                        <a:t>14 €</a:t>
+                        <a:t>13 €</a:t>
+                      </a:r>
+                      <a:endParaRPr lang="en-US" sz="1250" dirty="0">
+                        <a:latin typeface="Arial" charset="0"/>
+                        <a:ea typeface="Arial" charset="0"/>
+                        <a:cs typeface="Arial" charset="0"/>
+                      </a:endParaRPr>
+                    </a:p>
+                  </a:txBody>
+                  <a:tcPr marL="91440" marR="91440" marT="45720" marB="45720">
+                    <a:lnL w="12700" cap="flat" cmpd="sng" algn="ctr">
+                      <a:solidFill>
+                        <a:srgbClr val="FFFFFF"/>
+                      </a:solidFill>
+                      <a:prstDash val="solid"/>
+                      <a:round/>
+                      <a:headEnd type="none" w="med" len="med"/>
+                      <a:tailEnd type="none" w="med" len="med"/>
+                    </a:lnL>
+                    <a:lnR w="12700" cap="flat" cmpd="sng" algn="ctr">
+                      <a:solidFill>
+                        <a:srgbClr val="FFFFFF"/>
+                      </a:solidFill>
+                      <a:prstDash val="solid"/>
+                      <a:round/>
+                      <a:headEnd type="none" w="med" len="med"/>
+                      <a:tailEnd type="none" w="med" len="med"/>
+                    </a:lnR>
+                    <a:lnT w="12700" cap="flat" cmpd="sng" algn="ctr">
+                      <a:solidFill>
+                        <a:srgbClr val="FFFFFF"/>
+                      </a:solidFill>
+                      <a:prstDash val="solid"/>
+                      <a:round/>
+                      <a:headEnd type="none" w="med" len="med"/>
+                      <a:tailEnd type="none" w="med" len="med"/>
+                    </a:lnT>
+                    <a:lnB w="12700" cap="flat" cmpd="sng" algn="ctr">
+                      <a:solidFill>
+                        <a:srgbClr val="FFFFFF"/>
+                      </a:solidFill>
+                      <a:prstDash val="solid"/>
+                      <a:round/>
+                      <a:headEnd type="none" w="med" len="med"/>
+                      <a:tailEnd type="none" w="med" len="med"/>
+                    </a:lnB>
+                  </a:tcPr>
+                </a:tc>
+                <a:tc>
+                  <a:txBody>
+                    <a:bodyPr/>
+                    <a:lstStyle/>
+                    <a:p>
+                      <a:pPr algn="r" indent="0" marL="0">
+                        <a:buNone/>
+                      </a:pPr>
+                      <a:r>
+                        <a:rPr lang="en-US" sz="1250" dirty="0">
+                          <a:solidFill>
+                            <a:srgbClr val="000000"/>
+                          </a:solidFill>
+                          <a:latin typeface="Arial" pitchFamily="34" charset="0"/>
+                          <a:ea typeface="Arial" pitchFamily="34" charset="-122"/>
+                          <a:cs typeface="Arial" pitchFamily="34" charset="-120"/>
+                        </a:rPr>
+                        <a:t>8.840 €</a:t>
+                      </a:r>
+                      <a:endParaRPr lang="en-US" sz="1250" dirty="0">
+                        <a:latin typeface="Arial" charset="0"/>
+                        <a:ea typeface="Arial" charset="0"/>
+                        <a:cs typeface="Arial" charset="0"/>
+                      </a:endParaRPr>
+                    </a:p>
+                  </a:txBody>
+                  <a:tcPr marL="91440" marR="91440" marT="45720" marB="45720">
+                    <a:lnL w="12700" cap="flat" cmpd="sng" algn="ctr">
+                      <a:solidFill>
+                        <a:srgbClr val="FFFFFF"/>
+                      </a:solidFill>
+                      <a:prstDash val="solid"/>
+                      <a:round/>
+                      <a:headEnd type="none" w="med" len="med"/>
+                      <a:tailEnd type="none" w="med" len="med"/>
+                    </a:lnL>
+                    <a:lnR w="12700" cap="flat" cmpd="sng" algn="ctr">
+                      <a:solidFill>
+                        <a:srgbClr val="FFFFFF"/>
+                      </a:solidFill>
+                      <a:prstDash val="solid"/>
+                      <a:round/>
+                      <a:headEnd type="none" w="med" len="med"/>
+                      <a:tailEnd type="none" w="med" len="med"/>
+                    </a:lnR>
+                    <a:lnT w="12700" cap="flat" cmpd="sng" algn="ctr">
+                      <a:solidFill>
+                        <a:srgbClr val="FFFFFF"/>
+                      </a:solidFill>
+                      <a:prstDash val="solid"/>
+                      <a:round/>
+                      <a:headEnd type="none" w="med" len="med"/>
+                      <a:tailEnd type="none" w="med" len="med"/>
+                    </a:lnT>
+                    <a:lnB w="12700" cap="flat" cmpd="sng" algn="ctr">
+                      <a:solidFill>
+                        <a:srgbClr val="FFFFFF"/>
+                      </a:solidFill>
+                      <a:prstDash val="solid"/>
+                      <a:round/>
+                      <a:headEnd type="none" w="med" len="med"/>
+                      <a:tailEnd type="none" w="med" len="med"/>
+                    </a:lnB>
+                  </a:tcPr>
+                </a:tc>
+              </a:tr>
+              <a:tr h="457200">
+                <a:tc>
+                  <a:txBody>
+                    <a:bodyPr/>
+                    <a:lstStyle/>
+                    <a:p>
+                      <a:pPr indent="0" marL="0">
+                        <a:buNone/>
+                      </a:pPr>
+                      <a:r>
+                        <a:rPr lang="en-US" sz="1250" dirty="0">
+                          <a:solidFill>
+                            <a:srgbClr val="000000"/>
+                          </a:solidFill>
+                          <a:latin typeface="Arial" pitchFamily="34" charset="0"/>
+                          <a:ea typeface="Arial" pitchFamily="34" charset="-122"/>
+                          <a:cs typeface="Arial" pitchFamily="34" charset="-120"/>
+                        </a:rPr>
+                        <a:t>Nachmittag: Kaffee, Kuchen, Snacks (Di–So 14:30–17:00)</a:t>
+                      </a:r>
+                      <a:endParaRPr lang="en-US" sz="1250" dirty="0">
+                        <a:latin typeface="Arial" charset="0"/>
+                        <a:ea typeface="Arial" charset="0"/>
+                        <a:cs typeface="Arial" charset="0"/>
+                      </a:endParaRPr>
+                    </a:p>
+                  </a:txBody>
+                  <a:tcPr marL="91440" marR="91440" marT="45720" marB="45720">
+                    <a:lnL w="12700" cap="flat" cmpd="sng" algn="ctr">
+                      <a:solidFill>
+                        <a:srgbClr val="FFFFFF"/>
+                      </a:solidFill>
+                      <a:prstDash val="solid"/>
+                      <a:round/>
+                      <a:headEnd type="none" w="med" len="med"/>
+                      <a:tailEnd type="none" w="med" len="med"/>
+                    </a:lnL>
+                    <a:lnR w="12700" cap="flat" cmpd="sng" algn="ctr">
+                      <a:solidFill>
+                        <a:srgbClr val="FFFFFF"/>
+                      </a:solidFill>
+                      <a:prstDash val="solid"/>
+                      <a:round/>
+                      <a:headEnd type="none" w="med" len="med"/>
+                      <a:tailEnd type="none" w="med" len="med"/>
+                    </a:lnR>
+                    <a:lnT w="12700" cap="flat" cmpd="sng" algn="ctr">
+                      <a:solidFill>
+                        <a:srgbClr val="FFFFFF"/>
+                      </a:solidFill>
+                      <a:prstDash val="solid"/>
+                      <a:round/>
+                      <a:headEnd type="none" w="med" len="med"/>
+                      <a:tailEnd type="none" w="med" len="med"/>
+                    </a:lnT>
+                    <a:lnB w="12700" cap="flat" cmpd="sng" algn="ctr">
+                      <a:solidFill>
+                        <a:srgbClr val="FFFFFF"/>
+                      </a:solidFill>
+                      <a:prstDash val="solid"/>
+                      <a:round/>
+                      <a:headEnd type="none" w="med" len="med"/>
+                      <a:tailEnd type="none" w="med" len="med"/>
+                    </a:lnB>
+                  </a:tcPr>
+                </a:tc>
+                <a:tc>
+                  <a:txBody>
+                    <a:bodyPr/>
+                    <a:lstStyle/>
+                    <a:p>
+                      <a:pPr algn="r" indent="0" marL="0">
+                        <a:buNone/>
+                      </a:pPr>
+                      <a:r>
+                        <a:rPr lang="en-US" sz="1250" dirty="0">
+                          <a:solidFill>
+                            <a:srgbClr val="000000"/>
+                          </a:solidFill>
+                          <a:latin typeface="Arial" pitchFamily="34" charset="0"/>
+                          <a:ea typeface="Arial" pitchFamily="34" charset="-122"/>
+                          <a:cs typeface="Arial" pitchFamily="34" charset="-120"/>
+                        </a:rPr>
+                        <a:t>26</a:t>
+                      </a:r>
+                      <a:endParaRPr lang="en-US" sz="1250" dirty="0">
+                        <a:latin typeface="Arial" charset="0"/>
+                        <a:ea typeface="Arial" charset="0"/>
+                        <a:cs typeface="Arial" charset="0"/>
+                      </a:endParaRPr>
+                    </a:p>
+                  </a:txBody>
+                  <a:tcPr marL="91440" marR="91440" marT="45720" marB="45720">
+                    <a:lnL w="12700" cap="flat" cmpd="sng" algn="ctr">
+                      <a:solidFill>
+                        <a:srgbClr val="FFFFFF"/>
+                      </a:solidFill>
+                      <a:prstDash val="solid"/>
+                      <a:round/>
+                      <a:headEnd type="none" w="med" len="med"/>
+                      <a:tailEnd type="none" w="med" len="med"/>
+                    </a:lnL>
+                    <a:lnR w="12700" cap="flat" cmpd="sng" algn="ctr">
+                      <a:solidFill>
+                        <a:srgbClr val="FFFFFF"/>
+                      </a:solidFill>
+                      <a:prstDash val="solid"/>
+                      <a:round/>
+                      <a:headEnd type="none" w="med" len="med"/>
+                      <a:tailEnd type="none" w="med" len="med"/>
+                    </a:lnR>
+                    <a:lnT w="12700" cap="flat" cmpd="sng" algn="ctr">
+                      <a:solidFill>
+                        <a:srgbClr val="FFFFFF"/>
+                      </a:solidFill>
+                      <a:prstDash val="solid"/>
+                      <a:round/>
+                      <a:headEnd type="none" w="med" len="med"/>
+                      <a:tailEnd type="none" w="med" len="med"/>
+                    </a:lnT>
+                    <a:lnB w="12700" cap="flat" cmpd="sng" algn="ctr">
+                      <a:solidFill>
+                        <a:srgbClr val="FFFFFF"/>
+                      </a:solidFill>
+                      <a:prstDash val="solid"/>
+                      <a:round/>
+                      <a:headEnd type="none" w="med" len="med"/>
+                      <a:tailEnd type="none" w="med" len="med"/>
+                    </a:lnB>
+                  </a:tcPr>
+                </a:tc>
+                <a:tc>
+                  <a:txBody>
+                    <a:bodyPr/>
+                    <a:lstStyle/>
+                    <a:p>
+                      <a:pPr algn="r" indent="0" marL="0">
+                        <a:buNone/>
+                      </a:pPr>
+                      <a:r>
+                        <a:rPr lang="en-US" sz="1250" dirty="0">
+                          <a:solidFill>
+                            <a:srgbClr val="000000"/>
+                          </a:solidFill>
+                          <a:latin typeface="Arial" pitchFamily="34" charset="0"/>
+                          <a:ea typeface="Arial" pitchFamily="34" charset="-122"/>
+                          <a:cs typeface="Arial" pitchFamily="34" charset="-120"/>
+                        </a:rPr>
+                        <a:t>20</a:t>
+                      </a:r>
+                      <a:endParaRPr lang="en-US" sz="1250" dirty="0">
+                        <a:latin typeface="Arial" charset="0"/>
+                        <a:ea typeface="Arial" charset="0"/>
+                        <a:cs typeface="Arial" charset="0"/>
+                      </a:endParaRPr>
+                    </a:p>
+                  </a:txBody>
+                  <a:tcPr marL="91440" marR="91440" marT="45720" marB="45720">
+                    <a:lnL w="12700" cap="flat" cmpd="sng" algn="ctr">
+                      <a:solidFill>
+                        <a:srgbClr val="FFFFFF"/>
+                      </a:solidFill>
+                      <a:prstDash val="solid"/>
+                      <a:round/>
+                      <a:headEnd type="none" w="med" len="med"/>
+                      <a:tailEnd type="none" w="med" len="med"/>
+                    </a:lnL>
+                    <a:lnR w="12700" cap="flat" cmpd="sng" algn="ctr">
+                      <a:solidFill>
+                        <a:srgbClr val="FFFFFF"/>
+                      </a:solidFill>
+                      <a:prstDash val="solid"/>
+                      <a:round/>
+                      <a:headEnd type="none" w="med" len="med"/>
+                      <a:tailEnd type="none" w="med" len="med"/>
+                    </a:lnR>
+                    <a:lnT w="12700" cap="flat" cmpd="sng" algn="ctr">
+                      <a:solidFill>
+                        <a:srgbClr val="FFFFFF"/>
+                      </a:solidFill>
+                      <a:prstDash val="solid"/>
+                      <a:round/>
+                      <a:headEnd type="none" w="med" len="med"/>
+                      <a:tailEnd type="none" w="med" len="med"/>
+                    </a:lnT>
+                    <a:lnB w="12700" cap="flat" cmpd="sng" algn="ctr">
+                      <a:solidFill>
+                        <a:srgbClr val="FFFFFF"/>
+                      </a:solidFill>
+                      <a:prstDash val="solid"/>
+                      <a:round/>
+                      <a:headEnd type="none" w="med" len="med"/>
+                      <a:tailEnd type="none" w="med" len="med"/>
+                    </a:lnB>
+                  </a:tcPr>
+                </a:tc>
+                <a:tc>
+                  <a:txBody>
+                    <a:bodyPr/>
+                    <a:lstStyle/>
+                    <a:p>
+                      <a:pPr algn="r" indent="0" marL="0">
+                        <a:buNone/>
+                      </a:pPr>
+                      <a:r>
+                        <a:rPr lang="en-US" sz="1250" dirty="0">
+                          <a:solidFill>
+                            <a:srgbClr val="000000"/>
+                          </a:solidFill>
+                          <a:latin typeface="Arial" pitchFamily="34" charset="0"/>
+                          <a:ea typeface="Arial" pitchFamily="34" charset="-122"/>
+                          <a:cs typeface="Arial" pitchFamily="34" charset="-120"/>
+                        </a:rPr>
+                        <a:t>7 €</a:t>
+                      </a:r>
+                      <a:endParaRPr lang="en-US" sz="1250" dirty="0">
+                        <a:latin typeface="Arial" charset="0"/>
+                        <a:ea typeface="Arial" charset="0"/>
+                        <a:cs typeface="Arial" charset="0"/>
+                      </a:endParaRPr>
+                    </a:p>
+                  </a:txBody>
+                  <a:tcPr marL="91440" marR="91440" marT="45720" marB="45720">
+                    <a:lnL w="12700" cap="flat" cmpd="sng" algn="ctr">
+                      <a:solidFill>
+                        <a:srgbClr val="FFFFFF"/>
+                      </a:solidFill>
+                      <a:prstDash val="solid"/>
+                      <a:round/>
+                      <a:headEnd type="none" w="med" len="med"/>
+                      <a:tailEnd type="none" w="med" len="med"/>
+                    </a:lnL>
+                    <a:lnR w="12700" cap="flat" cmpd="sng" algn="ctr">
+                      <a:solidFill>
+                        <a:srgbClr val="FFFFFF"/>
+                      </a:solidFill>
+                      <a:prstDash val="solid"/>
+                      <a:round/>
+                      <a:headEnd type="none" w="med" len="med"/>
+                      <a:tailEnd type="none" w="med" len="med"/>
+                    </a:lnR>
+                    <a:lnT w="12700" cap="flat" cmpd="sng" algn="ctr">
+                      <a:solidFill>
+                        <a:srgbClr val="FFFFFF"/>
+                      </a:solidFill>
+                      <a:prstDash val="solid"/>
+                      <a:round/>
+                      <a:headEnd type="none" w="med" len="med"/>
+                      <a:tailEnd type="none" w="med" len="med"/>
+                    </a:lnT>
+                    <a:lnB w="12700" cap="flat" cmpd="sng" algn="ctr">
+                      <a:solidFill>
+                        <a:srgbClr val="FFFFFF"/>
+                      </a:solidFill>
+                      <a:prstDash val="solid"/>
+                      <a:round/>
+                      <a:headEnd type="none" w="med" len="med"/>
+                      <a:tailEnd type="none" w="med" len="med"/>
+                    </a:lnB>
+                  </a:tcPr>
+                </a:tc>
+                <a:tc>
+                  <a:txBody>
+                    <a:bodyPr/>
+                    <a:lstStyle/>
+                    <a:p>
+                      <a:pPr algn="r" indent="0" marL="0">
+                        <a:buNone/>
+                      </a:pPr>
+                      <a:r>
+                        <a:rPr lang="en-US" sz="1250" dirty="0">
+                          <a:solidFill>
+                            <a:srgbClr val="000000"/>
+                          </a:solidFill>
+                          <a:latin typeface="Arial" pitchFamily="34" charset="0"/>
+                          <a:ea typeface="Arial" pitchFamily="34" charset="-122"/>
+                          <a:cs typeface="Arial" pitchFamily="34" charset="-120"/>
+                        </a:rPr>
+                        <a:t>3.640 €</a:t>
+                      </a:r>
+                      <a:endParaRPr lang="en-US" sz="1250" dirty="0">
+                        <a:latin typeface="Arial" charset="0"/>
+                        <a:ea typeface="Arial" charset="0"/>
+                        <a:cs typeface="Arial" charset="0"/>
+                      </a:endParaRPr>
+                    </a:p>
+                  </a:txBody>
+                  <a:tcPr marL="91440" marR="91440" marT="45720" marB="45720">
+                    <a:lnL w="12700" cap="flat" cmpd="sng" algn="ctr">
+                      <a:solidFill>
+                        <a:srgbClr val="FFFFFF"/>
+                      </a:solidFill>
+                      <a:prstDash val="solid"/>
+                      <a:round/>
+                      <a:headEnd type="none" w="med" len="med"/>
+                      <a:tailEnd type="none" w="med" len="med"/>
+                    </a:lnL>
+                    <a:lnR w="12700" cap="flat" cmpd="sng" algn="ctr">
+                      <a:solidFill>
+                        <a:srgbClr val="FFFFFF"/>
+                      </a:solidFill>
+                      <a:prstDash val="solid"/>
+                      <a:round/>
+                      <a:headEnd type="none" w="med" len="med"/>
+                      <a:tailEnd type="none" w="med" len="med"/>
+                    </a:lnR>
+                    <a:lnT w="12700" cap="flat" cmpd="sng" algn="ctr">
+                      <a:solidFill>
+                        <a:srgbClr val="FFFFFF"/>
+                      </a:solidFill>
+                      <a:prstDash val="solid"/>
+                      <a:round/>
+                      <a:headEnd type="none" w="med" len="med"/>
+                      <a:tailEnd type="none" w="med" len="med"/>
+                    </a:lnT>
+                    <a:lnB w="12700" cap="flat" cmpd="sng" algn="ctr">
+                      <a:solidFill>
+                        <a:srgbClr val="FFFFFF"/>
+                      </a:solidFill>
+                      <a:prstDash val="solid"/>
+                      <a:round/>
+                      <a:headEnd type="none" w="med" len="med"/>
+                      <a:tailEnd type="none" w="med" len="med"/>
+                    </a:lnB>
+                  </a:tcPr>
+                </a:tc>
+              </a:tr>
+              <a:tr h="457200">
+                <a:tc>
+                  <a:txBody>
+                    <a:bodyPr/>
+                    <a:lstStyle/>
+                    <a:p>
+                      <a:pPr indent="0" marL="0">
+                        <a:buNone/>
+                      </a:pPr>
+                      <a:r>
+                        <a:rPr lang="en-US" sz="1250" dirty="0">
+                          <a:solidFill>
+                            <a:srgbClr val="000000"/>
+                          </a:solidFill>
+                          <a:latin typeface="Arial" pitchFamily="34" charset="0"/>
+                          <a:ea typeface="Arial" pitchFamily="34" charset="-122"/>
+                          <a:cs typeface="Arial" pitchFamily="34" charset="-120"/>
+                        </a:rPr>
+                        <a:t>Bar mit Snacks Di–Do, So (ab 17:00)</a:t>
+                      </a:r>
+                      <a:endParaRPr lang="en-US" sz="1250" dirty="0">
+                        <a:latin typeface="Arial" charset="0"/>
+                        <a:ea typeface="Arial" charset="0"/>
+                        <a:cs typeface="Arial" charset="0"/>
+                      </a:endParaRPr>
+                    </a:p>
+                  </a:txBody>
+                  <a:tcPr marL="91440" marR="91440" marT="45720" marB="45720">
+                    <a:lnL w="12700" cap="flat" cmpd="sng" algn="ctr">
+                      <a:solidFill>
+                        <a:srgbClr val="FFFFFF"/>
+                      </a:solidFill>
+                      <a:prstDash val="solid"/>
+                      <a:round/>
+                      <a:headEnd type="none" w="med" len="med"/>
+                      <a:tailEnd type="none" w="med" len="med"/>
+                    </a:lnL>
+                    <a:lnR w="12700" cap="flat" cmpd="sng" algn="ctr">
+                      <a:solidFill>
+                        <a:srgbClr val="FFFFFF"/>
+                      </a:solidFill>
+                      <a:prstDash val="solid"/>
+                      <a:round/>
+                      <a:headEnd type="none" w="med" len="med"/>
+                      <a:tailEnd type="none" w="med" len="med"/>
+                    </a:lnR>
+                    <a:lnT w="12700" cap="flat" cmpd="sng" algn="ctr">
+                      <a:solidFill>
+                        <a:srgbClr val="FFFFFF"/>
+                      </a:solidFill>
+                      <a:prstDash val="solid"/>
+                      <a:round/>
+                      <a:headEnd type="none" w="med" len="med"/>
+                      <a:tailEnd type="none" w="med" len="med"/>
+                    </a:lnT>
+                    <a:lnB w="12700" cap="flat" cmpd="sng" algn="ctr">
+                      <a:solidFill>
+                        <a:srgbClr val="FFFFFF"/>
+                      </a:solidFill>
+                      <a:prstDash val="solid"/>
+                      <a:round/>
+                      <a:headEnd type="none" w="med" len="med"/>
+                      <a:tailEnd type="none" w="med" len="med"/>
+                    </a:lnB>
+                  </a:tcPr>
+                </a:tc>
+                <a:tc>
+                  <a:txBody>
+                    <a:bodyPr/>
+                    <a:lstStyle/>
+                    <a:p>
+                      <a:pPr algn="r" indent="0" marL="0">
+                        <a:buNone/>
+                      </a:pPr>
+                      <a:r>
+                        <a:rPr lang="en-US" sz="1250" dirty="0">
+                          <a:solidFill>
+                            <a:srgbClr val="000000"/>
+                          </a:solidFill>
+                          <a:latin typeface="Arial" pitchFamily="34" charset="0"/>
+                          <a:ea typeface="Arial" pitchFamily="34" charset="-122"/>
+                          <a:cs typeface="Arial" pitchFamily="34" charset="-120"/>
+                        </a:rPr>
+                        <a:t>17</a:t>
+                      </a:r>
+                      <a:endParaRPr lang="en-US" sz="1250" dirty="0">
+                        <a:latin typeface="Arial" charset="0"/>
+                        <a:ea typeface="Arial" charset="0"/>
+                        <a:cs typeface="Arial" charset="0"/>
+                      </a:endParaRPr>
+                    </a:p>
+                  </a:txBody>
+                  <a:tcPr marL="91440" marR="91440" marT="45720" marB="45720">
+                    <a:lnL w="12700" cap="flat" cmpd="sng" algn="ctr">
+                      <a:solidFill>
+                        <a:srgbClr val="FFFFFF"/>
+                      </a:solidFill>
+                      <a:prstDash val="solid"/>
+                      <a:round/>
+                      <a:headEnd type="none" w="med" len="med"/>
+                      <a:tailEnd type="none" w="med" len="med"/>
+                    </a:lnL>
+                    <a:lnR w="12700" cap="flat" cmpd="sng" algn="ctr">
+                      <a:solidFill>
+                        <a:srgbClr val="FFFFFF"/>
+                      </a:solidFill>
+                      <a:prstDash val="solid"/>
+                      <a:round/>
+                      <a:headEnd type="none" w="med" len="med"/>
+                      <a:tailEnd type="none" w="med" len="med"/>
+                    </a:lnR>
+                    <a:lnT w="12700" cap="flat" cmpd="sng" algn="ctr">
+                      <a:solidFill>
+                        <a:srgbClr val="FFFFFF"/>
+                      </a:solidFill>
+                      <a:prstDash val="solid"/>
+                      <a:round/>
+                      <a:headEnd type="none" w="med" len="med"/>
+                      <a:tailEnd type="none" w="med" len="med"/>
+                    </a:lnT>
+                    <a:lnB w="12700" cap="flat" cmpd="sng" algn="ctr">
+                      <a:solidFill>
+                        <a:srgbClr val="FFFFFF"/>
+                      </a:solidFill>
+                      <a:prstDash val="solid"/>
+                      <a:round/>
+                      <a:headEnd type="none" w="med" len="med"/>
+                      <a:tailEnd type="none" w="med" len="med"/>
+                    </a:lnB>
+                  </a:tcPr>
+                </a:tc>
+                <a:tc>
+                  <a:txBody>
+                    <a:bodyPr/>
+                    <a:lstStyle/>
+                    <a:p>
+                      <a:pPr algn="r" indent="0" marL="0">
+                        <a:buNone/>
+                      </a:pPr>
+                      <a:r>
+                        <a:rPr lang="en-US" sz="1250" dirty="0">
+                          <a:solidFill>
+                            <a:srgbClr val="000000"/>
+                          </a:solidFill>
+                          <a:latin typeface="Arial" pitchFamily="34" charset="0"/>
+                          <a:ea typeface="Arial" pitchFamily="34" charset="-122"/>
+                          <a:cs typeface="Arial" pitchFamily="34" charset="-120"/>
+                        </a:rPr>
+                        <a:t>35</a:t>
+                      </a:r>
+                      <a:endParaRPr lang="en-US" sz="1250" dirty="0">
+                        <a:latin typeface="Arial" charset="0"/>
+                        <a:ea typeface="Arial" charset="0"/>
+                        <a:cs typeface="Arial" charset="0"/>
+                      </a:endParaRPr>
+                    </a:p>
+                  </a:txBody>
+                  <a:tcPr marL="91440" marR="91440" marT="45720" marB="45720">
+                    <a:lnL w="12700" cap="flat" cmpd="sng" algn="ctr">
+                      <a:solidFill>
+                        <a:srgbClr val="FFFFFF"/>
+                      </a:solidFill>
+                      <a:prstDash val="solid"/>
+                      <a:round/>
+                      <a:headEnd type="none" w="med" len="med"/>
+                      <a:tailEnd type="none" w="med" len="med"/>
+                    </a:lnL>
+                    <a:lnR w="12700" cap="flat" cmpd="sng" algn="ctr">
+                      <a:solidFill>
+                        <a:srgbClr val="FFFFFF"/>
+                      </a:solidFill>
+                      <a:prstDash val="solid"/>
+                      <a:round/>
+                      <a:headEnd type="none" w="med" len="med"/>
+                      <a:tailEnd type="none" w="med" len="med"/>
+                    </a:lnR>
+                    <a:lnT w="12700" cap="flat" cmpd="sng" algn="ctr">
+                      <a:solidFill>
+                        <a:srgbClr val="FFFFFF"/>
+                      </a:solidFill>
+                      <a:prstDash val="solid"/>
+                      <a:round/>
+                      <a:headEnd type="none" w="med" len="med"/>
+                      <a:tailEnd type="none" w="med" len="med"/>
+                    </a:lnT>
+                    <a:lnB w="12700" cap="flat" cmpd="sng" algn="ctr">
+                      <a:solidFill>
+                        <a:srgbClr val="FFFFFF"/>
+                      </a:solidFill>
+                      <a:prstDash val="solid"/>
+                      <a:round/>
+                      <a:headEnd type="none" w="med" len="med"/>
+                      <a:tailEnd type="none" w="med" len="med"/>
+                    </a:lnB>
+                  </a:tcPr>
+                </a:tc>
+                <a:tc>
+                  <a:txBody>
+                    <a:bodyPr/>
+                    <a:lstStyle/>
+                    <a:p>
+                      <a:pPr algn="r" indent="0" marL="0">
+                        <a:buNone/>
+                      </a:pPr>
+                      <a:r>
+                        <a:rPr lang="en-US" sz="1250" dirty="0">
+                          <a:solidFill>
+                            <a:srgbClr val="000000"/>
+                          </a:solidFill>
+                          <a:latin typeface="Arial" pitchFamily="34" charset="0"/>
+                          <a:ea typeface="Arial" pitchFamily="34" charset="-122"/>
+                          <a:cs typeface="Arial" pitchFamily="34" charset="-120"/>
+                        </a:rPr>
+                        <a:t>20 €</a:t>
                       </a:r>
                       <a:endParaRPr lang="en-US" sz="1250" dirty="0">
                         <a:latin typeface="Arial" charset="0"/>
@@ -4392,661 +5046,7 @@
                           <a:ea typeface="Arial" pitchFamily="34" charset="-122"/>
                           <a:cs typeface="Arial" pitchFamily="34" charset="-120"/>
                         </a:rPr>
-                        <a:t>Abendessen Restaurant (Di–So 17:30–22:00)</a:t>
-                      </a:r>
-                      <a:endParaRPr lang="en-US" sz="1250" dirty="0">
-                        <a:latin typeface="Arial" charset="0"/>
-                        <a:ea typeface="Arial" charset="0"/>
-                        <a:cs typeface="Arial" charset="0"/>
-                      </a:endParaRPr>
-                    </a:p>
-                  </a:txBody>
-                  <a:tcPr marL="91440" marR="91440" marT="45720" marB="45720">
-                    <a:lnL w="12700" cap="flat" cmpd="sng" algn="ctr">
-                      <a:solidFill>
-                        <a:srgbClr val="FFFFFF"/>
-                      </a:solidFill>
-                      <a:prstDash val="solid"/>
-                      <a:round/>
-                      <a:headEnd type="none" w="med" len="med"/>
-                      <a:tailEnd type="none" w="med" len="med"/>
-                    </a:lnL>
-                    <a:lnR w="12700" cap="flat" cmpd="sng" algn="ctr">
-                      <a:solidFill>
-                        <a:srgbClr val="FFFFFF"/>
-                      </a:solidFill>
-                      <a:prstDash val="solid"/>
-                      <a:round/>
-                      <a:headEnd type="none" w="med" len="med"/>
-                      <a:tailEnd type="none" w="med" len="med"/>
-                    </a:lnR>
-                    <a:lnT w="12700" cap="flat" cmpd="sng" algn="ctr">
-                      <a:solidFill>
-                        <a:srgbClr val="FFFFFF"/>
-                      </a:solidFill>
-                      <a:prstDash val="solid"/>
-                      <a:round/>
-                      <a:headEnd type="none" w="med" len="med"/>
-                      <a:tailEnd type="none" w="med" len="med"/>
-                    </a:lnT>
-                    <a:lnB w="12700" cap="flat" cmpd="sng" algn="ctr">
-                      <a:solidFill>
-                        <a:srgbClr val="FFFFFF"/>
-                      </a:solidFill>
-                      <a:prstDash val="solid"/>
-                      <a:round/>
-                      <a:headEnd type="none" w="med" len="med"/>
-                      <a:tailEnd type="none" w="med" len="med"/>
-                    </a:lnB>
-                  </a:tcPr>
-                </a:tc>
-                <a:tc>
-                  <a:txBody>
-                    <a:bodyPr/>
-                    <a:lstStyle/>
-                    <a:p>
-                      <a:pPr algn="r" indent="0" marL="0">
-                        <a:buNone/>
-                      </a:pPr>
-                      <a:r>
-                        <a:rPr lang="en-US" sz="1250" dirty="0">
-                          <a:solidFill>
-                            <a:srgbClr val="000000"/>
-                          </a:solidFill>
-                          <a:latin typeface="Arial" pitchFamily="34" charset="0"/>
-                          <a:ea typeface="Arial" pitchFamily="34" charset="-122"/>
-                          <a:cs typeface="Arial" pitchFamily="34" charset="-120"/>
-                        </a:rPr>
-                        <a:t>26</a:t>
-                      </a:r>
-                      <a:endParaRPr lang="en-US" sz="1250" dirty="0">
-                        <a:latin typeface="Arial" charset="0"/>
-                        <a:ea typeface="Arial" charset="0"/>
-                        <a:cs typeface="Arial" charset="0"/>
-                      </a:endParaRPr>
-                    </a:p>
-                  </a:txBody>
-                  <a:tcPr marL="91440" marR="91440" marT="45720" marB="45720">
-                    <a:lnL w="12700" cap="flat" cmpd="sng" algn="ctr">
-                      <a:solidFill>
-                        <a:srgbClr val="FFFFFF"/>
-                      </a:solidFill>
-                      <a:prstDash val="solid"/>
-                      <a:round/>
-                      <a:headEnd type="none" w="med" len="med"/>
-                      <a:tailEnd type="none" w="med" len="med"/>
-                    </a:lnL>
-                    <a:lnR w="12700" cap="flat" cmpd="sng" algn="ctr">
-                      <a:solidFill>
-                        <a:srgbClr val="FFFFFF"/>
-                      </a:solidFill>
-                      <a:prstDash val="solid"/>
-                      <a:round/>
-                      <a:headEnd type="none" w="med" len="med"/>
-                      <a:tailEnd type="none" w="med" len="med"/>
-                    </a:lnR>
-                    <a:lnT w="12700" cap="flat" cmpd="sng" algn="ctr">
-                      <a:solidFill>
-                        <a:srgbClr val="FFFFFF"/>
-                      </a:solidFill>
-                      <a:prstDash val="solid"/>
-                      <a:round/>
-                      <a:headEnd type="none" w="med" len="med"/>
-                      <a:tailEnd type="none" w="med" len="med"/>
-                    </a:lnT>
-                    <a:lnB w="12700" cap="flat" cmpd="sng" algn="ctr">
-                      <a:solidFill>
-                        <a:srgbClr val="FFFFFF"/>
-                      </a:solidFill>
-                      <a:prstDash val="solid"/>
-                      <a:round/>
-                      <a:headEnd type="none" w="med" len="med"/>
-                      <a:tailEnd type="none" w="med" len="med"/>
-                    </a:lnB>
-                  </a:tcPr>
-                </a:tc>
-                <a:tc>
-                  <a:txBody>
-                    <a:bodyPr/>
-                    <a:lstStyle/>
-                    <a:p>
-                      <a:pPr algn="r" indent="0" marL="0">
-                        <a:buNone/>
-                      </a:pPr>
-                      <a:r>
-                        <a:rPr lang="en-US" sz="1250" dirty="0">
-                          <a:solidFill>
-                            <a:srgbClr val="000000"/>
-                          </a:solidFill>
-                          <a:latin typeface="Arial" pitchFamily="34" charset="0"/>
-                          <a:ea typeface="Arial" pitchFamily="34" charset="-122"/>
-                          <a:cs typeface="Arial" pitchFamily="34" charset="-120"/>
-                        </a:rPr>
-                        <a:t>55</a:t>
-                      </a:r>
-                      <a:endParaRPr lang="en-US" sz="1250" dirty="0">
-                        <a:latin typeface="Arial" charset="0"/>
-                        <a:ea typeface="Arial" charset="0"/>
-                        <a:cs typeface="Arial" charset="0"/>
-                      </a:endParaRPr>
-                    </a:p>
-                  </a:txBody>
-                  <a:tcPr marL="91440" marR="91440" marT="45720" marB="45720">
-                    <a:lnL w="12700" cap="flat" cmpd="sng" algn="ctr">
-                      <a:solidFill>
-                        <a:srgbClr val="FFFFFF"/>
-                      </a:solidFill>
-                      <a:prstDash val="solid"/>
-                      <a:round/>
-                      <a:headEnd type="none" w="med" len="med"/>
-                      <a:tailEnd type="none" w="med" len="med"/>
-                    </a:lnL>
-                    <a:lnR w="12700" cap="flat" cmpd="sng" algn="ctr">
-                      <a:solidFill>
-                        <a:srgbClr val="FFFFFF"/>
-                      </a:solidFill>
-                      <a:prstDash val="solid"/>
-                      <a:round/>
-                      <a:headEnd type="none" w="med" len="med"/>
-                      <a:tailEnd type="none" w="med" len="med"/>
-                    </a:lnR>
-                    <a:lnT w="12700" cap="flat" cmpd="sng" algn="ctr">
-                      <a:solidFill>
-                        <a:srgbClr val="FFFFFF"/>
-                      </a:solidFill>
-                      <a:prstDash val="solid"/>
-                      <a:round/>
-                      <a:headEnd type="none" w="med" len="med"/>
-                      <a:tailEnd type="none" w="med" len="med"/>
-                    </a:lnT>
-                    <a:lnB w="12700" cap="flat" cmpd="sng" algn="ctr">
-                      <a:solidFill>
-                        <a:srgbClr val="FFFFFF"/>
-                      </a:solidFill>
-                      <a:prstDash val="solid"/>
-                      <a:round/>
-                      <a:headEnd type="none" w="med" len="med"/>
-                      <a:tailEnd type="none" w="med" len="med"/>
-                    </a:lnB>
-                  </a:tcPr>
-                </a:tc>
-                <a:tc>
-                  <a:txBody>
-                    <a:bodyPr/>
-                    <a:lstStyle/>
-                    <a:p>
-                      <a:pPr algn="r" indent="0" marL="0">
-                        <a:buNone/>
-                      </a:pPr>
-                      <a:r>
-                        <a:rPr lang="en-US" sz="1250" dirty="0">
-                          <a:solidFill>
-                            <a:srgbClr val="000000"/>
-                          </a:solidFill>
-                          <a:latin typeface="Arial" pitchFamily="34" charset="0"/>
-                          <a:ea typeface="Arial" pitchFamily="34" charset="-122"/>
-                          <a:cs typeface="Arial" pitchFamily="34" charset="-120"/>
-                        </a:rPr>
-                        <a:t>32 €</a:t>
-                      </a:r>
-                      <a:endParaRPr lang="en-US" sz="1250" dirty="0">
-                        <a:latin typeface="Arial" charset="0"/>
-                        <a:ea typeface="Arial" charset="0"/>
-                        <a:cs typeface="Arial" charset="0"/>
-                      </a:endParaRPr>
-                    </a:p>
-                  </a:txBody>
-                  <a:tcPr marL="91440" marR="91440" marT="45720" marB="45720">
-                    <a:lnL w="12700" cap="flat" cmpd="sng" algn="ctr">
-                      <a:solidFill>
-                        <a:srgbClr val="FFFFFF"/>
-                      </a:solidFill>
-                      <a:prstDash val="solid"/>
-                      <a:round/>
-                      <a:headEnd type="none" w="med" len="med"/>
-                      <a:tailEnd type="none" w="med" len="med"/>
-                    </a:lnL>
-                    <a:lnR w="12700" cap="flat" cmpd="sng" algn="ctr">
-                      <a:solidFill>
-                        <a:srgbClr val="FFFFFF"/>
-                      </a:solidFill>
-                      <a:prstDash val="solid"/>
-                      <a:round/>
-                      <a:headEnd type="none" w="med" len="med"/>
-                      <a:tailEnd type="none" w="med" len="med"/>
-                    </a:lnR>
-                    <a:lnT w="12700" cap="flat" cmpd="sng" algn="ctr">
-                      <a:solidFill>
-                        <a:srgbClr val="FFFFFF"/>
-                      </a:solidFill>
-                      <a:prstDash val="solid"/>
-                      <a:round/>
-                      <a:headEnd type="none" w="med" len="med"/>
-                      <a:tailEnd type="none" w="med" len="med"/>
-                    </a:lnT>
-                    <a:lnB w="12700" cap="flat" cmpd="sng" algn="ctr">
-                      <a:solidFill>
-                        <a:srgbClr val="FFFFFF"/>
-                      </a:solidFill>
-                      <a:prstDash val="solid"/>
-                      <a:round/>
-                      <a:headEnd type="none" w="med" len="med"/>
-                      <a:tailEnd type="none" w="med" len="med"/>
-                    </a:lnB>
-                  </a:tcPr>
-                </a:tc>
-                <a:tc>
-                  <a:txBody>
-                    <a:bodyPr/>
-                    <a:lstStyle/>
-                    <a:p>
-                      <a:pPr algn="r" indent="0" marL="0">
-                        <a:buNone/>
-                      </a:pPr>
-                      <a:r>
-                        <a:rPr lang="en-US" sz="1250" dirty="0">
-                          <a:solidFill>
-                            <a:srgbClr val="000000"/>
-                          </a:solidFill>
-                          <a:latin typeface="Arial" pitchFamily="34" charset="0"/>
-                          <a:ea typeface="Arial" pitchFamily="34" charset="-122"/>
-                          <a:cs typeface="Arial" pitchFamily="34" charset="-120"/>
-                        </a:rPr>
-                        <a:t>45.760 €</a:t>
-                      </a:r>
-                      <a:endParaRPr lang="en-US" sz="1250" dirty="0">
-                        <a:latin typeface="Arial" charset="0"/>
-                        <a:ea typeface="Arial" charset="0"/>
-                        <a:cs typeface="Arial" charset="0"/>
-                      </a:endParaRPr>
-                    </a:p>
-                  </a:txBody>
-                  <a:tcPr marL="91440" marR="91440" marT="45720" marB="45720">
-                    <a:lnL w="12700" cap="flat" cmpd="sng" algn="ctr">
-                      <a:solidFill>
-                        <a:srgbClr val="FFFFFF"/>
-                      </a:solidFill>
-                      <a:prstDash val="solid"/>
-                      <a:round/>
-                      <a:headEnd type="none" w="med" len="med"/>
-                      <a:tailEnd type="none" w="med" len="med"/>
-                    </a:lnL>
-                    <a:lnR w="12700" cap="flat" cmpd="sng" algn="ctr">
-                      <a:solidFill>
-                        <a:srgbClr val="FFFFFF"/>
-                      </a:solidFill>
-                      <a:prstDash val="solid"/>
-                      <a:round/>
-                      <a:headEnd type="none" w="med" len="med"/>
-                      <a:tailEnd type="none" w="med" len="med"/>
-                    </a:lnR>
-                    <a:lnT w="12700" cap="flat" cmpd="sng" algn="ctr">
-                      <a:solidFill>
-                        <a:srgbClr val="FFFFFF"/>
-                      </a:solidFill>
-                      <a:prstDash val="solid"/>
-                      <a:round/>
-                      <a:headEnd type="none" w="med" len="med"/>
-                      <a:tailEnd type="none" w="med" len="med"/>
-                    </a:lnT>
-                    <a:lnB w="12700" cap="flat" cmpd="sng" algn="ctr">
-                      <a:solidFill>
-                        <a:srgbClr val="FFFFFF"/>
-                      </a:solidFill>
-                      <a:prstDash val="solid"/>
-                      <a:round/>
-                      <a:headEnd type="none" w="med" len="med"/>
-                      <a:tailEnd type="none" w="med" len="med"/>
-                    </a:lnB>
-                  </a:tcPr>
-                </a:tc>
-              </a:tr>
-              <a:tr h="457200">
-                <a:tc>
-                  <a:txBody>
-                    <a:bodyPr/>
-                    <a:lstStyle/>
-                    <a:p>
-                      <a:pPr indent="0" marL="0">
-                        <a:buNone/>
-                      </a:pPr>
-                      <a:r>
-                        <a:rPr lang="en-US" sz="1250" dirty="0">
-                          <a:solidFill>
-                            <a:srgbClr val="000000"/>
-                          </a:solidFill>
-                          <a:latin typeface="Arial" pitchFamily="34" charset="0"/>
-                          <a:ea typeface="Arial" pitchFamily="34" charset="-122"/>
-                          <a:cs typeface="Arial" pitchFamily="34" charset="-120"/>
-                        </a:rPr>
-                        <a:t>Bar Di–Do (ab 21:00)</a:t>
-                      </a:r>
-                      <a:endParaRPr lang="en-US" sz="1250" dirty="0">
-                        <a:latin typeface="Arial" charset="0"/>
-                        <a:ea typeface="Arial" charset="0"/>
-                        <a:cs typeface="Arial" charset="0"/>
-                      </a:endParaRPr>
-                    </a:p>
-                  </a:txBody>
-                  <a:tcPr marL="91440" marR="91440" marT="45720" marB="45720">
-                    <a:lnL w="12700" cap="flat" cmpd="sng" algn="ctr">
-                      <a:solidFill>
-                        <a:srgbClr val="FFFFFF"/>
-                      </a:solidFill>
-                      <a:prstDash val="solid"/>
-                      <a:round/>
-                      <a:headEnd type="none" w="med" len="med"/>
-                      <a:tailEnd type="none" w="med" len="med"/>
-                    </a:lnL>
-                    <a:lnR w="12700" cap="flat" cmpd="sng" algn="ctr">
-                      <a:solidFill>
-                        <a:srgbClr val="FFFFFF"/>
-                      </a:solidFill>
-                      <a:prstDash val="solid"/>
-                      <a:round/>
-                      <a:headEnd type="none" w="med" len="med"/>
-                      <a:tailEnd type="none" w="med" len="med"/>
-                    </a:lnR>
-                    <a:lnT w="12700" cap="flat" cmpd="sng" algn="ctr">
-                      <a:solidFill>
-                        <a:srgbClr val="FFFFFF"/>
-                      </a:solidFill>
-                      <a:prstDash val="solid"/>
-                      <a:round/>
-                      <a:headEnd type="none" w="med" len="med"/>
-                      <a:tailEnd type="none" w="med" len="med"/>
-                    </a:lnT>
-                    <a:lnB w="12700" cap="flat" cmpd="sng" algn="ctr">
-                      <a:solidFill>
-                        <a:srgbClr val="FFFFFF"/>
-                      </a:solidFill>
-                      <a:prstDash val="solid"/>
-                      <a:round/>
-                      <a:headEnd type="none" w="med" len="med"/>
-                      <a:tailEnd type="none" w="med" len="med"/>
-                    </a:lnB>
-                  </a:tcPr>
-                </a:tc>
-                <a:tc>
-                  <a:txBody>
-                    <a:bodyPr/>
-                    <a:lstStyle/>
-                    <a:p>
-                      <a:pPr algn="r" indent="0" marL="0">
-                        <a:buNone/>
-                      </a:pPr>
-                      <a:r>
-                        <a:rPr lang="en-US" sz="1250" dirty="0">
-                          <a:solidFill>
-                            <a:srgbClr val="000000"/>
-                          </a:solidFill>
-                          <a:latin typeface="Arial" pitchFamily="34" charset="0"/>
-                          <a:ea typeface="Arial" pitchFamily="34" charset="-122"/>
-                          <a:cs typeface="Arial" pitchFamily="34" charset="-120"/>
-                        </a:rPr>
-                        <a:t>13</a:t>
-                      </a:r>
-                      <a:endParaRPr lang="en-US" sz="1250" dirty="0">
-                        <a:latin typeface="Arial" charset="0"/>
-                        <a:ea typeface="Arial" charset="0"/>
-                        <a:cs typeface="Arial" charset="0"/>
-                      </a:endParaRPr>
-                    </a:p>
-                  </a:txBody>
-                  <a:tcPr marL="91440" marR="91440" marT="45720" marB="45720">
-                    <a:lnL w="12700" cap="flat" cmpd="sng" algn="ctr">
-                      <a:solidFill>
-                        <a:srgbClr val="FFFFFF"/>
-                      </a:solidFill>
-                      <a:prstDash val="solid"/>
-                      <a:round/>
-                      <a:headEnd type="none" w="med" len="med"/>
-                      <a:tailEnd type="none" w="med" len="med"/>
-                    </a:lnL>
-                    <a:lnR w="12700" cap="flat" cmpd="sng" algn="ctr">
-                      <a:solidFill>
-                        <a:srgbClr val="FFFFFF"/>
-                      </a:solidFill>
-                      <a:prstDash val="solid"/>
-                      <a:round/>
-                      <a:headEnd type="none" w="med" len="med"/>
-                      <a:tailEnd type="none" w="med" len="med"/>
-                    </a:lnR>
-                    <a:lnT w="12700" cap="flat" cmpd="sng" algn="ctr">
-                      <a:solidFill>
-                        <a:srgbClr val="FFFFFF"/>
-                      </a:solidFill>
-                      <a:prstDash val="solid"/>
-                      <a:round/>
-                      <a:headEnd type="none" w="med" len="med"/>
-                      <a:tailEnd type="none" w="med" len="med"/>
-                    </a:lnT>
-                    <a:lnB w="12700" cap="flat" cmpd="sng" algn="ctr">
-                      <a:solidFill>
-                        <a:srgbClr val="FFFFFF"/>
-                      </a:solidFill>
-                      <a:prstDash val="solid"/>
-                      <a:round/>
-                      <a:headEnd type="none" w="med" len="med"/>
-                      <a:tailEnd type="none" w="med" len="med"/>
-                    </a:lnB>
-                  </a:tcPr>
-                </a:tc>
-                <a:tc>
-                  <a:txBody>
-                    <a:bodyPr/>
-                    <a:lstStyle/>
-                    <a:p>
-                      <a:pPr algn="r" indent="0" marL="0">
-                        <a:buNone/>
-                      </a:pPr>
-                      <a:r>
-                        <a:rPr lang="en-US" sz="1250" dirty="0">
-                          <a:solidFill>
-                            <a:srgbClr val="000000"/>
-                          </a:solidFill>
-                          <a:latin typeface="Arial" pitchFamily="34" charset="0"/>
-                          <a:ea typeface="Arial" pitchFamily="34" charset="-122"/>
-                          <a:cs typeface="Arial" pitchFamily="34" charset="-120"/>
-                        </a:rPr>
-                        <a:t>20</a:t>
-                      </a:r>
-                      <a:endParaRPr lang="en-US" sz="1250" dirty="0">
-                        <a:latin typeface="Arial" charset="0"/>
-                        <a:ea typeface="Arial" charset="0"/>
-                        <a:cs typeface="Arial" charset="0"/>
-                      </a:endParaRPr>
-                    </a:p>
-                  </a:txBody>
-                  <a:tcPr marL="91440" marR="91440" marT="45720" marB="45720">
-                    <a:lnL w="12700" cap="flat" cmpd="sng" algn="ctr">
-                      <a:solidFill>
-                        <a:srgbClr val="FFFFFF"/>
-                      </a:solidFill>
-                      <a:prstDash val="solid"/>
-                      <a:round/>
-                      <a:headEnd type="none" w="med" len="med"/>
-                      <a:tailEnd type="none" w="med" len="med"/>
-                    </a:lnL>
-                    <a:lnR w="12700" cap="flat" cmpd="sng" algn="ctr">
-                      <a:solidFill>
-                        <a:srgbClr val="FFFFFF"/>
-                      </a:solidFill>
-                      <a:prstDash val="solid"/>
-                      <a:round/>
-                      <a:headEnd type="none" w="med" len="med"/>
-                      <a:tailEnd type="none" w="med" len="med"/>
-                    </a:lnR>
-                    <a:lnT w="12700" cap="flat" cmpd="sng" algn="ctr">
-                      <a:solidFill>
-                        <a:srgbClr val="FFFFFF"/>
-                      </a:solidFill>
-                      <a:prstDash val="solid"/>
-                      <a:round/>
-                      <a:headEnd type="none" w="med" len="med"/>
-                      <a:tailEnd type="none" w="med" len="med"/>
-                    </a:lnT>
-                    <a:lnB w="12700" cap="flat" cmpd="sng" algn="ctr">
-                      <a:solidFill>
-                        <a:srgbClr val="FFFFFF"/>
-                      </a:solidFill>
-                      <a:prstDash val="solid"/>
-                      <a:round/>
-                      <a:headEnd type="none" w="med" len="med"/>
-                      <a:tailEnd type="none" w="med" len="med"/>
-                    </a:lnB>
-                  </a:tcPr>
-                </a:tc>
-                <a:tc>
-                  <a:txBody>
-                    <a:bodyPr/>
-                    <a:lstStyle/>
-                    <a:p>
-                      <a:pPr algn="r" indent="0" marL="0">
-                        <a:buNone/>
-                      </a:pPr>
-                      <a:r>
-                        <a:rPr lang="en-US" sz="1250" dirty="0">
-                          <a:solidFill>
-                            <a:srgbClr val="000000"/>
-                          </a:solidFill>
-                          <a:latin typeface="Arial" pitchFamily="34" charset="0"/>
-                          <a:ea typeface="Arial" pitchFamily="34" charset="-122"/>
-                          <a:cs typeface="Arial" pitchFamily="34" charset="-120"/>
-                        </a:rPr>
-                        <a:t>18 €</a:t>
-                      </a:r>
-                      <a:endParaRPr lang="en-US" sz="1250" dirty="0">
-                        <a:latin typeface="Arial" charset="0"/>
-                        <a:ea typeface="Arial" charset="0"/>
-                        <a:cs typeface="Arial" charset="0"/>
-                      </a:endParaRPr>
-                    </a:p>
-                  </a:txBody>
-                  <a:tcPr marL="91440" marR="91440" marT="45720" marB="45720">
-                    <a:lnL w="12700" cap="flat" cmpd="sng" algn="ctr">
-                      <a:solidFill>
-                        <a:srgbClr val="FFFFFF"/>
-                      </a:solidFill>
-                      <a:prstDash val="solid"/>
-                      <a:round/>
-                      <a:headEnd type="none" w="med" len="med"/>
-                      <a:tailEnd type="none" w="med" len="med"/>
-                    </a:lnL>
-                    <a:lnR w="12700" cap="flat" cmpd="sng" algn="ctr">
-                      <a:solidFill>
-                        <a:srgbClr val="FFFFFF"/>
-                      </a:solidFill>
-                      <a:prstDash val="solid"/>
-                      <a:round/>
-                      <a:headEnd type="none" w="med" len="med"/>
-                      <a:tailEnd type="none" w="med" len="med"/>
-                    </a:lnR>
-                    <a:lnT w="12700" cap="flat" cmpd="sng" algn="ctr">
-                      <a:solidFill>
-                        <a:srgbClr val="FFFFFF"/>
-                      </a:solidFill>
-                      <a:prstDash val="solid"/>
-                      <a:round/>
-                      <a:headEnd type="none" w="med" len="med"/>
-                      <a:tailEnd type="none" w="med" len="med"/>
-                    </a:lnT>
-                    <a:lnB w="12700" cap="flat" cmpd="sng" algn="ctr">
-                      <a:solidFill>
-                        <a:srgbClr val="FFFFFF"/>
-                      </a:solidFill>
-                      <a:prstDash val="solid"/>
-                      <a:round/>
-                      <a:headEnd type="none" w="med" len="med"/>
-                      <a:tailEnd type="none" w="med" len="med"/>
-                    </a:lnB>
-                  </a:tcPr>
-                </a:tc>
-                <a:tc>
-                  <a:txBody>
-                    <a:bodyPr/>
-                    <a:lstStyle/>
-                    <a:p>
-                      <a:pPr algn="r" indent="0" marL="0">
-                        <a:buNone/>
-                      </a:pPr>
-                      <a:r>
-                        <a:rPr lang="en-US" sz="1250" dirty="0">
-                          <a:solidFill>
-                            <a:srgbClr val="000000"/>
-                          </a:solidFill>
-                          <a:latin typeface="Arial" pitchFamily="34" charset="0"/>
-                          <a:ea typeface="Arial" pitchFamily="34" charset="-122"/>
-                          <a:cs typeface="Arial" pitchFamily="34" charset="-120"/>
-                        </a:rPr>
-                        <a:t>4.680 €</a:t>
-                      </a:r>
-                      <a:endParaRPr lang="en-US" sz="1250" dirty="0">
-                        <a:latin typeface="Arial" charset="0"/>
-                        <a:ea typeface="Arial" charset="0"/>
-                        <a:cs typeface="Arial" charset="0"/>
-                      </a:endParaRPr>
-                    </a:p>
-                  </a:txBody>
-                  <a:tcPr marL="91440" marR="91440" marT="45720" marB="45720">
-                    <a:lnL w="12700" cap="flat" cmpd="sng" algn="ctr">
-                      <a:solidFill>
-                        <a:srgbClr val="FFFFFF"/>
-                      </a:solidFill>
-                      <a:prstDash val="solid"/>
-                      <a:round/>
-                      <a:headEnd type="none" w="med" len="med"/>
-                      <a:tailEnd type="none" w="med" len="med"/>
-                    </a:lnL>
-                    <a:lnR w="12700" cap="flat" cmpd="sng" algn="ctr">
-                      <a:solidFill>
-                        <a:srgbClr val="FFFFFF"/>
-                      </a:solidFill>
-                      <a:prstDash val="solid"/>
-                      <a:round/>
-                      <a:headEnd type="none" w="med" len="med"/>
-                      <a:tailEnd type="none" w="med" len="med"/>
-                    </a:lnR>
-                    <a:lnT w="12700" cap="flat" cmpd="sng" algn="ctr">
-                      <a:solidFill>
-                        <a:srgbClr val="FFFFFF"/>
-                      </a:solidFill>
-                      <a:prstDash val="solid"/>
-                      <a:round/>
-                      <a:headEnd type="none" w="med" len="med"/>
-                      <a:tailEnd type="none" w="med" len="med"/>
-                    </a:lnT>
-                    <a:lnB w="12700" cap="flat" cmpd="sng" algn="ctr">
-                      <a:solidFill>
-                        <a:srgbClr val="FFFFFF"/>
-                      </a:solidFill>
-                      <a:prstDash val="solid"/>
-                      <a:round/>
-                      <a:headEnd type="none" w="med" len="med"/>
-                      <a:tailEnd type="none" w="med" len="med"/>
-                    </a:lnB>
-                  </a:tcPr>
-                </a:tc>
-              </a:tr>
-              <a:tr h="457200">
-                <a:tc>
-                  <a:txBody>
-                    <a:bodyPr/>
-                    <a:lstStyle/>
-                    <a:p>
-                      <a:pPr indent="0" marL="0">
-                        <a:buNone/>
-                      </a:pPr>
-                      <a:r>
-                        <a:rPr lang="en-US" sz="1250" dirty="0">
-                          <a:solidFill>
-                            <a:srgbClr val="000000"/>
-                          </a:solidFill>
-                          <a:latin typeface="Arial" pitchFamily="34" charset="0"/>
-                          <a:ea typeface="Arial" pitchFamily="34" charset="-122"/>
-                          <a:cs typeface="Arial" pitchFamily="34" charset="-120"/>
-                        </a:rPr>
-                        <a:t>Bar Fr, Sa (bis 01:00) (Cocktails, Wein, Bier, Musik)</a:t>
+                        <a:t>Bar Fr, Sa (bis 01:00) (Cocktails, Wein, Bier, Snacks)</a:t>
                       </a:r>
                       <a:endParaRPr lang="en-US" sz="1250" dirty="0">
                         <a:latin typeface="Arial" charset="0"/>
@@ -5176,7 +5176,7 @@
                           <a:ea typeface="Arial" pitchFamily="34" charset="-122"/>
                           <a:cs typeface="Arial" pitchFamily="34" charset="-120"/>
                         </a:rPr>
-                        <a:t>70</a:t>
+                        <a:t>90</a:t>
                       </a:r>
                       <a:endParaRPr lang="en-US" sz="1250" dirty="0">
                         <a:latin typeface="Arial" charset="0"/>
@@ -5241,7 +5241,7 @@
                           <a:ea typeface="Arial" pitchFamily="34" charset="-122"/>
                           <a:cs typeface="Arial" pitchFamily="34" charset="-120"/>
                         </a:rPr>
-                        <a:t>22 €</a:t>
+                        <a:t>26 €</a:t>
                       </a:r>
                       <a:endParaRPr lang="en-US" sz="1250" dirty="0">
                         <a:latin typeface="Arial" charset="0"/>
@@ -5306,7 +5306,7 @@
                           <a:ea typeface="Arial" pitchFamily="34" charset="-122"/>
                           <a:cs typeface="Arial" pitchFamily="34" charset="-120"/>
                         </a:rPr>
-                        <a:t>13.860 €</a:t>
+                        <a:t>21.060 €</a:t>
                       </a:r>
                       <a:endParaRPr lang="en-US" sz="1250" dirty="0">
                         <a:latin typeface="Arial" charset="0"/>
@@ -5373,7 +5373,7 @@
                           <a:ea typeface="Arial" pitchFamily="34" charset="-122"/>
                           <a:cs typeface="Arial" pitchFamily="34" charset="-120"/>
                         </a:rPr>
-                        <a:t>Feiern, Live-Abende, Séparée (nach Absprache, 4 pro Monat)</a:t>
+                        <a:t>Events: Live-Musik, Feiern (nach Absprache, 4 pro Monat)</a:t>
                       </a:r>
                       <a:endParaRPr lang="en-US" sz="1250" dirty="0">
                         <a:latin typeface="Arial" charset="0"/>
@@ -5568,7 +5568,7 @@
                           <a:ea typeface="Arial" pitchFamily="34" charset="-122"/>
                           <a:cs typeface="Arial" pitchFamily="34" charset="-120"/>
                         </a:rPr>
-                        <a:t>45 €</a:t>
+                        <a:t>40 €</a:t>
                       </a:r>
                       <a:endParaRPr lang="en-US" sz="1250" dirty="0">
                         <a:latin typeface="Arial" charset="0"/>
@@ -5633,7 +5633,7 @@
                           <a:ea typeface="Arial" pitchFamily="34" charset="-122"/>
                           <a:cs typeface="Arial" pitchFamily="34" charset="-120"/>
                         </a:rPr>
-                        <a:t>7.200 €</a:t>
+                        <a:t>6.400 €</a:t>
                       </a:r>
                       <a:endParaRPr lang="en-US" sz="1250" dirty="0">
                         <a:latin typeface="Arial" charset="0"/>
@@ -5927,7 +5927,7 @@
                           <a:ea typeface="Arial" pitchFamily="34" charset="-122"/>
                           <a:cs typeface="Arial" pitchFamily="34" charset="-120"/>
                         </a:rPr>
-                        <a:t>95.635 €</a:t>
+                        <a:t>65.010 €</a:t>
                       </a:r>
                       <a:endParaRPr lang="en-US" sz="1250" dirty="0">
                         <a:latin typeface="Arial" charset="0"/>
@@ -6057,7 +6057,7 @@
                 <a:ea typeface="Arial" pitchFamily="34" charset="-122"/>
                 <a:cs typeface="Arial" pitchFamily="34" charset="-120"/>
               </a:rPr>
-              <a:t>Ca. 4.295 Gäste im Monat, im Schnitt ca. 165 pro Öffnungstag bei 190 Plätzen. Der Abend (Restaurant, Bar, Feiern) bringt 75 % vom Umsatz.</a:t>
+              <a:t>Ca. 3.815 Gäste im Monat, im Schnitt ca. 147 pro Öffnungstag bei 190 Plätzen. Der Abend (Bar mit Snacks, Events) bringt 61 % vom Umsatz.</a:t>
             </a:r>
             <a:endParaRPr lang="en-US" sz="1300" dirty="0"/>
           </a:p>
@@ -6512,7 +6512,7 @@
                           <a:ea typeface="Arial" pitchFamily="34" charset="-122"/>
                           <a:cs typeface="Arial" pitchFamily="34" charset="-120"/>
                         </a:rPr>
-                        <a:t>Küchenchef</a:t>
+                        <a:t>Küchenleitung (Bowls, Snacks)</a:t>
                       </a:r>
                       <a:endParaRPr lang="en-US" sz="1250" dirty="0">
                         <a:latin typeface="Arial" charset="0"/>
@@ -6642,7 +6642,7 @@
                           <a:ea typeface="Arial" pitchFamily="34" charset="-122"/>
                           <a:cs typeface="Arial" pitchFamily="34" charset="-120"/>
                         </a:rPr>
-                        <a:t>4.200 €</a:t>
+                        <a:t>3.400 €</a:t>
                       </a:r>
                       <a:endParaRPr lang="en-US" sz="1250" dirty="0">
                         <a:latin typeface="Arial" charset="0"/>
@@ -6709,7 +6709,401 @@
                           <a:ea typeface="Arial" pitchFamily="34" charset="-122"/>
                           <a:cs typeface="Arial" pitchFamily="34" charset="-120"/>
                         </a:rPr>
-                        <a:t>Koch</a:t>
+                        <a:t>Küchenhilfe</a:t>
+                      </a:r>
+                      <a:endParaRPr lang="en-US" sz="1250" dirty="0">
+                        <a:latin typeface="Arial" charset="0"/>
+                        <a:ea typeface="Arial" charset="0"/>
+                        <a:cs typeface="Arial" charset="0"/>
+                      </a:endParaRPr>
+                    </a:p>
+                  </a:txBody>
+                  <a:tcPr marL="91440" marR="91440" marT="45720" marB="45720">
+                    <a:lnL w="12700" cap="flat" cmpd="sng" algn="ctr">
+                      <a:solidFill>
+                        <a:srgbClr val="FFFFFF"/>
+                      </a:solidFill>
+                      <a:prstDash val="solid"/>
+                      <a:round/>
+                      <a:headEnd type="none" w="med" len="med"/>
+                      <a:tailEnd type="none" w="med" len="med"/>
+                    </a:lnL>
+                    <a:lnR w="12700" cap="flat" cmpd="sng" algn="ctr">
+                      <a:solidFill>
+                        <a:srgbClr val="FFFFFF"/>
+                      </a:solidFill>
+                      <a:prstDash val="solid"/>
+                      <a:round/>
+                      <a:headEnd type="none" w="med" len="med"/>
+                      <a:tailEnd type="none" w="med" len="med"/>
+                    </a:lnR>
+                    <a:lnT w="12700" cap="flat" cmpd="sng" algn="ctr">
+                      <a:solidFill>
+                        <a:srgbClr val="FFFFFF"/>
+                      </a:solidFill>
+                      <a:prstDash val="solid"/>
+                      <a:round/>
+                      <a:headEnd type="none" w="med" len="med"/>
+                      <a:tailEnd type="none" w="med" len="med"/>
+                    </a:lnT>
+                    <a:lnB w="12700" cap="flat" cmpd="sng" algn="ctr">
+                      <a:solidFill>
+                        <a:srgbClr val="FFFFFF"/>
+                      </a:solidFill>
+                      <a:prstDash val="solid"/>
+                      <a:round/>
+                      <a:headEnd type="none" w="med" len="med"/>
+                      <a:tailEnd type="none" w="med" len="med"/>
+                    </a:lnB>
+                  </a:tcPr>
+                </a:tc>
+                <a:tc>
+                  <a:txBody>
+                    <a:bodyPr/>
+                    <a:lstStyle/>
+                    <a:p>
+                      <a:pPr indent="0" marL="0">
+                        <a:buNone/>
+                      </a:pPr>
+                      <a:r>
+                        <a:rPr lang="en-US" sz="1250" dirty="0">
+                          <a:solidFill>
+                            <a:srgbClr val="000000"/>
+                          </a:solidFill>
+                          <a:latin typeface="Arial" pitchFamily="34" charset="0"/>
+                          <a:ea typeface="Arial" pitchFamily="34" charset="-122"/>
+                          <a:cs typeface="Arial" pitchFamily="34" charset="-120"/>
+                        </a:rPr>
+                        <a:t>1 Teilzeit</a:t>
+                      </a:r>
+                      <a:endParaRPr lang="en-US" sz="1250" dirty="0">
+                        <a:latin typeface="Arial" charset="0"/>
+                        <a:ea typeface="Arial" charset="0"/>
+                        <a:cs typeface="Arial" charset="0"/>
+                      </a:endParaRPr>
+                    </a:p>
+                  </a:txBody>
+                  <a:tcPr marL="91440" marR="91440" marT="45720" marB="45720">
+                    <a:lnL w="12700" cap="flat" cmpd="sng" algn="ctr">
+                      <a:solidFill>
+                        <a:srgbClr val="FFFFFF"/>
+                      </a:solidFill>
+                      <a:prstDash val="solid"/>
+                      <a:round/>
+                      <a:headEnd type="none" w="med" len="med"/>
+                      <a:tailEnd type="none" w="med" len="med"/>
+                    </a:lnL>
+                    <a:lnR w="12700" cap="flat" cmpd="sng" algn="ctr">
+                      <a:solidFill>
+                        <a:srgbClr val="FFFFFF"/>
+                      </a:solidFill>
+                      <a:prstDash val="solid"/>
+                      <a:round/>
+                      <a:headEnd type="none" w="med" len="med"/>
+                      <a:tailEnd type="none" w="med" len="med"/>
+                    </a:lnR>
+                    <a:lnT w="12700" cap="flat" cmpd="sng" algn="ctr">
+                      <a:solidFill>
+                        <a:srgbClr val="FFFFFF"/>
+                      </a:solidFill>
+                      <a:prstDash val="solid"/>
+                      <a:round/>
+                      <a:headEnd type="none" w="med" len="med"/>
+                      <a:tailEnd type="none" w="med" len="med"/>
+                    </a:lnT>
+                    <a:lnB w="12700" cap="flat" cmpd="sng" algn="ctr">
+                      <a:solidFill>
+                        <a:srgbClr val="FFFFFF"/>
+                      </a:solidFill>
+                      <a:prstDash val="solid"/>
+                      <a:round/>
+                      <a:headEnd type="none" w="med" len="med"/>
+                      <a:tailEnd type="none" w="med" len="med"/>
+                    </a:lnB>
+                  </a:tcPr>
+                </a:tc>
+                <a:tc>
+                  <a:txBody>
+                    <a:bodyPr/>
+                    <a:lstStyle/>
+                    <a:p>
+                      <a:pPr algn="r" indent="0" marL="0">
+                        <a:buNone/>
+                      </a:pPr>
+                      <a:r>
+                        <a:rPr lang="en-US" sz="1250" dirty="0">
+                          <a:solidFill>
+                            <a:srgbClr val="000000"/>
+                          </a:solidFill>
+                          <a:latin typeface="Arial" pitchFamily="34" charset="0"/>
+                          <a:ea typeface="Arial" pitchFamily="34" charset="-122"/>
+                          <a:cs typeface="Arial" pitchFamily="34" charset="-120"/>
+                        </a:rPr>
+                        <a:t>2.400 €</a:t>
+                      </a:r>
+                      <a:endParaRPr lang="en-US" sz="1250" dirty="0">
+                        <a:latin typeface="Arial" charset="0"/>
+                        <a:ea typeface="Arial" charset="0"/>
+                        <a:cs typeface="Arial" charset="0"/>
+                      </a:endParaRPr>
+                    </a:p>
+                  </a:txBody>
+                  <a:tcPr marL="91440" marR="91440" marT="45720" marB="45720">
+                    <a:lnL w="12700" cap="flat" cmpd="sng" algn="ctr">
+                      <a:solidFill>
+                        <a:srgbClr val="FFFFFF"/>
+                      </a:solidFill>
+                      <a:prstDash val="solid"/>
+                      <a:round/>
+                      <a:headEnd type="none" w="med" len="med"/>
+                      <a:tailEnd type="none" w="med" len="med"/>
+                    </a:lnL>
+                    <a:lnR w="12700" cap="flat" cmpd="sng" algn="ctr">
+                      <a:solidFill>
+                        <a:srgbClr val="FFFFFF"/>
+                      </a:solidFill>
+                      <a:prstDash val="solid"/>
+                      <a:round/>
+                      <a:headEnd type="none" w="med" len="med"/>
+                      <a:tailEnd type="none" w="med" len="med"/>
+                    </a:lnR>
+                    <a:lnT w="12700" cap="flat" cmpd="sng" algn="ctr">
+                      <a:solidFill>
+                        <a:srgbClr val="FFFFFF"/>
+                      </a:solidFill>
+                      <a:prstDash val="solid"/>
+                      <a:round/>
+                      <a:headEnd type="none" w="med" len="med"/>
+                      <a:tailEnd type="none" w="med" len="med"/>
+                    </a:lnT>
+                    <a:lnB w="12700" cap="flat" cmpd="sng" algn="ctr">
+                      <a:solidFill>
+                        <a:srgbClr val="FFFFFF"/>
+                      </a:solidFill>
+                      <a:prstDash val="solid"/>
+                      <a:round/>
+                      <a:headEnd type="none" w="med" len="med"/>
+                      <a:tailEnd type="none" w="med" len="med"/>
+                    </a:lnB>
+                  </a:tcPr>
+                </a:tc>
+              </a:tr>
+              <a:tr h="502920">
+                <a:tc>
+                  <a:txBody>
+                    <a:bodyPr/>
+                    <a:lstStyle/>
+                    <a:p>
+                      <a:pPr indent="0" marL="0">
+                        <a:buNone/>
+                      </a:pPr>
+                      <a:r>
+                        <a:rPr lang="en-US" sz="1250" dirty="0">
+                          <a:solidFill>
+                            <a:srgbClr val="000000"/>
+                          </a:solidFill>
+                          <a:latin typeface="Arial" pitchFamily="34" charset="0"/>
+                          <a:ea typeface="Arial" pitchFamily="34" charset="-122"/>
+                          <a:cs typeface="Arial" pitchFamily="34" charset="-120"/>
+                        </a:rPr>
+                        <a:t>Spülen, Frühstücksservice</a:t>
+                      </a:r>
+                      <a:endParaRPr lang="en-US" sz="1250" dirty="0">
+                        <a:latin typeface="Arial" charset="0"/>
+                        <a:ea typeface="Arial" charset="0"/>
+                        <a:cs typeface="Arial" charset="0"/>
+                      </a:endParaRPr>
+                    </a:p>
+                  </a:txBody>
+                  <a:tcPr marL="91440" marR="91440" marT="45720" marB="45720">
+                    <a:lnL w="12700" cap="flat" cmpd="sng" algn="ctr">
+                      <a:solidFill>
+                        <a:srgbClr val="FFFFFF"/>
+                      </a:solidFill>
+                      <a:prstDash val="solid"/>
+                      <a:round/>
+                      <a:headEnd type="none" w="med" len="med"/>
+                      <a:tailEnd type="none" w="med" len="med"/>
+                    </a:lnL>
+                    <a:lnR w="12700" cap="flat" cmpd="sng" algn="ctr">
+                      <a:solidFill>
+                        <a:srgbClr val="FFFFFF"/>
+                      </a:solidFill>
+                      <a:prstDash val="solid"/>
+                      <a:round/>
+                      <a:headEnd type="none" w="med" len="med"/>
+                      <a:tailEnd type="none" w="med" len="med"/>
+                    </a:lnR>
+                    <a:lnT w="12700" cap="flat" cmpd="sng" algn="ctr">
+                      <a:solidFill>
+                        <a:srgbClr val="FFFFFF"/>
+                      </a:solidFill>
+                      <a:prstDash val="solid"/>
+                      <a:round/>
+                      <a:headEnd type="none" w="med" len="med"/>
+                      <a:tailEnd type="none" w="med" len="med"/>
+                    </a:lnT>
+                    <a:lnB w="12700" cap="flat" cmpd="sng" algn="ctr">
+                      <a:solidFill>
+                        <a:srgbClr val="FFFFFF"/>
+                      </a:solidFill>
+                      <a:prstDash val="solid"/>
+                      <a:round/>
+                      <a:headEnd type="none" w="med" len="med"/>
+                      <a:tailEnd type="none" w="med" len="med"/>
+                    </a:lnB>
+                  </a:tcPr>
+                </a:tc>
+                <a:tc>
+                  <a:txBody>
+                    <a:bodyPr/>
+                    <a:lstStyle/>
+                    <a:p>
+                      <a:pPr indent="0" marL="0">
+                        <a:buNone/>
+                      </a:pPr>
+                      <a:r>
+                        <a:rPr lang="en-US" sz="1250" dirty="0">
+                          <a:solidFill>
+                            <a:srgbClr val="000000"/>
+                          </a:solidFill>
+                          <a:latin typeface="Arial" pitchFamily="34" charset="0"/>
+                          <a:ea typeface="Arial" pitchFamily="34" charset="-122"/>
+                          <a:cs typeface="Arial" pitchFamily="34" charset="-120"/>
+                        </a:rPr>
+                        <a:t>1 Teilzeit</a:t>
+                      </a:r>
+                      <a:endParaRPr lang="en-US" sz="1250" dirty="0">
+                        <a:latin typeface="Arial" charset="0"/>
+                        <a:ea typeface="Arial" charset="0"/>
+                        <a:cs typeface="Arial" charset="0"/>
+                      </a:endParaRPr>
+                    </a:p>
+                  </a:txBody>
+                  <a:tcPr marL="91440" marR="91440" marT="45720" marB="45720">
+                    <a:lnL w="12700" cap="flat" cmpd="sng" algn="ctr">
+                      <a:solidFill>
+                        <a:srgbClr val="FFFFFF"/>
+                      </a:solidFill>
+                      <a:prstDash val="solid"/>
+                      <a:round/>
+                      <a:headEnd type="none" w="med" len="med"/>
+                      <a:tailEnd type="none" w="med" len="med"/>
+                    </a:lnL>
+                    <a:lnR w="12700" cap="flat" cmpd="sng" algn="ctr">
+                      <a:solidFill>
+                        <a:srgbClr val="FFFFFF"/>
+                      </a:solidFill>
+                      <a:prstDash val="solid"/>
+                      <a:round/>
+                      <a:headEnd type="none" w="med" len="med"/>
+                      <a:tailEnd type="none" w="med" len="med"/>
+                    </a:lnR>
+                    <a:lnT w="12700" cap="flat" cmpd="sng" algn="ctr">
+                      <a:solidFill>
+                        <a:srgbClr val="FFFFFF"/>
+                      </a:solidFill>
+                      <a:prstDash val="solid"/>
+                      <a:round/>
+                      <a:headEnd type="none" w="med" len="med"/>
+                      <a:tailEnd type="none" w="med" len="med"/>
+                    </a:lnT>
+                    <a:lnB w="12700" cap="flat" cmpd="sng" algn="ctr">
+                      <a:solidFill>
+                        <a:srgbClr val="FFFFFF"/>
+                      </a:solidFill>
+                      <a:prstDash val="solid"/>
+                      <a:round/>
+                      <a:headEnd type="none" w="med" len="med"/>
+                      <a:tailEnd type="none" w="med" len="med"/>
+                    </a:lnB>
+                  </a:tcPr>
+                </a:tc>
+                <a:tc>
+                  <a:txBody>
+                    <a:bodyPr/>
+                    <a:lstStyle/>
+                    <a:p>
+                      <a:pPr algn="r" indent="0" marL="0">
+                        <a:buNone/>
+                      </a:pPr>
+                      <a:r>
+                        <a:rPr lang="en-US" sz="1250" dirty="0">
+                          <a:solidFill>
+                            <a:srgbClr val="000000"/>
+                          </a:solidFill>
+                          <a:latin typeface="Arial" pitchFamily="34" charset="0"/>
+                          <a:ea typeface="Arial" pitchFamily="34" charset="-122"/>
+                          <a:cs typeface="Arial" pitchFamily="34" charset="-120"/>
+                        </a:rPr>
+                        <a:t>1.400 €</a:t>
+                      </a:r>
+                      <a:endParaRPr lang="en-US" sz="1250" dirty="0">
+                        <a:latin typeface="Arial" charset="0"/>
+                        <a:ea typeface="Arial" charset="0"/>
+                        <a:cs typeface="Arial" charset="0"/>
+                      </a:endParaRPr>
+                    </a:p>
+                  </a:txBody>
+                  <a:tcPr marL="91440" marR="91440" marT="45720" marB="45720">
+                    <a:lnL w="12700" cap="flat" cmpd="sng" algn="ctr">
+                      <a:solidFill>
+                        <a:srgbClr val="FFFFFF"/>
+                      </a:solidFill>
+                      <a:prstDash val="solid"/>
+                      <a:round/>
+                      <a:headEnd type="none" w="med" len="med"/>
+                      <a:tailEnd type="none" w="med" len="med"/>
+                    </a:lnL>
+                    <a:lnR w="12700" cap="flat" cmpd="sng" algn="ctr">
+                      <a:solidFill>
+                        <a:srgbClr val="FFFFFF"/>
+                      </a:solidFill>
+                      <a:prstDash val="solid"/>
+                      <a:round/>
+                      <a:headEnd type="none" w="med" len="med"/>
+                      <a:tailEnd type="none" w="med" len="med"/>
+                    </a:lnR>
+                    <a:lnT w="12700" cap="flat" cmpd="sng" algn="ctr">
+                      <a:solidFill>
+                        <a:srgbClr val="FFFFFF"/>
+                      </a:solidFill>
+                      <a:prstDash val="solid"/>
+                      <a:round/>
+                      <a:headEnd type="none" w="med" len="med"/>
+                      <a:tailEnd type="none" w="med" len="med"/>
+                    </a:lnT>
+                    <a:lnB w="12700" cap="flat" cmpd="sng" algn="ctr">
+                      <a:solidFill>
+                        <a:srgbClr val="FFFFFF"/>
+                      </a:solidFill>
+                      <a:prstDash val="solid"/>
+                      <a:round/>
+                      <a:headEnd type="none" w="med" len="med"/>
+                      <a:tailEnd type="none" w="med" len="med"/>
+                    </a:lnB>
+                  </a:tcPr>
+                </a:tc>
+              </a:tr>
+              <a:tr h="502920">
+                <a:tc>
+                  <a:txBody>
+                    <a:bodyPr/>
+                    <a:lstStyle/>
+                    <a:p>
+                      <a:pPr indent="0" marL="0">
+                        <a:buNone/>
+                      </a:pPr>
+                      <a:r>
+                        <a:rPr lang="en-US" sz="1250" dirty="0">
+                          <a:solidFill>
+                            <a:srgbClr val="000000"/>
+                          </a:solidFill>
+                          <a:latin typeface="Arial" pitchFamily="34" charset="0"/>
+                          <a:ea typeface="Arial" pitchFamily="34" charset="-122"/>
+                          <a:cs typeface="Arial" pitchFamily="34" charset="-120"/>
+                        </a:rPr>
+                        <a:t>Barchef</a:t>
                       </a:r>
                       <a:endParaRPr lang="en-US" sz="1250" dirty="0">
                         <a:latin typeface="Arial" charset="0"/>
@@ -6839,401 +7233,7 @@
                           <a:ea typeface="Arial" pitchFamily="34" charset="-122"/>
                           <a:cs typeface="Arial" pitchFamily="34" charset="-120"/>
                         </a:rPr>
-                        <a:t>3.400 €</a:t>
-                      </a:r>
-                      <a:endParaRPr lang="en-US" sz="1250" dirty="0">
-                        <a:latin typeface="Arial" charset="0"/>
-                        <a:ea typeface="Arial" charset="0"/>
-                        <a:cs typeface="Arial" charset="0"/>
-                      </a:endParaRPr>
-                    </a:p>
-                  </a:txBody>
-                  <a:tcPr marL="91440" marR="91440" marT="45720" marB="45720">
-                    <a:lnL w="12700" cap="flat" cmpd="sng" algn="ctr">
-                      <a:solidFill>
-                        <a:srgbClr val="FFFFFF"/>
-                      </a:solidFill>
-                      <a:prstDash val="solid"/>
-                      <a:round/>
-                      <a:headEnd type="none" w="med" len="med"/>
-                      <a:tailEnd type="none" w="med" len="med"/>
-                    </a:lnL>
-                    <a:lnR w="12700" cap="flat" cmpd="sng" algn="ctr">
-                      <a:solidFill>
-                        <a:srgbClr val="FFFFFF"/>
-                      </a:solidFill>
-                      <a:prstDash val="solid"/>
-                      <a:round/>
-                      <a:headEnd type="none" w="med" len="med"/>
-                      <a:tailEnd type="none" w="med" len="med"/>
-                    </a:lnR>
-                    <a:lnT w="12700" cap="flat" cmpd="sng" algn="ctr">
-                      <a:solidFill>
-                        <a:srgbClr val="FFFFFF"/>
-                      </a:solidFill>
-                      <a:prstDash val="solid"/>
-                      <a:round/>
-                      <a:headEnd type="none" w="med" len="med"/>
-                      <a:tailEnd type="none" w="med" len="med"/>
-                    </a:lnT>
-                    <a:lnB w="12700" cap="flat" cmpd="sng" algn="ctr">
-                      <a:solidFill>
-                        <a:srgbClr val="FFFFFF"/>
-                      </a:solidFill>
-                      <a:prstDash val="solid"/>
-                      <a:round/>
-                      <a:headEnd type="none" w="med" len="med"/>
-                      <a:tailEnd type="none" w="med" len="med"/>
-                    </a:lnB>
-                  </a:tcPr>
-                </a:tc>
-              </a:tr>
-              <a:tr h="502920">
-                <a:tc>
-                  <a:txBody>
-                    <a:bodyPr/>
-                    <a:lstStyle/>
-                    <a:p>
-                      <a:pPr indent="0" marL="0">
-                        <a:buNone/>
-                      </a:pPr>
-                      <a:r>
-                        <a:rPr lang="en-US" sz="1250" dirty="0">
-                          <a:solidFill>
-                            <a:srgbClr val="000000"/>
-                          </a:solidFill>
-                          <a:latin typeface="Arial" pitchFamily="34" charset="0"/>
-                          <a:ea typeface="Arial" pitchFamily="34" charset="-122"/>
-                          <a:cs typeface="Arial" pitchFamily="34" charset="-120"/>
-                        </a:rPr>
-                        <a:t>Koch</a:t>
-                      </a:r>
-                      <a:endParaRPr lang="en-US" sz="1250" dirty="0">
-                        <a:latin typeface="Arial" charset="0"/>
-                        <a:ea typeface="Arial" charset="0"/>
-                        <a:cs typeface="Arial" charset="0"/>
-                      </a:endParaRPr>
-                    </a:p>
-                  </a:txBody>
-                  <a:tcPr marL="91440" marR="91440" marT="45720" marB="45720">
-                    <a:lnL w="12700" cap="flat" cmpd="sng" algn="ctr">
-                      <a:solidFill>
-                        <a:srgbClr val="FFFFFF"/>
-                      </a:solidFill>
-                      <a:prstDash val="solid"/>
-                      <a:round/>
-                      <a:headEnd type="none" w="med" len="med"/>
-                      <a:tailEnd type="none" w="med" len="med"/>
-                    </a:lnL>
-                    <a:lnR w="12700" cap="flat" cmpd="sng" algn="ctr">
-                      <a:solidFill>
-                        <a:srgbClr val="FFFFFF"/>
-                      </a:solidFill>
-                      <a:prstDash val="solid"/>
-                      <a:round/>
-                      <a:headEnd type="none" w="med" len="med"/>
-                      <a:tailEnd type="none" w="med" len="med"/>
-                    </a:lnR>
-                    <a:lnT w="12700" cap="flat" cmpd="sng" algn="ctr">
-                      <a:solidFill>
-                        <a:srgbClr val="FFFFFF"/>
-                      </a:solidFill>
-                      <a:prstDash val="solid"/>
-                      <a:round/>
-                      <a:headEnd type="none" w="med" len="med"/>
-                      <a:tailEnd type="none" w="med" len="med"/>
-                    </a:lnT>
-                    <a:lnB w="12700" cap="flat" cmpd="sng" algn="ctr">
-                      <a:solidFill>
-                        <a:srgbClr val="FFFFFF"/>
-                      </a:solidFill>
-                      <a:prstDash val="solid"/>
-                      <a:round/>
-                      <a:headEnd type="none" w="med" len="med"/>
-                      <a:tailEnd type="none" w="med" len="med"/>
-                    </a:lnB>
-                  </a:tcPr>
-                </a:tc>
-                <a:tc>
-                  <a:txBody>
-                    <a:bodyPr/>
-                    <a:lstStyle/>
-                    <a:p>
-                      <a:pPr indent="0" marL="0">
-                        <a:buNone/>
-                      </a:pPr>
-                      <a:r>
-                        <a:rPr lang="en-US" sz="1250" dirty="0">
-                          <a:solidFill>
-                            <a:srgbClr val="000000"/>
-                          </a:solidFill>
-                          <a:latin typeface="Arial" pitchFamily="34" charset="0"/>
-                          <a:ea typeface="Arial" pitchFamily="34" charset="-122"/>
-                          <a:cs typeface="Arial" pitchFamily="34" charset="-120"/>
-                        </a:rPr>
-                        <a:t>1 Teilzeit</a:t>
-                      </a:r>
-                      <a:endParaRPr lang="en-US" sz="1250" dirty="0">
-                        <a:latin typeface="Arial" charset="0"/>
-                        <a:ea typeface="Arial" charset="0"/>
-                        <a:cs typeface="Arial" charset="0"/>
-                      </a:endParaRPr>
-                    </a:p>
-                  </a:txBody>
-                  <a:tcPr marL="91440" marR="91440" marT="45720" marB="45720">
-                    <a:lnL w="12700" cap="flat" cmpd="sng" algn="ctr">
-                      <a:solidFill>
-                        <a:srgbClr val="FFFFFF"/>
-                      </a:solidFill>
-                      <a:prstDash val="solid"/>
-                      <a:round/>
-                      <a:headEnd type="none" w="med" len="med"/>
-                      <a:tailEnd type="none" w="med" len="med"/>
-                    </a:lnL>
-                    <a:lnR w="12700" cap="flat" cmpd="sng" algn="ctr">
-                      <a:solidFill>
-                        <a:srgbClr val="FFFFFF"/>
-                      </a:solidFill>
-                      <a:prstDash val="solid"/>
-                      <a:round/>
-                      <a:headEnd type="none" w="med" len="med"/>
-                      <a:tailEnd type="none" w="med" len="med"/>
-                    </a:lnR>
-                    <a:lnT w="12700" cap="flat" cmpd="sng" algn="ctr">
-                      <a:solidFill>
-                        <a:srgbClr val="FFFFFF"/>
-                      </a:solidFill>
-                      <a:prstDash val="solid"/>
-                      <a:round/>
-                      <a:headEnd type="none" w="med" len="med"/>
-                      <a:tailEnd type="none" w="med" len="med"/>
-                    </a:lnT>
-                    <a:lnB w="12700" cap="flat" cmpd="sng" algn="ctr">
-                      <a:solidFill>
-                        <a:srgbClr val="FFFFFF"/>
-                      </a:solidFill>
-                      <a:prstDash val="solid"/>
-                      <a:round/>
-                      <a:headEnd type="none" w="med" len="med"/>
-                      <a:tailEnd type="none" w="med" len="med"/>
-                    </a:lnB>
-                  </a:tcPr>
-                </a:tc>
-                <a:tc>
-                  <a:txBody>
-                    <a:bodyPr/>
-                    <a:lstStyle/>
-                    <a:p>
-                      <a:pPr algn="r" indent="0" marL="0">
-                        <a:buNone/>
-                      </a:pPr>
-                      <a:r>
-                        <a:rPr lang="en-US" sz="1250" dirty="0">
-                          <a:solidFill>
-                            <a:srgbClr val="000000"/>
-                          </a:solidFill>
-                          <a:latin typeface="Arial" pitchFamily="34" charset="0"/>
-                          <a:ea typeface="Arial" pitchFamily="34" charset="-122"/>
-                          <a:cs typeface="Arial" pitchFamily="34" charset="-120"/>
-                        </a:rPr>
-                        <a:t>2.400 €</a:t>
-                      </a:r>
-                      <a:endParaRPr lang="en-US" sz="1250" dirty="0">
-                        <a:latin typeface="Arial" charset="0"/>
-                        <a:ea typeface="Arial" charset="0"/>
-                        <a:cs typeface="Arial" charset="0"/>
-                      </a:endParaRPr>
-                    </a:p>
-                  </a:txBody>
-                  <a:tcPr marL="91440" marR="91440" marT="45720" marB="45720">
-                    <a:lnL w="12700" cap="flat" cmpd="sng" algn="ctr">
-                      <a:solidFill>
-                        <a:srgbClr val="FFFFFF"/>
-                      </a:solidFill>
-                      <a:prstDash val="solid"/>
-                      <a:round/>
-                      <a:headEnd type="none" w="med" len="med"/>
-                      <a:tailEnd type="none" w="med" len="med"/>
-                    </a:lnL>
-                    <a:lnR w="12700" cap="flat" cmpd="sng" algn="ctr">
-                      <a:solidFill>
-                        <a:srgbClr val="FFFFFF"/>
-                      </a:solidFill>
-                      <a:prstDash val="solid"/>
-                      <a:round/>
-                      <a:headEnd type="none" w="med" len="med"/>
-                      <a:tailEnd type="none" w="med" len="med"/>
-                    </a:lnR>
-                    <a:lnT w="12700" cap="flat" cmpd="sng" algn="ctr">
-                      <a:solidFill>
-                        <a:srgbClr val="FFFFFF"/>
-                      </a:solidFill>
-                      <a:prstDash val="solid"/>
-                      <a:round/>
-                      <a:headEnd type="none" w="med" len="med"/>
-                      <a:tailEnd type="none" w="med" len="med"/>
-                    </a:lnT>
-                    <a:lnB w="12700" cap="flat" cmpd="sng" algn="ctr">
-                      <a:solidFill>
-                        <a:srgbClr val="FFFFFF"/>
-                      </a:solidFill>
-                      <a:prstDash val="solid"/>
-                      <a:round/>
-                      <a:headEnd type="none" w="med" len="med"/>
-                      <a:tailEnd type="none" w="med" len="med"/>
-                    </a:lnB>
-                  </a:tcPr>
-                </a:tc>
-              </a:tr>
-              <a:tr h="502920">
-                <a:tc>
-                  <a:txBody>
-                    <a:bodyPr/>
-                    <a:lstStyle/>
-                    <a:p>
-                      <a:pPr indent="0" marL="0">
-                        <a:buNone/>
-                      </a:pPr>
-                      <a:r>
-                        <a:rPr lang="en-US" sz="1250" dirty="0">
-                          <a:solidFill>
-                            <a:srgbClr val="000000"/>
-                          </a:solidFill>
-                          <a:latin typeface="Arial" pitchFamily="34" charset="0"/>
-                          <a:ea typeface="Arial" pitchFamily="34" charset="-122"/>
-                          <a:cs typeface="Arial" pitchFamily="34" charset="-120"/>
-                        </a:rPr>
-                        <a:t>Küchenhilfe, Spülen</a:t>
-                      </a:r>
-                      <a:endParaRPr lang="en-US" sz="1250" dirty="0">
-                        <a:latin typeface="Arial" charset="0"/>
-                        <a:ea typeface="Arial" charset="0"/>
-                        <a:cs typeface="Arial" charset="0"/>
-                      </a:endParaRPr>
-                    </a:p>
-                  </a:txBody>
-                  <a:tcPr marL="91440" marR="91440" marT="45720" marB="45720">
-                    <a:lnL w="12700" cap="flat" cmpd="sng" algn="ctr">
-                      <a:solidFill>
-                        <a:srgbClr val="FFFFFF"/>
-                      </a:solidFill>
-                      <a:prstDash val="solid"/>
-                      <a:round/>
-                      <a:headEnd type="none" w="med" len="med"/>
-                      <a:tailEnd type="none" w="med" len="med"/>
-                    </a:lnL>
-                    <a:lnR w="12700" cap="flat" cmpd="sng" algn="ctr">
-                      <a:solidFill>
-                        <a:srgbClr val="FFFFFF"/>
-                      </a:solidFill>
-                      <a:prstDash val="solid"/>
-                      <a:round/>
-                      <a:headEnd type="none" w="med" len="med"/>
-                      <a:tailEnd type="none" w="med" len="med"/>
-                    </a:lnR>
-                    <a:lnT w="12700" cap="flat" cmpd="sng" algn="ctr">
-                      <a:solidFill>
-                        <a:srgbClr val="FFFFFF"/>
-                      </a:solidFill>
-                      <a:prstDash val="solid"/>
-                      <a:round/>
-                      <a:headEnd type="none" w="med" len="med"/>
-                      <a:tailEnd type="none" w="med" len="med"/>
-                    </a:lnT>
-                    <a:lnB w="12700" cap="flat" cmpd="sng" algn="ctr">
-                      <a:solidFill>
-                        <a:srgbClr val="FFFFFF"/>
-                      </a:solidFill>
-                      <a:prstDash val="solid"/>
-                      <a:round/>
-                      <a:headEnd type="none" w="med" len="med"/>
-                      <a:tailEnd type="none" w="med" len="med"/>
-                    </a:lnB>
-                  </a:tcPr>
-                </a:tc>
-                <a:tc>
-                  <a:txBody>
-                    <a:bodyPr/>
-                    <a:lstStyle/>
-                    <a:p>
-                      <a:pPr indent="0" marL="0">
-                        <a:buNone/>
-                      </a:pPr>
-                      <a:r>
-                        <a:rPr lang="en-US" sz="1250" dirty="0">
-                          <a:solidFill>
-                            <a:srgbClr val="000000"/>
-                          </a:solidFill>
-                          <a:latin typeface="Arial" pitchFamily="34" charset="0"/>
-                          <a:ea typeface="Arial" pitchFamily="34" charset="-122"/>
-                          <a:cs typeface="Arial" pitchFamily="34" charset="-120"/>
-                        </a:rPr>
-                        <a:t>2 Teilzeit</a:t>
-                      </a:r>
-                      <a:endParaRPr lang="en-US" sz="1250" dirty="0">
-                        <a:latin typeface="Arial" charset="0"/>
-                        <a:ea typeface="Arial" charset="0"/>
-                        <a:cs typeface="Arial" charset="0"/>
-                      </a:endParaRPr>
-                    </a:p>
-                  </a:txBody>
-                  <a:tcPr marL="91440" marR="91440" marT="45720" marB="45720">
-                    <a:lnL w="12700" cap="flat" cmpd="sng" algn="ctr">
-                      <a:solidFill>
-                        <a:srgbClr val="FFFFFF"/>
-                      </a:solidFill>
-                      <a:prstDash val="solid"/>
-                      <a:round/>
-                      <a:headEnd type="none" w="med" len="med"/>
-                      <a:tailEnd type="none" w="med" len="med"/>
-                    </a:lnL>
-                    <a:lnR w="12700" cap="flat" cmpd="sng" algn="ctr">
-                      <a:solidFill>
-                        <a:srgbClr val="FFFFFF"/>
-                      </a:solidFill>
-                      <a:prstDash val="solid"/>
-                      <a:round/>
-                      <a:headEnd type="none" w="med" len="med"/>
-                      <a:tailEnd type="none" w="med" len="med"/>
-                    </a:lnR>
-                    <a:lnT w="12700" cap="flat" cmpd="sng" algn="ctr">
-                      <a:solidFill>
-                        <a:srgbClr val="FFFFFF"/>
-                      </a:solidFill>
-                      <a:prstDash val="solid"/>
-                      <a:round/>
-                      <a:headEnd type="none" w="med" len="med"/>
-                      <a:tailEnd type="none" w="med" len="med"/>
-                    </a:lnT>
-                    <a:lnB w="12700" cap="flat" cmpd="sng" algn="ctr">
-                      <a:solidFill>
-                        <a:srgbClr val="FFFFFF"/>
-                      </a:solidFill>
-                      <a:prstDash val="solid"/>
-                      <a:round/>
-                      <a:headEnd type="none" w="med" len="med"/>
-                      <a:tailEnd type="none" w="med" len="med"/>
-                    </a:lnB>
-                  </a:tcPr>
-                </a:tc>
-                <a:tc>
-                  <a:txBody>
-                    <a:bodyPr/>
-                    <a:lstStyle/>
-                    <a:p>
-                      <a:pPr algn="r" indent="0" marL="0">
-                        <a:buNone/>
-                      </a:pPr>
-                      <a:r>
-                        <a:rPr lang="en-US" sz="1250" dirty="0">
-                          <a:solidFill>
-                            <a:srgbClr val="000000"/>
-                          </a:solidFill>
-                          <a:latin typeface="Arial" pitchFamily="34" charset="0"/>
-                          <a:ea typeface="Arial" pitchFamily="34" charset="-122"/>
-                          <a:cs typeface="Arial" pitchFamily="34" charset="-120"/>
-                        </a:rPr>
-                        <a:t>2.800 €</a:t>
+                        <a:t>3.200 €</a:t>
                       </a:r>
                       <a:endParaRPr lang="en-US" sz="1250" dirty="0">
                         <a:latin typeface="Arial" charset="0"/>
@@ -7365,7 +7365,7 @@
                           <a:ea typeface="Arial" pitchFamily="34" charset="-122"/>
                           <a:cs typeface="Arial" pitchFamily="34" charset="-120"/>
                         </a:rPr>
-                        <a:t>ca. 7 Teilzeit und Minijobs</a:t>
+                        <a:t>ca. 8 Teilzeit und Minijobs</a:t>
                       </a:r>
                       <a:endParaRPr lang="en-US" sz="1250" dirty="0">
                         <a:latin typeface="Arial" charset="0"/>
@@ -7430,7 +7430,7 @@
                           <a:ea typeface="Arial" pitchFamily="34" charset="-122"/>
                           <a:cs typeface="Arial" pitchFamily="34" charset="-120"/>
                         </a:rPr>
-                        <a:t>6.700 €</a:t>
+                        <a:t>7.600 €</a:t>
                       </a:r>
                       <a:endParaRPr lang="en-US" sz="1250" dirty="0">
                         <a:latin typeface="Arial" charset="0"/>
@@ -7562,7 +7562,7 @@
                           <a:ea typeface="Arial" pitchFamily="34" charset="-122"/>
                           <a:cs typeface="Arial" pitchFamily="34" charset="-120"/>
                         </a:rPr>
-                        <a:t>entspricht 20 % vom Umsatz</a:t>
+                        <a:t>entspricht 28 % vom Umsatz</a:t>
                       </a:r>
                       <a:endParaRPr lang="en-US" sz="1250" dirty="0">
                         <a:latin typeface="Arial" charset="0"/>
@@ -7627,7 +7627,7 @@
                           <a:ea typeface="Arial" pitchFamily="34" charset="-122"/>
                           <a:cs typeface="Arial" pitchFamily="34" charset="-120"/>
                         </a:rPr>
-                        <a:t>19.500 €</a:t>
+                        <a:t>18.000 €</a:t>
                       </a:r>
                       <a:endParaRPr lang="en-US" sz="1250" dirty="0">
                         <a:latin typeface="Arial" charset="0"/>
@@ -7757,7 +7757,7 @@
                 <a:ea typeface="Arial" pitchFamily="34" charset="-122"/>
                 <a:cs typeface="Arial" pitchFamily="34" charset="-120"/>
               </a:rPr>
-              <a:t>Du führst die Gastro selbst oder verpachtest sie. Bei Verpachtung zahlt der Betreiber ca. 10 €/m² Pacht, das sind bei 510 m² ca. 5.100 € im Monat (ca. 5.3 % vom Umsatz).</a:t>
+              <a:t>Du führst die Gastro selbst oder verpachtest sie. Bei Verpachtung zahlt der Betreiber ca. 10 €/m² Pacht, das sind bei 510 m² ca. 5.100 € im Monat (ca. 7.8 % vom Umsatz).</a:t>
             </a:r>
             <a:endParaRPr lang="en-US" sz="1300" dirty="0"/>
           </a:p>
@@ -7808,7 +7808,7 @@
                 <a:ea typeface="Arial" pitchFamily="34" charset="-122"/>
                 <a:cs typeface="Arial" pitchFamily="34" charset="-120"/>
               </a:rPr>
-              <a:t>Küchenchef früh einstellen, 4 bis 6 Wochen vor Eröffnung Probebetrieb.</a:t>
+              <a:t>Barchef und Küchenleitung früh einstellen, 4 bis 6 Wochen vor Eröffnung Probebetrieb.</a:t>
             </a:r>
             <a:endParaRPr lang="en-US" sz="1300" dirty="0"/>
           </a:p>
@@ -8281,6 +8281,271 @@
                           <a:ea typeface="Arial" pitchFamily="34" charset="-122"/>
                           <a:cs typeface="Arial" pitchFamily="34" charset="-120"/>
                         </a:rPr>
+                        <a:t>40.000 €</a:t>
+                      </a:r>
+                      <a:endParaRPr lang="en-US" sz="1250" dirty="0">
+                        <a:latin typeface="Arial" charset="0"/>
+                        <a:ea typeface="Arial" charset="0"/>
+                        <a:cs typeface="Arial" charset="0"/>
+                      </a:endParaRPr>
+                    </a:p>
+                  </a:txBody>
+                  <a:tcPr marL="91440" marR="91440" marT="45720" marB="45720">
+                    <a:lnL w="12700" cap="flat" cmpd="sng" algn="ctr">
+                      <a:solidFill>
+                        <a:srgbClr val="FFFFFF"/>
+                      </a:solidFill>
+                      <a:prstDash val="solid"/>
+                      <a:round/>
+                      <a:headEnd type="none" w="med" len="med"/>
+                      <a:tailEnd type="none" w="med" len="med"/>
+                    </a:lnL>
+                    <a:lnR w="12700" cap="flat" cmpd="sng" algn="ctr">
+                      <a:solidFill>
+                        <a:srgbClr val="FFFFFF"/>
+                      </a:solidFill>
+                      <a:prstDash val="solid"/>
+                      <a:round/>
+                      <a:headEnd type="none" w="med" len="med"/>
+                      <a:tailEnd type="none" w="med" len="med"/>
+                    </a:lnR>
+                    <a:lnT w="12700" cap="flat" cmpd="sng" algn="ctr">
+                      <a:solidFill>
+                        <a:srgbClr val="FFFFFF"/>
+                      </a:solidFill>
+                      <a:prstDash val="solid"/>
+                      <a:round/>
+                      <a:headEnd type="none" w="med" len="med"/>
+                      <a:tailEnd type="none" w="med" len="med"/>
+                    </a:lnT>
+                    <a:lnB w="12700" cap="flat" cmpd="sng" algn="ctr">
+                      <a:solidFill>
+                        <a:srgbClr val="FFFFFF"/>
+                      </a:solidFill>
+                      <a:prstDash val="solid"/>
+                      <a:round/>
+                      <a:headEnd type="none" w="med" len="med"/>
+                      <a:tailEnd type="none" w="med" len="med"/>
+                    </a:lnB>
+                  </a:tcPr>
+                </a:tc>
+                <a:tc>
+                  <a:txBody>
+                    <a:bodyPr/>
+                    <a:lstStyle/>
+                    <a:p>
+                      <a:pPr algn="r" indent="0" marL="0">
+                        <a:buNone/>
+                      </a:pPr>
+                      <a:r>
+                        <a:rPr lang="en-US" sz="1250" dirty="0">
+                          <a:solidFill>
+                            <a:srgbClr val="000000"/>
+                          </a:solidFill>
+                          <a:latin typeface="Arial" pitchFamily="34" charset="0"/>
+                          <a:ea typeface="Arial" pitchFamily="34" charset="-122"/>
+                          <a:cs typeface="Arial" pitchFamily="34" charset="-120"/>
+                        </a:rPr>
+                        <a:t>12.200 €</a:t>
+                      </a:r>
+                      <a:endParaRPr lang="en-US" sz="1250" dirty="0">
+                        <a:latin typeface="Arial" charset="0"/>
+                        <a:ea typeface="Arial" charset="0"/>
+                        <a:cs typeface="Arial" charset="0"/>
+                      </a:endParaRPr>
+                    </a:p>
+                  </a:txBody>
+                  <a:tcPr marL="91440" marR="91440" marT="45720" marB="45720">
+                    <a:lnL w="12700" cap="flat" cmpd="sng" algn="ctr">
+                      <a:solidFill>
+                        <a:srgbClr val="FFFFFF"/>
+                      </a:solidFill>
+                      <a:prstDash val="solid"/>
+                      <a:round/>
+                      <a:headEnd type="none" w="med" len="med"/>
+                      <a:tailEnd type="none" w="med" len="med"/>
+                    </a:lnL>
+                    <a:lnR w="12700" cap="flat" cmpd="sng" algn="ctr">
+                      <a:solidFill>
+                        <a:srgbClr val="FFFFFF"/>
+                      </a:solidFill>
+                      <a:prstDash val="solid"/>
+                      <a:round/>
+                      <a:headEnd type="none" w="med" len="med"/>
+                      <a:tailEnd type="none" w="med" len="med"/>
+                    </a:lnR>
+                    <a:lnT w="12700" cap="flat" cmpd="sng" algn="ctr">
+                      <a:solidFill>
+                        <a:srgbClr val="FFFFFF"/>
+                      </a:solidFill>
+                      <a:prstDash val="solid"/>
+                      <a:round/>
+                      <a:headEnd type="none" w="med" len="med"/>
+                      <a:tailEnd type="none" w="med" len="med"/>
+                    </a:lnT>
+                    <a:lnB w="12700" cap="flat" cmpd="sng" algn="ctr">
+                      <a:solidFill>
+                        <a:srgbClr val="FFFFFF"/>
+                      </a:solidFill>
+                      <a:prstDash val="solid"/>
+                      <a:round/>
+                      <a:headEnd type="none" w="med" len="med"/>
+                      <a:tailEnd type="none" w="med" len="med"/>
+                    </a:lnB>
+                  </a:tcPr>
+                </a:tc>
+                <a:tc>
+                  <a:txBody>
+                    <a:bodyPr/>
+                    <a:lstStyle/>
+                    <a:p>
+                      <a:pPr algn="r" indent="0" marL="0">
+                        <a:buNone/>
+                      </a:pPr>
+                      <a:r>
+                        <a:rPr lang="en-US" sz="1250" dirty="0">
+                          <a:solidFill>
+                            <a:srgbClr val="000000"/>
+                          </a:solidFill>
+                          <a:latin typeface="Arial" pitchFamily="34" charset="0"/>
+                          <a:ea typeface="Arial" pitchFamily="34" charset="-122"/>
+                          <a:cs typeface="Arial" pitchFamily="34" charset="-120"/>
+                        </a:rPr>
+                        <a:t>−5.100 €</a:t>
+                      </a:r>
+                      <a:endParaRPr lang="en-US" sz="1250" dirty="0">
+                        <a:latin typeface="Arial" charset="0"/>
+                        <a:ea typeface="Arial" charset="0"/>
+                        <a:cs typeface="Arial" charset="0"/>
+                      </a:endParaRPr>
+                    </a:p>
+                  </a:txBody>
+                  <a:tcPr marL="91440" marR="91440" marT="45720" marB="45720">
+                    <a:lnL w="12700" cap="flat" cmpd="sng" algn="ctr">
+                      <a:solidFill>
+                        <a:srgbClr val="FFFFFF"/>
+                      </a:solidFill>
+                      <a:prstDash val="solid"/>
+                      <a:round/>
+                      <a:headEnd type="none" w="med" len="med"/>
+                      <a:tailEnd type="none" w="med" len="med"/>
+                    </a:lnL>
+                    <a:lnR w="12700" cap="flat" cmpd="sng" algn="ctr">
+                      <a:solidFill>
+                        <a:srgbClr val="FFFFFF"/>
+                      </a:solidFill>
+                      <a:prstDash val="solid"/>
+                      <a:round/>
+                      <a:headEnd type="none" w="med" len="med"/>
+                      <a:tailEnd type="none" w="med" len="med"/>
+                    </a:lnR>
+                    <a:lnT w="12700" cap="flat" cmpd="sng" algn="ctr">
+                      <a:solidFill>
+                        <a:srgbClr val="FFFFFF"/>
+                      </a:solidFill>
+                      <a:prstDash val="solid"/>
+                      <a:round/>
+                      <a:headEnd type="none" w="med" len="med"/>
+                      <a:tailEnd type="none" w="med" len="med"/>
+                    </a:lnT>
+                    <a:lnB w="12700" cap="flat" cmpd="sng" algn="ctr">
+                      <a:solidFill>
+                        <a:srgbClr val="FFFFFF"/>
+                      </a:solidFill>
+                      <a:prstDash val="solid"/>
+                      <a:round/>
+                      <a:headEnd type="none" w="med" len="med"/>
+                      <a:tailEnd type="none" w="med" len="med"/>
+                    </a:lnB>
+                  </a:tcPr>
+                </a:tc>
+                <a:tc>
+                  <a:txBody>
+                    <a:bodyPr/>
+                    <a:lstStyle/>
+                    <a:p>
+                      <a:pPr algn="r" indent="0" marL="0">
+                        <a:buNone/>
+                      </a:pPr>
+                      <a:r>
+                        <a:rPr lang="en-US" sz="1250" b="1" dirty="0">
+                          <a:solidFill>
+                            <a:schemeClr val="accent5"/>
+                          </a:solidFill>
+                          <a:latin typeface="Arial" pitchFamily="34" charset="0"/>
+                          <a:ea typeface="Arial" pitchFamily="34" charset="-122"/>
+                          <a:cs typeface="Arial" pitchFamily="34" charset="-120"/>
+                        </a:rPr>
+                        <a:t>+7.100 €</a:t>
+                      </a:r>
+                      <a:endParaRPr lang="en-US" sz="1250" dirty="0">
+                        <a:latin typeface="Arial" charset="0"/>
+                        <a:ea typeface="Arial" charset="0"/>
+                        <a:cs typeface="Arial" charset="0"/>
+                      </a:endParaRPr>
+                    </a:p>
+                  </a:txBody>
+                  <a:tcPr marL="91440" marR="91440" marT="45720" marB="45720">
+                    <a:lnL w="12700" cap="flat" cmpd="sng" algn="ctr">
+                      <a:solidFill>
+                        <a:srgbClr val="FFFFFF"/>
+                      </a:solidFill>
+                      <a:prstDash val="solid"/>
+                      <a:round/>
+                      <a:headEnd type="none" w="med" len="med"/>
+                      <a:tailEnd type="none" w="med" len="med"/>
+                    </a:lnL>
+                    <a:lnR w="12700" cap="flat" cmpd="sng" algn="ctr">
+                      <a:solidFill>
+                        <a:srgbClr val="FFFFFF"/>
+                      </a:solidFill>
+                      <a:prstDash val="solid"/>
+                      <a:round/>
+                      <a:headEnd type="none" w="med" len="med"/>
+                      <a:tailEnd type="none" w="med" len="med"/>
+                    </a:lnR>
+                    <a:lnT w="12700" cap="flat" cmpd="sng" algn="ctr">
+                      <a:solidFill>
+                        <a:srgbClr val="FFFFFF"/>
+                      </a:solidFill>
+                      <a:prstDash val="solid"/>
+                      <a:round/>
+                      <a:headEnd type="none" w="med" len="med"/>
+                      <a:tailEnd type="none" w="med" len="med"/>
+                    </a:lnT>
+                    <a:lnB w="12700" cap="flat" cmpd="sng" algn="ctr">
+                      <a:solidFill>
+                        <a:srgbClr val="FFFFFF"/>
+                      </a:solidFill>
+                      <a:prstDash val="solid"/>
+                      <a:round/>
+                      <a:headEnd type="none" w="med" len="med"/>
+                      <a:tailEnd type="none" w="med" len="med"/>
+                    </a:lnB>
+                    <a:solidFill>
+                      <a:srgbClr val="E3F1EA"/>
+                    </a:solidFill>
+                  </a:tcPr>
+                </a:tc>
+              </a:tr>
+              <a:tr h="502920">
+                <a:tc>
+                  <a:txBody>
+                    <a:bodyPr/>
+                    <a:lstStyle/>
+                    <a:p>
+                      <a:pPr indent="0" marL="0">
+                        <a:buNone/>
+                      </a:pPr>
+                      <a:r>
+                        <a:rPr lang="en-US" sz="1250" dirty="0">
+                          <a:solidFill>
+                            <a:srgbClr val="000000"/>
+                          </a:solidFill>
+                          <a:latin typeface="Arial" pitchFamily="34" charset="0"/>
+                          <a:ea typeface="Arial" pitchFamily="34" charset="-122"/>
+                          <a:cs typeface="Arial" pitchFamily="34" charset="-120"/>
+                        </a:rPr>
                         <a:t>50.000 €</a:t>
                       </a:r>
                       <a:endParaRPr lang="en-US" sz="1250" dirty="0">
@@ -8538,7 +8803,7 @@
                         <a:buNone/>
                       </a:pPr>
                       <a:r>
-                        <a:rPr lang="en-US" sz="1250" dirty="0">
+                        <a:rPr lang="en-US" sz="1250" b="1" dirty="0">
                           <a:solidFill>
                             <a:srgbClr val="000000"/>
                           </a:solidFill>
@@ -8546,7 +8811,7 @@
                           <a:ea typeface="Arial" pitchFamily="34" charset="-122"/>
                           <a:cs typeface="Arial" pitchFamily="34" charset="-120"/>
                         </a:rPr>
-                        <a:t>65.000 €</a:t>
+                        <a:t>65.010 €</a:t>
                       </a:r>
                       <a:endParaRPr lang="en-US" sz="1250" dirty="0">
                         <a:latin typeface="Arial" charset="0"/>
@@ -8611,7 +8876,7 @@
                           <a:ea typeface="Arial" pitchFamily="34" charset="-122"/>
                           <a:cs typeface="Arial" pitchFamily="34" charset="-120"/>
                         </a:rPr>
-                        <a:t>19.825 €</a:t>
+                        <a:t>19.828 €</a:t>
                       </a:r>
                       <a:endParaRPr lang="en-US" sz="1250" dirty="0">
                         <a:latin typeface="Arial" charset="0"/>
@@ -8741,7 +9006,7 @@
                           <a:ea typeface="Arial" pitchFamily="34" charset="-122"/>
                           <a:cs typeface="Arial" pitchFamily="34" charset="-120"/>
                         </a:rPr>
-                        <a:t>+14.725 €</a:t>
+                        <a:t>+14.728 €</a:t>
                       </a:r>
                       <a:endParaRPr lang="en-US" sz="1250" dirty="0">
                         <a:latin typeface="Arial" charset="0"/>
@@ -9068,7 +9333,7 @@
                         <a:buNone/>
                       </a:pPr>
                       <a:r>
-                        <a:rPr lang="en-US" sz="1250" b="1" dirty="0">
+                        <a:rPr lang="en-US" sz="1250" dirty="0">
                           <a:solidFill>
                             <a:srgbClr val="000000"/>
                           </a:solidFill>
@@ -9076,7 +9341,7 @@
                           <a:ea typeface="Arial" pitchFamily="34" charset="-122"/>
                           <a:cs typeface="Arial" pitchFamily="34" charset="-120"/>
                         </a:rPr>
-                        <a:t>95.635 €</a:t>
+                        <a:t>95.000 €</a:t>
                       </a:r>
                       <a:endParaRPr lang="en-US" sz="1250" dirty="0">
                         <a:latin typeface="Arial" charset="0"/>
@@ -9141,7 +9406,7 @@
                           <a:ea typeface="Arial" pitchFamily="34" charset="-122"/>
                           <a:cs typeface="Arial" pitchFamily="34" charset="-120"/>
                         </a:rPr>
-                        <a:t>29.169 €</a:t>
+                        <a:t>28.975 €</a:t>
                       </a:r>
                       <a:endParaRPr lang="en-US" sz="1250" dirty="0">
                         <a:latin typeface="Arial" charset="0"/>
@@ -9271,272 +9536,7 @@
                           <a:ea typeface="Arial" pitchFamily="34" charset="-122"/>
                           <a:cs typeface="Arial" pitchFamily="34" charset="-120"/>
                         </a:rPr>
-                        <a:t>+24.069 €</a:t>
-                      </a:r>
-                      <a:endParaRPr lang="en-US" sz="1250" dirty="0">
-                        <a:latin typeface="Arial" charset="0"/>
-                        <a:ea typeface="Arial" charset="0"/>
-                        <a:cs typeface="Arial" charset="0"/>
-                      </a:endParaRPr>
-                    </a:p>
-                  </a:txBody>
-                  <a:tcPr marL="91440" marR="91440" marT="45720" marB="45720">
-                    <a:lnL w="12700" cap="flat" cmpd="sng" algn="ctr">
-                      <a:solidFill>
-                        <a:srgbClr val="FFFFFF"/>
-                      </a:solidFill>
-                      <a:prstDash val="solid"/>
-                      <a:round/>
-                      <a:headEnd type="none" w="med" len="med"/>
-                      <a:tailEnd type="none" w="med" len="med"/>
-                    </a:lnL>
-                    <a:lnR w="12700" cap="flat" cmpd="sng" algn="ctr">
-                      <a:solidFill>
-                        <a:srgbClr val="FFFFFF"/>
-                      </a:solidFill>
-                      <a:prstDash val="solid"/>
-                      <a:round/>
-                      <a:headEnd type="none" w="med" len="med"/>
-                      <a:tailEnd type="none" w="med" len="med"/>
-                    </a:lnR>
-                    <a:lnT w="12700" cap="flat" cmpd="sng" algn="ctr">
-                      <a:solidFill>
-                        <a:srgbClr val="FFFFFF"/>
-                      </a:solidFill>
-                      <a:prstDash val="solid"/>
-                      <a:round/>
-                      <a:headEnd type="none" w="med" len="med"/>
-                      <a:tailEnd type="none" w="med" len="med"/>
-                    </a:lnT>
-                    <a:lnB w="12700" cap="flat" cmpd="sng" algn="ctr">
-                      <a:solidFill>
-                        <a:srgbClr val="FFFFFF"/>
-                      </a:solidFill>
-                      <a:prstDash val="solid"/>
-                      <a:round/>
-                      <a:headEnd type="none" w="med" len="med"/>
-                      <a:tailEnd type="none" w="med" len="med"/>
-                    </a:lnB>
-                    <a:solidFill>
-                      <a:srgbClr val="E3F1EA"/>
-                    </a:solidFill>
-                  </a:tcPr>
-                </a:tc>
-              </a:tr>
-              <a:tr h="502920">
-                <a:tc>
-                  <a:txBody>
-                    <a:bodyPr/>
-                    <a:lstStyle/>
-                    <a:p>
-                      <a:pPr indent="0" marL="0">
-                        <a:buNone/>
-                      </a:pPr>
-                      <a:r>
-                        <a:rPr lang="en-US" sz="1250" dirty="0">
-                          <a:solidFill>
-                            <a:srgbClr val="000000"/>
-                          </a:solidFill>
-                          <a:latin typeface="Arial" pitchFamily="34" charset="0"/>
-                          <a:ea typeface="Arial" pitchFamily="34" charset="-122"/>
-                          <a:cs typeface="Arial" pitchFamily="34" charset="-120"/>
-                        </a:rPr>
-                        <a:t>110.000 €</a:t>
-                      </a:r>
-                      <a:endParaRPr lang="en-US" sz="1250" dirty="0">
-                        <a:latin typeface="Arial" charset="0"/>
-                        <a:ea typeface="Arial" charset="0"/>
-                        <a:cs typeface="Arial" charset="0"/>
-                      </a:endParaRPr>
-                    </a:p>
-                  </a:txBody>
-                  <a:tcPr marL="91440" marR="91440" marT="45720" marB="45720">
-                    <a:lnL w="12700" cap="flat" cmpd="sng" algn="ctr">
-                      <a:solidFill>
-                        <a:srgbClr val="FFFFFF"/>
-                      </a:solidFill>
-                      <a:prstDash val="solid"/>
-                      <a:round/>
-                      <a:headEnd type="none" w="med" len="med"/>
-                      <a:tailEnd type="none" w="med" len="med"/>
-                    </a:lnL>
-                    <a:lnR w="12700" cap="flat" cmpd="sng" algn="ctr">
-                      <a:solidFill>
-                        <a:srgbClr val="FFFFFF"/>
-                      </a:solidFill>
-                      <a:prstDash val="solid"/>
-                      <a:round/>
-                      <a:headEnd type="none" w="med" len="med"/>
-                      <a:tailEnd type="none" w="med" len="med"/>
-                    </a:lnR>
-                    <a:lnT w="12700" cap="flat" cmpd="sng" algn="ctr">
-                      <a:solidFill>
-                        <a:srgbClr val="FFFFFF"/>
-                      </a:solidFill>
-                      <a:prstDash val="solid"/>
-                      <a:round/>
-                      <a:headEnd type="none" w="med" len="med"/>
-                      <a:tailEnd type="none" w="med" len="med"/>
-                    </a:lnT>
-                    <a:lnB w="12700" cap="flat" cmpd="sng" algn="ctr">
-                      <a:solidFill>
-                        <a:srgbClr val="FFFFFF"/>
-                      </a:solidFill>
-                      <a:prstDash val="solid"/>
-                      <a:round/>
-                      <a:headEnd type="none" w="med" len="med"/>
-                      <a:tailEnd type="none" w="med" len="med"/>
-                    </a:lnB>
-                  </a:tcPr>
-                </a:tc>
-                <a:tc>
-                  <a:txBody>
-                    <a:bodyPr/>
-                    <a:lstStyle/>
-                    <a:p>
-                      <a:pPr algn="r" indent="0" marL="0">
-                        <a:buNone/>
-                      </a:pPr>
-                      <a:r>
-                        <a:rPr lang="en-US" sz="1250" dirty="0">
-                          <a:solidFill>
-                            <a:srgbClr val="000000"/>
-                          </a:solidFill>
-                          <a:latin typeface="Arial" pitchFamily="34" charset="0"/>
-                          <a:ea typeface="Arial" pitchFamily="34" charset="-122"/>
-                          <a:cs typeface="Arial" pitchFamily="34" charset="-120"/>
-                        </a:rPr>
-                        <a:t>33.550 €</a:t>
-                      </a:r>
-                      <a:endParaRPr lang="en-US" sz="1250" dirty="0">
-                        <a:latin typeface="Arial" charset="0"/>
-                        <a:ea typeface="Arial" charset="0"/>
-                        <a:cs typeface="Arial" charset="0"/>
-                      </a:endParaRPr>
-                    </a:p>
-                  </a:txBody>
-                  <a:tcPr marL="91440" marR="91440" marT="45720" marB="45720">
-                    <a:lnL w="12700" cap="flat" cmpd="sng" algn="ctr">
-                      <a:solidFill>
-                        <a:srgbClr val="FFFFFF"/>
-                      </a:solidFill>
-                      <a:prstDash val="solid"/>
-                      <a:round/>
-                      <a:headEnd type="none" w="med" len="med"/>
-                      <a:tailEnd type="none" w="med" len="med"/>
-                    </a:lnL>
-                    <a:lnR w="12700" cap="flat" cmpd="sng" algn="ctr">
-                      <a:solidFill>
-                        <a:srgbClr val="FFFFFF"/>
-                      </a:solidFill>
-                      <a:prstDash val="solid"/>
-                      <a:round/>
-                      <a:headEnd type="none" w="med" len="med"/>
-                      <a:tailEnd type="none" w="med" len="med"/>
-                    </a:lnR>
-                    <a:lnT w="12700" cap="flat" cmpd="sng" algn="ctr">
-                      <a:solidFill>
-                        <a:srgbClr val="FFFFFF"/>
-                      </a:solidFill>
-                      <a:prstDash val="solid"/>
-                      <a:round/>
-                      <a:headEnd type="none" w="med" len="med"/>
-                      <a:tailEnd type="none" w="med" len="med"/>
-                    </a:lnT>
-                    <a:lnB w="12700" cap="flat" cmpd="sng" algn="ctr">
-                      <a:solidFill>
-                        <a:srgbClr val="FFFFFF"/>
-                      </a:solidFill>
-                      <a:prstDash val="solid"/>
-                      <a:round/>
-                      <a:headEnd type="none" w="med" len="med"/>
-                      <a:tailEnd type="none" w="med" len="med"/>
-                    </a:lnB>
-                  </a:tcPr>
-                </a:tc>
-                <a:tc>
-                  <a:txBody>
-                    <a:bodyPr/>
-                    <a:lstStyle/>
-                    <a:p>
-                      <a:pPr algn="r" indent="0" marL="0">
-                        <a:buNone/>
-                      </a:pPr>
-                      <a:r>
-                        <a:rPr lang="en-US" sz="1250" dirty="0">
-                          <a:solidFill>
-                            <a:srgbClr val="000000"/>
-                          </a:solidFill>
-                          <a:latin typeface="Arial" pitchFamily="34" charset="0"/>
-                          <a:ea typeface="Arial" pitchFamily="34" charset="-122"/>
-                          <a:cs typeface="Arial" pitchFamily="34" charset="-120"/>
-                        </a:rPr>
-                        <a:t>−5.100 €</a:t>
-                      </a:r>
-                      <a:endParaRPr lang="en-US" sz="1250" dirty="0">
-                        <a:latin typeface="Arial" charset="0"/>
-                        <a:ea typeface="Arial" charset="0"/>
-                        <a:cs typeface="Arial" charset="0"/>
-                      </a:endParaRPr>
-                    </a:p>
-                  </a:txBody>
-                  <a:tcPr marL="91440" marR="91440" marT="45720" marB="45720">
-                    <a:lnL w="12700" cap="flat" cmpd="sng" algn="ctr">
-                      <a:solidFill>
-                        <a:srgbClr val="FFFFFF"/>
-                      </a:solidFill>
-                      <a:prstDash val="solid"/>
-                      <a:round/>
-                      <a:headEnd type="none" w="med" len="med"/>
-                      <a:tailEnd type="none" w="med" len="med"/>
-                    </a:lnL>
-                    <a:lnR w="12700" cap="flat" cmpd="sng" algn="ctr">
-                      <a:solidFill>
-                        <a:srgbClr val="FFFFFF"/>
-                      </a:solidFill>
-                      <a:prstDash val="solid"/>
-                      <a:round/>
-                      <a:headEnd type="none" w="med" len="med"/>
-                      <a:tailEnd type="none" w="med" len="med"/>
-                    </a:lnR>
-                    <a:lnT w="12700" cap="flat" cmpd="sng" algn="ctr">
-                      <a:solidFill>
-                        <a:srgbClr val="FFFFFF"/>
-                      </a:solidFill>
-                      <a:prstDash val="solid"/>
-                      <a:round/>
-                      <a:headEnd type="none" w="med" len="med"/>
-                      <a:tailEnd type="none" w="med" len="med"/>
-                    </a:lnT>
-                    <a:lnB w="12700" cap="flat" cmpd="sng" algn="ctr">
-                      <a:solidFill>
-                        <a:srgbClr val="FFFFFF"/>
-                      </a:solidFill>
-                      <a:prstDash val="solid"/>
-                      <a:round/>
-                      <a:headEnd type="none" w="med" len="med"/>
-                      <a:tailEnd type="none" w="med" len="med"/>
-                    </a:lnB>
-                  </a:tcPr>
-                </a:tc>
-                <a:tc>
-                  <a:txBody>
-                    <a:bodyPr/>
-                    <a:lstStyle/>
-                    <a:p>
-                      <a:pPr algn="r" indent="0" marL="0">
-                        <a:buNone/>
-                      </a:pPr>
-                      <a:r>
-                        <a:rPr lang="en-US" sz="1250" b="1" dirty="0">
-                          <a:solidFill>
-                            <a:schemeClr val="accent5"/>
-                          </a:solidFill>
-                          <a:latin typeface="Arial" pitchFamily="34" charset="0"/>
-                          <a:ea typeface="Arial" pitchFamily="34" charset="-122"/>
-                          <a:cs typeface="Arial" pitchFamily="34" charset="-120"/>
-                        </a:rPr>
-                        <a:t>+28.450 €</a:t>
+                        <a:t>+23.875 €</a:t>
                       </a:r>
                       <a:endParaRPr lang="en-US" sz="1250" dirty="0">
                         <a:latin typeface="Arial" charset="0"/>
@@ -9669,7 +9669,7 @@
                 <a:ea typeface="Arial" pitchFamily="34" charset="-122"/>
                 <a:cs typeface="Arial" pitchFamily="34" charset="-120"/>
               </a:rPr>
-              <a:t>Mit 95.635 € Umsatz bleiben im ganzen Haus +18.954 € pro Monat nach Zinsen und Tilgung (KfW-Kredite und Hausbank, ohne Lohn). Die Gastro braucht für Break-even im Haus ca. 33.500 € Umsatz.</a:t>
+              <a:t>Mit 65.010 € Umsatz bleiben im ganzen Haus +9.613 € pro Monat nach Zinsen und Tilgung (KfW-Kredite und Hausbank, ohne Lohn). Die Gastro braucht für Break-even im Haus ca. 33.500 € Umsatz.</a:t>
             </a:r>
             <a:endParaRPr lang="en-US" sz="1300" dirty="0"/>
           </a:p>
@@ -10043,7 +10043,7 @@
                           <a:ea typeface="Arial" pitchFamily="34" charset="-122"/>
                           <a:cs typeface="Arial" pitchFamily="34" charset="-120"/>
                         </a:rPr>
-                        <a:t>Küche (Herd, Kühlräume, Edelstahl, Spülküche)</a:t>
+                        <a:t>Küche (Bowl- und Snackküche, Kühlräume, Spülküche)</a:t>
                       </a:r>
                       <a:endParaRPr lang="en-US" sz="1250" dirty="0">
                         <a:latin typeface="Arial" charset="0"/>
@@ -10108,7 +10108,7 @@
                           <a:ea typeface="Arial" pitchFamily="34" charset="-122"/>
                           <a:cs typeface="Arial" pitchFamily="34" charset="-120"/>
                         </a:rPr>
-                        <a:t>38.000 €</a:t>
+                        <a:t>28.000 €</a:t>
                       </a:r>
                       <a:endParaRPr lang="en-US" sz="1250" dirty="0">
                         <a:latin typeface="Arial" charset="0"/>
@@ -10307,7 +10307,7 @@
                           <a:ea typeface="Arial" pitchFamily="34" charset="-122"/>
                           <a:cs typeface="Arial" pitchFamily="34" charset="-120"/>
                         </a:rPr>
-                        <a:t>Theke und Bar (Zapfanlage, Kühlung, Backbar)</a:t>
+                        <a:t>Theke und Bar (Zapfanlage, Kühlung, Backbar, große Theke)</a:t>
                       </a:r>
                       <a:endParaRPr lang="en-US" sz="1250" dirty="0">
                         <a:latin typeface="Arial" charset="0"/>
@@ -10372,7 +10372,7 @@
                           <a:ea typeface="Arial" pitchFamily="34" charset="-122"/>
                           <a:cs typeface="Arial" pitchFamily="34" charset="-120"/>
                         </a:rPr>
-                        <a:t>25.000 €</a:t>
+                        <a:t>35.000 €</a:t>
                       </a:r>
                       <a:endParaRPr lang="en-US" sz="1250" dirty="0">
                         <a:latin typeface="Arial" charset="0"/>
@@ -12162,7 +12162,7 @@
                 <a:ea typeface="Arial" pitchFamily="34" charset="-122"/>
                 <a:cs typeface="Arial" pitchFamily="34" charset="-120"/>
               </a:rPr>
-              <a:t>Gastro unter Wohnungen: Schallschutz der Decke, leise Technik, Abluft der Küche über Dach. Nutzungszeiten der Terrasse klären.</a:t>
+              <a:t>Gastro unter Wohnungen: Schallschutz der Decke, leise Technik, Abluft der kleinen Küche über Dach. Nutzungszeiten der Terrasse klären.</a:t>
             </a:r>
             <a:endParaRPr lang="en-US" sz="1300" dirty="0"/>
           </a:p>
@@ -12372,7 +12372,7 @@
                 <a:ea typeface="Arial" pitchFamily="34" charset="-122"/>
                 <a:cs typeface="Arial" pitchFamily="34" charset="-120"/>
               </a:rPr>
-              <a:t>Keine Marktdaten für Werlte. Erfahrener Betreiber oder Küchenchef früh gewinnen, Probebetrieb und vorsichtiger Start.</a:t>
+              <a:t>Keine Marktdaten für Werlte. Erfahrener Betreiber oder Barchef früh gewinnen, Probebetrieb und vorsichtiger Start.</a:t>
             </a:r>
             <a:endParaRPr lang="en-US" sz="1300" dirty="0"/>
           </a:p>
@@ -12661,7 +12661,7 @@
                 <a:ea typeface="Arial" pitchFamily="34" charset="-122"/>
                 <a:cs typeface="Arial" pitchFamily="34" charset="-120"/>
               </a:rPr>
-              <a:t>Name, Marke und Zielgruppe festlegen, Betreiber oder Küchenchef ansprechen</a:t>
+              <a:t>Name, Marke und Zielgruppe festlegen, Betreiber oder Barchef ansprechen</a:t>
             </a:r>
             <a:endParaRPr lang="en-US" sz="1500" dirty="0"/>
           </a:p>
@@ -13623,7 +13623,7 @@
                 <a:ea typeface="Arial" pitchFamily="34" charset="-122"/>
                 <a:cs typeface="Arial" pitchFamily="34" charset="-120"/>
               </a:rPr>
-              <a:t>Frühstück, Brunch am Wochenende und Mittagstisch am Marktplatz. Regional, frisch, schnell für Beschäftigte aus Rathaus und Umgebung.</a:t>
+              <a:t>Frühstück, Brunch am Wochenende und Bowls, Salate und Suppe zum Mittag. Frisch, schnell, fair im Preis für Beschäftigte aus Rathaus und Umgebung.</a:t>
             </a:r>
             <a:endParaRPr lang="en-US" sz="1400" dirty="0"/>
           </a:p>
@@ -13631,7 +13631,7 @@
       </p:sp>
       <p:sp>
         <p:nvSpPr>
-          <p:cNvPr id="8" name="Abends (Hauptfokus)"/>
+          <p:cNvPr id="8" name="Abends: Bar mit Snacks"/>
           <p:cNvSpPr/>
           <p:nvPr/>
         </p:nvSpPr>
@@ -13689,7 +13689,7 @@
                 <a:ea typeface="Georgia" pitchFamily="34" charset="-122"/>
                 <a:cs typeface="Georgia" pitchFamily="34" charset="-120"/>
               </a:rPr>
-              <a:t>Abends (Hauptfokus)</a:t>
+              <a:t>Abends: Bar mit Snacks</a:t>
             </a:r>
             <a:endParaRPr lang="en-US" sz="2000" dirty="0"/>
           </a:p>
@@ -13728,7 +13728,7 @@
                 <a:ea typeface="Arial" pitchFamily="34" charset="-122"/>
                 <a:cs typeface="Arial" pitchFamily="34" charset="-120"/>
               </a:rPr>
-              <a:t>Moderne, regionale Küche in warmer, dunkler Atmosphäre mit Cognac-Banketten und Kerzenlicht. Der Abend bringt ca. 75 % vom Umsatz.</a:t>
+              <a:t>Bar mit Snacks in warmer, dunkler Atmosphäre mit Cognac-Banketten und Kerzenlicht, keine große Restaurantküche. Der Abend bringt ca. 61 % vom Umsatz.</a:t>
             </a:r>
             <a:endParaRPr lang="en-US" sz="1400" dirty="0"/>
           </a:p>
@@ -13736,7 +13736,7 @@
       </p:sp>
       <p:sp>
         <p:nvSpPr>
-          <p:cNvPr id="11" name="Bar und Feiern"/>
+          <p:cNvPr id="11" name="Cocktails und Events"/>
           <p:cNvSpPr/>
           <p:nvPr/>
         </p:nvSpPr>
@@ -13794,7 +13794,7 @@
                 <a:ea typeface="Georgia" pitchFamily="34" charset="-122"/>
                 <a:cs typeface="Georgia" pitchFamily="34" charset="-120"/>
               </a:rPr>
-              <a:t>Bar und Feiern</a:t>
+              <a:t>Cocktails und Events</a:t>
             </a:r>
             <a:endParaRPr lang="en-US" sz="2000" dirty="0"/>
           </a:p>
@@ -13833,7 +13833,7 @@
                 <a:ea typeface="Arial" pitchFamily="34" charset="-122"/>
                 <a:cs typeface="Arial" pitchFamily="34" charset="-120"/>
               </a:rPr>
-              <a:t>Ab 21 Uhr Cocktails, Wein und Bier an der Theke, Fr und Sa bis 01 Uhr. Live-Abende, Séparée mit 30 Plätzen für Feiern.</a:t>
+              <a:t>Cocktails, Wein und Bier an der großen Theke, Fr und Sa bis 01 Uhr. Live-Musik, Séparée mit 30 Plätzen für Feiern.</a:t>
             </a:r>
             <a:endParaRPr lang="en-US" sz="1400" dirty="0"/>
           </a:p>
@@ -14292,7 +14292,7 @@
                 <a:ea typeface="Arial" pitchFamily="34" charset="-122"/>
                 <a:cs typeface="Arial" pitchFamily="34" charset="-120"/>
               </a:rPr>
-              <a:t>Arbeitstitel: Bar-Restaurant am Marktplatz. Ein Name und eine Marke sind noch offen.</a:t>
+              <a:t>Arbeitstitel: Café und Bar am Marktplatz. Ein Name und eine Marke sind noch offen.</a:t>
             </a:r>
             <a:endParaRPr lang="en-US" sz="1300" dirty="0"/>
           </a:p>
@@ -15614,7 +15614,7 @@
                           <a:ea typeface="Arial" pitchFamily="34" charset="-122"/>
                           <a:cs typeface="Arial" pitchFamily="34" charset="-120"/>
                         </a:rPr>
-                        <a:t>Terrasse, Kaffee, regionale Küche</a:t>
+                        <a:t>Terrasse, Kaffee, Bowls</a:t>
                       </a:r>
                       <a:endParaRPr lang="en-US" sz="1250" dirty="0">
                         <a:latin typeface="Arial" charset="0"/>
@@ -16407,7 +16407,7 @@
                           <a:ea typeface="Arial" pitchFamily="34" charset="-122"/>
                           <a:cs typeface="Arial" pitchFamily="34" charset="-120"/>
                         </a:rPr>
-                        <a:t>Mittagstisch, Tagesgericht, Suppe</a:t>
+                        <a:t>Bowls, Salate, Suppe des Tages</a:t>
                       </a:r>
                       <a:endParaRPr lang="en-US" sz="1250" dirty="0">
                         <a:latin typeface="Arial" charset="0"/>
@@ -16539,7 +16539,7 @@
                           <a:ea typeface="Arial" pitchFamily="34" charset="-122"/>
                           <a:cs typeface="Arial" pitchFamily="34" charset="-120"/>
                         </a:rPr>
-                        <a:t>14:30–17:30</a:t>
+                        <a:t>14:30–17:00</a:t>
                       </a:r>
                       <a:endParaRPr lang="en-US" sz="1250" dirty="0">
                         <a:latin typeface="Arial" charset="0"/>
@@ -16604,7 +16604,7 @@
                           <a:ea typeface="Arial" pitchFamily="34" charset="-122"/>
                           <a:cs typeface="Arial" pitchFamily="34" charset="-120"/>
                         </a:rPr>
-                        <a:t>Kaffee, Kuchen, kleine Karte</a:t>
+                        <a:t>Kaffee, Kuchen, kleine Snacks</a:t>
                       </a:r>
                       <a:endParaRPr lang="en-US" sz="1250" dirty="0">
                         <a:latin typeface="Arial" charset="0"/>
@@ -16736,7 +16736,7 @@
                           <a:ea typeface="Arial" pitchFamily="34" charset="-122"/>
                           <a:cs typeface="Arial" pitchFamily="34" charset="-120"/>
                         </a:rPr>
-                        <a:t>17:30–22:00 (Di–So)</a:t>
+                        <a:t>ab 17:00 (Di–Do, So bis 22:00)</a:t>
                       </a:r>
                       <a:endParaRPr lang="en-US" sz="1250" dirty="0">
                         <a:latin typeface="Arial" charset="0"/>
@@ -16801,7 +16801,7 @@
                           <a:ea typeface="Arial" pitchFamily="34" charset="-122"/>
                           <a:cs typeface="Arial" pitchFamily="34" charset="-120"/>
                         </a:rPr>
-                        <a:t>Abendessen, Wein, Bier</a:t>
+                        <a:t>Bar mit Snacks, Wein, Bier, Cocktails</a:t>
                       </a:r>
                       <a:endParaRPr lang="en-US" sz="1250" dirty="0">
                         <a:latin typeface="Arial" charset="0"/>
@@ -16933,7 +16933,7 @@
                           <a:ea typeface="Arial" pitchFamily="34" charset="-122"/>
                           <a:cs typeface="Arial" pitchFamily="34" charset="-120"/>
                         </a:rPr>
-                        <a:t>ab 21:00 (Fr, Sa bis 01:00)</a:t>
+                        <a:t>Fr, Sa bis 01:00</a:t>
                       </a:r>
                       <a:endParaRPr lang="en-US" sz="1250" dirty="0">
                         <a:latin typeface="Arial" charset="0"/>
@@ -16998,7 +16998,7 @@
                           <a:ea typeface="Arial" pitchFamily="34" charset="-122"/>
                           <a:cs typeface="Arial" pitchFamily="34" charset="-120"/>
                         </a:rPr>
-                        <a:t>Bar, Cocktails, Live-Abende, leise Musik</a:t>
+                        <a:t>Bar, Cocktails, Snacks, Live-Musik</a:t>
                       </a:r>
                       <a:endParaRPr lang="en-US" sz="1250" dirty="0">
                         <a:latin typeface="Arial" charset="0"/>
@@ -17450,7 +17450,7 @@
                 <a:ea typeface="Arial" pitchFamily="34" charset="-122"/>
                 <a:cs typeface="Arial" pitchFamily="34" charset="-120"/>
               </a:rPr>
-              <a:t>Eggs Benedict 13,90 €</a:t>
+              <a:t>Avocado-Toast mit Ei 10,90 €</a:t>
             </a:r>
             <a:endParaRPr lang="en-US" sz="1300" dirty="0"/>
           </a:p>
@@ -17500,7 +17500,7 @@
       </p:sp>
       <p:sp>
         <p:nvSpPr>
-          <p:cNvPr id="8" name="Mittagstisch"/>
+          <p:cNvPr id="8" name="Bowls und Mittag"/>
           <p:cNvSpPr/>
           <p:nvPr/>
         </p:nvSpPr>
@@ -17558,7 +17558,7 @@
                 <a:ea typeface="Georgia" pitchFamily="34" charset="-122"/>
                 <a:cs typeface="Georgia" pitchFamily="34" charset="-120"/>
               </a:rPr>
-              <a:t>Mittagstisch</a:t>
+              <a:t>Bowls und Mittag</a:t>
             </a:r>
             <a:endParaRPr lang="en-US" sz="1700" dirty="0"/>
           </a:p>
@@ -17601,7 +17601,7 @@
                 <a:ea typeface="Arial" pitchFamily="34" charset="-122"/>
                 <a:cs typeface="Arial" pitchFamily="34" charset="-120"/>
               </a:rPr>
-              <a:t>Tagesgericht 10,90–13,90 €</a:t>
+              <a:t>Bowl mit Huhn und Gemüse 12,90 €</a:t>
             </a:r>
             <a:endParaRPr lang="en-US" sz="1300" dirty="0"/>
           </a:p>
@@ -17622,7 +17622,179 @@
                 <a:ea typeface="Arial" pitchFamily="34" charset="-122"/>
                 <a:cs typeface="Arial" pitchFamily="34" charset="-120"/>
               </a:rPr>
-              <a:t>Bowl mit Gemüse und Huhn 12,90 €</a:t>
+              <a:t>Vegane Bowl 11,90 €</a:t>
+            </a:r>
+            <a:endParaRPr lang="en-US" sz="1300" dirty="0"/>
+          </a:p>
+          <a:p>
+            <a:pPr marL="342900" indent="-342900">
+              <a:spcAft>
+                <a:spcPts val="600"/>
+              </a:spcAft>
+              <a:buSzPct val="100000"/>
+              <a:buChar char="•"/>
+            </a:pPr>
+            <a:r>
+              <a:rPr lang="en-US" sz="1300" dirty="0">
+                <a:solidFill>
+                  <a:schemeClr val="tx1"/>
+                </a:solidFill>
+                <a:latin typeface="Arial" pitchFamily="34" charset="0"/>
+                <a:ea typeface="Arial" pitchFamily="34" charset="-122"/>
+                <a:cs typeface="Arial" pitchFamily="34" charset="-120"/>
+              </a:rPr>
+              <a:t>Salat mit Topping 10,90 €</a:t>
+            </a:r>
+            <a:endParaRPr lang="en-US" sz="1300" dirty="0"/>
+          </a:p>
+          <a:p>
+            <a:pPr marL="342900" indent="-342900">
+              <a:spcAft>
+                <a:spcPts val="600"/>
+              </a:spcAft>
+              <a:buSzPct val="100000"/>
+              <a:buChar char="•"/>
+            </a:pPr>
+            <a:r>
+              <a:rPr lang="en-US" sz="1300" dirty="0">
+                <a:solidFill>
+                  <a:schemeClr val="tx1"/>
+                </a:solidFill>
+                <a:latin typeface="Arial" pitchFamily="34" charset="0"/>
+                <a:ea typeface="Arial" pitchFamily="34" charset="-122"/>
+                <a:cs typeface="Arial" pitchFamily="34" charset="-120"/>
+              </a:rPr>
+              <a:t>Suppe des Tages 6,50 €</a:t>
+            </a:r>
+            <a:endParaRPr lang="en-US" sz="1300" dirty="0"/>
+          </a:p>
+        </p:txBody>
+      </p:sp>
+      <p:sp>
+        <p:nvSpPr>
+          <p:cNvPr id="11" name="Snacks zur Bar"/>
+          <p:cNvSpPr/>
+          <p:nvPr/>
+        </p:nvSpPr>
+        <p:spPr>
+          <a:xfrm>
+            <a:off x="6231636" y="1371600"/>
+            <a:ext cx="2567178" cy="3657600"/>
+          </a:xfrm>
+          <a:prstGeom prst="roundRect">
+            <a:avLst>
+              <a:gd name="adj" fmla="val 2850"/>
+            </a:avLst>
+          </a:prstGeom>
+          <a:solidFill>
+            <a:schemeClr val="bg2"/>
+          </a:solidFill>
+          <a:ln w="12700">
+            <a:solidFill>
+              <a:schemeClr val="bg2"/>
+            </a:solidFill>
+            <a:prstDash val="solid"/>
+          </a:ln>
+        </p:spPr>
+      </p:sp>
+      <p:sp>
+        <p:nvSpPr>
+          <p:cNvPr id="12" name="Text 9"/>
+          <p:cNvSpPr txBox="1"/>
+          <p:nvPr/>
+        </p:nvSpPr>
+        <p:spPr>
+          <a:xfrm>
+            <a:off x="6414516" y="1481328"/>
+            <a:ext cx="2201418" cy="457200"/>
+          </a:xfrm>
+          <a:prstGeom prst="rect">
+            <a:avLst/>
+          </a:prstGeom>
+          <a:noFill/>
+          <a:ln/>
+        </p:spPr>
+        <p:txBody>
+          <a:bodyPr wrap="square" lIns="0" tIns="0" rIns="0" bIns="0" rtlCol="0" anchor="t"/>
+          <a:lstStyle/>
+          <a:p>
+            <a:pPr indent="0" marL="0">
+              <a:buNone/>
+            </a:pPr>
+            <a:r>
+              <a:rPr lang="en-US" sz="1700" dirty="0">
+                <a:solidFill>
+                  <a:schemeClr val="accent1"/>
+                </a:solidFill>
+                <a:latin typeface="Georgia" pitchFamily="34" charset="0"/>
+                <a:ea typeface="Georgia" pitchFamily="34" charset="-122"/>
+                <a:cs typeface="Georgia" pitchFamily="34" charset="-120"/>
+              </a:rPr>
+              <a:t>Snacks zur Bar</a:t>
+            </a:r>
+            <a:endParaRPr lang="en-US" sz="1700" dirty="0"/>
+          </a:p>
+        </p:txBody>
+      </p:sp>
+      <p:sp>
+        <p:nvSpPr>
+          <p:cNvPr id="13" name="Text 10"/>
+          <p:cNvSpPr txBox="1"/>
+          <p:nvPr/>
+        </p:nvSpPr>
+        <p:spPr>
+          <a:xfrm>
+            <a:off x="6414516" y="2011680"/>
+            <a:ext cx="2201418" cy="2926080"/>
+          </a:xfrm>
+          <a:prstGeom prst="rect">
+            <a:avLst/>
+          </a:prstGeom>
+          <a:noFill/>
+          <a:ln/>
+        </p:spPr>
+        <p:txBody>
+          <a:bodyPr wrap="square" lIns="0" tIns="0" rIns="0" bIns="0" rtlCol="0" anchor="t"/>
+          <a:lstStyle/>
+          <a:p>
+            <a:pPr marL="342900" indent="-342900">
+              <a:spcAft>
+                <a:spcPts val="600"/>
+              </a:spcAft>
+              <a:buSzPct val="100000"/>
+              <a:buChar char="•"/>
+            </a:pPr>
+            <a:r>
+              <a:rPr lang="en-US" sz="1300" dirty="0">
+                <a:solidFill>
+                  <a:schemeClr val="tx1"/>
+                </a:solidFill>
+                <a:latin typeface="Arial" pitchFamily="34" charset="0"/>
+                <a:ea typeface="Arial" pitchFamily="34" charset="-122"/>
+                <a:cs typeface="Arial" pitchFamily="34" charset="-120"/>
+              </a:rPr>
+              <a:t>Nachos mit Dip 8,90 €</a:t>
+            </a:r>
+            <a:endParaRPr lang="en-US" sz="1300" dirty="0"/>
+          </a:p>
+          <a:p>
+            <a:pPr marL="342900" indent="-342900">
+              <a:spcAft>
+                <a:spcPts val="600"/>
+              </a:spcAft>
+              <a:buSzPct val="100000"/>
+              <a:buChar char="•"/>
+            </a:pPr>
+            <a:r>
+              <a:rPr lang="en-US" sz="1300" dirty="0">
+                <a:solidFill>
+                  <a:schemeClr val="tx1"/>
+                </a:solidFill>
+                <a:latin typeface="Arial" pitchFamily="34" charset="0"/>
+                <a:ea typeface="Arial" pitchFamily="34" charset="-122"/>
+                <a:cs typeface="Arial" pitchFamily="34" charset="-120"/>
+              </a:rPr>
+              <a:t>Käse- und Wurstplatte 14,90 €</a:t>
             </a:r>
             <a:endParaRPr lang="en-US" sz="1300" dirty="0"/>
           </a:p>
@@ -17664,116 +17836,7 @@
                 <a:ea typeface="Arial" pitchFamily="34" charset="-122"/>
                 <a:cs typeface="Arial" pitchFamily="34" charset="-120"/>
               </a:rPr>
-              <a:t>Suppe des Tages 6,50 €</a:t>
-            </a:r>
-            <a:endParaRPr lang="en-US" sz="1300" dirty="0"/>
-          </a:p>
-        </p:txBody>
-      </p:sp>
-      <p:sp>
-        <p:nvSpPr>
-          <p:cNvPr id="11" name="Abendkarte"/>
-          <p:cNvSpPr/>
-          <p:nvPr/>
-        </p:nvSpPr>
-        <p:spPr>
-          <a:xfrm>
-            <a:off x="6231636" y="1371600"/>
-            <a:ext cx="2567178" cy="3657600"/>
-          </a:xfrm>
-          <a:prstGeom prst="roundRect">
-            <a:avLst>
-              <a:gd name="adj" fmla="val 2850"/>
-            </a:avLst>
-          </a:prstGeom>
-          <a:solidFill>
-            <a:schemeClr val="bg2"/>
-          </a:solidFill>
-          <a:ln w="12700">
-            <a:solidFill>
-              <a:schemeClr val="bg2"/>
-            </a:solidFill>
-            <a:prstDash val="solid"/>
-          </a:ln>
-        </p:spPr>
-      </p:sp>
-      <p:sp>
-        <p:nvSpPr>
-          <p:cNvPr id="12" name="Text 9"/>
-          <p:cNvSpPr txBox="1"/>
-          <p:nvPr/>
-        </p:nvSpPr>
-        <p:spPr>
-          <a:xfrm>
-            <a:off x="6414516" y="1481328"/>
-            <a:ext cx="2201418" cy="457200"/>
-          </a:xfrm>
-          <a:prstGeom prst="rect">
-            <a:avLst/>
-          </a:prstGeom>
-          <a:noFill/>
-          <a:ln/>
-        </p:spPr>
-        <p:txBody>
-          <a:bodyPr wrap="square" lIns="0" tIns="0" rIns="0" bIns="0" rtlCol="0" anchor="t"/>
-          <a:lstStyle/>
-          <a:p>
-            <a:pPr indent="0" marL="0">
-              <a:buNone/>
-            </a:pPr>
-            <a:r>
-              <a:rPr lang="en-US" sz="1700" dirty="0">
-                <a:solidFill>
-                  <a:schemeClr val="accent1"/>
-                </a:solidFill>
-                <a:latin typeface="Georgia" pitchFamily="34" charset="0"/>
-                <a:ea typeface="Georgia" pitchFamily="34" charset="-122"/>
-                <a:cs typeface="Georgia" pitchFamily="34" charset="-120"/>
-              </a:rPr>
-              <a:t>Abendkarte</a:t>
-            </a:r>
-            <a:endParaRPr lang="en-US" sz="1700" dirty="0"/>
-          </a:p>
-        </p:txBody>
-      </p:sp>
-      <p:sp>
-        <p:nvSpPr>
-          <p:cNvPr id="13" name="Text 10"/>
-          <p:cNvSpPr txBox="1"/>
-          <p:nvPr/>
-        </p:nvSpPr>
-        <p:spPr>
-          <a:xfrm>
-            <a:off x="6414516" y="2011680"/>
-            <a:ext cx="2201418" cy="2926080"/>
-          </a:xfrm>
-          <a:prstGeom prst="rect">
-            <a:avLst/>
-          </a:prstGeom>
-          <a:noFill/>
-          <a:ln/>
-        </p:spPr>
-        <p:txBody>
-          <a:bodyPr wrap="square" lIns="0" tIns="0" rIns="0" bIns="0" rtlCol="0" anchor="t"/>
-          <a:lstStyle/>
-          <a:p>
-            <a:pPr marL="342900" indent="-342900">
-              <a:spcAft>
-                <a:spcPts val="600"/>
-              </a:spcAft>
-              <a:buSzPct val="100000"/>
-              <a:buChar char="•"/>
-            </a:pPr>
-            <a:r>
-              <a:rPr lang="en-US" sz="1300" dirty="0">
-                <a:solidFill>
-                  <a:schemeClr val="tx1"/>
-                </a:solidFill>
-                <a:latin typeface="Arial" pitchFamily="34" charset="0"/>
-                <a:ea typeface="Arial" pitchFamily="34" charset="-122"/>
-                <a:cs typeface="Arial" pitchFamily="34" charset="-120"/>
-              </a:rPr>
-              <a:t>Burrata mit Tomaten 11,90 €</a:t>
+              <a:t>Bruschetta 7,90 €</a:t>
             </a:r>
             <a:endParaRPr lang="en-US" sz="1300" dirty="0"/>
           </a:p>
@@ -17794,7 +17857,7 @@
                 <a:ea typeface="Arial" pitchFamily="34" charset="-122"/>
                 <a:cs typeface="Arial" pitchFamily="34" charset="-120"/>
               </a:rPr>
-              <a:t>Burger vom Weiderind 16,90 €</a:t>
+              <a:t>Chicken Wings 9,90 €</a:t>
             </a:r>
             <a:endParaRPr lang="en-US" sz="1300" dirty="0"/>
           </a:p>
@@ -17815,70 +17878,7 @@
                 <a:ea typeface="Arial" pitchFamily="34" charset="-122"/>
                 <a:cs typeface="Arial" pitchFamily="34" charset="-120"/>
               </a:rPr>
-              <a:t>Schnitzel, regional 18,90 €</a:t>
-            </a:r>
-            <a:endParaRPr lang="en-US" sz="1300" dirty="0"/>
-          </a:p>
-          <a:p>
-            <a:pPr marL="342900" indent="-342900">
-              <a:spcAft>
-                <a:spcPts val="600"/>
-              </a:spcAft>
-              <a:buSzPct val="100000"/>
-              <a:buChar char="•"/>
-            </a:pPr>
-            <a:r>
-              <a:rPr lang="en-US" sz="1300" dirty="0">
-                <a:solidFill>
-                  <a:schemeClr val="tx1"/>
-                </a:solidFill>
-                <a:latin typeface="Arial" pitchFamily="34" charset="0"/>
-                <a:ea typeface="Arial" pitchFamily="34" charset="-122"/>
-                <a:cs typeface="Arial" pitchFamily="34" charset="-120"/>
-              </a:rPr>
-              <a:t>Pasta, vegetarisch 14,90 €</a:t>
-            </a:r>
-            <a:endParaRPr lang="en-US" sz="1300" dirty="0"/>
-          </a:p>
-          <a:p>
-            <a:pPr marL="342900" indent="-342900">
-              <a:spcAft>
-                <a:spcPts val="600"/>
-              </a:spcAft>
-              <a:buSzPct val="100000"/>
-              <a:buChar char="•"/>
-            </a:pPr>
-            <a:r>
-              <a:rPr lang="en-US" sz="1300" dirty="0">
-                <a:solidFill>
-                  <a:schemeClr val="tx1"/>
-                </a:solidFill>
-                <a:latin typeface="Arial" pitchFamily="34" charset="0"/>
-                <a:ea typeface="Arial" pitchFamily="34" charset="-122"/>
-                <a:cs typeface="Arial" pitchFamily="34" charset="-120"/>
-              </a:rPr>
-              <a:t>Steak mit Beilage 29,90 €</a:t>
-            </a:r>
-            <a:endParaRPr lang="en-US" sz="1300" dirty="0"/>
-          </a:p>
-          <a:p>
-            <a:pPr marL="342900" indent="-342900">
-              <a:spcAft>
-                <a:spcPts val="600"/>
-              </a:spcAft>
-              <a:buSzPct val="100000"/>
-              <a:buChar char="•"/>
-            </a:pPr>
-            <a:r>
-              <a:rPr lang="en-US" sz="1300" dirty="0">
-                <a:solidFill>
-                  <a:schemeClr val="tx1"/>
-                </a:solidFill>
-                <a:latin typeface="Arial" pitchFamily="34" charset="0"/>
-                <a:ea typeface="Arial" pitchFamily="34" charset="-122"/>
-                <a:cs typeface="Arial" pitchFamily="34" charset="-120"/>
-              </a:rPr>
-              <a:t>Dessert 7,90 €</a:t>
+              <a:t>Süßkartoffel-Pommes 6,90 €</a:t>
             </a:r>
             <a:endParaRPr lang="en-US" sz="1300" dirty="0"/>
           </a:p>
@@ -18110,7 +18110,7 @@
                 <a:ea typeface="Arial" pitchFamily="34" charset="-122"/>
                 <a:cs typeface="Arial" pitchFamily="34" charset="-120"/>
               </a:rPr>
-              <a:t>Durchschnittlicher Bon (Annahme): Frühstück 11 €, Brunch 14 €, Mittag 14 €, Abendessen 32 €, Bar 18–22 €, Feiern 45 €.</a:t>
+              <a:t>Durchschnittlicher Bon (Annahme): Frühstück 11 €, Brunch 14 €, Bowls 13 €, Kaffee 7 €, Bar mit Snacks 20–26 €, Events 40 €.</a:t>
             </a:r>
             <a:endParaRPr lang="en-US" sz="1400" dirty="0"/>
           </a:p>
@@ -18221,7 +18221,7 @@
                 <a:ea typeface="Georgia" pitchFamily="34" charset="-122"/>
                 <a:cs typeface="Georgia" pitchFamily="34" charset="-120"/>
               </a:rPr>
-              <a:t>Hauptfokus Abend: Restaurant und Bar</a:t>
+              <a:t>Hauptfokus Abend: Bar mit Snacks</a:t>
             </a:r>
             <a:endParaRPr lang="en-US" sz="2700" dirty="0"/>
           </a:p>
@@ -18323,7 +18323,7 @@
                 <a:ea typeface="Arial" pitchFamily="34" charset="-122"/>
                 <a:cs typeface="Arial" pitchFamily="34" charset="-120"/>
               </a:rPr>
-              <a:t>Restaurant (17:30–22:00)</a:t>
+              <a:t>Snacks (kleine Küche)</a:t>
             </a:r>
             <a:endParaRPr lang="en-US" sz="1300" dirty="0"/>
           </a:p>
@@ -18344,7 +18344,7 @@
                 <a:ea typeface="Arial" pitchFamily="34" charset="-122"/>
                 <a:cs typeface="Arial" pitchFamily="34" charset="-120"/>
               </a:rPr>
-              <a:t>Kurze, moderne Karte mit regionalen Zutaten, Steaks und Burger, Wein-Empfehlung zum Essen</a:t>
+              <a:t>Kurze Snackkarte: Platten, Flammkuchen, Nachos, Wings, Bruschetta</a:t>
             </a:r>
             <a:endParaRPr lang="en-US" sz="1300" dirty="0"/>
           </a:p>
@@ -18365,7 +18365,7 @@
                 <a:ea typeface="Arial" pitchFamily="34" charset="-122"/>
                 <a:cs typeface="Arial" pitchFamily="34" charset="-120"/>
               </a:rPr>
-              <a:t>Reservierung für Gruppen, Tische für zwei bis acht</a:t>
+              <a:t>Gäste teilen und bleiben, dadurch mehr Getränkeumsatz</a:t>
             </a:r>
             <a:endParaRPr lang="en-US" sz="1300" dirty="0"/>
           </a:p>
@@ -18385,7 +18385,7 @@
                 <a:ea typeface="Arial" pitchFamily="34" charset="-122"/>
                 <a:cs typeface="Arial" pitchFamily="34" charset="-120"/>
               </a:rPr>
-              <a:t>Bar (ab 21:00, Fr und Sa bis 01:00)</a:t>
+              <a:t>Bar (ab 17:00, Fr und Sa bis 01:00)</a:t>
             </a:r>
             <a:endParaRPr lang="en-US" sz="1300" dirty="0"/>
           </a:p>
@@ -18863,7 +18863,7 @@
                           <a:ea typeface="Arial" pitchFamily="34" charset="-122"/>
                           <a:cs typeface="Arial" pitchFamily="34" charset="-120"/>
                         </a:rPr>
-                        <a:t>Abendessen Restaurant</a:t>
+                        <a:t>Bar mit Snacks Di–Do, So</a:t>
                       </a:r>
                       <a:endParaRPr lang="en-US" sz="1250" dirty="0">
                         <a:latin typeface="Arial" charset="0"/>
@@ -18928,7 +18928,7 @@
                           <a:ea typeface="Arial" pitchFamily="34" charset="-122"/>
                           <a:cs typeface="Arial" pitchFamily="34" charset="-120"/>
                         </a:rPr>
-                        <a:t>26</a:t>
+                        <a:t>17</a:t>
                       </a:r>
                       <a:endParaRPr lang="en-US" sz="1250" dirty="0">
                         <a:latin typeface="Arial" charset="0"/>
@@ -18993,7 +18993,7 @@
                           <a:ea typeface="Arial" pitchFamily="34" charset="-122"/>
                           <a:cs typeface="Arial" pitchFamily="34" charset="-120"/>
                         </a:rPr>
-                        <a:t>55</a:t>
+                        <a:t>35</a:t>
                       </a:r>
                       <a:endParaRPr lang="en-US" sz="1250" dirty="0">
                         <a:latin typeface="Arial" charset="0"/>
@@ -19058,7 +19058,7 @@
                           <a:ea typeface="Arial" pitchFamily="34" charset="-122"/>
                           <a:cs typeface="Arial" pitchFamily="34" charset="-120"/>
                         </a:rPr>
-                        <a:t>32 €</a:t>
+                        <a:t>20 €</a:t>
                       </a:r>
                       <a:endParaRPr lang="en-US" sz="1250" dirty="0">
                         <a:latin typeface="Arial" charset="0"/>
@@ -19123,334 +19123,7 @@
                           <a:ea typeface="Arial" pitchFamily="34" charset="-122"/>
                           <a:cs typeface="Arial" pitchFamily="34" charset="-120"/>
                         </a:rPr>
-                        <a:t>45.760 €</a:t>
-                      </a:r>
-                      <a:endParaRPr lang="en-US" sz="1250" dirty="0">
-                        <a:latin typeface="Arial" charset="0"/>
-                        <a:ea typeface="Arial" charset="0"/>
-                        <a:cs typeface="Arial" charset="0"/>
-                      </a:endParaRPr>
-                    </a:p>
-                  </a:txBody>
-                  <a:tcPr marL="91440" marR="91440" marT="45720" marB="45720">
-                    <a:lnL w="12700" cap="flat" cmpd="sng" algn="ctr">
-                      <a:solidFill>
-                        <a:srgbClr val="FFFFFF"/>
-                      </a:solidFill>
-                      <a:prstDash val="solid"/>
-                      <a:round/>
-                      <a:headEnd type="none" w="med" len="med"/>
-                      <a:tailEnd type="none" w="med" len="med"/>
-                    </a:lnL>
-                    <a:lnR w="12700" cap="flat" cmpd="sng" algn="ctr">
-                      <a:solidFill>
-                        <a:srgbClr val="FFFFFF"/>
-                      </a:solidFill>
-                      <a:prstDash val="solid"/>
-                      <a:round/>
-                      <a:headEnd type="none" w="med" len="med"/>
-                      <a:tailEnd type="none" w="med" len="med"/>
-                    </a:lnR>
-                    <a:lnT w="12700" cap="flat" cmpd="sng" algn="ctr">
-                      <a:solidFill>
-                        <a:srgbClr val="FFFFFF"/>
-                      </a:solidFill>
-                      <a:prstDash val="solid"/>
-                      <a:round/>
-                      <a:headEnd type="none" w="med" len="med"/>
-                      <a:tailEnd type="none" w="med" len="med"/>
-                    </a:lnT>
-                    <a:lnB w="12700" cap="flat" cmpd="sng" algn="ctr">
-                      <a:solidFill>
-                        <a:srgbClr val="FFFFFF"/>
-                      </a:solidFill>
-                      <a:prstDash val="solid"/>
-                      <a:round/>
-                      <a:headEnd type="none" w="med" len="med"/>
-                      <a:tailEnd type="none" w="med" len="med"/>
-                    </a:lnB>
-                  </a:tcPr>
-                </a:tc>
-              </a:tr>
-              <a:tr h="246888">
-                <a:tc>
-                  <a:txBody>
-                    <a:bodyPr/>
-                    <a:lstStyle/>
-                    <a:p>
-                      <a:pPr indent="0" marL="0">
-                        <a:buNone/>
-                      </a:pPr>
-                      <a:r>
-                        <a:rPr lang="en-US" sz="1250" dirty="0">
-                          <a:solidFill>
-                            <a:srgbClr val="000000"/>
-                          </a:solidFill>
-                          <a:latin typeface="Arial" pitchFamily="34" charset="0"/>
-                          <a:ea typeface="Arial" pitchFamily="34" charset="-122"/>
-                          <a:cs typeface="Arial" pitchFamily="34" charset="-120"/>
-                        </a:rPr>
-                        <a:t>Bar Di–Do</a:t>
-                      </a:r>
-                      <a:endParaRPr lang="en-US" sz="1250" dirty="0">
-                        <a:latin typeface="Arial" charset="0"/>
-                        <a:ea typeface="Arial" charset="0"/>
-                        <a:cs typeface="Arial" charset="0"/>
-                      </a:endParaRPr>
-                    </a:p>
-                  </a:txBody>
-                  <a:tcPr marL="91440" marR="91440" marT="45720" marB="45720">
-                    <a:lnL w="12700" cap="flat" cmpd="sng" algn="ctr">
-                      <a:solidFill>
-                        <a:srgbClr val="FFFFFF"/>
-                      </a:solidFill>
-                      <a:prstDash val="solid"/>
-                      <a:round/>
-                      <a:headEnd type="none" w="med" len="med"/>
-                      <a:tailEnd type="none" w="med" len="med"/>
-                    </a:lnL>
-                    <a:lnR w="12700" cap="flat" cmpd="sng" algn="ctr">
-                      <a:solidFill>
-                        <a:srgbClr val="FFFFFF"/>
-                      </a:solidFill>
-                      <a:prstDash val="solid"/>
-                      <a:round/>
-                      <a:headEnd type="none" w="med" len="med"/>
-                      <a:tailEnd type="none" w="med" len="med"/>
-                    </a:lnR>
-                    <a:lnT w="12700" cap="flat" cmpd="sng" algn="ctr">
-                      <a:solidFill>
-                        <a:srgbClr val="FFFFFF"/>
-                      </a:solidFill>
-                      <a:prstDash val="solid"/>
-                      <a:round/>
-                      <a:headEnd type="none" w="med" len="med"/>
-                      <a:tailEnd type="none" w="med" len="med"/>
-                    </a:lnT>
-                    <a:lnB w="12700" cap="flat" cmpd="sng" algn="ctr">
-                      <a:solidFill>
-                        <a:srgbClr val="FFFFFF"/>
-                      </a:solidFill>
-                      <a:prstDash val="solid"/>
-                      <a:round/>
-                      <a:headEnd type="none" w="med" len="med"/>
-                      <a:tailEnd type="none" w="med" len="med"/>
-                    </a:lnB>
-                  </a:tcPr>
-                </a:tc>
-                <a:tc>
-                  <a:txBody>
-                    <a:bodyPr/>
-                    <a:lstStyle/>
-                    <a:p>
-                      <a:pPr algn="r" indent="0" marL="0">
-                        <a:buNone/>
-                      </a:pPr>
-                      <a:r>
-                        <a:rPr lang="en-US" sz="1250" dirty="0">
-                          <a:solidFill>
-                            <a:srgbClr val="000000"/>
-                          </a:solidFill>
-                          <a:latin typeface="Arial" pitchFamily="34" charset="0"/>
-                          <a:ea typeface="Arial" pitchFamily="34" charset="-122"/>
-                          <a:cs typeface="Arial" pitchFamily="34" charset="-120"/>
-                        </a:rPr>
-                        <a:t>13</a:t>
-                      </a:r>
-                      <a:endParaRPr lang="en-US" sz="1250" dirty="0">
-                        <a:latin typeface="Arial" charset="0"/>
-                        <a:ea typeface="Arial" charset="0"/>
-                        <a:cs typeface="Arial" charset="0"/>
-                      </a:endParaRPr>
-                    </a:p>
-                  </a:txBody>
-                  <a:tcPr marL="91440" marR="91440" marT="45720" marB="45720">
-                    <a:lnL w="12700" cap="flat" cmpd="sng" algn="ctr">
-                      <a:solidFill>
-                        <a:srgbClr val="FFFFFF"/>
-                      </a:solidFill>
-                      <a:prstDash val="solid"/>
-                      <a:round/>
-                      <a:headEnd type="none" w="med" len="med"/>
-                      <a:tailEnd type="none" w="med" len="med"/>
-                    </a:lnL>
-                    <a:lnR w="12700" cap="flat" cmpd="sng" algn="ctr">
-                      <a:solidFill>
-                        <a:srgbClr val="FFFFFF"/>
-                      </a:solidFill>
-                      <a:prstDash val="solid"/>
-                      <a:round/>
-                      <a:headEnd type="none" w="med" len="med"/>
-                      <a:tailEnd type="none" w="med" len="med"/>
-                    </a:lnR>
-                    <a:lnT w="12700" cap="flat" cmpd="sng" algn="ctr">
-                      <a:solidFill>
-                        <a:srgbClr val="FFFFFF"/>
-                      </a:solidFill>
-                      <a:prstDash val="solid"/>
-                      <a:round/>
-                      <a:headEnd type="none" w="med" len="med"/>
-                      <a:tailEnd type="none" w="med" len="med"/>
-                    </a:lnT>
-                    <a:lnB w="12700" cap="flat" cmpd="sng" algn="ctr">
-                      <a:solidFill>
-                        <a:srgbClr val="FFFFFF"/>
-                      </a:solidFill>
-                      <a:prstDash val="solid"/>
-                      <a:round/>
-                      <a:headEnd type="none" w="med" len="med"/>
-                      <a:tailEnd type="none" w="med" len="med"/>
-                    </a:lnB>
-                  </a:tcPr>
-                </a:tc>
-                <a:tc>
-                  <a:txBody>
-                    <a:bodyPr/>
-                    <a:lstStyle/>
-                    <a:p>
-                      <a:pPr algn="r" indent="0" marL="0">
-                        <a:buNone/>
-                      </a:pPr>
-                      <a:r>
-                        <a:rPr lang="en-US" sz="1250" dirty="0">
-                          <a:solidFill>
-                            <a:srgbClr val="000000"/>
-                          </a:solidFill>
-                          <a:latin typeface="Arial" pitchFamily="34" charset="0"/>
-                          <a:ea typeface="Arial" pitchFamily="34" charset="-122"/>
-                          <a:cs typeface="Arial" pitchFamily="34" charset="-120"/>
-                        </a:rPr>
-                        <a:t>20</a:t>
-                      </a:r>
-                      <a:endParaRPr lang="en-US" sz="1250" dirty="0">
-                        <a:latin typeface="Arial" charset="0"/>
-                        <a:ea typeface="Arial" charset="0"/>
-                        <a:cs typeface="Arial" charset="0"/>
-                      </a:endParaRPr>
-                    </a:p>
-                  </a:txBody>
-                  <a:tcPr marL="91440" marR="91440" marT="45720" marB="45720">
-                    <a:lnL w="12700" cap="flat" cmpd="sng" algn="ctr">
-                      <a:solidFill>
-                        <a:srgbClr val="FFFFFF"/>
-                      </a:solidFill>
-                      <a:prstDash val="solid"/>
-                      <a:round/>
-                      <a:headEnd type="none" w="med" len="med"/>
-                      <a:tailEnd type="none" w="med" len="med"/>
-                    </a:lnL>
-                    <a:lnR w="12700" cap="flat" cmpd="sng" algn="ctr">
-                      <a:solidFill>
-                        <a:srgbClr val="FFFFFF"/>
-                      </a:solidFill>
-                      <a:prstDash val="solid"/>
-                      <a:round/>
-                      <a:headEnd type="none" w="med" len="med"/>
-                      <a:tailEnd type="none" w="med" len="med"/>
-                    </a:lnR>
-                    <a:lnT w="12700" cap="flat" cmpd="sng" algn="ctr">
-                      <a:solidFill>
-                        <a:srgbClr val="FFFFFF"/>
-                      </a:solidFill>
-                      <a:prstDash val="solid"/>
-                      <a:round/>
-                      <a:headEnd type="none" w="med" len="med"/>
-                      <a:tailEnd type="none" w="med" len="med"/>
-                    </a:lnT>
-                    <a:lnB w="12700" cap="flat" cmpd="sng" algn="ctr">
-                      <a:solidFill>
-                        <a:srgbClr val="FFFFFF"/>
-                      </a:solidFill>
-                      <a:prstDash val="solid"/>
-                      <a:round/>
-                      <a:headEnd type="none" w="med" len="med"/>
-                      <a:tailEnd type="none" w="med" len="med"/>
-                    </a:lnB>
-                  </a:tcPr>
-                </a:tc>
-                <a:tc>
-                  <a:txBody>
-                    <a:bodyPr/>
-                    <a:lstStyle/>
-                    <a:p>
-                      <a:pPr algn="r" indent="0" marL="0">
-                        <a:buNone/>
-                      </a:pPr>
-                      <a:r>
-                        <a:rPr lang="en-US" sz="1250" dirty="0">
-                          <a:solidFill>
-                            <a:srgbClr val="000000"/>
-                          </a:solidFill>
-                          <a:latin typeface="Arial" pitchFamily="34" charset="0"/>
-                          <a:ea typeface="Arial" pitchFamily="34" charset="-122"/>
-                          <a:cs typeface="Arial" pitchFamily="34" charset="-120"/>
-                        </a:rPr>
-                        <a:t>18 €</a:t>
-                      </a:r>
-                      <a:endParaRPr lang="en-US" sz="1250" dirty="0">
-                        <a:latin typeface="Arial" charset="0"/>
-                        <a:ea typeface="Arial" charset="0"/>
-                        <a:cs typeface="Arial" charset="0"/>
-                      </a:endParaRPr>
-                    </a:p>
-                  </a:txBody>
-                  <a:tcPr marL="91440" marR="91440" marT="45720" marB="45720">
-                    <a:lnL w="12700" cap="flat" cmpd="sng" algn="ctr">
-                      <a:solidFill>
-                        <a:srgbClr val="FFFFFF"/>
-                      </a:solidFill>
-                      <a:prstDash val="solid"/>
-                      <a:round/>
-                      <a:headEnd type="none" w="med" len="med"/>
-                      <a:tailEnd type="none" w="med" len="med"/>
-                    </a:lnL>
-                    <a:lnR w="12700" cap="flat" cmpd="sng" algn="ctr">
-                      <a:solidFill>
-                        <a:srgbClr val="FFFFFF"/>
-                      </a:solidFill>
-                      <a:prstDash val="solid"/>
-                      <a:round/>
-                      <a:headEnd type="none" w="med" len="med"/>
-                      <a:tailEnd type="none" w="med" len="med"/>
-                    </a:lnR>
-                    <a:lnT w="12700" cap="flat" cmpd="sng" algn="ctr">
-                      <a:solidFill>
-                        <a:srgbClr val="FFFFFF"/>
-                      </a:solidFill>
-                      <a:prstDash val="solid"/>
-                      <a:round/>
-                      <a:headEnd type="none" w="med" len="med"/>
-                      <a:tailEnd type="none" w="med" len="med"/>
-                    </a:lnT>
-                    <a:lnB w="12700" cap="flat" cmpd="sng" algn="ctr">
-                      <a:solidFill>
-                        <a:srgbClr val="FFFFFF"/>
-                      </a:solidFill>
-                      <a:prstDash val="solid"/>
-                      <a:round/>
-                      <a:headEnd type="none" w="med" len="med"/>
-                      <a:tailEnd type="none" w="med" len="med"/>
-                    </a:lnB>
-                  </a:tcPr>
-                </a:tc>
-                <a:tc>
-                  <a:txBody>
-                    <a:bodyPr/>
-                    <a:lstStyle/>
-                    <a:p>
-                      <a:pPr algn="r" indent="0" marL="0">
-                        <a:buNone/>
-                      </a:pPr>
-                      <a:r>
-                        <a:rPr lang="en-US" sz="1250" dirty="0">
-                          <a:solidFill>
-                            <a:srgbClr val="000000"/>
-                          </a:solidFill>
-                          <a:latin typeface="Arial" pitchFamily="34" charset="0"/>
-                          <a:ea typeface="Arial" pitchFamily="34" charset="-122"/>
-                          <a:cs typeface="Arial" pitchFamily="34" charset="-120"/>
-                        </a:rPr>
-                        <a:t>4.680 €</a:t>
+                        <a:t>11.900 €</a:t>
                       </a:r>
                       <a:endParaRPr lang="en-US" sz="1250" dirty="0">
                         <a:latin typeface="Arial" charset="0"/>
@@ -19647,7 +19320,7 @@
                           <a:ea typeface="Arial" pitchFamily="34" charset="-122"/>
                           <a:cs typeface="Arial" pitchFamily="34" charset="-120"/>
                         </a:rPr>
-                        <a:t>70</a:t>
+                        <a:t>90</a:t>
                       </a:r>
                       <a:endParaRPr lang="en-US" sz="1250" dirty="0">
                         <a:latin typeface="Arial" charset="0"/>
@@ -19712,7 +19385,7 @@
                           <a:ea typeface="Arial" pitchFamily="34" charset="-122"/>
                           <a:cs typeface="Arial" pitchFamily="34" charset="-120"/>
                         </a:rPr>
-                        <a:t>22 €</a:t>
+                        <a:t>26 €</a:t>
                       </a:r>
                       <a:endParaRPr lang="en-US" sz="1250" dirty="0">
                         <a:latin typeface="Arial" charset="0"/>
@@ -19777,7 +19450,7 @@
                           <a:ea typeface="Arial" pitchFamily="34" charset="-122"/>
                           <a:cs typeface="Arial" pitchFamily="34" charset="-120"/>
                         </a:rPr>
-                        <a:t>13.860 €</a:t>
+                        <a:t>21.060 €</a:t>
                       </a:r>
                       <a:endParaRPr lang="en-US" sz="1250" dirty="0">
                         <a:latin typeface="Arial" charset="0"/>
@@ -19844,7 +19517,7 @@
                           <a:ea typeface="Arial" pitchFamily="34" charset="-122"/>
                           <a:cs typeface="Arial" pitchFamily="34" charset="-120"/>
                         </a:rPr>
-                        <a:t>Feiern, Live-Abende, Séparée</a:t>
+                        <a:t>Events: Live-Musik, Feiern</a:t>
                       </a:r>
                       <a:endParaRPr lang="en-US" sz="1250" dirty="0">
                         <a:latin typeface="Arial" charset="0"/>
@@ -20039,7 +19712,7 @@
                           <a:ea typeface="Arial" pitchFamily="34" charset="-122"/>
                           <a:cs typeface="Arial" pitchFamily="34" charset="-120"/>
                         </a:rPr>
-                        <a:t>45 €</a:t>
+                        <a:t>40 €</a:t>
                       </a:r>
                       <a:endParaRPr lang="en-US" sz="1250" dirty="0">
                         <a:latin typeface="Arial" charset="0"/>
@@ -20104,7 +19777,7 @@
                           <a:ea typeface="Arial" pitchFamily="34" charset="-122"/>
                           <a:cs typeface="Arial" pitchFamily="34" charset="-120"/>
                         </a:rPr>
-                        <a:t>7.200 €</a:t>
+                        <a:t>6.400 €</a:t>
                       </a:r>
                       <a:endParaRPr lang="en-US" sz="1250" dirty="0">
                         <a:latin typeface="Arial" charset="0"/>
@@ -20398,7 +20071,7 @@
                           <a:ea typeface="Arial" pitchFamily="34" charset="-122"/>
                           <a:cs typeface="Arial" pitchFamily="34" charset="-120"/>
                         </a:rPr>
-                        <a:t>71.500 €</a:t>
+                        <a:t>39.360 €</a:t>
                       </a:r>
                       <a:endParaRPr lang="en-US" sz="1250" dirty="0">
                         <a:latin typeface="Arial" charset="0"/>
@@ -20484,7 +20157,7 @@
                 <a:ea typeface="Georgia" pitchFamily="34" charset="-122"/>
                 <a:cs typeface="Georgia" pitchFamily="34" charset="-120"/>
               </a:rPr>
-              <a:t>75 % vom Gastro-Umsatz</a:t>
+              <a:t>61 % vom Gastro-Umsatz</a:t>
             </a:r>
             <a:endParaRPr lang="en-US" sz="2400" dirty="0"/>
           </a:p>
@@ -22737,7 +22410,7 @@
                           <a:ea typeface="Arial" pitchFamily="34" charset="-122"/>
                           <a:cs typeface="Arial" pitchFamily="34" charset="-120"/>
                         </a:rPr>
-                        <a:t>Bar und Theken-Zone</a:t>
+                        <a:t>Große Bar und Theken-Zone</a:t>
                       </a:r>
                       <a:endParaRPr lang="en-US" sz="1250" dirty="0">
                         <a:latin typeface="Arial" charset="0"/>
@@ -22802,7 +22475,7 @@
                           <a:ea typeface="Arial" pitchFamily="34" charset="-122"/>
                           <a:cs typeface="Arial" pitchFamily="34" charset="-120"/>
                         </a:rPr>
-                        <a:t>ca. 25 m²</a:t>
+                        <a:t>ca. 45 m²</a:t>
                       </a:r>
                       <a:endParaRPr lang="en-US" sz="1250" dirty="0">
                         <a:latin typeface="Arial" charset="0"/>
@@ -23328,7 +23001,7 @@
                           <a:ea typeface="Arial" pitchFamily="34" charset="-122"/>
                           <a:cs typeface="Arial" pitchFamily="34" charset="-120"/>
                         </a:rPr>
-                        <a:t>Küche, Lager, WC, Eingang</a:t>
+                        <a:t>Kleine Küche, Lager, WC, Eingang</a:t>
                       </a:r>
                       <a:endParaRPr lang="en-US" sz="1250" dirty="0">
                         <a:latin typeface="Arial" charset="0"/>
@@ -23393,7 +23066,7 @@
                           <a:ea typeface="Arial" pitchFamily="34" charset="-122"/>
                           <a:cs typeface="Arial" pitchFamily="34" charset="-120"/>
                         </a:rPr>
-                        <a:t>ca. 139 m²</a:t>
+                        <a:t>ca. 119 m²</a:t>
                       </a:r>
                       <a:endParaRPr lang="en-US" sz="1250" dirty="0">
                         <a:latin typeface="Arial" charset="0"/>

--- a/praesentation/Neue-Mitte-Werlte_Baufeld3_Gastro-Konzept.pptx
+++ b/praesentation/Neue-Mitte-Werlte_Baufeld3_Gastro-Konzept.pptx
@@ -693,7 +693,7 @@
           <a:p>
             <a:r>
               <a:rPr lang="en-US" dirty="0"/>
-              <a:t>Plausibilitätsrechnung mit Annahmen für Gäste und Bon. Ca. 4.100 € Umsatz je Sitzplatz und Jahr bei 190 Plätzen, Branchen-Median Österreich ca. 12.000 €.</a:t>
+              <a:t>Plausibilitätsrechnung mit Annahmen für Gäste und Bon. Ca. 6.000 € Umsatz je Sitzplatz und Jahr bei 190 Plätzen, Branchen-Median Österreich ca. 12.000 €.</a:t>
             </a:r>
             <a:endParaRPr lang="en-US" dirty="0"/>
           </a:p>
@@ -1397,7 +1397,7 @@
           <a:p>
             <a:r>
               <a:rPr lang="en-US" dirty="0"/>
-              <a:t>Vorschlag für Öffnungszeiten, Ruhetag Montag. Hauptfokus ist der Abend an der Bar. Snacks bis kurz vor Schluss.</a:t>
+              <a:t>Vorschlag für Öffnungszeiten, Ruhetag Montag. Hauptfokus ist der Abend. Küche warm bis ca. 21:30 Uhr.</a:t>
             </a:r>
             <a:endParaRPr lang="en-US" dirty="0"/>
           </a:p>
@@ -2561,7 +2561,7 @@
                 <a:ea typeface="Arial" pitchFamily="34" charset="-122"/>
                 <a:cs typeface="Arial" pitchFamily="34" charset="-120"/>
               </a:rPr>
-              <a:t>Frühstück, Bowls und Bar für den ganzen Tag, ca. 510 m² im ganzen EG</a:t>
+              <a:t>Bar-Restaurant für den ganzen Tag, ca. 510 m² im ganzen EG</a:t>
             </a:r>
             <a:endParaRPr lang="en-US" sz="1700" dirty="0"/>
           </a:p>
@@ -2980,7 +2980,7 @@
                 <a:ea typeface="Georgia" pitchFamily="34" charset="-122"/>
                 <a:cs typeface="Georgia" pitchFamily="34" charset="-120"/>
               </a:rPr>
-              <a:t>Wie 65.010 € Umsatz im Monat zusammenkommen</a:t>
+              <a:t>Wie 95.635 € Umsatz im Monat zusammenkommen</a:t>
             </a:r>
             <a:endParaRPr lang="en-US" sz="2700" dirty="0"/>
           </a:p>
@@ -3541,7 +3541,7 @@
                           <a:ea typeface="Arial" pitchFamily="34" charset="-122"/>
                           <a:cs typeface="Arial" pitchFamily="34" charset="-120"/>
                         </a:rPr>
-                        <a:t>30</a:t>
+                        <a:t>25</a:t>
                       </a:r>
                       <a:endParaRPr lang="en-US" sz="1250" dirty="0">
                         <a:latin typeface="Arial" charset="0"/>
@@ -3671,7 +3671,7 @@
                           <a:ea typeface="Arial" pitchFamily="34" charset="-122"/>
                           <a:cs typeface="Arial" pitchFamily="34" charset="-120"/>
                         </a:rPr>
-                        <a:t>5.610 €</a:t>
+                        <a:t>4.675 €</a:t>
                       </a:r>
                       <a:endParaRPr lang="en-US" sz="1250" dirty="0">
                         <a:latin typeface="Arial" charset="0"/>
@@ -4065,7 +4065,7 @@
                           <a:ea typeface="Arial" pitchFamily="34" charset="-122"/>
                           <a:cs typeface="Arial" pitchFamily="34" charset="-120"/>
                         </a:rPr>
-                        <a:t>Mittag: Bowls, Salate, Suppe (Di–Fr 11:30–14:30)</a:t>
+                        <a:t>Mittagstisch (Di–Fr 11:30–14:30)</a:t>
                       </a:r>
                       <a:endParaRPr lang="en-US" sz="1250" dirty="0">
                         <a:latin typeface="Arial" charset="0"/>
@@ -4195,7 +4195,7 @@
                           <a:ea typeface="Arial" pitchFamily="34" charset="-122"/>
                           <a:cs typeface="Arial" pitchFamily="34" charset="-120"/>
                         </a:rPr>
-                        <a:t>40</a:t>
+                        <a:t>50</a:t>
                       </a:r>
                       <a:endParaRPr lang="en-US" sz="1250" dirty="0">
                         <a:latin typeface="Arial" charset="0"/>
@@ -4260,7 +4260,7 @@
                           <a:ea typeface="Arial" pitchFamily="34" charset="-122"/>
                           <a:cs typeface="Arial" pitchFamily="34" charset="-120"/>
                         </a:rPr>
-                        <a:t>13 €</a:t>
+                        <a:t>14 €</a:t>
                       </a:r>
                       <a:endParaRPr lang="en-US" sz="1250" dirty="0">
                         <a:latin typeface="Arial" charset="0"/>
@@ -4325,7 +4325,7 @@
                           <a:ea typeface="Arial" pitchFamily="34" charset="-122"/>
                           <a:cs typeface="Arial" pitchFamily="34" charset="-120"/>
                         </a:rPr>
-                        <a:t>8.840 €</a:t>
+                        <a:t>11.900 €</a:t>
                       </a:r>
                       <a:endParaRPr lang="en-US" sz="1250" dirty="0">
                         <a:latin typeface="Arial" charset="0"/>
@@ -4392,7 +4392,7 @@
                           <a:ea typeface="Arial" pitchFamily="34" charset="-122"/>
                           <a:cs typeface="Arial" pitchFamily="34" charset="-120"/>
                         </a:rPr>
-                        <a:t>Nachmittag: Kaffee, Kuchen, Snacks (Di–So 14:30–17:00)</a:t>
+                        <a:t>Abendessen Restaurant (Di–So 17:30–22:00)</a:t>
                       </a:r>
                       <a:endParaRPr lang="en-US" sz="1250" dirty="0">
                         <a:latin typeface="Arial" charset="0"/>
@@ -4522,7 +4522,7 @@
                           <a:ea typeface="Arial" pitchFamily="34" charset="-122"/>
                           <a:cs typeface="Arial" pitchFamily="34" charset="-120"/>
                         </a:rPr>
-                        <a:t>20</a:t>
+                        <a:t>55</a:t>
                       </a:r>
                       <a:endParaRPr lang="en-US" sz="1250" dirty="0">
                         <a:latin typeface="Arial" charset="0"/>
@@ -4587,7 +4587,7 @@
                           <a:ea typeface="Arial" pitchFamily="34" charset="-122"/>
                           <a:cs typeface="Arial" pitchFamily="34" charset="-120"/>
                         </a:rPr>
-                        <a:t>7 €</a:t>
+                        <a:t>32 €</a:t>
                       </a:r>
                       <a:endParaRPr lang="en-US" sz="1250" dirty="0">
                         <a:latin typeface="Arial" charset="0"/>
@@ -4652,7 +4652,7 @@
                           <a:ea typeface="Arial" pitchFamily="34" charset="-122"/>
                           <a:cs typeface="Arial" pitchFamily="34" charset="-120"/>
                         </a:rPr>
-                        <a:t>3.640 €</a:t>
+                        <a:t>45.760 €</a:t>
                       </a:r>
                       <a:endParaRPr lang="en-US" sz="1250" dirty="0">
                         <a:latin typeface="Arial" charset="0"/>
@@ -4719,7 +4719,7 @@
                           <a:ea typeface="Arial" pitchFamily="34" charset="-122"/>
                           <a:cs typeface="Arial" pitchFamily="34" charset="-120"/>
                         </a:rPr>
-                        <a:t>Bar mit Snacks Di–Do, So (ab 17:00)</a:t>
+                        <a:t>Bar Di–Do (ab 21:00)</a:t>
                       </a:r>
                       <a:endParaRPr lang="en-US" sz="1250" dirty="0">
                         <a:latin typeface="Arial" charset="0"/>
@@ -4784,7 +4784,7 @@
                           <a:ea typeface="Arial" pitchFamily="34" charset="-122"/>
                           <a:cs typeface="Arial" pitchFamily="34" charset="-120"/>
                         </a:rPr>
-                        <a:t>17</a:t>
+                        <a:t>13</a:t>
                       </a:r>
                       <a:endParaRPr lang="en-US" sz="1250" dirty="0">
                         <a:latin typeface="Arial" charset="0"/>
@@ -4849,7 +4849,7 @@
                           <a:ea typeface="Arial" pitchFamily="34" charset="-122"/>
                           <a:cs typeface="Arial" pitchFamily="34" charset="-120"/>
                         </a:rPr>
-                        <a:t>35</a:t>
+                        <a:t>20</a:t>
                       </a:r>
                       <a:endParaRPr lang="en-US" sz="1250" dirty="0">
                         <a:latin typeface="Arial" charset="0"/>
@@ -4914,7 +4914,7 @@
                           <a:ea typeface="Arial" pitchFamily="34" charset="-122"/>
                           <a:cs typeface="Arial" pitchFamily="34" charset="-120"/>
                         </a:rPr>
-                        <a:t>20 €</a:t>
+                        <a:t>18 €</a:t>
                       </a:r>
                       <a:endParaRPr lang="en-US" sz="1250" dirty="0">
                         <a:latin typeface="Arial" charset="0"/>
@@ -4979,7 +4979,7 @@
                           <a:ea typeface="Arial" pitchFamily="34" charset="-122"/>
                           <a:cs typeface="Arial" pitchFamily="34" charset="-120"/>
                         </a:rPr>
-                        <a:t>11.900 €</a:t>
+                        <a:t>4.680 €</a:t>
                       </a:r>
                       <a:endParaRPr lang="en-US" sz="1250" dirty="0">
                         <a:latin typeface="Arial" charset="0"/>
@@ -5046,7 +5046,7 @@
                           <a:ea typeface="Arial" pitchFamily="34" charset="-122"/>
                           <a:cs typeface="Arial" pitchFamily="34" charset="-120"/>
                         </a:rPr>
-                        <a:t>Bar Fr, Sa (bis 01:00) (Cocktails, Wein, Bier, Snacks)</a:t>
+                        <a:t>Bar Fr, Sa (bis 01:00) (Cocktails, Wein, Bier, Musik)</a:t>
                       </a:r>
                       <a:endParaRPr lang="en-US" sz="1250" dirty="0">
                         <a:latin typeface="Arial" charset="0"/>
@@ -5176,7 +5176,7 @@
                           <a:ea typeface="Arial" pitchFamily="34" charset="-122"/>
                           <a:cs typeface="Arial" pitchFamily="34" charset="-120"/>
                         </a:rPr>
-                        <a:t>90</a:t>
+                        <a:t>70</a:t>
                       </a:r>
                       <a:endParaRPr lang="en-US" sz="1250" dirty="0">
                         <a:latin typeface="Arial" charset="0"/>
@@ -5241,7 +5241,7 @@
                           <a:ea typeface="Arial" pitchFamily="34" charset="-122"/>
                           <a:cs typeface="Arial" pitchFamily="34" charset="-120"/>
                         </a:rPr>
-                        <a:t>26 €</a:t>
+                        <a:t>22 €</a:t>
                       </a:r>
                       <a:endParaRPr lang="en-US" sz="1250" dirty="0">
                         <a:latin typeface="Arial" charset="0"/>
@@ -5306,7 +5306,7 @@
                           <a:ea typeface="Arial" pitchFamily="34" charset="-122"/>
                           <a:cs typeface="Arial" pitchFamily="34" charset="-120"/>
                         </a:rPr>
-                        <a:t>21.060 €</a:t>
+                        <a:t>13.860 €</a:t>
                       </a:r>
                       <a:endParaRPr lang="en-US" sz="1250" dirty="0">
                         <a:latin typeface="Arial" charset="0"/>
@@ -5373,7 +5373,7 @@
                           <a:ea typeface="Arial" pitchFamily="34" charset="-122"/>
                           <a:cs typeface="Arial" pitchFamily="34" charset="-120"/>
                         </a:rPr>
-                        <a:t>Events: Live-Musik, Feiern (nach Absprache, 4 pro Monat)</a:t>
+                        <a:t>Feiern, Live-Abende, Séparée (nach Absprache, 4 pro Monat)</a:t>
                       </a:r>
                       <a:endParaRPr lang="en-US" sz="1250" dirty="0">
                         <a:latin typeface="Arial" charset="0"/>
@@ -5568,7 +5568,7 @@
                           <a:ea typeface="Arial" pitchFamily="34" charset="-122"/>
                           <a:cs typeface="Arial" pitchFamily="34" charset="-120"/>
                         </a:rPr>
-                        <a:t>40 €</a:t>
+                        <a:t>45 €</a:t>
                       </a:r>
                       <a:endParaRPr lang="en-US" sz="1250" dirty="0">
                         <a:latin typeface="Arial" charset="0"/>
@@ -5633,7 +5633,7 @@
                           <a:ea typeface="Arial" pitchFamily="34" charset="-122"/>
                           <a:cs typeface="Arial" pitchFamily="34" charset="-120"/>
                         </a:rPr>
-                        <a:t>6.400 €</a:t>
+                        <a:t>7.200 €</a:t>
                       </a:r>
                       <a:endParaRPr lang="en-US" sz="1250" dirty="0">
                         <a:latin typeface="Arial" charset="0"/>
@@ -5927,7 +5927,7 @@
                           <a:ea typeface="Arial" pitchFamily="34" charset="-122"/>
                           <a:cs typeface="Arial" pitchFamily="34" charset="-120"/>
                         </a:rPr>
-                        <a:t>65.010 €</a:t>
+                        <a:t>95.635 €</a:t>
                       </a:r>
                       <a:endParaRPr lang="en-US" sz="1250" dirty="0">
                         <a:latin typeface="Arial" charset="0"/>
@@ -6057,7 +6057,7 @@
                 <a:ea typeface="Arial" pitchFamily="34" charset="-122"/>
                 <a:cs typeface="Arial" pitchFamily="34" charset="-120"/>
               </a:rPr>
-              <a:t>Ca. 3.815 Gäste im Monat, im Schnitt ca. 147 pro Öffnungstag bei 190 Plätzen. Der Abend (Bar mit Snacks, Events) bringt 61 % vom Umsatz.</a:t>
+              <a:t>Ca. 4.295 Gäste im Monat, im Schnitt ca. 165 pro Öffnungstag bei 190 Plätzen. Der Abend (Restaurant, Bar, Feiern) bringt 75 % vom Umsatz.</a:t>
             </a:r>
             <a:endParaRPr lang="en-US" sz="1300" dirty="0"/>
           </a:p>
@@ -6512,7 +6512,7 @@
                           <a:ea typeface="Arial" pitchFamily="34" charset="-122"/>
                           <a:cs typeface="Arial" pitchFamily="34" charset="-120"/>
                         </a:rPr>
-                        <a:t>Küchenleitung (Bowls, Snacks)</a:t>
+                        <a:t>Küchenchef</a:t>
                       </a:r>
                       <a:endParaRPr lang="en-US" sz="1250" dirty="0">
                         <a:latin typeface="Arial" charset="0"/>
@@ -6642,7 +6642,7 @@
                           <a:ea typeface="Arial" pitchFamily="34" charset="-122"/>
                           <a:cs typeface="Arial" pitchFamily="34" charset="-120"/>
                         </a:rPr>
-                        <a:t>3.400 €</a:t>
+                        <a:t>4.200 €</a:t>
                       </a:r>
                       <a:endParaRPr lang="en-US" sz="1250" dirty="0">
                         <a:latin typeface="Arial" charset="0"/>
@@ -6709,7 +6709,204 @@
                           <a:ea typeface="Arial" pitchFamily="34" charset="-122"/>
                           <a:cs typeface="Arial" pitchFamily="34" charset="-120"/>
                         </a:rPr>
-                        <a:t>Küchenhilfe</a:t>
+                        <a:t>Koch</a:t>
+                      </a:r>
+                      <a:endParaRPr lang="en-US" sz="1250" dirty="0">
+                        <a:latin typeface="Arial" charset="0"/>
+                        <a:ea typeface="Arial" charset="0"/>
+                        <a:cs typeface="Arial" charset="0"/>
+                      </a:endParaRPr>
+                    </a:p>
+                  </a:txBody>
+                  <a:tcPr marL="91440" marR="91440" marT="45720" marB="45720">
+                    <a:lnL w="12700" cap="flat" cmpd="sng" algn="ctr">
+                      <a:solidFill>
+                        <a:srgbClr val="FFFFFF"/>
+                      </a:solidFill>
+                      <a:prstDash val="solid"/>
+                      <a:round/>
+                      <a:headEnd type="none" w="med" len="med"/>
+                      <a:tailEnd type="none" w="med" len="med"/>
+                    </a:lnL>
+                    <a:lnR w="12700" cap="flat" cmpd="sng" algn="ctr">
+                      <a:solidFill>
+                        <a:srgbClr val="FFFFFF"/>
+                      </a:solidFill>
+                      <a:prstDash val="solid"/>
+                      <a:round/>
+                      <a:headEnd type="none" w="med" len="med"/>
+                      <a:tailEnd type="none" w="med" len="med"/>
+                    </a:lnR>
+                    <a:lnT w="12700" cap="flat" cmpd="sng" algn="ctr">
+                      <a:solidFill>
+                        <a:srgbClr val="FFFFFF"/>
+                      </a:solidFill>
+                      <a:prstDash val="solid"/>
+                      <a:round/>
+                      <a:headEnd type="none" w="med" len="med"/>
+                      <a:tailEnd type="none" w="med" len="med"/>
+                    </a:lnT>
+                    <a:lnB w="12700" cap="flat" cmpd="sng" algn="ctr">
+                      <a:solidFill>
+                        <a:srgbClr val="FFFFFF"/>
+                      </a:solidFill>
+                      <a:prstDash val="solid"/>
+                      <a:round/>
+                      <a:headEnd type="none" w="med" len="med"/>
+                      <a:tailEnd type="none" w="med" len="med"/>
+                    </a:lnB>
+                  </a:tcPr>
+                </a:tc>
+                <a:tc>
+                  <a:txBody>
+                    <a:bodyPr/>
+                    <a:lstStyle/>
+                    <a:p>
+                      <a:pPr indent="0" marL="0">
+                        <a:buNone/>
+                      </a:pPr>
+                      <a:r>
+                        <a:rPr lang="en-US" sz="1250" dirty="0">
+                          <a:solidFill>
+                            <a:srgbClr val="000000"/>
+                          </a:solidFill>
+                          <a:latin typeface="Arial" pitchFamily="34" charset="0"/>
+                          <a:ea typeface="Arial" pitchFamily="34" charset="-122"/>
+                          <a:cs typeface="Arial" pitchFamily="34" charset="-120"/>
+                        </a:rPr>
+                        <a:t>1 Vollzeit</a:t>
+                      </a:r>
+                      <a:endParaRPr lang="en-US" sz="1250" dirty="0">
+                        <a:latin typeface="Arial" charset="0"/>
+                        <a:ea typeface="Arial" charset="0"/>
+                        <a:cs typeface="Arial" charset="0"/>
+                      </a:endParaRPr>
+                    </a:p>
+                  </a:txBody>
+                  <a:tcPr marL="91440" marR="91440" marT="45720" marB="45720">
+                    <a:lnL w="12700" cap="flat" cmpd="sng" algn="ctr">
+                      <a:solidFill>
+                        <a:srgbClr val="FFFFFF"/>
+                      </a:solidFill>
+                      <a:prstDash val="solid"/>
+                      <a:round/>
+                      <a:headEnd type="none" w="med" len="med"/>
+                      <a:tailEnd type="none" w="med" len="med"/>
+                    </a:lnL>
+                    <a:lnR w="12700" cap="flat" cmpd="sng" algn="ctr">
+                      <a:solidFill>
+                        <a:srgbClr val="FFFFFF"/>
+                      </a:solidFill>
+                      <a:prstDash val="solid"/>
+                      <a:round/>
+                      <a:headEnd type="none" w="med" len="med"/>
+                      <a:tailEnd type="none" w="med" len="med"/>
+                    </a:lnR>
+                    <a:lnT w="12700" cap="flat" cmpd="sng" algn="ctr">
+                      <a:solidFill>
+                        <a:srgbClr val="FFFFFF"/>
+                      </a:solidFill>
+                      <a:prstDash val="solid"/>
+                      <a:round/>
+                      <a:headEnd type="none" w="med" len="med"/>
+                      <a:tailEnd type="none" w="med" len="med"/>
+                    </a:lnT>
+                    <a:lnB w="12700" cap="flat" cmpd="sng" algn="ctr">
+                      <a:solidFill>
+                        <a:srgbClr val="FFFFFF"/>
+                      </a:solidFill>
+                      <a:prstDash val="solid"/>
+                      <a:round/>
+                      <a:headEnd type="none" w="med" len="med"/>
+                      <a:tailEnd type="none" w="med" len="med"/>
+                    </a:lnB>
+                  </a:tcPr>
+                </a:tc>
+                <a:tc>
+                  <a:txBody>
+                    <a:bodyPr/>
+                    <a:lstStyle/>
+                    <a:p>
+                      <a:pPr algn="r" indent="0" marL="0">
+                        <a:buNone/>
+                      </a:pPr>
+                      <a:r>
+                        <a:rPr lang="en-US" sz="1250" dirty="0">
+                          <a:solidFill>
+                            <a:srgbClr val="000000"/>
+                          </a:solidFill>
+                          <a:latin typeface="Arial" pitchFamily="34" charset="0"/>
+                          <a:ea typeface="Arial" pitchFamily="34" charset="-122"/>
+                          <a:cs typeface="Arial" pitchFamily="34" charset="-120"/>
+                        </a:rPr>
+                        <a:t>3.400 €</a:t>
+                      </a:r>
+                      <a:endParaRPr lang="en-US" sz="1250" dirty="0">
+                        <a:latin typeface="Arial" charset="0"/>
+                        <a:ea typeface="Arial" charset="0"/>
+                        <a:cs typeface="Arial" charset="0"/>
+                      </a:endParaRPr>
+                    </a:p>
+                  </a:txBody>
+                  <a:tcPr marL="91440" marR="91440" marT="45720" marB="45720">
+                    <a:lnL w="12700" cap="flat" cmpd="sng" algn="ctr">
+                      <a:solidFill>
+                        <a:srgbClr val="FFFFFF"/>
+                      </a:solidFill>
+                      <a:prstDash val="solid"/>
+                      <a:round/>
+                      <a:headEnd type="none" w="med" len="med"/>
+                      <a:tailEnd type="none" w="med" len="med"/>
+                    </a:lnL>
+                    <a:lnR w="12700" cap="flat" cmpd="sng" algn="ctr">
+                      <a:solidFill>
+                        <a:srgbClr val="FFFFFF"/>
+                      </a:solidFill>
+                      <a:prstDash val="solid"/>
+                      <a:round/>
+                      <a:headEnd type="none" w="med" len="med"/>
+                      <a:tailEnd type="none" w="med" len="med"/>
+                    </a:lnR>
+                    <a:lnT w="12700" cap="flat" cmpd="sng" algn="ctr">
+                      <a:solidFill>
+                        <a:srgbClr val="FFFFFF"/>
+                      </a:solidFill>
+                      <a:prstDash val="solid"/>
+                      <a:round/>
+                      <a:headEnd type="none" w="med" len="med"/>
+                      <a:tailEnd type="none" w="med" len="med"/>
+                    </a:lnT>
+                    <a:lnB w="12700" cap="flat" cmpd="sng" algn="ctr">
+                      <a:solidFill>
+                        <a:srgbClr val="FFFFFF"/>
+                      </a:solidFill>
+                      <a:prstDash val="solid"/>
+                      <a:round/>
+                      <a:headEnd type="none" w="med" len="med"/>
+                      <a:tailEnd type="none" w="med" len="med"/>
+                    </a:lnB>
+                  </a:tcPr>
+                </a:tc>
+              </a:tr>
+              <a:tr h="502920">
+                <a:tc>
+                  <a:txBody>
+                    <a:bodyPr/>
+                    <a:lstStyle/>
+                    <a:p>
+                      <a:pPr indent="0" marL="0">
+                        <a:buNone/>
+                      </a:pPr>
+                      <a:r>
+                        <a:rPr lang="en-US" sz="1250" dirty="0">
+                          <a:solidFill>
+                            <a:srgbClr val="000000"/>
+                          </a:solidFill>
+                          <a:latin typeface="Arial" pitchFamily="34" charset="0"/>
+                          <a:ea typeface="Arial" pitchFamily="34" charset="-122"/>
+                          <a:cs typeface="Arial" pitchFamily="34" charset="-120"/>
+                        </a:rPr>
+                        <a:t>Koch</a:t>
                       </a:r>
                       <a:endParaRPr lang="en-US" sz="1250" dirty="0">
                         <a:latin typeface="Arial" charset="0"/>
@@ -6906,7 +7103,7 @@
                           <a:ea typeface="Arial" pitchFamily="34" charset="-122"/>
                           <a:cs typeface="Arial" pitchFamily="34" charset="-120"/>
                         </a:rPr>
-                        <a:t>Spülen, Frühstücksservice</a:t>
+                        <a:t>Küchenhilfe, Spülen</a:t>
                       </a:r>
                       <a:endParaRPr lang="en-US" sz="1250" dirty="0">
                         <a:latin typeface="Arial" charset="0"/>
@@ -6971,7 +7168,7 @@
                           <a:ea typeface="Arial" pitchFamily="34" charset="-122"/>
                           <a:cs typeface="Arial" pitchFamily="34" charset="-120"/>
                         </a:rPr>
-                        <a:t>1 Teilzeit</a:t>
+                        <a:t>2 Teilzeit</a:t>
                       </a:r>
                       <a:endParaRPr lang="en-US" sz="1250" dirty="0">
                         <a:latin typeface="Arial" charset="0"/>
@@ -7036,204 +7233,7 @@
                           <a:ea typeface="Arial" pitchFamily="34" charset="-122"/>
                           <a:cs typeface="Arial" pitchFamily="34" charset="-120"/>
                         </a:rPr>
-                        <a:t>1.400 €</a:t>
-                      </a:r>
-                      <a:endParaRPr lang="en-US" sz="1250" dirty="0">
-                        <a:latin typeface="Arial" charset="0"/>
-                        <a:ea typeface="Arial" charset="0"/>
-                        <a:cs typeface="Arial" charset="0"/>
-                      </a:endParaRPr>
-                    </a:p>
-                  </a:txBody>
-                  <a:tcPr marL="91440" marR="91440" marT="45720" marB="45720">
-                    <a:lnL w="12700" cap="flat" cmpd="sng" algn="ctr">
-                      <a:solidFill>
-                        <a:srgbClr val="FFFFFF"/>
-                      </a:solidFill>
-                      <a:prstDash val="solid"/>
-                      <a:round/>
-                      <a:headEnd type="none" w="med" len="med"/>
-                      <a:tailEnd type="none" w="med" len="med"/>
-                    </a:lnL>
-                    <a:lnR w="12700" cap="flat" cmpd="sng" algn="ctr">
-                      <a:solidFill>
-                        <a:srgbClr val="FFFFFF"/>
-                      </a:solidFill>
-                      <a:prstDash val="solid"/>
-                      <a:round/>
-                      <a:headEnd type="none" w="med" len="med"/>
-                      <a:tailEnd type="none" w="med" len="med"/>
-                    </a:lnR>
-                    <a:lnT w="12700" cap="flat" cmpd="sng" algn="ctr">
-                      <a:solidFill>
-                        <a:srgbClr val="FFFFFF"/>
-                      </a:solidFill>
-                      <a:prstDash val="solid"/>
-                      <a:round/>
-                      <a:headEnd type="none" w="med" len="med"/>
-                      <a:tailEnd type="none" w="med" len="med"/>
-                    </a:lnT>
-                    <a:lnB w="12700" cap="flat" cmpd="sng" algn="ctr">
-                      <a:solidFill>
-                        <a:srgbClr val="FFFFFF"/>
-                      </a:solidFill>
-                      <a:prstDash val="solid"/>
-                      <a:round/>
-                      <a:headEnd type="none" w="med" len="med"/>
-                      <a:tailEnd type="none" w="med" len="med"/>
-                    </a:lnB>
-                  </a:tcPr>
-                </a:tc>
-              </a:tr>
-              <a:tr h="502920">
-                <a:tc>
-                  <a:txBody>
-                    <a:bodyPr/>
-                    <a:lstStyle/>
-                    <a:p>
-                      <a:pPr indent="0" marL="0">
-                        <a:buNone/>
-                      </a:pPr>
-                      <a:r>
-                        <a:rPr lang="en-US" sz="1250" dirty="0">
-                          <a:solidFill>
-                            <a:srgbClr val="000000"/>
-                          </a:solidFill>
-                          <a:latin typeface="Arial" pitchFamily="34" charset="0"/>
-                          <a:ea typeface="Arial" pitchFamily="34" charset="-122"/>
-                          <a:cs typeface="Arial" pitchFamily="34" charset="-120"/>
-                        </a:rPr>
-                        <a:t>Barchef</a:t>
-                      </a:r>
-                      <a:endParaRPr lang="en-US" sz="1250" dirty="0">
-                        <a:latin typeface="Arial" charset="0"/>
-                        <a:ea typeface="Arial" charset="0"/>
-                        <a:cs typeface="Arial" charset="0"/>
-                      </a:endParaRPr>
-                    </a:p>
-                  </a:txBody>
-                  <a:tcPr marL="91440" marR="91440" marT="45720" marB="45720">
-                    <a:lnL w="12700" cap="flat" cmpd="sng" algn="ctr">
-                      <a:solidFill>
-                        <a:srgbClr val="FFFFFF"/>
-                      </a:solidFill>
-                      <a:prstDash val="solid"/>
-                      <a:round/>
-                      <a:headEnd type="none" w="med" len="med"/>
-                      <a:tailEnd type="none" w="med" len="med"/>
-                    </a:lnL>
-                    <a:lnR w="12700" cap="flat" cmpd="sng" algn="ctr">
-                      <a:solidFill>
-                        <a:srgbClr val="FFFFFF"/>
-                      </a:solidFill>
-                      <a:prstDash val="solid"/>
-                      <a:round/>
-                      <a:headEnd type="none" w="med" len="med"/>
-                      <a:tailEnd type="none" w="med" len="med"/>
-                    </a:lnR>
-                    <a:lnT w="12700" cap="flat" cmpd="sng" algn="ctr">
-                      <a:solidFill>
-                        <a:srgbClr val="FFFFFF"/>
-                      </a:solidFill>
-                      <a:prstDash val="solid"/>
-                      <a:round/>
-                      <a:headEnd type="none" w="med" len="med"/>
-                      <a:tailEnd type="none" w="med" len="med"/>
-                    </a:lnT>
-                    <a:lnB w="12700" cap="flat" cmpd="sng" algn="ctr">
-                      <a:solidFill>
-                        <a:srgbClr val="FFFFFF"/>
-                      </a:solidFill>
-                      <a:prstDash val="solid"/>
-                      <a:round/>
-                      <a:headEnd type="none" w="med" len="med"/>
-                      <a:tailEnd type="none" w="med" len="med"/>
-                    </a:lnB>
-                  </a:tcPr>
-                </a:tc>
-                <a:tc>
-                  <a:txBody>
-                    <a:bodyPr/>
-                    <a:lstStyle/>
-                    <a:p>
-                      <a:pPr indent="0" marL="0">
-                        <a:buNone/>
-                      </a:pPr>
-                      <a:r>
-                        <a:rPr lang="en-US" sz="1250" dirty="0">
-                          <a:solidFill>
-                            <a:srgbClr val="000000"/>
-                          </a:solidFill>
-                          <a:latin typeface="Arial" pitchFamily="34" charset="0"/>
-                          <a:ea typeface="Arial" pitchFamily="34" charset="-122"/>
-                          <a:cs typeface="Arial" pitchFamily="34" charset="-120"/>
-                        </a:rPr>
-                        <a:t>1 Vollzeit</a:t>
-                      </a:r>
-                      <a:endParaRPr lang="en-US" sz="1250" dirty="0">
-                        <a:latin typeface="Arial" charset="0"/>
-                        <a:ea typeface="Arial" charset="0"/>
-                        <a:cs typeface="Arial" charset="0"/>
-                      </a:endParaRPr>
-                    </a:p>
-                  </a:txBody>
-                  <a:tcPr marL="91440" marR="91440" marT="45720" marB="45720">
-                    <a:lnL w="12700" cap="flat" cmpd="sng" algn="ctr">
-                      <a:solidFill>
-                        <a:srgbClr val="FFFFFF"/>
-                      </a:solidFill>
-                      <a:prstDash val="solid"/>
-                      <a:round/>
-                      <a:headEnd type="none" w="med" len="med"/>
-                      <a:tailEnd type="none" w="med" len="med"/>
-                    </a:lnL>
-                    <a:lnR w="12700" cap="flat" cmpd="sng" algn="ctr">
-                      <a:solidFill>
-                        <a:srgbClr val="FFFFFF"/>
-                      </a:solidFill>
-                      <a:prstDash val="solid"/>
-                      <a:round/>
-                      <a:headEnd type="none" w="med" len="med"/>
-                      <a:tailEnd type="none" w="med" len="med"/>
-                    </a:lnR>
-                    <a:lnT w="12700" cap="flat" cmpd="sng" algn="ctr">
-                      <a:solidFill>
-                        <a:srgbClr val="FFFFFF"/>
-                      </a:solidFill>
-                      <a:prstDash val="solid"/>
-                      <a:round/>
-                      <a:headEnd type="none" w="med" len="med"/>
-                      <a:tailEnd type="none" w="med" len="med"/>
-                    </a:lnT>
-                    <a:lnB w="12700" cap="flat" cmpd="sng" algn="ctr">
-                      <a:solidFill>
-                        <a:srgbClr val="FFFFFF"/>
-                      </a:solidFill>
-                      <a:prstDash val="solid"/>
-                      <a:round/>
-                      <a:headEnd type="none" w="med" len="med"/>
-                      <a:tailEnd type="none" w="med" len="med"/>
-                    </a:lnB>
-                  </a:tcPr>
-                </a:tc>
-                <a:tc>
-                  <a:txBody>
-                    <a:bodyPr/>
-                    <a:lstStyle/>
-                    <a:p>
-                      <a:pPr algn="r" indent="0" marL="0">
-                        <a:buNone/>
-                      </a:pPr>
-                      <a:r>
-                        <a:rPr lang="en-US" sz="1250" dirty="0">
-                          <a:solidFill>
-                            <a:srgbClr val="000000"/>
-                          </a:solidFill>
-                          <a:latin typeface="Arial" pitchFamily="34" charset="0"/>
-                          <a:ea typeface="Arial" pitchFamily="34" charset="-122"/>
-                          <a:cs typeface="Arial" pitchFamily="34" charset="-120"/>
-                        </a:rPr>
-                        <a:t>3.200 €</a:t>
+                        <a:t>2.800 €</a:t>
                       </a:r>
                       <a:endParaRPr lang="en-US" sz="1250" dirty="0">
                         <a:latin typeface="Arial" charset="0"/>
@@ -7365,7 +7365,7 @@
                           <a:ea typeface="Arial" pitchFamily="34" charset="-122"/>
                           <a:cs typeface="Arial" pitchFamily="34" charset="-120"/>
                         </a:rPr>
-                        <a:t>ca. 8 Teilzeit und Minijobs</a:t>
+                        <a:t>ca. 7 Teilzeit und Minijobs</a:t>
                       </a:r>
                       <a:endParaRPr lang="en-US" sz="1250" dirty="0">
                         <a:latin typeface="Arial" charset="0"/>
@@ -7430,7 +7430,7 @@
                           <a:ea typeface="Arial" pitchFamily="34" charset="-122"/>
                           <a:cs typeface="Arial" pitchFamily="34" charset="-120"/>
                         </a:rPr>
-                        <a:t>7.600 €</a:t>
+                        <a:t>6.700 €</a:t>
                       </a:r>
                       <a:endParaRPr lang="en-US" sz="1250" dirty="0">
                         <a:latin typeface="Arial" charset="0"/>
@@ -7562,7 +7562,7 @@
                           <a:ea typeface="Arial" pitchFamily="34" charset="-122"/>
                           <a:cs typeface="Arial" pitchFamily="34" charset="-120"/>
                         </a:rPr>
-                        <a:t>entspricht 28 % vom Umsatz</a:t>
+                        <a:t>entspricht 20 % vom Umsatz</a:t>
                       </a:r>
                       <a:endParaRPr lang="en-US" sz="1250" dirty="0">
                         <a:latin typeface="Arial" charset="0"/>
@@ -7627,7 +7627,7 @@
                           <a:ea typeface="Arial" pitchFamily="34" charset="-122"/>
                           <a:cs typeface="Arial" pitchFamily="34" charset="-120"/>
                         </a:rPr>
-                        <a:t>18.000 €</a:t>
+                        <a:t>19.500 €</a:t>
                       </a:r>
                       <a:endParaRPr lang="en-US" sz="1250" dirty="0">
                         <a:latin typeface="Arial" charset="0"/>
@@ -7757,7 +7757,7 @@
                 <a:ea typeface="Arial" pitchFamily="34" charset="-122"/>
                 <a:cs typeface="Arial" pitchFamily="34" charset="-120"/>
               </a:rPr>
-              <a:t>Du führst die Gastro selbst oder verpachtest sie. Bei Verpachtung zahlt der Betreiber ca. 10 €/m² Pacht, das sind bei 510 m² ca. 5.100 € im Monat (ca. 7.8 % vom Umsatz).</a:t>
+              <a:t>Du führst die Gastro selbst oder verpachtest sie. Bei Verpachtung zahlt der Betreiber ca. 10 €/m² Pacht, das sind bei 510 m² ca. 5.100 € im Monat (ca. 5.3 % vom Umsatz).</a:t>
             </a:r>
             <a:endParaRPr lang="en-US" sz="1300" dirty="0"/>
           </a:p>
@@ -7808,7 +7808,7 @@
                 <a:ea typeface="Arial" pitchFamily="34" charset="-122"/>
                 <a:cs typeface="Arial" pitchFamily="34" charset="-120"/>
               </a:rPr>
-              <a:t>Barchef und Küchenleitung früh einstellen, 4 bis 6 Wochen vor Eröffnung Probebetrieb.</a:t>
+              <a:t>Küchenchef früh einstellen, 4 bis 6 Wochen vor Eröffnung Probebetrieb.</a:t>
             </a:r>
             <a:endParaRPr lang="en-US" sz="1300" dirty="0"/>
           </a:p>
@@ -8281,7 +8281,7 @@
                           <a:ea typeface="Arial" pitchFamily="34" charset="-122"/>
                           <a:cs typeface="Arial" pitchFamily="34" charset="-120"/>
                         </a:rPr>
-                        <a:t>40.000 €</a:t>
+                        <a:t>50.000 €</a:t>
                       </a:r>
                       <a:endParaRPr lang="en-US" sz="1250" dirty="0">
                         <a:latin typeface="Arial" charset="0"/>
@@ -8346,7 +8346,7 @@
                           <a:ea typeface="Arial" pitchFamily="34" charset="-122"/>
                           <a:cs typeface="Arial" pitchFamily="34" charset="-120"/>
                         </a:rPr>
-                        <a:t>12.200 €</a:t>
+                        <a:t>15.250 €</a:t>
                       </a:r>
                       <a:endParaRPr lang="en-US" sz="1250" dirty="0">
                         <a:latin typeface="Arial" charset="0"/>
@@ -8476,7 +8476,7 @@
                           <a:ea typeface="Arial" pitchFamily="34" charset="-122"/>
                           <a:cs typeface="Arial" pitchFamily="34" charset="-120"/>
                         </a:rPr>
-                        <a:t>+7.100 €</a:t>
+                        <a:t>+10.150 €</a:t>
                       </a:r>
                       <a:endParaRPr lang="en-US" sz="1250" dirty="0">
                         <a:latin typeface="Arial" charset="0"/>
@@ -8546,7 +8546,7 @@
                           <a:ea typeface="Arial" pitchFamily="34" charset="-122"/>
                           <a:cs typeface="Arial" pitchFamily="34" charset="-120"/>
                         </a:rPr>
-                        <a:t>50.000 €</a:t>
+                        <a:t>65.000 €</a:t>
                       </a:r>
                       <a:endParaRPr lang="en-US" sz="1250" dirty="0">
                         <a:latin typeface="Arial" charset="0"/>
@@ -8611,7 +8611,7 @@
                           <a:ea typeface="Arial" pitchFamily="34" charset="-122"/>
                           <a:cs typeface="Arial" pitchFamily="34" charset="-120"/>
                         </a:rPr>
-                        <a:t>15.250 €</a:t>
+                        <a:t>19.825 €</a:t>
                       </a:r>
                       <a:endParaRPr lang="en-US" sz="1250" dirty="0">
                         <a:latin typeface="Arial" charset="0"/>
@@ -8741,272 +8741,7 @@
                           <a:ea typeface="Arial" pitchFamily="34" charset="-122"/>
                           <a:cs typeface="Arial" pitchFamily="34" charset="-120"/>
                         </a:rPr>
-                        <a:t>+10.150 €</a:t>
-                      </a:r>
-                      <a:endParaRPr lang="en-US" sz="1250" dirty="0">
-                        <a:latin typeface="Arial" charset="0"/>
-                        <a:ea typeface="Arial" charset="0"/>
-                        <a:cs typeface="Arial" charset="0"/>
-                      </a:endParaRPr>
-                    </a:p>
-                  </a:txBody>
-                  <a:tcPr marL="91440" marR="91440" marT="45720" marB="45720">
-                    <a:lnL w="12700" cap="flat" cmpd="sng" algn="ctr">
-                      <a:solidFill>
-                        <a:srgbClr val="FFFFFF"/>
-                      </a:solidFill>
-                      <a:prstDash val="solid"/>
-                      <a:round/>
-                      <a:headEnd type="none" w="med" len="med"/>
-                      <a:tailEnd type="none" w="med" len="med"/>
-                    </a:lnL>
-                    <a:lnR w="12700" cap="flat" cmpd="sng" algn="ctr">
-                      <a:solidFill>
-                        <a:srgbClr val="FFFFFF"/>
-                      </a:solidFill>
-                      <a:prstDash val="solid"/>
-                      <a:round/>
-                      <a:headEnd type="none" w="med" len="med"/>
-                      <a:tailEnd type="none" w="med" len="med"/>
-                    </a:lnR>
-                    <a:lnT w="12700" cap="flat" cmpd="sng" algn="ctr">
-                      <a:solidFill>
-                        <a:srgbClr val="FFFFFF"/>
-                      </a:solidFill>
-                      <a:prstDash val="solid"/>
-                      <a:round/>
-                      <a:headEnd type="none" w="med" len="med"/>
-                      <a:tailEnd type="none" w="med" len="med"/>
-                    </a:lnT>
-                    <a:lnB w="12700" cap="flat" cmpd="sng" algn="ctr">
-                      <a:solidFill>
-                        <a:srgbClr val="FFFFFF"/>
-                      </a:solidFill>
-                      <a:prstDash val="solid"/>
-                      <a:round/>
-                      <a:headEnd type="none" w="med" len="med"/>
-                      <a:tailEnd type="none" w="med" len="med"/>
-                    </a:lnB>
-                    <a:solidFill>
-                      <a:srgbClr val="E3F1EA"/>
-                    </a:solidFill>
-                  </a:tcPr>
-                </a:tc>
-              </a:tr>
-              <a:tr h="502920">
-                <a:tc>
-                  <a:txBody>
-                    <a:bodyPr/>
-                    <a:lstStyle/>
-                    <a:p>
-                      <a:pPr indent="0" marL="0">
-                        <a:buNone/>
-                      </a:pPr>
-                      <a:r>
-                        <a:rPr lang="en-US" sz="1250" b="1" dirty="0">
-                          <a:solidFill>
-                            <a:srgbClr val="000000"/>
-                          </a:solidFill>
-                          <a:latin typeface="Arial" pitchFamily="34" charset="0"/>
-                          <a:ea typeface="Arial" pitchFamily="34" charset="-122"/>
-                          <a:cs typeface="Arial" pitchFamily="34" charset="-120"/>
-                        </a:rPr>
-                        <a:t>65.010 €</a:t>
-                      </a:r>
-                      <a:endParaRPr lang="en-US" sz="1250" dirty="0">
-                        <a:latin typeface="Arial" charset="0"/>
-                        <a:ea typeface="Arial" charset="0"/>
-                        <a:cs typeface="Arial" charset="0"/>
-                      </a:endParaRPr>
-                    </a:p>
-                  </a:txBody>
-                  <a:tcPr marL="91440" marR="91440" marT="45720" marB="45720">
-                    <a:lnL w="12700" cap="flat" cmpd="sng" algn="ctr">
-                      <a:solidFill>
-                        <a:srgbClr val="FFFFFF"/>
-                      </a:solidFill>
-                      <a:prstDash val="solid"/>
-                      <a:round/>
-                      <a:headEnd type="none" w="med" len="med"/>
-                      <a:tailEnd type="none" w="med" len="med"/>
-                    </a:lnL>
-                    <a:lnR w="12700" cap="flat" cmpd="sng" algn="ctr">
-                      <a:solidFill>
-                        <a:srgbClr val="FFFFFF"/>
-                      </a:solidFill>
-                      <a:prstDash val="solid"/>
-                      <a:round/>
-                      <a:headEnd type="none" w="med" len="med"/>
-                      <a:tailEnd type="none" w="med" len="med"/>
-                    </a:lnR>
-                    <a:lnT w="12700" cap="flat" cmpd="sng" algn="ctr">
-                      <a:solidFill>
-                        <a:srgbClr val="FFFFFF"/>
-                      </a:solidFill>
-                      <a:prstDash val="solid"/>
-                      <a:round/>
-                      <a:headEnd type="none" w="med" len="med"/>
-                      <a:tailEnd type="none" w="med" len="med"/>
-                    </a:lnT>
-                    <a:lnB w="12700" cap="flat" cmpd="sng" algn="ctr">
-                      <a:solidFill>
-                        <a:srgbClr val="FFFFFF"/>
-                      </a:solidFill>
-                      <a:prstDash val="solid"/>
-                      <a:round/>
-                      <a:headEnd type="none" w="med" len="med"/>
-                      <a:tailEnd type="none" w="med" len="med"/>
-                    </a:lnB>
-                  </a:tcPr>
-                </a:tc>
-                <a:tc>
-                  <a:txBody>
-                    <a:bodyPr/>
-                    <a:lstStyle/>
-                    <a:p>
-                      <a:pPr algn="r" indent="0" marL="0">
-                        <a:buNone/>
-                      </a:pPr>
-                      <a:r>
-                        <a:rPr lang="en-US" sz="1250" dirty="0">
-                          <a:solidFill>
-                            <a:srgbClr val="000000"/>
-                          </a:solidFill>
-                          <a:latin typeface="Arial" pitchFamily="34" charset="0"/>
-                          <a:ea typeface="Arial" pitchFamily="34" charset="-122"/>
-                          <a:cs typeface="Arial" pitchFamily="34" charset="-120"/>
-                        </a:rPr>
-                        <a:t>19.828 €</a:t>
-                      </a:r>
-                      <a:endParaRPr lang="en-US" sz="1250" dirty="0">
-                        <a:latin typeface="Arial" charset="0"/>
-                        <a:ea typeface="Arial" charset="0"/>
-                        <a:cs typeface="Arial" charset="0"/>
-                      </a:endParaRPr>
-                    </a:p>
-                  </a:txBody>
-                  <a:tcPr marL="91440" marR="91440" marT="45720" marB="45720">
-                    <a:lnL w="12700" cap="flat" cmpd="sng" algn="ctr">
-                      <a:solidFill>
-                        <a:srgbClr val="FFFFFF"/>
-                      </a:solidFill>
-                      <a:prstDash val="solid"/>
-                      <a:round/>
-                      <a:headEnd type="none" w="med" len="med"/>
-                      <a:tailEnd type="none" w="med" len="med"/>
-                    </a:lnL>
-                    <a:lnR w="12700" cap="flat" cmpd="sng" algn="ctr">
-                      <a:solidFill>
-                        <a:srgbClr val="FFFFFF"/>
-                      </a:solidFill>
-                      <a:prstDash val="solid"/>
-                      <a:round/>
-                      <a:headEnd type="none" w="med" len="med"/>
-                      <a:tailEnd type="none" w="med" len="med"/>
-                    </a:lnR>
-                    <a:lnT w="12700" cap="flat" cmpd="sng" algn="ctr">
-                      <a:solidFill>
-                        <a:srgbClr val="FFFFFF"/>
-                      </a:solidFill>
-                      <a:prstDash val="solid"/>
-                      <a:round/>
-                      <a:headEnd type="none" w="med" len="med"/>
-                      <a:tailEnd type="none" w="med" len="med"/>
-                    </a:lnT>
-                    <a:lnB w="12700" cap="flat" cmpd="sng" algn="ctr">
-                      <a:solidFill>
-                        <a:srgbClr val="FFFFFF"/>
-                      </a:solidFill>
-                      <a:prstDash val="solid"/>
-                      <a:round/>
-                      <a:headEnd type="none" w="med" len="med"/>
-                      <a:tailEnd type="none" w="med" len="med"/>
-                    </a:lnB>
-                  </a:tcPr>
-                </a:tc>
-                <a:tc>
-                  <a:txBody>
-                    <a:bodyPr/>
-                    <a:lstStyle/>
-                    <a:p>
-                      <a:pPr algn="r" indent="0" marL="0">
-                        <a:buNone/>
-                      </a:pPr>
-                      <a:r>
-                        <a:rPr lang="en-US" sz="1250" dirty="0">
-                          <a:solidFill>
-                            <a:srgbClr val="000000"/>
-                          </a:solidFill>
-                          <a:latin typeface="Arial" pitchFamily="34" charset="0"/>
-                          <a:ea typeface="Arial" pitchFamily="34" charset="-122"/>
-                          <a:cs typeface="Arial" pitchFamily="34" charset="-120"/>
-                        </a:rPr>
-                        <a:t>−5.100 €</a:t>
-                      </a:r>
-                      <a:endParaRPr lang="en-US" sz="1250" dirty="0">
-                        <a:latin typeface="Arial" charset="0"/>
-                        <a:ea typeface="Arial" charset="0"/>
-                        <a:cs typeface="Arial" charset="0"/>
-                      </a:endParaRPr>
-                    </a:p>
-                  </a:txBody>
-                  <a:tcPr marL="91440" marR="91440" marT="45720" marB="45720">
-                    <a:lnL w="12700" cap="flat" cmpd="sng" algn="ctr">
-                      <a:solidFill>
-                        <a:srgbClr val="FFFFFF"/>
-                      </a:solidFill>
-                      <a:prstDash val="solid"/>
-                      <a:round/>
-                      <a:headEnd type="none" w="med" len="med"/>
-                      <a:tailEnd type="none" w="med" len="med"/>
-                    </a:lnL>
-                    <a:lnR w="12700" cap="flat" cmpd="sng" algn="ctr">
-                      <a:solidFill>
-                        <a:srgbClr val="FFFFFF"/>
-                      </a:solidFill>
-                      <a:prstDash val="solid"/>
-                      <a:round/>
-                      <a:headEnd type="none" w="med" len="med"/>
-                      <a:tailEnd type="none" w="med" len="med"/>
-                    </a:lnR>
-                    <a:lnT w="12700" cap="flat" cmpd="sng" algn="ctr">
-                      <a:solidFill>
-                        <a:srgbClr val="FFFFFF"/>
-                      </a:solidFill>
-                      <a:prstDash val="solid"/>
-                      <a:round/>
-                      <a:headEnd type="none" w="med" len="med"/>
-                      <a:tailEnd type="none" w="med" len="med"/>
-                    </a:lnT>
-                    <a:lnB w="12700" cap="flat" cmpd="sng" algn="ctr">
-                      <a:solidFill>
-                        <a:srgbClr val="FFFFFF"/>
-                      </a:solidFill>
-                      <a:prstDash val="solid"/>
-                      <a:round/>
-                      <a:headEnd type="none" w="med" len="med"/>
-                      <a:tailEnd type="none" w="med" len="med"/>
-                    </a:lnB>
-                  </a:tcPr>
-                </a:tc>
-                <a:tc>
-                  <a:txBody>
-                    <a:bodyPr/>
-                    <a:lstStyle/>
-                    <a:p>
-                      <a:pPr algn="r" indent="0" marL="0">
-                        <a:buNone/>
-                      </a:pPr>
-                      <a:r>
-                        <a:rPr lang="en-US" sz="1250" b="1" dirty="0">
-                          <a:solidFill>
-                            <a:schemeClr val="accent5"/>
-                          </a:solidFill>
-                          <a:latin typeface="Arial" pitchFamily="34" charset="0"/>
-                          <a:ea typeface="Arial" pitchFamily="34" charset="-122"/>
-                          <a:cs typeface="Arial" pitchFamily="34" charset="-120"/>
-                        </a:rPr>
-                        <a:t>+14.728 €</a:t>
+                        <a:t>+14.725 €</a:t>
                       </a:r>
                       <a:endParaRPr lang="en-US" sz="1250" dirty="0">
                         <a:latin typeface="Arial" charset="0"/>
@@ -9333,7 +9068,7 @@
                         <a:buNone/>
                       </a:pPr>
                       <a:r>
-                        <a:rPr lang="en-US" sz="1250" dirty="0">
+                        <a:rPr lang="en-US" sz="1250" b="1" dirty="0">
                           <a:solidFill>
                             <a:srgbClr val="000000"/>
                           </a:solidFill>
@@ -9341,7 +9076,7 @@
                           <a:ea typeface="Arial" pitchFamily="34" charset="-122"/>
                           <a:cs typeface="Arial" pitchFamily="34" charset="-120"/>
                         </a:rPr>
-                        <a:t>95.000 €</a:t>
+                        <a:t>95.635 €</a:t>
                       </a:r>
                       <a:endParaRPr lang="en-US" sz="1250" dirty="0">
                         <a:latin typeface="Arial" charset="0"/>
@@ -9406,7 +9141,7 @@
                           <a:ea typeface="Arial" pitchFamily="34" charset="-122"/>
                           <a:cs typeface="Arial" pitchFamily="34" charset="-120"/>
                         </a:rPr>
-                        <a:t>28.975 €</a:t>
+                        <a:t>29.169 €</a:t>
                       </a:r>
                       <a:endParaRPr lang="en-US" sz="1250" dirty="0">
                         <a:latin typeface="Arial" charset="0"/>
@@ -9536,7 +9271,272 @@
                           <a:ea typeface="Arial" pitchFamily="34" charset="-122"/>
                           <a:cs typeface="Arial" pitchFamily="34" charset="-120"/>
                         </a:rPr>
-                        <a:t>+23.875 €</a:t>
+                        <a:t>+24.069 €</a:t>
+                      </a:r>
+                      <a:endParaRPr lang="en-US" sz="1250" dirty="0">
+                        <a:latin typeface="Arial" charset="0"/>
+                        <a:ea typeface="Arial" charset="0"/>
+                        <a:cs typeface="Arial" charset="0"/>
+                      </a:endParaRPr>
+                    </a:p>
+                  </a:txBody>
+                  <a:tcPr marL="91440" marR="91440" marT="45720" marB="45720">
+                    <a:lnL w="12700" cap="flat" cmpd="sng" algn="ctr">
+                      <a:solidFill>
+                        <a:srgbClr val="FFFFFF"/>
+                      </a:solidFill>
+                      <a:prstDash val="solid"/>
+                      <a:round/>
+                      <a:headEnd type="none" w="med" len="med"/>
+                      <a:tailEnd type="none" w="med" len="med"/>
+                    </a:lnL>
+                    <a:lnR w="12700" cap="flat" cmpd="sng" algn="ctr">
+                      <a:solidFill>
+                        <a:srgbClr val="FFFFFF"/>
+                      </a:solidFill>
+                      <a:prstDash val="solid"/>
+                      <a:round/>
+                      <a:headEnd type="none" w="med" len="med"/>
+                      <a:tailEnd type="none" w="med" len="med"/>
+                    </a:lnR>
+                    <a:lnT w="12700" cap="flat" cmpd="sng" algn="ctr">
+                      <a:solidFill>
+                        <a:srgbClr val="FFFFFF"/>
+                      </a:solidFill>
+                      <a:prstDash val="solid"/>
+                      <a:round/>
+                      <a:headEnd type="none" w="med" len="med"/>
+                      <a:tailEnd type="none" w="med" len="med"/>
+                    </a:lnT>
+                    <a:lnB w="12700" cap="flat" cmpd="sng" algn="ctr">
+                      <a:solidFill>
+                        <a:srgbClr val="FFFFFF"/>
+                      </a:solidFill>
+                      <a:prstDash val="solid"/>
+                      <a:round/>
+                      <a:headEnd type="none" w="med" len="med"/>
+                      <a:tailEnd type="none" w="med" len="med"/>
+                    </a:lnB>
+                    <a:solidFill>
+                      <a:srgbClr val="E3F1EA"/>
+                    </a:solidFill>
+                  </a:tcPr>
+                </a:tc>
+              </a:tr>
+              <a:tr h="502920">
+                <a:tc>
+                  <a:txBody>
+                    <a:bodyPr/>
+                    <a:lstStyle/>
+                    <a:p>
+                      <a:pPr indent="0" marL="0">
+                        <a:buNone/>
+                      </a:pPr>
+                      <a:r>
+                        <a:rPr lang="en-US" sz="1250" dirty="0">
+                          <a:solidFill>
+                            <a:srgbClr val="000000"/>
+                          </a:solidFill>
+                          <a:latin typeface="Arial" pitchFamily="34" charset="0"/>
+                          <a:ea typeface="Arial" pitchFamily="34" charset="-122"/>
+                          <a:cs typeface="Arial" pitchFamily="34" charset="-120"/>
+                        </a:rPr>
+                        <a:t>110.000 €</a:t>
+                      </a:r>
+                      <a:endParaRPr lang="en-US" sz="1250" dirty="0">
+                        <a:latin typeface="Arial" charset="0"/>
+                        <a:ea typeface="Arial" charset="0"/>
+                        <a:cs typeface="Arial" charset="0"/>
+                      </a:endParaRPr>
+                    </a:p>
+                  </a:txBody>
+                  <a:tcPr marL="91440" marR="91440" marT="45720" marB="45720">
+                    <a:lnL w="12700" cap="flat" cmpd="sng" algn="ctr">
+                      <a:solidFill>
+                        <a:srgbClr val="FFFFFF"/>
+                      </a:solidFill>
+                      <a:prstDash val="solid"/>
+                      <a:round/>
+                      <a:headEnd type="none" w="med" len="med"/>
+                      <a:tailEnd type="none" w="med" len="med"/>
+                    </a:lnL>
+                    <a:lnR w="12700" cap="flat" cmpd="sng" algn="ctr">
+                      <a:solidFill>
+                        <a:srgbClr val="FFFFFF"/>
+                      </a:solidFill>
+                      <a:prstDash val="solid"/>
+                      <a:round/>
+                      <a:headEnd type="none" w="med" len="med"/>
+                      <a:tailEnd type="none" w="med" len="med"/>
+                    </a:lnR>
+                    <a:lnT w="12700" cap="flat" cmpd="sng" algn="ctr">
+                      <a:solidFill>
+                        <a:srgbClr val="FFFFFF"/>
+                      </a:solidFill>
+                      <a:prstDash val="solid"/>
+                      <a:round/>
+                      <a:headEnd type="none" w="med" len="med"/>
+                      <a:tailEnd type="none" w="med" len="med"/>
+                    </a:lnT>
+                    <a:lnB w="12700" cap="flat" cmpd="sng" algn="ctr">
+                      <a:solidFill>
+                        <a:srgbClr val="FFFFFF"/>
+                      </a:solidFill>
+                      <a:prstDash val="solid"/>
+                      <a:round/>
+                      <a:headEnd type="none" w="med" len="med"/>
+                      <a:tailEnd type="none" w="med" len="med"/>
+                    </a:lnB>
+                  </a:tcPr>
+                </a:tc>
+                <a:tc>
+                  <a:txBody>
+                    <a:bodyPr/>
+                    <a:lstStyle/>
+                    <a:p>
+                      <a:pPr algn="r" indent="0" marL="0">
+                        <a:buNone/>
+                      </a:pPr>
+                      <a:r>
+                        <a:rPr lang="en-US" sz="1250" dirty="0">
+                          <a:solidFill>
+                            <a:srgbClr val="000000"/>
+                          </a:solidFill>
+                          <a:latin typeface="Arial" pitchFamily="34" charset="0"/>
+                          <a:ea typeface="Arial" pitchFamily="34" charset="-122"/>
+                          <a:cs typeface="Arial" pitchFamily="34" charset="-120"/>
+                        </a:rPr>
+                        <a:t>33.550 €</a:t>
+                      </a:r>
+                      <a:endParaRPr lang="en-US" sz="1250" dirty="0">
+                        <a:latin typeface="Arial" charset="0"/>
+                        <a:ea typeface="Arial" charset="0"/>
+                        <a:cs typeface="Arial" charset="0"/>
+                      </a:endParaRPr>
+                    </a:p>
+                  </a:txBody>
+                  <a:tcPr marL="91440" marR="91440" marT="45720" marB="45720">
+                    <a:lnL w="12700" cap="flat" cmpd="sng" algn="ctr">
+                      <a:solidFill>
+                        <a:srgbClr val="FFFFFF"/>
+                      </a:solidFill>
+                      <a:prstDash val="solid"/>
+                      <a:round/>
+                      <a:headEnd type="none" w="med" len="med"/>
+                      <a:tailEnd type="none" w="med" len="med"/>
+                    </a:lnL>
+                    <a:lnR w="12700" cap="flat" cmpd="sng" algn="ctr">
+                      <a:solidFill>
+                        <a:srgbClr val="FFFFFF"/>
+                      </a:solidFill>
+                      <a:prstDash val="solid"/>
+                      <a:round/>
+                      <a:headEnd type="none" w="med" len="med"/>
+                      <a:tailEnd type="none" w="med" len="med"/>
+                    </a:lnR>
+                    <a:lnT w="12700" cap="flat" cmpd="sng" algn="ctr">
+                      <a:solidFill>
+                        <a:srgbClr val="FFFFFF"/>
+                      </a:solidFill>
+                      <a:prstDash val="solid"/>
+                      <a:round/>
+                      <a:headEnd type="none" w="med" len="med"/>
+                      <a:tailEnd type="none" w="med" len="med"/>
+                    </a:lnT>
+                    <a:lnB w="12700" cap="flat" cmpd="sng" algn="ctr">
+                      <a:solidFill>
+                        <a:srgbClr val="FFFFFF"/>
+                      </a:solidFill>
+                      <a:prstDash val="solid"/>
+                      <a:round/>
+                      <a:headEnd type="none" w="med" len="med"/>
+                      <a:tailEnd type="none" w="med" len="med"/>
+                    </a:lnB>
+                  </a:tcPr>
+                </a:tc>
+                <a:tc>
+                  <a:txBody>
+                    <a:bodyPr/>
+                    <a:lstStyle/>
+                    <a:p>
+                      <a:pPr algn="r" indent="0" marL="0">
+                        <a:buNone/>
+                      </a:pPr>
+                      <a:r>
+                        <a:rPr lang="en-US" sz="1250" dirty="0">
+                          <a:solidFill>
+                            <a:srgbClr val="000000"/>
+                          </a:solidFill>
+                          <a:latin typeface="Arial" pitchFamily="34" charset="0"/>
+                          <a:ea typeface="Arial" pitchFamily="34" charset="-122"/>
+                          <a:cs typeface="Arial" pitchFamily="34" charset="-120"/>
+                        </a:rPr>
+                        <a:t>−5.100 €</a:t>
+                      </a:r>
+                      <a:endParaRPr lang="en-US" sz="1250" dirty="0">
+                        <a:latin typeface="Arial" charset="0"/>
+                        <a:ea typeface="Arial" charset="0"/>
+                        <a:cs typeface="Arial" charset="0"/>
+                      </a:endParaRPr>
+                    </a:p>
+                  </a:txBody>
+                  <a:tcPr marL="91440" marR="91440" marT="45720" marB="45720">
+                    <a:lnL w="12700" cap="flat" cmpd="sng" algn="ctr">
+                      <a:solidFill>
+                        <a:srgbClr val="FFFFFF"/>
+                      </a:solidFill>
+                      <a:prstDash val="solid"/>
+                      <a:round/>
+                      <a:headEnd type="none" w="med" len="med"/>
+                      <a:tailEnd type="none" w="med" len="med"/>
+                    </a:lnL>
+                    <a:lnR w="12700" cap="flat" cmpd="sng" algn="ctr">
+                      <a:solidFill>
+                        <a:srgbClr val="FFFFFF"/>
+                      </a:solidFill>
+                      <a:prstDash val="solid"/>
+                      <a:round/>
+                      <a:headEnd type="none" w="med" len="med"/>
+                      <a:tailEnd type="none" w="med" len="med"/>
+                    </a:lnR>
+                    <a:lnT w="12700" cap="flat" cmpd="sng" algn="ctr">
+                      <a:solidFill>
+                        <a:srgbClr val="FFFFFF"/>
+                      </a:solidFill>
+                      <a:prstDash val="solid"/>
+                      <a:round/>
+                      <a:headEnd type="none" w="med" len="med"/>
+                      <a:tailEnd type="none" w="med" len="med"/>
+                    </a:lnT>
+                    <a:lnB w="12700" cap="flat" cmpd="sng" algn="ctr">
+                      <a:solidFill>
+                        <a:srgbClr val="FFFFFF"/>
+                      </a:solidFill>
+                      <a:prstDash val="solid"/>
+                      <a:round/>
+                      <a:headEnd type="none" w="med" len="med"/>
+                      <a:tailEnd type="none" w="med" len="med"/>
+                    </a:lnB>
+                  </a:tcPr>
+                </a:tc>
+                <a:tc>
+                  <a:txBody>
+                    <a:bodyPr/>
+                    <a:lstStyle/>
+                    <a:p>
+                      <a:pPr algn="r" indent="0" marL="0">
+                        <a:buNone/>
+                      </a:pPr>
+                      <a:r>
+                        <a:rPr lang="en-US" sz="1250" b="1" dirty="0">
+                          <a:solidFill>
+                            <a:schemeClr val="accent5"/>
+                          </a:solidFill>
+                          <a:latin typeface="Arial" pitchFamily="34" charset="0"/>
+                          <a:ea typeface="Arial" pitchFamily="34" charset="-122"/>
+                          <a:cs typeface="Arial" pitchFamily="34" charset="-120"/>
+                        </a:rPr>
+                        <a:t>+28.450 €</a:t>
                       </a:r>
                       <a:endParaRPr lang="en-US" sz="1250" dirty="0">
                         <a:latin typeface="Arial" charset="0"/>
@@ -9669,7 +9669,7 @@
                 <a:ea typeface="Arial" pitchFamily="34" charset="-122"/>
                 <a:cs typeface="Arial" pitchFamily="34" charset="-120"/>
               </a:rPr>
-              <a:t>Mit 65.010 € Umsatz bleiben im ganzen Haus +9.613 € pro Monat nach Zinsen und Tilgung (KfW-Kredite und Hausbank, ohne Lohn). Die Gastro braucht für Break-even im Haus ca. 33.500 € Umsatz.</a:t>
+              <a:t>Mit 95.635 € Umsatz bleiben im ganzen Haus +18.954 € pro Monat nach Zinsen und Tilgung (KfW-Kredite und Hausbank, ohne Lohn). Die Gastro braucht für Break-even im Haus ca. 33.500 € Umsatz.</a:t>
             </a:r>
             <a:endParaRPr lang="en-US" sz="1300" dirty="0"/>
           </a:p>
@@ -10043,7 +10043,7 @@
                           <a:ea typeface="Arial" pitchFamily="34" charset="-122"/>
                           <a:cs typeface="Arial" pitchFamily="34" charset="-120"/>
                         </a:rPr>
-                        <a:t>Küche (Bowl- und Snackküche, Kühlräume, Spülküche)</a:t>
+                        <a:t>Küche (Herd, Kühlräume, Edelstahl, Spülküche)</a:t>
                       </a:r>
                       <a:endParaRPr lang="en-US" sz="1250" dirty="0">
                         <a:latin typeface="Arial" charset="0"/>
@@ -10108,7 +10108,7 @@
                           <a:ea typeface="Arial" pitchFamily="34" charset="-122"/>
                           <a:cs typeface="Arial" pitchFamily="34" charset="-120"/>
                         </a:rPr>
-                        <a:t>28.000 €</a:t>
+                        <a:t>38.000 €</a:t>
                       </a:r>
                       <a:endParaRPr lang="en-US" sz="1250" dirty="0">
                         <a:latin typeface="Arial" charset="0"/>
@@ -10307,7 +10307,7 @@
                           <a:ea typeface="Arial" pitchFamily="34" charset="-122"/>
                           <a:cs typeface="Arial" pitchFamily="34" charset="-120"/>
                         </a:rPr>
-                        <a:t>Theke und Bar (Zapfanlage, Kühlung, Backbar, große Theke)</a:t>
+                        <a:t>Theke und Bar (Zapfanlage, Kühlung, Backbar)</a:t>
                       </a:r>
                       <a:endParaRPr lang="en-US" sz="1250" dirty="0">
                         <a:latin typeface="Arial" charset="0"/>
@@ -10372,7 +10372,7 @@
                           <a:ea typeface="Arial" pitchFamily="34" charset="-122"/>
                           <a:cs typeface="Arial" pitchFamily="34" charset="-120"/>
                         </a:rPr>
-                        <a:t>35.000 €</a:t>
+                        <a:t>25.000 €</a:t>
                       </a:r>
                       <a:endParaRPr lang="en-US" sz="1250" dirty="0">
                         <a:latin typeface="Arial" charset="0"/>
@@ -12162,7 +12162,7 @@
                 <a:ea typeface="Arial" pitchFamily="34" charset="-122"/>
                 <a:cs typeface="Arial" pitchFamily="34" charset="-120"/>
               </a:rPr>
-              <a:t>Gastro unter Wohnungen: Schallschutz der Decke, leise Technik, Abluft der kleinen Küche über Dach. Nutzungszeiten der Terrasse klären.</a:t>
+              <a:t>Gastro unter Wohnungen: Schallschutz der Decke, leise Technik, Abluft der Küche über Dach. Nutzungszeiten der Terrasse klären.</a:t>
             </a:r>
             <a:endParaRPr lang="en-US" sz="1300" dirty="0"/>
           </a:p>
@@ -12372,7 +12372,7 @@
                 <a:ea typeface="Arial" pitchFamily="34" charset="-122"/>
                 <a:cs typeface="Arial" pitchFamily="34" charset="-120"/>
               </a:rPr>
-              <a:t>Keine Marktdaten für Werlte. Erfahrener Betreiber oder Barchef früh gewinnen, Probebetrieb und vorsichtiger Start.</a:t>
+              <a:t>Keine Marktdaten für Werlte. Erfahrener Betreiber oder Küchenchef früh gewinnen, Probebetrieb und vorsichtiger Start.</a:t>
             </a:r>
             <a:endParaRPr lang="en-US" sz="1300" dirty="0"/>
           </a:p>
@@ -12661,7 +12661,7 @@
                 <a:ea typeface="Arial" pitchFamily="34" charset="-122"/>
                 <a:cs typeface="Arial" pitchFamily="34" charset="-120"/>
               </a:rPr>
-              <a:t>Name, Marke und Zielgruppe festlegen, Betreiber oder Barchef ansprechen</a:t>
+              <a:t>Name, Marke und Zielgruppe festlegen, Betreiber oder Küchenchef ansprechen</a:t>
             </a:r>
             <a:endParaRPr lang="en-US" sz="1500" dirty="0"/>
           </a:p>
@@ -13623,7 +13623,7 @@
                 <a:ea typeface="Arial" pitchFamily="34" charset="-122"/>
                 <a:cs typeface="Arial" pitchFamily="34" charset="-120"/>
               </a:rPr>
-              <a:t>Frühstück, Brunch am Wochenende und Bowls, Salate und Suppe zum Mittag. Frisch, schnell, fair im Preis für Beschäftigte aus Rathaus und Umgebung.</a:t>
+              <a:t>Frühstück, Brunch am Wochenende und Mittagstisch am Marktplatz. Regional, frisch, schnell für Beschäftigte aus Rathaus und Umgebung.</a:t>
             </a:r>
             <a:endParaRPr lang="en-US" sz="1400" dirty="0"/>
           </a:p>
@@ -13631,7 +13631,7 @@
       </p:sp>
       <p:sp>
         <p:nvSpPr>
-          <p:cNvPr id="8" name="Abends: Bar mit Snacks"/>
+          <p:cNvPr id="8" name="Abends (Hauptfokus)"/>
           <p:cNvSpPr/>
           <p:nvPr/>
         </p:nvSpPr>
@@ -13689,7 +13689,7 @@
                 <a:ea typeface="Georgia" pitchFamily="34" charset="-122"/>
                 <a:cs typeface="Georgia" pitchFamily="34" charset="-120"/>
               </a:rPr>
-              <a:t>Abends: Bar mit Snacks</a:t>
+              <a:t>Abends (Hauptfokus)</a:t>
             </a:r>
             <a:endParaRPr lang="en-US" sz="2000" dirty="0"/>
           </a:p>
@@ -13728,7 +13728,7 @@
                 <a:ea typeface="Arial" pitchFamily="34" charset="-122"/>
                 <a:cs typeface="Arial" pitchFamily="34" charset="-120"/>
               </a:rPr>
-              <a:t>Bar mit Snacks in warmer, dunkler Atmosphäre mit Cognac-Banketten und Kerzenlicht, keine große Restaurantküche. Der Abend bringt ca. 61 % vom Umsatz.</a:t>
+              <a:t>Moderne, regionale Küche in warmer, dunkler Atmosphäre mit Cognac-Banketten und Kerzenlicht. Der Abend bringt ca. 75 % vom Umsatz.</a:t>
             </a:r>
             <a:endParaRPr lang="en-US" sz="1400" dirty="0"/>
           </a:p>
@@ -13736,7 +13736,7 @@
       </p:sp>
       <p:sp>
         <p:nvSpPr>
-          <p:cNvPr id="11" name="Cocktails und Events"/>
+          <p:cNvPr id="11" name="Bar und Feiern"/>
           <p:cNvSpPr/>
           <p:nvPr/>
         </p:nvSpPr>
@@ -13794,7 +13794,7 @@
                 <a:ea typeface="Georgia" pitchFamily="34" charset="-122"/>
                 <a:cs typeface="Georgia" pitchFamily="34" charset="-120"/>
               </a:rPr>
-              <a:t>Cocktails und Events</a:t>
+              <a:t>Bar und Feiern</a:t>
             </a:r>
             <a:endParaRPr lang="en-US" sz="2000" dirty="0"/>
           </a:p>
@@ -13833,7 +13833,7 @@
                 <a:ea typeface="Arial" pitchFamily="34" charset="-122"/>
                 <a:cs typeface="Arial" pitchFamily="34" charset="-120"/>
               </a:rPr>
-              <a:t>Cocktails, Wein und Bier an der großen Theke, Fr und Sa bis 01 Uhr. Live-Musik, Séparée mit 30 Plätzen für Feiern.</a:t>
+              <a:t>Ab 21 Uhr Cocktails, Wein und Bier an der Theke, Fr und Sa bis 01 Uhr. Live-Abende, Séparée mit 30 Plätzen für Feiern.</a:t>
             </a:r>
             <a:endParaRPr lang="en-US" sz="1400" dirty="0"/>
           </a:p>
@@ -14292,7 +14292,7 @@
                 <a:ea typeface="Arial" pitchFamily="34" charset="-122"/>
                 <a:cs typeface="Arial" pitchFamily="34" charset="-120"/>
               </a:rPr>
-              <a:t>Arbeitstitel: Café und Bar am Marktplatz. Ein Name und eine Marke sind noch offen.</a:t>
+              <a:t>Arbeitstitel: Bar-Restaurant am Marktplatz. Ein Name und eine Marke sind noch offen.</a:t>
             </a:r>
             <a:endParaRPr lang="en-US" sz="1300" dirty="0"/>
           </a:p>
@@ -15614,7 +15614,7 @@
                           <a:ea typeface="Arial" pitchFamily="34" charset="-122"/>
                           <a:cs typeface="Arial" pitchFamily="34" charset="-120"/>
                         </a:rPr>
-                        <a:t>Terrasse, Kaffee, Bowls</a:t>
+                        <a:t>Terrasse, Kaffee, regionale Küche</a:t>
                       </a:r>
                       <a:endParaRPr lang="en-US" sz="1250" dirty="0">
                         <a:latin typeface="Arial" charset="0"/>
@@ -16407,7 +16407,7 @@
                           <a:ea typeface="Arial" pitchFamily="34" charset="-122"/>
                           <a:cs typeface="Arial" pitchFamily="34" charset="-120"/>
                         </a:rPr>
-                        <a:t>Bowls, Salate, Suppe des Tages</a:t>
+                        <a:t>Mittagstisch, Tagesgericht, Suppe</a:t>
                       </a:r>
                       <a:endParaRPr lang="en-US" sz="1250" dirty="0">
                         <a:latin typeface="Arial" charset="0"/>
@@ -16539,7 +16539,7 @@
                           <a:ea typeface="Arial" pitchFamily="34" charset="-122"/>
                           <a:cs typeface="Arial" pitchFamily="34" charset="-120"/>
                         </a:rPr>
-                        <a:t>14:30–17:00</a:t>
+                        <a:t>14:30–17:30</a:t>
                       </a:r>
                       <a:endParaRPr lang="en-US" sz="1250" dirty="0">
                         <a:latin typeface="Arial" charset="0"/>
@@ -16604,7 +16604,7 @@
                           <a:ea typeface="Arial" pitchFamily="34" charset="-122"/>
                           <a:cs typeface="Arial" pitchFamily="34" charset="-120"/>
                         </a:rPr>
-                        <a:t>Kaffee, Kuchen, kleine Snacks</a:t>
+                        <a:t>Kaffee, Kuchen, kleine Karte</a:t>
                       </a:r>
                       <a:endParaRPr lang="en-US" sz="1250" dirty="0">
                         <a:latin typeface="Arial" charset="0"/>
@@ -16736,7 +16736,7 @@
                           <a:ea typeface="Arial" pitchFamily="34" charset="-122"/>
                           <a:cs typeface="Arial" pitchFamily="34" charset="-120"/>
                         </a:rPr>
-                        <a:t>ab 17:00 (Di–Do, So bis 22:00)</a:t>
+                        <a:t>17:30–22:00 (Di–So)</a:t>
                       </a:r>
                       <a:endParaRPr lang="en-US" sz="1250" dirty="0">
                         <a:latin typeface="Arial" charset="0"/>
@@ -16801,7 +16801,7 @@
                           <a:ea typeface="Arial" pitchFamily="34" charset="-122"/>
                           <a:cs typeface="Arial" pitchFamily="34" charset="-120"/>
                         </a:rPr>
-                        <a:t>Bar mit Snacks, Wein, Bier, Cocktails</a:t>
+                        <a:t>Abendessen, Wein, Bier</a:t>
                       </a:r>
                       <a:endParaRPr lang="en-US" sz="1250" dirty="0">
                         <a:latin typeface="Arial" charset="0"/>
@@ -16933,7 +16933,7 @@
                           <a:ea typeface="Arial" pitchFamily="34" charset="-122"/>
                           <a:cs typeface="Arial" pitchFamily="34" charset="-120"/>
                         </a:rPr>
-                        <a:t>Fr, Sa bis 01:00</a:t>
+                        <a:t>ab 21:00 (Fr, Sa bis 01:00)</a:t>
                       </a:r>
                       <a:endParaRPr lang="en-US" sz="1250" dirty="0">
                         <a:latin typeface="Arial" charset="0"/>
@@ -16998,7 +16998,7 @@
                           <a:ea typeface="Arial" pitchFamily="34" charset="-122"/>
                           <a:cs typeface="Arial" pitchFamily="34" charset="-120"/>
                         </a:rPr>
-                        <a:t>Bar, Cocktails, Snacks, Live-Musik</a:t>
+                        <a:t>Bar, Cocktails, Live-Abende, leise Musik</a:t>
                       </a:r>
                       <a:endParaRPr lang="en-US" sz="1250" dirty="0">
                         <a:latin typeface="Arial" charset="0"/>
@@ -17450,7 +17450,7 @@
                 <a:ea typeface="Arial" pitchFamily="34" charset="-122"/>
                 <a:cs typeface="Arial" pitchFamily="34" charset="-120"/>
               </a:rPr>
-              <a:t>Avocado-Toast mit Ei 10,90 €</a:t>
+              <a:t>Eggs Benedict 13,90 €</a:t>
             </a:r>
             <a:endParaRPr lang="en-US" sz="1300" dirty="0"/>
           </a:p>
@@ -17500,7 +17500,7 @@
       </p:sp>
       <p:sp>
         <p:nvSpPr>
-          <p:cNvPr id="8" name="Bowls und Mittag"/>
+          <p:cNvPr id="8" name="Mittagstisch"/>
           <p:cNvSpPr/>
           <p:nvPr/>
         </p:nvSpPr>
@@ -17558,7 +17558,7 @@
                 <a:ea typeface="Georgia" pitchFamily="34" charset="-122"/>
                 <a:cs typeface="Georgia" pitchFamily="34" charset="-120"/>
               </a:rPr>
-              <a:t>Bowls und Mittag</a:t>
+              <a:t>Mittagstisch</a:t>
             </a:r>
             <a:endParaRPr lang="en-US" sz="1700" dirty="0"/>
           </a:p>
@@ -17601,7 +17601,7 @@
                 <a:ea typeface="Arial" pitchFamily="34" charset="-122"/>
                 <a:cs typeface="Arial" pitchFamily="34" charset="-120"/>
               </a:rPr>
-              <a:t>Bowl mit Huhn und Gemüse 12,90 €</a:t>
+              <a:t>Tagesgericht 10,90–13,90 €</a:t>
             </a:r>
             <a:endParaRPr lang="en-US" sz="1300" dirty="0"/>
           </a:p>
@@ -17622,179 +17622,7 @@
                 <a:ea typeface="Arial" pitchFamily="34" charset="-122"/>
                 <a:cs typeface="Arial" pitchFamily="34" charset="-120"/>
               </a:rPr>
-              <a:t>Vegane Bowl 11,90 €</a:t>
-            </a:r>
-            <a:endParaRPr lang="en-US" sz="1300" dirty="0"/>
-          </a:p>
-          <a:p>
-            <a:pPr marL="342900" indent="-342900">
-              <a:spcAft>
-                <a:spcPts val="600"/>
-              </a:spcAft>
-              <a:buSzPct val="100000"/>
-              <a:buChar char="•"/>
-            </a:pPr>
-            <a:r>
-              <a:rPr lang="en-US" sz="1300" dirty="0">
-                <a:solidFill>
-                  <a:schemeClr val="tx1"/>
-                </a:solidFill>
-                <a:latin typeface="Arial" pitchFamily="34" charset="0"/>
-                <a:ea typeface="Arial" pitchFamily="34" charset="-122"/>
-                <a:cs typeface="Arial" pitchFamily="34" charset="-120"/>
-              </a:rPr>
-              <a:t>Salat mit Topping 10,90 €</a:t>
-            </a:r>
-            <a:endParaRPr lang="en-US" sz="1300" dirty="0"/>
-          </a:p>
-          <a:p>
-            <a:pPr marL="342900" indent="-342900">
-              <a:spcAft>
-                <a:spcPts val="600"/>
-              </a:spcAft>
-              <a:buSzPct val="100000"/>
-              <a:buChar char="•"/>
-            </a:pPr>
-            <a:r>
-              <a:rPr lang="en-US" sz="1300" dirty="0">
-                <a:solidFill>
-                  <a:schemeClr val="tx1"/>
-                </a:solidFill>
-                <a:latin typeface="Arial" pitchFamily="34" charset="0"/>
-                <a:ea typeface="Arial" pitchFamily="34" charset="-122"/>
-                <a:cs typeface="Arial" pitchFamily="34" charset="-120"/>
-              </a:rPr>
-              <a:t>Suppe des Tages 6,50 €</a:t>
-            </a:r>
-            <a:endParaRPr lang="en-US" sz="1300" dirty="0"/>
-          </a:p>
-        </p:txBody>
-      </p:sp>
-      <p:sp>
-        <p:nvSpPr>
-          <p:cNvPr id="11" name="Snacks zur Bar"/>
-          <p:cNvSpPr/>
-          <p:nvPr/>
-        </p:nvSpPr>
-        <p:spPr>
-          <a:xfrm>
-            <a:off x="6231636" y="1371600"/>
-            <a:ext cx="2567178" cy="3657600"/>
-          </a:xfrm>
-          <a:prstGeom prst="roundRect">
-            <a:avLst>
-              <a:gd name="adj" fmla="val 2850"/>
-            </a:avLst>
-          </a:prstGeom>
-          <a:solidFill>
-            <a:schemeClr val="bg2"/>
-          </a:solidFill>
-          <a:ln w="12700">
-            <a:solidFill>
-              <a:schemeClr val="bg2"/>
-            </a:solidFill>
-            <a:prstDash val="solid"/>
-          </a:ln>
-        </p:spPr>
-      </p:sp>
-      <p:sp>
-        <p:nvSpPr>
-          <p:cNvPr id="12" name="Text 9"/>
-          <p:cNvSpPr txBox="1"/>
-          <p:nvPr/>
-        </p:nvSpPr>
-        <p:spPr>
-          <a:xfrm>
-            <a:off x="6414516" y="1481328"/>
-            <a:ext cx="2201418" cy="457200"/>
-          </a:xfrm>
-          <a:prstGeom prst="rect">
-            <a:avLst/>
-          </a:prstGeom>
-          <a:noFill/>
-          <a:ln/>
-        </p:spPr>
-        <p:txBody>
-          <a:bodyPr wrap="square" lIns="0" tIns="0" rIns="0" bIns="0" rtlCol="0" anchor="t"/>
-          <a:lstStyle/>
-          <a:p>
-            <a:pPr indent="0" marL="0">
-              <a:buNone/>
-            </a:pPr>
-            <a:r>
-              <a:rPr lang="en-US" sz="1700" dirty="0">
-                <a:solidFill>
-                  <a:schemeClr val="accent1"/>
-                </a:solidFill>
-                <a:latin typeface="Georgia" pitchFamily="34" charset="0"/>
-                <a:ea typeface="Georgia" pitchFamily="34" charset="-122"/>
-                <a:cs typeface="Georgia" pitchFamily="34" charset="-120"/>
-              </a:rPr>
-              <a:t>Snacks zur Bar</a:t>
-            </a:r>
-            <a:endParaRPr lang="en-US" sz="1700" dirty="0"/>
-          </a:p>
-        </p:txBody>
-      </p:sp>
-      <p:sp>
-        <p:nvSpPr>
-          <p:cNvPr id="13" name="Text 10"/>
-          <p:cNvSpPr txBox="1"/>
-          <p:nvPr/>
-        </p:nvSpPr>
-        <p:spPr>
-          <a:xfrm>
-            <a:off x="6414516" y="2011680"/>
-            <a:ext cx="2201418" cy="2926080"/>
-          </a:xfrm>
-          <a:prstGeom prst="rect">
-            <a:avLst/>
-          </a:prstGeom>
-          <a:noFill/>
-          <a:ln/>
-        </p:spPr>
-        <p:txBody>
-          <a:bodyPr wrap="square" lIns="0" tIns="0" rIns="0" bIns="0" rtlCol="0" anchor="t"/>
-          <a:lstStyle/>
-          <a:p>
-            <a:pPr marL="342900" indent="-342900">
-              <a:spcAft>
-                <a:spcPts val="600"/>
-              </a:spcAft>
-              <a:buSzPct val="100000"/>
-              <a:buChar char="•"/>
-            </a:pPr>
-            <a:r>
-              <a:rPr lang="en-US" sz="1300" dirty="0">
-                <a:solidFill>
-                  <a:schemeClr val="tx1"/>
-                </a:solidFill>
-                <a:latin typeface="Arial" pitchFamily="34" charset="0"/>
-                <a:ea typeface="Arial" pitchFamily="34" charset="-122"/>
-                <a:cs typeface="Arial" pitchFamily="34" charset="-120"/>
-              </a:rPr>
-              <a:t>Nachos mit Dip 8,90 €</a:t>
-            </a:r>
-            <a:endParaRPr lang="en-US" sz="1300" dirty="0"/>
-          </a:p>
-          <a:p>
-            <a:pPr marL="342900" indent="-342900">
-              <a:spcAft>
-                <a:spcPts val="600"/>
-              </a:spcAft>
-              <a:buSzPct val="100000"/>
-              <a:buChar char="•"/>
-            </a:pPr>
-            <a:r>
-              <a:rPr lang="en-US" sz="1300" dirty="0">
-                <a:solidFill>
-                  <a:schemeClr val="tx1"/>
-                </a:solidFill>
-                <a:latin typeface="Arial" pitchFamily="34" charset="0"/>
-                <a:ea typeface="Arial" pitchFamily="34" charset="-122"/>
-                <a:cs typeface="Arial" pitchFamily="34" charset="-120"/>
-              </a:rPr>
-              <a:t>Käse- und Wurstplatte 14,90 €</a:t>
+              <a:t>Bowl mit Gemüse und Huhn 12,90 €</a:t>
             </a:r>
             <a:endParaRPr lang="en-US" sz="1300" dirty="0"/>
           </a:p>
@@ -17836,7 +17664,116 @@
                 <a:ea typeface="Arial" pitchFamily="34" charset="-122"/>
                 <a:cs typeface="Arial" pitchFamily="34" charset="-120"/>
               </a:rPr>
-              <a:t>Bruschetta 7,90 €</a:t>
+              <a:t>Suppe des Tages 6,50 €</a:t>
+            </a:r>
+            <a:endParaRPr lang="en-US" sz="1300" dirty="0"/>
+          </a:p>
+        </p:txBody>
+      </p:sp>
+      <p:sp>
+        <p:nvSpPr>
+          <p:cNvPr id="11" name="Abendkarte"/>
+          <p:cNvSpPr/>
+          <p:nvPr/>
+        </p:nvSpPr>
+        <p:spPr>
+          <a:xfrm>
+            <a:off x="6231636" y="1371600"/>
+            <a:ext cx="2567178" cy="3657600"/>
+          </a:xfrm>
+          <a:prstGeom prst="roundRect">
+            <a:avLst>
+              <a:gd name="adj" fmla="val 2850"/>
+            </a:avLst>
+          </a:prstGeom>
+          <a:solidFill>
+            <a:schemeClr val="bg2"/>
+          </a:solidFill>
+          <a:ln w="12700">
+            <a:solidFill>
+              <a:schemeClr val="bg2"/>
+            </a:solidFill>
+            <a:prstDash val="solid"/>
+          </a:ln>
+        </p:spPr>
+      </p:sp>
+      <p:sp>
+        <p:nvSpPr>
+          <p:cNvPr id="12" name="Text 9"/>
+          <p:cNvSpPr txBox="1"/>
+          <p:nvPr/>
+        </p:nvSpPr>
+        <p:spPr>
+          <a:xfrm>
+            <a:off x="6414516" y="1481328"/>
+            <a:ext cx="2201418" cy="457200"/>
+          </a:xfrm>
+          <a:prstGeom prst="rect">
+            <a:avLst/>
+          </a:prstGeom>
+          <a:noFill/>
+          <a:ln/>
+        </p:spPr>
+        <p:txBody>
+          <a:bodyPr wrap="square" lIns="0" tIns="0" rIns="0" bIns="0" rtlCol="0" anchor="t"/>
+          <a:lstStyle/>
+          <a:p>
+            <a:pPr indent="0" marL="0">
+              <a:buNone/>
+            </a:pPr>
+            <a:r>
+              <a:rPr lang="en-US" sz="1700" dirty="0">
+                <a:solidFill>
+                  <a:schemeClr val="accent1"/>
+                </a:solidFill>
+                <a:latin typeface="Georgia" pitchFamily="34" charset="0"/>
+                <a:ea typeface="Georgia" pitchFamily="34" charset="-122"/>
+                <a:cs typeface="Georgia" pitchFamily="34" charset="-120"/>
+              </a:rPr>
+              <a:t>Abendkarte</a:t>
+            </a:r>
+            <a:endParaRPr lang="en-US" sz="1700" dirty="0"/>
+          </a:p>
+        </p:txBody>
+      </p:sp>
+      <p:sp>
+        <p:nvSpPr>
+          <p:cNvPr id="13" name="Text 10"/>
+          <p:cNvSpPr txBox="1"/>
+          <p:nvPr/>
+        </p:nvSpPr>
+        <p:spPr>
+          <a:xfrm>
+            <a:off x="6414516" y="2011680"/>
+            <a:ext cx="2201418" cy="2926080"/>
+          </a:xfrm>
+          <a:prstGeom prst="rect">
+            <a:avLst/>
+          </a:prstGeom>
+          <a:noFill/>
+          <a:ln/>
+        </p:spPr>
+        <p:txBody>
+          <a:bodyPr wrap="square" lIns="0" tIns="0" rIns="0" bIns="0" rtlCol="0" anchor="t"/>
+          <a:lstStyle/>
+          <a:p>
+            <a:pPr marL="342900" indent="-342900">
+              <a:spcAft>
+                <a:spcPts val="600"/>
+              </a:spcAft>
+              <a:buSzPct val="100000"/>
+              <a:buChar char="•"/>
+            </a:pPr>
+            <a:r>
+              <a:rPr lang="en-US" sz="1300" dirty="0">
+                <a:solidFill>
+                  <a:schemeClr val="tx1"/>
+                </a:solidFill>
+                <a:latin typeface="Arial" pitchFamily="34" charset="0"/>
+                <a:ea typeface="Arial" pitchFamily="34" charset="-122"/>
+                <a:cs typeface="Arial" pitchFamily="34" charset="-120"/>
+              </a:rPr>
+              <a:t>Burrata mit Tomaten 11,90 €</a:t>
             </a:r>
             <a:endParaRPr lang="en-US" sz="1300" dirty="0"/>
           </a:p>
@@ -17857,7 +17794,7 @@
                 <a:ea typeface="Arial" pitchFamily="34" charset="-122"/>
                 <a:cs typeface="Arial" pitchFamily="34" charset="-120"/>
               </a:rPr>
-              <a:t>Chicken Wings 9,90 €</a:t>
+              <a:t>Burger vom Weiderind 16,90 €</a:t>
             </a:r>
             <a:endParaRPr lang="en-US" sz="1300" dirty="0"/>
           </a:p>
@@ -17878,7 +17815,70 @@
                 <a:ea typeface="Arial" pitchFamily="34" charset="-122"/>
                 <a:cs typeface="Arial" pitchFamily="34" charset="-120"/>
               </a:rPr>
-              <a:t>Süßkartoffel-Pommes 6,90 €</a:t>
+              <a:t>Schnitzel, regional 18,90 €</a:t>
+            </a:r>
+            <a:endParaRPr lang="en-US" sz="1300" dirty="0"/>
+          </a:p>
+          <a:p>
+            <a:pPr marL="342900" indent="-342900">
+              <a:spcAft>
+                <a:spcPts val="600"/>
+              </a:spcAft>
+              <a:buSzPct val="100000"/>
+              <a:buChar char="•"/>
+            </a:pPr>
+            <a:r>
+              <a:rPr lang="en-US" sz="1300" dirty="0">
+                <a:solidFill>
+                  <a:schemeClr val="tx1"/>
+                </a:solidFill>
+                <a:latin typeface="Arial" pitchFamily="34" charset="0"/>
+                <a:ea typeface="Arial" pitchFamily="34" charset="-122"/>
+                <a:cs typeface="Arial" pitchFamily="34" charset="-120"/>
+              </a:rPr>
+              <a:t>Pasta, vegetarisch 14,90 €</a:t>
+            </a:r>
+            <a:endParaRPr lang="en-US" sz="1300" dirty="0"/>
+          </a:p>
+          <a:p>
+            <a:pPr marL="342900" indent="-342900">
+              <a:spcAft>
+                <a:spcPts val="600"/>
+              </a:spcAft>
+              <a:buSzPct val="100000"/>
+              <a:buChar char="•"/>
+            </a:pPr>
+            <a:r>
+              <a:rPr lang="en-US" sz="1300" dirty="0">
+                <a:solidFill>
+                  <a:schemeClr val="tx1"/>
+                </a:solidFill>
+                <a:latin typeface="Arial" pitchFamily="34" charset="0"/>
+                <a:ea typeface="Arial" pitchFamily="34" charset="-122"/>
+                <a:cs typeface="Arial" pitchFamily="34" charset="-120"/>
+              </a:rPr>
+              <a:t>Steak mit Beilage 29,90 €</a:t>
+            </a:r>
+            <a:endParaRPr lang="en-US" sz="1300" dirty="0"/>
+          </a:p>
+          <a:p>
+            <a:pPr marL="342900" indent="-342900">
+              <a:spcAft>
+                <a:spcPts val="600"/>
+              </a:spcAft>
+              <a:buSzPct val="100000"/>
+              <a:buChar char="•"/>
+            </a:pPr>
+            <a:r>
+              <a:rPr lang="en-US" sz="1300" dirty="0">
+                <a:solidFill>
+                  <a:schemeClr val="tx1"/>
+                </a:solidFill>
+                <a:latin typeface="Arial" pitchFamily="34" charset="0"/>
+                <a:ea typeface="Arial" pitchFamily="34" charset="-122"/>
+                <a:cs typeface="Arial" pitchFamily="34" charset="-120"/>
+              </a:rPr>
+              <a:t>Dessert 7,90 €</a:t>
             </a:r>
             <a:endParaRPr lang="en-US" sz="1300" dirty="0"/>
           </a:p>
@@ -18110,7 +18110,7 @@
                 <a:ea typeface="Arial" pitchFamily="34" charset="-122"/>
                 <a:cs typeface="Arial" pitchFamily="34" charset="-120"/>
               </a:rPr>
-              <a:t>Durchschnittlicher Bon (Annahme): Frühstück 11 €, Brunch 14 €, Bowls 13 €, Kaffee 7 €, Bar mit Snacks 20–26 €, Events 40 €.</a:t>
+              <a:t>Durchschnittlicher Bon (Annahme): Frühstück 11 €, Brunch 14 €, Mittag 14 €, Abendessen 32 €, Bar 18–22 €, Feiern 45 €.</a:t>
             </a:r>
             <a:endParaRPr lang="en-US" sz="1400" dirty="0"/>
           </a:p>
@@ -18221,7 +18221,7 @@
                 <a:ea typeface="Georgia" pitchFamily="34" charset="-122"/>
                 <a:cs typeface="Georgia" pitchFamily="34" charset="-120"/>
               </a:rPr>
-              <a:t>Hauptfokus Abend: Bar mit Snacks</a:t>
+              <a:t>Hauptfokus Abend: Restaurant und Bar</a:t>
             </a:r>
             <a:endParaRPr lang="en-US" sz="2700" dirty="0"/>
           </a:p>
@@ -18323,7 +18323,7 @@
                 <a:ea typeface="Arial" pitchFamily="34" charset="-122"/>
                 <a:cs typeface="Arial" pitchFamily="34" charset="-120"/>
               </a:rPr>
-              <a:t>Snacks (kleine Küche)</a:t>
+              <a:t>Restaurant (17:30–22:00)</a:t>
             </a:r>
             <a:endParaRPr lang="en-US" sz="1300" dirty="0"/>
           </a:p>
@@ -18344,7 +18344,7 @@
                 <a:ea typeface="Arial" pitchFamily="34" charset="-122"/>
                 <a:cs typeface="Arial" pitchFamily="34" charset="-120"/>
               </a:rPr>
-              <a:t>Kurze Snackkarte: Platten, Flammkuchen, Nachos, Wings, Bruschetta</a:t>
+              <a:t>Kurze, moderne Karte mit regionalen Zutaten, Steaks und Burger, Wein-Empfehlung zum Essen</a:t>
             </a:r>
             <a:endParaRPr lang="en-US" sz="1300" dirty="0"/>
           </a:p>
@@ -18365,7 +18365,7 @@
                 <a:ea typeface="Arial" pitchFamily="34" charset="-122"/>
                 <a:cs typeface="Arial" pitchFamily="34" charset="-120"/>
               </a:rPr>
-              <a:t>Gäste teilen und bleiben, dadurch mehr Getränkeumsatz</a:t>
+              <a:t>Reservierung für Gruppen, Tische für zwei bis acht</a:t>
             </a:r>
             <a:endParaRPr lang="en-US" sz="1300" dirty="0"/>
           </a:p>
@@ -18385,7 +18385,7 @@
                 <a:ea typeface="Arial" pitchFamily="34" charset="-122"/>
                 <a:cs typeface="Arial" pitchFamily="34" charset="-120"/>
               </a:rPr>
-              <a:t>Bar (ab 17:00, Fr und Sa bis 01:00)</a:t>
+              <a:t>Bar (ab 21:00, Fr und Sa bis 01:00)</a:t>
             </a:r>
             <a:endParaRPr lang="en-US" sz="1300" dirty="0"/>
           </a:p>
@@ -18863,7 +18863,7 @@
                           <a:ea typeface="Arial" pitchFamily="34" charset="-122"/>
                           <a:cs typeface="Arial" pitchFamily="34" charset="-120"/>
                         </a:rPr>
-                        <a:t>Bar mit Snacks Di–Do, So</a:t>
+                        <a:t>Abendessen Restaurant</a:t>
                       </a:r>
                       <a:endParaRPr lang="en-US" sz="1250" dirty="0">
                         <a:latin typeface="Arial" charset="0"/>
@@ -18928,7 +18928,7 @@
                           <a:ea typeface="Arial" pitchFamily="34" charset="-122"/>
                           <a:cs typeface="Arial" pitchFamily="34" charset="-120"/>
                         </a:rPr>
-                        <a:t>17</a:t>
+                        <a:t>26</a:t>
                       </a:r>
                       <a:endParaRPr lang="en-US" sz="1250" dirty="0">
                         <a:latin typeface="Arial" charset="0"/>
@@ -18993,7 +18993,7 @@
                           <a:ea typeface="Arial" pitchFamily="34" charset="-122"/>
                           <a:cs typeface="Arial" pitchFamily="34" charset="-120"/>
                         </a:rPr>
-                        <a:t>35</a:t>
+                        <a:t>55</a:t>
                       </a:r>
                       <a:endParaRPr lang="en-US" sz="1250" dirty="0">
                         <a:latin typeface="Arial" charset="0"/>
@@ -19058,7 +19058,7 @@
                           <a:ea typeface="Arial" pitchFamily="34" charset="-122"/>
                           <a:cs typeface="Arial" pitchFamily="34" charset="-120"/>
                         </a:rPr>
-                        <a:t>20 €</a:t>
+                        <a:t>32 €</a:t>
                       </a:r>
                       <a:endParaRPr lang="en-US" sz="1250" dirty="0">
                         <a:latin typeface="Arial" charset="0"/>
@@ -19123,7 +19123,334 @@
                           <a:ea typeface="Arial" pitchFamily="34" charset="-122"/>
                           <a:cs typeface="Arial" pitchFamily="34" charset="-120"/>
                         </a:rPr>
-                        <a:t>11.900 €</a:t>
+                        <a:t>45.760 €</a:t>
+                      </a:r>
+                      <a:endParaRPr lang="en-US" sz="1250" dirty="0">
+                        <a:latin typeface="Arial" charset="0"/>
+                        <a:ea typeface="Arial" charset="0"/>
+                        <a:cs typeface="Arial" charset="0"/>
+                      </a:endParaRPr>
+                    </a:p>
+                  </a:txBody>
+                  <a:tcPr marL="91440" marR="91440" marT="45720" marB="45720">
+                    <a:lnL w="12700" cap="flat" cmpd="sng" algn="ctr">
+                      <a:solidFill>
+                        <a:srgbClr val="FFFFFF"/>
+                      </a:solidFill>
+                      <a:prstDash val="solid"/>
+                      <a:round/>
+                      <a:headEnd type="none" w="med" len="med"/>
+                      <a:tailEnd type="none" w="med" len="med"/>
+                    </a:lnL>
+                    <a:lnR w="12700" cap="flat" cmpd="sng" algn="ctr">
+                      <a:solidFill>
+                        <a:srgbClr val="FFFFFF"/>
+                      </a:solidFill>
+                      <a:prstDash val="solid"/>
+                      <a:round/>
+                      <a:headEnd type="none" w="med" len="med"/>
+                      <a:tailEnd type="none" w="med" len="med"/>
+                    </a:lnR>
+                    <a:lnT w="12700" cap="flat" cmpd="sng" algn="ctr">
+                      <a:solidFill>
+                        <a:srgbClr val="FFFFFF"/>
+                      </a:solidFill>
+                      <a:prstDash val="solid"/>
+                      <a:round/>
+                      <a:headEnd type="none" w="med" len="med"/>
+                      <a:tailEnd type="none" w="med" len="med"/>
+                    </a:lnT>
+                    <a:lnB w="12700" cap="flat" cmpd="sng" algn="ctr">
+                      <a:solidFill>
+                        <a:srgbClr val="FFFFFF"/>
+                      </a:solidFill>
+                      <a:prstDash val="solid"/>
+                      <a:round/>
+                      <a:headEnd type="none" w="med" len="med"/>
+                      <a:tailEnd type="none" w="med" len="med"/>
+                    </a:lnB>
+                  </a:tcPr>
+                </a:tc>
+              </a:tr>
+              <a:tr h="246888">
+                <a:tc>
+                  <a:txBody>
+                    <a:bodyPr/>
+                    <a:lstStyle/>
+                    <a:p>
+                      <a:pPr indent="0" marL="0">
+                        <a:buNone/>
+                      </a:pPr>
+                      <a:r>
+                        <a:rPr lang="en-US" sz="1250" dirty="0">
+                          <a:solidFill>
+                            <a:srgbClr val="000000"/>
+                          </a:solidFill>
+                          <a:latin typeface="Arial" pitchFamily="34" charset="0"/>
+                          <a:ea typeface="Arial" pitchFamily="34" charset="-122"/>
+                          <a:cs typeface="Arial" pitchFamily="34" charset="-120"/>
+                        </a:rPr>
+                        <a:t>Bar Di–Do</a:t>
+                      </a:r>
+                      <a:endParaRPr lang="en-US" sz="1250" dirty="0">
+                        <a:latin typeface="Arial" charset="0"/>
+                        <a:ea typeface="Arial" charset="0"/>
+                        <a:cs typeface="Arial" charset="0"/>
+                      </a:endParaRPr>
+                    </a:p>
+                  </a:txBody>
+                  <a:tcPr marL="91440" marR="91440" marT="45720" marB="45720">
+                    <a:lnL w="12700" cap="flat" cmpd="sng" algn="ctr">
+                      <a:solidFill>
+                        <a:srgbClr val="FFFFFF"/>
+                      </a:solidFill>
+                      <a:prstDash val="solid"/>
+                      <a:round/>
+                      <a:headEnd type="none" w="med" len="med"/>
+                      <a:tailEnd type="none" w="med" len="med"/>
+                    </a:lnL>
+                    <a:lnR w="12700" cap="flat" cmpd="sng" algn="ctr">
+                      <a:solidFill>
+                        <a:srgbClr val="FFFFFF"/>
+                      </a:solidFill>
+                      <a:prstDash val="solid"/>
+                      <a:round/>
+                      <a:headEnd type="none" w="med" len="med"/>
+                      <a:tailEnd type="none" w="med" len="med"/>
+                    </a:lnR>
+                    <a:lnT w="12700" cap="flat" cmpd="sng" algn="ctr">
+                      <a:solidFill>
+                        <a:srgbClr val="FFFFFF"/>
+                      </a:solidFill>
+                      <a:prstDash val="solid"/>
+                      <a:round/>
+                      <a:headEnd type="none" w="med" len="med"/>
+                      <a:tailEnd type="none" w="med" len="med"/>
+                    </a:lnT>
+                    <a:lnB w="12700" cap="flat" cmpd="sng" algn="ctr">
+                      <a:solidFill>
+                        <a:srgbClr val="FFFFFF"/>
+                      </a:solidFill>
+                      <a:prstDash val="solid"/>
+                      <a:round/>
+                      <a:headEnd type="none" w="med" len="med"/>
+                      <a:tailEnd type="none" w="med" len="med"/>
+                    </a:lnB>
+                  </a:tcPr>
+                </a:tc>
+                <a:tc>
+                  <a:txBody>
+                    <a:bodyPr/>
+                    <a:lstStyle/>
+                    <a:p>
+                      <a:pPr algn="r" indent="0" marL="0">
+                        <a:buNone/>
+                      </a:pPr>
+                      <a:r>
+                        <a:rPr lang="en-US" sz="1250" dirty="0">
+                          <a:solidFill>
+                            <a:srgbClr val="000000"/>
+                          </a:solidFill>
+                          <a:latin typeface="Arial" pitchFamily="34" charset="0"/>
+                          <a:ea typeface="Arial" pitchFamily="34" charset="-122"/>
+                          <a:cs typeface="Arial" pitchFamily="34" charset="-120"/>
+                        </a:rPr>
+                        <a:t>13</a:t>
+                      </a:r>
+                      <a:endParaRPr lang="en-US" sz="1250" dirty="0">
+                        <a:latin typeface="Arial" charset="0"/>
+                        <a:ea typeface="Arial" charset="0"/>
+                        <a:cs typeface="Arial" charset="0"/>
+                      </a:endParaRPr>
+                    </a:p>
+                  </a:txBody>
+                  <a:tcPr marL="91440" marR="91440" marT="45720" marB="45720">
+                    <a:lnL w="12700" cap="flat" cmpd="sng" algn="ctr">
+                      <a:solidFill>
+                        <a:srgbClr val="FFFFFF"/>
+                      </a:solidFill>
+                      <a:prstDash val="solid"/>
+                      <a:round/>
+                      <a:headEnd type="none" w="med" len="med"/>
+                      <a:tailEnd type="none" w="med" len="med"/>
+                    </a:lnL>
+                    <a:lnR w="12700" cap="flat" cmpd="sng" algn="ctr">
+                      <a:solidFill>
+                        <a:srgbClr val="FFFFFF"/>
+                      </a:solidFill>
+                      <a:prstDash val="solid"/>
+                      <a:round/>
+                      <a:headEnd type="none" w="med" len="med"/>
+                      <a:tailEnd type="none" w="med" len="med"/>
+                    </a:lnR>
+                    <a:lnT w="12700" cap="flat" cmpd="sng" algn="ctr">
+                      <a:solidFill>
+                        <a:srgbClr val="FFFFFF"/>
+                      </a:solidFill>
+                      <a:prstDash val="solid"/>
+                      <a:round/>
+                      <a:headEnd type="none" w="med" len="med"/>
+                      <a:tailEnd type="none" w="med" len="med"/>
+                    </a:lnT>
+                    <a:lnB w="12700" cap="flat" cmpd="sng" algn="ctr">
+                      <a:solidFill>
+                        <a:srgbClr val="FFFFFF"/>
+                      </a:solidFill>
+                      <a:prstDash val="solid"/>
+                      <a:round/>
+                      <a:headEnd type="none" w="med" len="med"/>
+                      <a:tailEnd type="none" w="med" len="med"/>
+                    </a:lnB>
+                  </a:tcPr>
+                </a:tc>
+                <a:tc>
+                  <a:txBody>
+                    <a:bodyPr/>
+                    <a:lstStyle/>
+                    <a:p>
+                      <a:pPr algn="r" indent="0" marL="0">
+                        <a:buNone/>
+                      </a:pPr>
+                      <a:r>
+                        <a:rPr lang="en-US" sz="1250" dirty="0">
+                          <a:solidFill>
+                            <a:srgbClr val="000000"/>
+                          </a:solidFill>
+                          <a:latin typeface="Arial" pitchFamily="34" charset="0"/>
+                          <a:ea typeface="Arial" pitchFamily="34" charset="-122"/>
+                          <a:cs typeface="Arial" pitchFamily="34" charset="-120"/>
+                        </a:rPr>
+                        <a:t>20</a:t>
+                      </a:r>
+                      <a:endParaRPr lang="en-US" sz="1250" dirty="0">
+                        <a:latin typeface="Arial" charset="0"/>
+                        <a:ea typeface="Arial" charset="0"/>
+                        <a:cs typeface="Arial" charset="0"/>
+                      </a:endParaRPr>
+                    </a:p>
+                  </a:txBody>
+                  <a:tcPr marL="91440" marR="91440" marT="45720" marB="45720">
+                    <a:lnL w="12700" cap="flat" cmpd="sng" algn="ctr">
+                      <a:solidFill>
+                        <a:srgbClr val="FFFFFF"/>
+                      </a:solidFill>
+                      <a:prstDash val="solid"/>
+                      <a:round/>
+                      <a:headEnd type="none" w="med" len="med"/>
+                      <a:tailEnd type="none" w="med" len="med"/>
+                    </a:lnL>
+                    <a:lnR w="12700" cap="flat" cmpd="sng" algn="ctr">
+                      <a:solidFill>
+                        <a:srgbClr val="FFFFFF"/>
+                      </a:solidFill>
+                      <a:prstDash val="solid"/>
+                      <a:round/>
+                      <a:headEnd type="none" w="med" len="med"/>
+                      <a:tailEnd type="none" w="med" len="med"/>
+                    </a:lnR>
+                    <a:lnT w="12700" cap="flat" cmpd="sng" algn="ctr">
+                      <a:solidFill>
+                        <a:srgbClr val="FFFFFF"/>
+                      </a:solidFill>
+                      <a:prstDash val="solid"/>
+                      <a:round/>
+                      <a:headEnd type="none" w="med" len="med"/>
+                      <a:tailEnd type="none" w="med" len="med"/>
+                    </a:lnT>
+                    <a:lnB w="12700" cap="flat" cmpd="sng" algn="ctr">
+                      <a:solidFill>
+                        <a:srgbClr val="FFFFFF"/>
+                      </a:solidFill>
+                      <a:prstDash val="solid"/>
+                      <a:round/>
+                      <a:headEnd type="none" w="med" len="med"/>
+                      <a:tailEnd type="none" w="med" len="med"/>
+                    </a:lnB>
+                  </a:tcPr>
+                </a:tc>
+                <a:tc>
+                  <a:txBody>
+                    <a:bodyPr/>
+                    <a:lstStyle/>
+                    <a:p>
+                      <a:pPr algn="r" indent="0" marL="0">
+                        <a:buNone/>
+                      </a:pPr>
+                      <a:r>
+                        <a:rPr lang="en-US" sz="1250" dirty="0">
+                          <a:solidFill>
+                            <a:srgbClr val="000000"/>
+                          </a:solidFill>
+                          <a:latin typeface="Arial" pitchFamily="34" charset="0"/>
+                          <a:ea typeface="Arial" pitchFamily="34" charset="-122"/>
+                          <a:cs typeface="Arial" pitchFamily="34" charset="-120"/>
+                        </a:rPr>
+                        <a:t>18 €</a:t>
+                      </a:r>
+                      <a:endParaRPr lang="en-US" sz="1250" dirty="0">
+                        <a:latin typeface="Arial" charset="0"/>
+                        <a:ea typeface="Arial" charset="0"/>
+                        <a:cs typeface="Arial" charset="0"/>
+                      </a:endParaRPr>
+                    </a:p>
+                  </a:txBody>
+                  <a:tcPr marL="91440" marR="91440" marT="45720" marB="45720">
+                    <a:lnL w="12700" cap="flat" cmpd="sng" algn="ctr">
+                      <a:solidFill>
+                        <a:srgbClr val="FFFFFF"/>
+                      </a:solidFill>
+                      <a:prstDash val="solid"/>
+                      <a:round/>
+                      <a:headEnd type="none" w="med" len="med"/>
+                      <a:tailEnd type="none" w="med" len="med"/>
+                    </a:lnL>
+                    <a:lnR w="12700" cap="flat" cmpd="sng" algn="ctr">
+                      <a:solidFill>
+                        <a:srgbClr val="FFFFFF"/>
+                      </a:solidFill>
+                      <a:prstDash val="solid"/>
+                      <a:round/>
+                      <a:headEnd type="none" w="med" len="med"/>
+                      <a:tailEnd type="none" w="med" len="med"/>
+                    </a:lnR>
+                    <a:lnT w="12700" cap="flat" cmpd="sng" algn="ctr">
+                      <a:solidFill>
+                        <a:srgbClr val="FFFFFF"/>
+                      </a:solidFill>
+                      <a:prstDash val="solid"/>
+                      <a:round/>
+                      <a:headEnd type="none" w="med" len="med"/>
+                      <a:tailEnd type="none" w="med" len="med"/>
+                    </a:lnT>
+                    <a:lnB w="12700" cap="flat" cmpd="sng" algn="ctr">
+                      <a:solidFill>
+                        <a:srgbClr val="FFFFFF"/>
+                      </a:solidFill>
+                      <a:prstDash val="solid"/>
+                      <a:round/>
+                      <a:headEnd type="none" w="med" len="med"/>
+                      <a:tailEnd type="none" w="med" len="med"/>
+                    </a:lnB>
+                  </a:tcPr>
+                </a:tc>
+                <a:tc>
+                  <a:txBody>
+                    <a:bodyPr/>
+                    <a:lstStyle/>
+                    <a:p>
+                      <a:pPr algn="r" indent="0" marL="0">
+                        <a:buNone/>
+                      </a:pPr>
+                      <a:r>
+                        <a:rPr lang="en-US" sz="1250" dirty="0">
+                          <a:solidFill>
+                            <a:srgbClr val="000000"/>
+                          </a:solidFill>
+                          <a:latin typeface="Arial" pitchFamily="34" charset="0"/>
+                          <a:ea typeface="Arial" pitchFamily="34" charset="-122"/>
+                          <a:cs typeface="Arial" pitchFamily="34" charset="-120"/>
+                        </a:rPr>
+                        <a:t>4.680 €</a:t>
                       </a:r>
                       <a:endParaRPr lang="en-US" sz="1250" dirty="0">
                         <a:latin typeface="Arial" charset="0"/>
@@ -19320,7 +19647,7 @@
                           <a:ea typeface="Arial" pitchFamily="34" charset="-122"/>
                           <a:cs typeface="Arial" pitchFamily="34" charset="-120"/>
                         </a:rPr>
-                        <a:t>90</a:t>
+                        <a:t>70</a:t>
                       </a:r>
                       <a:endParaRPr lang="en-US" sz="1250" dirty="0">
                         <a:latin typeface="Arial" charset="0"/>
@@ -19385,7 +19712,7 @@
                           <a:ea typeface="Arial" pitchFamily="34" charset="-122"/>
                           <a:cs typeface="Arial" pitchFamily="34" charset="-120"/>
                         </a:rPr>
-                        <a:t>26 €</a:t>
+                        <a:t>22 €</a:t>
                       </a:r>
                       <a:endParaRPr lang="en-US" sz="1250" dirty="0">
                         <a:latin typeface="Arial" charset="0"/>
@@ -19450,7 +19777,7 @@
                           <a:ea typeface="Arial" pitchFamily="34" charset="-122"/>
                           <a:cs typeface="Arial" pitchFamily="34" charset="-120"/>
                         </a:rPr>
-                        <a:t>21.060 €</a:t>
+                        <a:t>13.860 €</a:t>
                       </a:r>
                       <a:endParaRPr lang="en-US" sz="1250" dirty="0">
                         <a:latin typeface="Arial" charset="0"/>
@@ -19517,7 +19844,7 @@
                           <a:ea typeface="Arial" pitchFamily="34" charset="-122"/>
                           <a:cs typeface="Arial" pitchFamily="34" charset="-120"/>
                         </a:rPr>
-                        <a:t>Events: Live-Musik, Feiern</a:t>
+                        <a:t>Feiern, Live-Abende, Séparée</a:t>
                       </a:r>
                       <a:endParaRPr lang="en-US" sz="1250" dirty="0">
                         <a:latin typeface="Arial" charset="0"/>
@@ -19712,7 +20039,7 @@
                           <a:ea typeface="Arial" pitchFamily="34" charset="-122"/>
                           <a:cs typeface="Arial" pitchFamily="34" charset="-120"/>
                         </a:rPr>
-                        <a:t>40 €</a:t>
+                        <a:t>45 €</a:t>
                       </a:r>
                       <a:endParaRPr lang="en-US" sz="1250" dirty="0">
                         <a:latin typeface="Arial" charset="0"/>
@@ -19777,7 +20104,7 @@
                           <a:ea typeface="Arial" pitchFamily="34" charset="-122"/>
                           <a:cs typeface="Arial" pitchFamily="34" charset="-120"/>
                         </a:rPr>
-                        <a:t>6.400 €</a:t>
+                        <a:t>7.200 €</a:t>
                       </a:r>
                       <a:endParaRPr lang="en-US" sz="1250" dirty="0">
                         <a:latin typeface="Arial" charset="0"/>
@@ -20071,7 +20398,7 @@
                           <a:ea typeface="Arial" pitchFamily="34" charset="-122"/>
                           <a:cs typeface="Arial" pitchFamily="34" charset="-120"/>
                         </a:rPr>
-                        <a:t>39.360 €</a:t>
+                        <a:t>71.500 €</a:t>
                       </a:r>
                       <a:endParaRPr lang="en-US" sz="1250" dirty="0">
                         <a:latin typeface="Arial" charset="0"/>
@@ -20157,7 +20484,7 @@
                 <a:ea typeface="Georgia" pitchFamily="34" charset="-122"/>
                 <a:cs typeface="Georgia" pitchFamily="34" charset="-120"/>
               </a:rPr>
-              <a:t>61 % vom Gastro-Umsatz</a:t>
+              <a:t>75 % vom Gastro-Umsatz</a:t>
             </a:r>
             <a:endParaRPr lang="en-US" sz="2400" dirty="0"/>
           </a:p>
@@ -22410,7 +22737,7 @@
                           <a:ea typeface="Arial" pitchFamily="34" charset="-122"/>
                           <a:cs typeface="Arial" pitchFamily="34" charset="-120"/>
                         </a:rPr>
-                        <a:t>Große Bar und Theken-Zone</a:t>
+                        <a:t>Bar und Theken-Zone</a:t>
                       </a:r>
                       <a:endParaRPr lang="en-US" sz="1250" dirty="0">
                         <a:latin typeface="Arial" charset="0"/>
@@ -22475,7 +22802,7 @@
                           <a:ea typeface="Arial" pitchFamily="34" charset="-122"/>
                           <a:cs typeface="Arial" pitchFamily="34" charset="-120"/>
                         </a:rPr>
-                        <a:t>ca. 45 m²</a:t>
+                        <a:t>ca. 25 m²</a:t>
                       </a:r>
                       <a:endParaRPr lang="en-US" sz="1250" dirty="0">
                         <a:latin typeface="Arial" charset="0"/>
@@ -23001,7 +23328,7 @@
                           <a:ea typeface="Arial" pitchFamily="34" charset="-122"/>
                           <a:cs typeface="Arial" pitchFamily="34" charset="-120"/>
                         </a:rPr>
-                        <a:t>Kleine Küche, Lager, WC, Eingang</a:t>
+                        <a:t>Küche, Lager, WC, Eingang</a:t>
                       </a:r>
                       <a:endParaRPr lang="en-US" sz="1250" dirty="0">
                         <a:latin typeface="Arial" charset="0"/>
@@ -23066,7 +23393,7 @@
                           <a:ea typeface="Arial" pitchFamily="34" charset="-122"/>
                           <a:cs typeface="Arial" pitchFamily="34" charset="-120"/>
                         </a:rPr>
-                        <a:t>ca. 119 m²</a:t>
+                        <a:t>ca. 139 m²</a:t>
                       </a:r>
                       <a:endParaRPr lang="en-US" sz="1250" dirty="0">
                         <a:latin typeface="Arial" charset="0"/>

--- a/praesentation/Neue-Mitte-Werlte_Baufeld3_Gastro-Konzept.pptx
+++ b/praesentation/Neue-Mitte-Werlte_Baufeld3_Gastro-Konzept.pptx
@@ -869,7 +869,7 @@
           <a:p>
             <a:r>
               <a:rPr lang="en-US" dirty="0"/>
-              <a:t>Marge vor Pacht 30,5 % vom Umsatz (Branchen-Richtwert, nicht aus Werlte). Bei sehr niedrigem Umsatz drücken die Fixkosten stärker, die Rechnung ist dort zu günstig.</a:t>
+              <a:t>Betreiberfirma: Marge vor Pacht 30,5 % vom Umsatz (Branchen-Richtwert, nicht aus Werlte). Pacht = Maximum aus 10 €/m² und 10 % vom Umsatz. Bei sehr niedrigem Umsatz drücken die Fixkosten stärker.</a:t>
             </a:r>
             <a:endParaRPr lang="en-US" dirty="0"/>
           </a:p>
@@ -7757,7 +7757,7 @@
                 <a:ea typeface="Arial" pitchFamily="34" charset="-122"/>
                 <a:cs typeface="Arial" pitchFamily="34" charset="-120"/>
               </a:rPr>
-              <a:t>Du führst die Gastro selbst oder verpachtest sie. Bei Verpachtung zahlt der Betreiber ca. 10 €/m² Pacht, das sind bei 510 m² ca. 5.100 € im Monat (ca. 5.3 % vom Umsatz).</a:t>
+              <a:t>Eine eigene Betreiberfirma des Bauherrn pachtet die Gastro von der Vermietungs-GbR. Die Pacht beträgt 10 % vom Umsatz, mindestens 10 €/m². Bei Plan-Umsatz sind das 9.564 € im Monat (18.75 €/m²).</a:t>
             </a:r>
             <a:endParaRPr lang="en-US" sz="1300" dirty="0"/>
           </a:p>
@@ -8143,7 +8143,7 @@
                           <a:ea typeface="Arial" pitchFamily="34" charset="-122"/>
                           <a:cs typeface="Arial" pitchFamily="34" charset="-120"/>
                         </a:rPr>
-                        <a:t>Pacht ans Haus</a:t>
+                        <a:t>Pacht an die GbR</a:t>
                       </a:r>
                       <a:endParaRPr lang="en-US" sz="1250" dirty="0">
                         <a:latin typeface="Arial" charset="0"/>
@@ -8676,7 +8676,7 @@
                           <a:ea typeface="Arial" pitchFamily="34" charset="-122"/>
                           <a:cs typeface="Arial" pitchFamily="34" charset="-120"/>
                         </a:rPr>
-                        <a:t>−5.100 €</a:t>
+                        <a:t>−6.500 €</a:t>
                       </a:r>
                       <a:endParaRPr lang="en-US" sz="1250" dirty="0">
                         <a:latin typeface="Arial" charset="0"/>
@@ -8741,7 +8741,7 @@
                           <a:ea typeface="Arial" pitchFamily="34" charset="-122"/>
                           <a:cs typeface="Arial" pitchFamily="34" charset="-120"/>
                         </a:rPr>
-                        <a:t>+14.725 €</a:t>
+                        <a:t>+13.325 €</a:t>
                       </a:r>
                       <a:endParaRPr lang="en-US" sz="1250" dirty="0">
                         <a:latin typeface="Arial" charset="0"/>
@@ -8941,7 +8941,7 @@
                           <a:ea typeface="Arial" pitchFamily="34" charset="-122"/>
                           <a:cs typeface="Arial" pitchFamily="34" charset="-120"/>
                         </a:rPr>
-                        <a:t>−5.100 €</a:t>
+                        <a:t>−8.000 €</a:t>
                       </a:r>
                       <a:endParaRPr lang="en-US" sz="1250" dirty="0">
                         <a:latin typeface="Arial" charset="0"/>
@@ -9006,7 +9006,7 @@
                           <a:ea typeface="Arial" pitchFamily="34" charset="-122"/>
                           <a:cs typeface="Arial" pitchFamily="34" charset="-120"/>
                         </a:rPr>
-                        <a:t>+19.300 €</a:t>
+                        <a:t>+16.400 €</a:t>
                       </a:r>
                       <a:endParaRPr lang="en-US" sz="1250" dirty="0">
                         <a:latin typeface="Arial" charset="0"/>
@@ -9206,7 +9206,7 @@
                           <a:ea typeface="Arial" pitchFamily="34" charset="-122"/>
                           <a:cs typeface="Arial" pitchFamily="34" charset="-120"/>
                         </a:rPr>
-                        <a:t>−5.100 €</a:t>
+                        <a:t>−9.563 €</a:t>
                       </a:r>
                       <a:endParaRPr lang="en-US" sz="1250" dirty="0">
                         <a:latin typeface="Arial" charset="0"/>
@@ -9271,7 +9271,7 @@
                           <a:ea typeface="Arial" pitchFamily="34" charset="-122"/>
                           <a:cs typeface="Arial" pitchFamily="34" charset="-120"/>
                         </a:rPr>
-                        <a:t>+24.069 €</a:t>
+                        <a:t>+19.605 €</a:t>
                       </a:r>
                       <a:endParaRPr lang="en-US" sz="1250" dirty="0">
                         <a:latin typeface="Arial" charset="0"/>
@@ -9471,7 +9471,7 @@
                           <a:ea typeface="Arial" pitchFamily="34" charset="-122"/>
                           <a:cs typeface="Arial" pitchFamily="34" charset="-120"/>
                         </a:rPr>
-                        <a:t>−5.100 €</a:t>
+                        <a:t>−11.000 €</a:t>
                       </a:r>
                       <a:endParaRPr lang="en-US" sz="1250" dirty="0">
                         <a:latin typeface="Arial" charset="0"/>
@@ -9536,7 +9536,7 @@
                           <a:ea typeface="Arial" pitchFamily="34" charset="-122"/>
                           <a:cs typeface="Arial" pitchFamily="34" charset="-120"/>
                         </a:rPr>
-                        <a:t>+28.450 €</a:t>
+                        <a:t>+22.550 €</a:t>
                       </a:r>
                       <a:endParaRPr lang="en-US" sz="1250" dirty="0">
                         <a:latin typeface="Arial" charset="0"/>
@@ -9652,7 +9652,7 @@
                 <a:ea typeface="Arial" pitchFamily="34" charset="-122"/>
                 <a:cs typeface="Arial" pitchFamily="34" charset="-120"/>
               </a:rPr>
-              <a:t>Für das ganze Haus</a:t>
+              <a:t>Betreiberfirma und GbR</a:t>
             </a:r>
             <a:endParaRPr lang="en-US" sz="1300" dirty="0"/>
           </a:p>
@@ -9669,7 +9669,7 @@
                 <a:ea typeface="Arial" pitchFamily="34" charset="-122"/>
                 <a:cs typeface="Arial" pitchFamily="34" charset="-120"/>
               </a:rPr>
-              <a:t>Mit 95.635 € Umsatz bleiben im ganzen Haus +18.954 € pro Monat nach Zinsen und Tilgung (KfW-Kredite und Hausbank, ohne Lohn). Die Gastro braucht für Break-even im Haus ca. 33.500 € Umsatz.</a:t>
+              <a:t>Mit 95.635 € Umsatz verdient die Betreiberfirma +19.605 € pro Monat nach Pacht (ohne Lohn). Die Vermietungs-GbR bekommt 9.564 € Pacht und deckt damit ihre Raten ab ca. 101.800 € Umsatz.</a:t>
             </a:r>
             <a:endParaRPr lang="en-US" sz="1300" dirty="0"/>
           </a:p>

--- a/praesentation/Neue-Mitte-Werlte_Baufeld3_Gastro-Konzept.pptx
+++ b/praesentation/Neue-Mitte-Werlte_Baufeld3_Gastro-Konzept.pptx
@@ -1837,7 +1837,7 @@
           <a:p>
             <a:r>
               <a:rPr lang="en-US" dirty="0"/>
-              <a:t>KI-Visualisierungen zur Orientierung, keine Planung.</a:t>
+              <a:t>Renderings zur Orientierung, keine Planung.</a:t>
             </a:r>
             <a:endParaRPr lang="en-US" dirty="0"/>
           </a:p>
